--- a/documentation/presentation/presentation.pptx
+++ b/documentation/presentation/presentation.pptx
@@ -113,7 +113,51 @@
                 <a:uFillTx/>
                 <a:latin typeface="Calibri"/>
               </a:rPr>
-              <a:t>Click to edit Master title style</a:t>
+              <a:t>Click </a:t>
+            </a:r>
+            <a:r>
+              <a:rPr lang="en-US" sz="4400" b="0" u="none" strike="noStrike">
+                <a:solidFill>
+                  <a:schemeClr val="dk1"/>
+                </a:solidFill>
+                <a:effectLst/>
+                <a:uFillTx/>
+                <a:latin typeface="Calibri"/>
+              </a:rPr>
+              <a:t>to edit </a:t>
+            </a:r>
+            <a:r>
+              <a:rPr lang="en-US" sz="4400" b="0" u="none" strike="noStrike">
+                <a:solidFill>
+                  <a:schemeClr val="dk1"/>
+                </a:solidFill>
+                <a:effectLst/>
+                <a:uFillTx/>
+                <a:latin typeface="Calibri"/>
+              </a:rPr>
+              <a:t>Master </a:t>
+            </a:r>
+            <a:r>
+              <a:rPr lang="en-US" sz="4400" b="0" u="none" strike="noStrike">
+                <a:solidFill>
+                  <a:schemeClr val="dk1"/>
+                </a:solidFill>
+                <a:effectLst/>
+                <a:uFillTx/>
+                <a:latin typeface="Calibri"/>
+              </a:rPr>
+              <a:t>title </a:t>
+            </a:r>
+            <a:r>
+              <a:rPr lang="en-US" sz="4400" b="0" u="none" strike="noStrike">
+                <a:solidFill>
+                  <a:schemeClr val="dk1"/>
+                </a:solidFill>
+                <a:effectLst/>
+                <a:uFillTx/>
+                <a:latin typeface="Calibri"/>
+              </a:rPr>
+              <a:t>style</a:t>
             </a:r>
             <a:endParaRPr lang="en-US" sz="4400" b="0" u="none" strike="noStrike">
               <a:solidFill>
@@ -807,7 +851,7 @@
                 <a:uFillTx/>
                 <a:latin typeface="Calibri"/>
               </a:rPr>
-              <a:t> </a:t>
+              <a:t>&lt;date/time&gt;</a:t>
             </a:r>
             <a:endParaRPr lang="en-US" sz="1200" b="0" u="none" strike="noStrike">
               <a:solidFill>
@@ -885,7 +929,7 @@
                 <a:uFillTx/>
                 <a:latin typeface="Times New Roman"/>
               </a:rPr>
-              <a:t> </a:t>
+              <a:t>&lt;footer&gt;</a:t>
             </a:r>
             <a:endParaRPr lang="en-US" sz="1400" b="0" u="none" strike="noStrike">
               <a:solidFill>
@@ -956,7 +1000,7 @@
                 <a:tab pos="0" algn="l"/>
               </a:tabLst>
             </a:pPr>
-            <a:fld id="{FCF1F30F-C387-4100-9068-C828F99FA3F3}" type="slidenum">
+            <a:fld id="{29D302CD-D98C-42B7-808E-DE31D7DD9471}" type="slidenum">
               <a:rPr lang="en-US" sz="1200" b="0" u="none" strike="noStrike">
                 <a:solidFill>
                   <a:schemeClr val="dk1">
@@ -967,7 +1011,7 @@
                 <a:uFillTx/>
                 <a:latin typeface="Calibri"/>
               </a:rPr>
-              <a:t>3</a:t>
+              <a:t>&lt;number&gt;</a:t>
             </a:fld>
             <a:endParaRPr lang="en-US" sz="1200" b="0" u="none" strike="noStrike">
               <a:solidFill>
@@ -1074,18 +1118,7 @@
                 <a:uFillTx/>
                 <a:latin typeface="Calibri"/>
               </a:rPr>
-              <a:t>Click to edit </a:t>
-            </a:r>
-            <a:r>
-              <a:rPr lang="en-US" sz="4400" b="0" u="none" strike="noStrike">
-                <a:solidFill>
-                  <a:schemeClr val="dk1"/>
-                </a:solidFill>
-                <a:effectLst/>
-                <a:uFillTx/>
-                <a:latin typeface="Calibri"/>
-              </a:rPr>
-              <a:t>Master title style</a:t>
+              <a:t>Click to edit Master title style</a:t>
             </a:r>
             <a:endParaRPr lang="en-US" sz="4400" b="0" u="none" strike="noStrike">
               <a:solidFill>
@@ -1622,7 +1655,7 @@
                 <a:tab pos="0" algn="l"/>
               </a:tabLst>
             </a:pPr>
-            <a:fld id="{C8CE3900-2EB9-4B59-9863-0C2D950881B1}" type="slidenum">
+            <a:fld id="{A73B8F69-5CB0-49D2-872C-64239F8D7CB9}" type="slidenum">
               <a:rPr lang="en-US" sz="1200" b="0" u="none" strike="noStrike">
                 <a:solidFill>
                   <a:schemeClr val="dk1">
@@ -2061,7 +2094,7 @@
                 <a:tab pos="0" algn="l"/>
               </a:tabLst>
             </a:pPr>
-            <a:fld id="{2AB590DF-CCD5-4291-86EA-54FBEA6A52DD}" type="slidenum">
+            <a:fld id="{210DBB7E-39DB-4B51-93E1-CD3E7B90D17B}" type="slidenum">
               <a:rPr lang="en-US" sz="1200" b="0" u="none" strike="noStrike">
                 <a:solidFill>
                   <a:schemeClr val="dk1">
@@ -2179,7 +2212,51 @@
                 <a:uFillTx/>
                 <a:latin typeface="Calibri"/>
               </a:rPr>
-              <a:t>Click to edit Master title style</a:t>
+              <a:t>Click </a:t>
+            </a:r>
+            <a:r>
+              <a:rPr lang="en-US" sz="4400" b="0" u="none" strike="noStrike">
+                <a:solidFill>
+                  <a:schemeClr val="dk1"/>
+                </a:solidFill>
+                <a:effectLst/>
+                <a:uFillTx/>
+                <a:latin typeface="Calibri"/>
+              </a:rPr>
+              <a:t>to edit </a:t>
+            </a:r>
+            <a:r>
+              <a:rPr lang="en-US" sz="4400" b="0" u="none" strike="noStrike">
+                <a:solidFill>
+                  <a:schemeClr val="dk1"/>
+                </a:solidFill>
+                <a:effectLst/>
+                <a:uFillTx/>
+                <a:latin typeface="Calibri"/>
+              </a:rPr>
+              <a:t>Master </a:t>
+            </a:r>
+            <a:r>
+              <a:rPr lang="en-US" sz="4400" b="0" u="none" strike="noStrike">
+                <a:solidFill>
+                  <a:schemeClr val="dk1"/>
+                </a:solidFill>
+                <a:effectLst/>
+                <a:uFillTx/>
+                <a:latin typeface="Calibri"/>
+              </a:rPr>
+              <a:t>title </a:t>
+            </a:r>
+            <a:r>
+              <a:rPr lang="en-US" sz="4400" b="0" u="none" strike="noStrike">
+                <a:solidFill>
+                  <a:schemeClr val="dk1"/>
+                </a:solidFill>
+                <a:effectLst/>
+                <a:uFillTx/>
+                <a:latin typeface="Calibri"/>
+              </a:rPr>
+              <a:t>style</a:t>
             </a:r>
             <a:endParaRPr lang="en-US" sz="4400" b="0" u="none" strike="noStrike">
               <a:solidFill>
@@ -3101,7 +3178,7 @@
                 <a:uFillTx/>
                 <a:latin typeface="Calibri"/>
               </a:rPr>
-              <a:t> </a:t>
+              <a:t>&lt;date/time&gt;</a:t>
             </a:r>
             <a:endParaRPr lang="en-US" sz="1200" b="0" u="none" strike="noStrike">
               <a:solidFill>
@@ -3179,7 +3256,7 @@
                 <a:uFillTx/>
                 <a:latin typeface="Times New Roman"/>
               </a:rPr>
-              <a:t> </a:t>
+              <a:t>&lt;footer&gt;</a:t>
             </a:r>
             <a:endParaRPr lang="en-US" sz="1400" b="0" u="none" strike="noStrike">
               <a:solidFill>
@@ -3250,7 +3327,7 @@
                 <a:tab pos="0" algn="l"/>
               </a:tabLst>
             </a:pPr>
-            <a:fld id="{1DDE83AD-9FA2-4495-AEDC-BF2BB043F83F}" type="slidenum">
+            <a:fld id="{A8AD439F-331E-4DDE-AA18-56A22D72B0F0}" type="slidenum">
               <a:rPr lang="en-US" sz="1200" b="0" u="none" strike="noStrike">
                 <a:solidFill>
                   <a:schemeClr val="dk1">
@@ -3261,7 +3338,7 @@
                 <a:uFillTx/>
                 <a:latin typeface="Calibri"/>
               </a:rPr>
-              <a:t>3</a:t>
+              <a:t>&lt;number&gt;</a:t>
             </a:fld>
             <a:endParaRPr lang="en-US" sz="1200" b="0" u="none" strike="noStrike">
               <a:solidFill>
@@ -3368,7 +3445,51 @@
                 <a:uFillTx/>
                 <a:latin typeface="Calibri"/>
               </a:rPr>
-              <a:t>Click to edit Master title style</a:t>
+              <a:t>Click </a:t>
+            </a:r>
+            <a:r>
+              <a:rPr lang="en-US" sz="4400" b="0" u="none" strike="noStrike">
+                <a:solidFill>
+                  <a:schemeClr val="dk1"/>
+                </a:solidFill>
+                <a:effectLst/>
+                <a:uFillTx/>
+                <a:latin typeface="Calibri"/>
+              </a:rPr>
+              <a:t>to edit </a:t>
+            </a:r>
+            <a:r>
+              <a:rPr lang="en-US" sz="4400" b="0" u="none" strike="noStrike">
+                <a:solidFill>
+                  <a:schemeClr val="dk1"/>
+                </a:solidFill>
+                <a:effectLst/>
+                <a:uFillTx/>
+                <a:latin typeface="Calibri"/>
+              </a:rPr>
+              <a:t>Master </a:t>
+            </a:r>
+            <a:r>
+              <a:rPr lang="en-US" sz="4400" b="0" u="none" strike="noStrike">
+                <a:solidFill>
+                  <a:schemeClr val="dk1"/>
+                </a:solidFill>
+                <a:effectLst/>
+                <a:uFillTx/>
+                <a:latin typeface="Calibri"/>
+              </a:rPr>
+              <a:t>title </a:t>
+            </a:r>
+            <a:r>
+              <a:rPr lang="en-US" sz="4400" b="0" u="none" strike="noStrike">
+                <a:solidFill>
+                  <a:schemeClr val="dk1"/>
+                </a:solidFill>
+                <a:effectLst/>
+                <a:uFillTx/>
+                <a:latin typeface="Calibri"/>
+              </a:rPr>
+              <a:t>style</a:t>
             </a:r>
             <a:endParaRPr lang="en-US" sz="4400" b="0" u="none" strike="noStrike">
               <a:solidFill>
@@ -3450,7 +3571,7 @@
                 <a:uFillTx/>
                 <a:latin typeface="Calibri"/>
               </a:rPr>
-              <a:t> </a:t>
+              <a:t>&lt;date/time&gt;</a:t>
             </a:r>
             <a:endParaRPr lang="en-US" sz="1200" b="0" u="none" strike="noStrike">
               <a:solidFill>
@@ -3528,7 +3649,7 @@
                 <a:uFillTx/>
                 <a:latin typeface="Times New Roman"/>
               </a:rPr>
-              <a:t> </a:t>
+              <a:t>&lt;footer&gt;</a:t>
             </a:r>
             <a:endParaRPr lang="en-US" sz="1400" b="0" u="none" strike="noStrike">
               <a:solidFill>
@@ -3599,7 +3720,7 @@
                 <a:tab pos="0" algn="l"/>
               </a:tabLst>
             </a:pPr>
-            <a:fld id="{DDFD8C55-FA91-4C7E-9FF9-268B07AF874B}" type="slidenum">
+            <a:fld id="{289F35BB-D7AF-4EEE-98C5-2D74520C7451}" type="slidenum">
               <a:rPr lang="en-US" sz="1200" b="0" u="none" strike="noStrike">
                 <a:solidFill>
                   <a:schemeClr val="dk1">
@@ -3610,7 +3731,7 @@
                 <a:uFillTx/>
                 <a:latin typeface="Calibri"/>
               </a:rPr>
-              <a:t>3</a:t>
+              <a:t>&lt;number&gt;</a:t>
             </a:fld>
             <a:endParaRPr lang="en-US" sz="1200" b="0" u="none" strike="noStrike">
               <a:solidFill>
@@ -3721,7 +3842,7 @@
                 <a:uFillTx/>
                 <a:latin typeface="Calibri"/>
               </a:rPr>
-              <a:t> </a:t>
+              <a:t>&lt;date/time&gt;</a:t>
             </a:r>
             <a:endParaRPr lang="en-US" sz="1200" b="0" u="none" strike="noStrike">
               <a:solidFill>
@@ -3799,7 +3920,7 @@
                 <a:uFillTx/>
                 <a:latin typeface="Times New Roman"/>
               </a:rPr>
-              <a:t> </a:t>
+              <a:t>&lt;footer&gt;</a:t>
             </a:r>
             <a:endParaRPr lang="en-US" sz="1400" b="0" u="none" strike="noStrike">
               <a:solidFill>
@@ -3870,7 +3991,7 @@
                 <a:tab pos="0" algn="l"/>
               </a:tabLst>
             </a:pPr>
-            <a:fld id="{74FC0AF6-4944-439D-946A-2CA0908FACE2}" type="slidenum">
+            <a:fld id="{A79877AB-044A-45F0-8D57-BA3F2C6BD881}" type="slidenum">
               <a:rPr lang="en-US" sz="1200" b="0" u="none" strike="noStrike">
                 <a:solidFill>
                   <a:schemeClr val="dk1">
@@ -3881,7 +4002,7 @@
                 <a:uFillTx/>
                 <a:latin typeface="Calibri"/>
               </a:rPr>
-              <a:t>3</a:t>
+              <a:t>&lt;number&gt;</a:t>
             </a:fld>
             <a:endParaRPr lang="en-US" sz="1200" b="0" u="none" strike="noStrike">
               <a:solidFill>
@@ -3959,7 +4080,62 @@
                 <a:uFillTx/>
                 <a:latin typeface="Calibri"/>
               </a:rPr>
-              <a:t>Click to edit the title text format</a:t>
+              <a:t>Click </a:t>
+            </a:r>
+            <a:r>
+              <a:rPr lang="en-US" sz="4400" b="0" u="none" strike="noStrike">
+                <a:solidFill>
+                  <a:schemeClr val="dk1"/>
+                </a:solidFill>
+                <a:effectLst/>
+                <a:uFillTx/>
+                <a:latin typeface="Calibri"/>
+              </a:rPr>
+              <a:t>to edit </a:t>
+            </a:r>
+            <a:r>
+              <a:rPr lang="en-US" sz="4400" b="0" u="none" strike="noStrike">
+                <a:solidFill>
+                  <a:schemeClr val="dk1"/>
+                </a:solidFill>
+                <a:effectLst/>
+                <a:uFillTx/>
+                <a:latin typeface="Calibri"/>
+              </a:rPr>
+              <a:t>the </a:t>
+            </a:r>
+            <a:r>
+              <a:rPr lang="en-US" sz="4400" b="0" u="none" strike="noStrike">
+                <a:solidFill>
+                  <a:schemeClr val="dk1"/>
+                </a:solidFill>
+                <a:effectLst/>
+                <a:uFillTx/>
+                <a:latin typeface="Calibri"/>
+              </a:rPr>
+              <a:t>title </a:t>
+            </a:r>
+            <a:r>
+              <a:rPr lang="en-US" sz="4400" b="0" u="none" strike="noStrike">
+                <a:solidFill>
+                  <a:schemeClr val="dk1"/>
+                </a:solidFill>
+                <a:effectLst/>
+                <a:uFillTx/>
+                <a:latin typeface="Calibri"/>
+              </a:rPr>
+              <a:t>text </a:t>
+            </a:r>
+            <a:r>
+              <a:rPr lang="en-US" sz="4400" b="0" u="none" strike="noStrike">
+                <a:solidFill>
+                  <a:schemeClr val="dk1"/>
+                </a:solidFill>
+                <a:effectLst/>
+                <a:uFillTx/>
+                <a:latin typeface="Calibri"/>
+              </a:rPr>
+              <a:t>format</a:t>
             </a:r>
             <a:endParaRPr lang="en-US" sz="4400" b="0" u="none" strike="noStrike">
               <a:solidFill>
@@ -4494,7 +4670,29 @@
                 <a:uFillTx/>
                 <a:latin typeface="Calibri"/>
               </a:rPr>
-              <a:t>Click to edit Master title style</a:t>
+              <a:t>Click to edit </a:t>
+            </a:r>
+            <a:r>
+              <a:rPr lang="en-US" sz="2000" b="1" u="none" strike="noStrike">
+                <a:solidFill>
+                  <a:schemeClr val="dk1"/>
+                </a:solidFill>
+                <a:effectLst/>
+                <a:uFillTx/>
+                <a:latin typeface="Calibri"/>
+              </a:rPr>
+              <a:t>Master title </a:t>
+            </a:r>
+            <a:r>
+              <a:rPr lang="en-US" sz="2000" b="1" u="none" strike="noStrike">
+                <a:solidFill>
+                  <a:schemeClr val="dk1"/>
+                </a:solidFill>
+                <a:effectLst/>
+                <a:uFillTx/>
+                <a:latin typeface="Calibri"/>
+              </a:rPr>
+              <a:t>style</a:t>
             </a:r>
             <a:endParaRPr lang="en-US" sz="2000" b="1" u="none" strike="noStrike">
               <a:solidFill>
@@ -5115,7 +5313,7 @@
                 <a:tab pos="0" algn="l"/>
               </a:tabLst>
             </a:pPr>
-            <a:fld id="{E32C7292-ABAD-48AF-8C67-6D582F4404D0}" type="slidenum">
+            <a:fld id="{548F888A-A8DF-43DC-9FA0-C61AD76DADBD}" type="slidenum">
               <a:rPr lang="en-US" sz="1200" b="0" u="none" strike="noStrike">
                 <a:solidFill>
                   <a:schemeClr val="dk1">
@@ -6018,7 +6216,7 @@
                 <a:tab pos="0" algn="l"/>
               </a:tabLst>
             </a:pPr>
-            <a:fld id="{8B3D1FE1-5145-4ABB-A0F6-6BB948FE6AC6}" type="slidenum">
+            <a:fld id="{8E995674-0C63-4323-8BE5-0EB3760C12A4}" type="slidenum">
               <a:rPr lang="en-US" sz="1200" b="0" u="none" strike="noStrike">
                 <a:solidFill>
                   <a:schemeClr val="dk1">
@@ -6367,7 +6565,7 @@
                 <a:tab pos="0" algn="l"/>
               </a:tabLst>
             </a:pPr>
-            <a:fld id="{9514966A-7402-40B5-B8A6-75CF44ACE028}" type="slidenum">
+            <a:fld id="{DB2A8906-F4B0-4883-840C-9546257790EB}" type="slidenum">
               <a:rPr lang="en-US" sz="1200" b="0" u="none" strike="noStrike">
                 <a:solidFill>
                   <a:schemeClr val="dk1">
@@ -6485,29 +6683,7 @@
                 <a:uFillTx/>
                 <a:latin typeface="Calibri"/>
               </a:rPr>
-              <a:t>Click to edit </a:t>
-            </a:r>
-            <a:r>
-              <a:rPr lang="en-US" sz="4400" b="0" u="none" strike="noStrike">
-                <a:solidFill>
-                  <a:schemeClr val="dk1"/>
-                </a:solidFill>
-                <a:effectLst/>
-                <a:uFillTx/>
-                <a:latin typeface="Calibri"/>
-              </a:rPr>
-              <a:t>Master title </a:t>
-            </a:r>
-            <a:r>
-              <a:rPr lang="en-US" sz="4400" b="0" u="none" strike="noStrike">
-                <a:solidFill>
-                  <a:schemeClr val="dk1"/>
-                </a:solidFill>
-                <a:effectLst/>
-                <a:uFillTx/>
-                <a:latin typeface="Calibri"/>
-              </a:rPr>
-              <a:t>style</a:t>
+              <a:t>Click to edit Master title style</a:t>
             </a:r>
             <a:endParaRPr lang="en-US" sz="4400" b="0" u="none" strike="noStrike">
               <a:solidFill>
@@ -7044,7 +7220,7 @@
                 <a:tab pos="0" algn="l"/>
               </a:tabLst>
             </a:pPr>
-            <a:fld id="{4834E9BB-8784-4354-A8DA-299AC20F5CDB}" type="slidenum">
+            <a:fld id="{78513F20-A246-4A42-A5FC-D66C44F2AC21}" type="slidenum">
               <a:rPr lang="en-US" sz="1200" b="0" u="none" strike="noStrike">
                 <a:solidFill>
                   <a:schemeClr val="dk1">
@@ -7162,326 +7338,7 @@
                 <a:uFillTx/>
                 <a:latin typeface="Calibri"/>
               </a:rPr>
-              <a:t>C</a:t>
-            </a:r>
-            <a:r>
-              <a:rPr lang="en-US" sz="4400" b="0" u="none" strike="noStrike">
-                <a:solidFill>
-                  <a:schemeClr val="dk1"/>
-                </a:solidFill>
-                <a:effectLst/>
-                <a:uFillTx/>
-                <a:latin typeface="Calibri"/>
-              </a:rPr>
-              <a:t>l</a:t>
-            </a:r>
-            <a:r>
-              <a:rPr lang="en-US" sz="4400" b="0" u="none" strike="noStrike">
-                <a:solidFill>
-                  <a:schemeClr val="dk1"/>
-                </a:solidFill>
-                <a:effectLst/>
-                <a:uFillTx/>
-                <a:latin typeface="Calibri"/>
-              </a:rPr>
-              <a:t>i</a:t>
-            </a:r>
-            <a:r>
-              <a:rPr lang="en-US" sz="4400" b="0" u="none" strike="noStrike">
-                <a:solidFill>
-                  <a:schemeClr val="dk1"/>
-                </a:solidFill>
-                <a:effectLst/>
-                <a:uFillTx/>
-                <a:latin typeface="Calibri"/>
-              </a:rPr>
-              <a:t>c</a:t>
-            </a:r>
-            <a:r>
-              <a:rPr lang="en-US" sz="4400" b="0" u="none" strike="noStrike">
-                <a:solidFill>
-                  <a:schemeClr val="dk1"/>
-                </a:solidFill>
-                <a:effectLst/>
-                <a:uFillTx/>
-                <a:latin typeface="Calibri"/>
-              </a:rPr>
-              <a:t>k</a:t>
-            </a:r>
-            <a:r>
-              <a:rPr lang="en-US" sz="4400" b="0" u="none" strike="noStrike">
-                <a:solidFill>
-                  <a:schemeClr val="dk1"/>
-                </a:solidFill>
-                <a:effectLst/>
-                <a:uFillTx/>
-                <a:latin typeface="Calibri"/>
-              </a:rPr>
-              <a:t> </a:t>
-            </a:r>
-            <a:r>
-              <a:rPr lang="en-US" sz="4400" b="0" u="none" strike="noStrike">
-                <a:solidFill>
-                  <a:schemeClr val="dk1"/>
-                </a:solidFill>
-                <a:effectLst/>
-                <a:uFillTx/>
-                <a:latin typeface="Calibri"/>
-              </a:rPr>
-              <a:t>t</a:t>
-            </a:r>
-            <a:r>
-              <a:rPr lang="en-US" sz="4400" b="0" u="none" strike="noStrike">
-                <a:solidFill>
-                  <a:schemeClr val="dk1"/>
-                </a:solidFill>
-                <a:effectLst/>
-                <a:uFillTx/>
-                <a:latin typeface="Calibri"/>
-              </a:rPr>
-              <a:t>o</a:t>
-            </a:r>
-            <a:r>
-              <a:rPr lang="en-US" sz="4400" b="0" u="none" strike="noStrike">
-                <a:solidFill>
-                  <a:schemeClr val="dk1"/>
-                </a:solidFill>
-                <a:effectLst/>
-                <a:uFillTx/>
-                <a:latin typeface="Calibri"/>
-              </a:rPr>
-              <a:t> </a:t>
-            </a:r>
-            <a:r>
-              <a:rPr lang="en-US" sz="4400" b="0" u="none" strike="noStrike">
-                <a:solidFill>
-                  <a:schemeClr val="dk1"/>
-                </a:solidFill>
-                <a:effectLst/>
-                <a:uFillTx/>
-                <a:latin typeface="Calibri"/>
-              </a:rPr>
-              <a:t>e</a:t>
-            </a:r>
-            <a:r>
-              <a:rPr lang="en-US" sz="4400" b="0" u="none" strike="noStrike">
-                <a:solidFill>
-                  <a:schemeClr val="dk1"/>
-                </a:solidFill>
-                <a:effectLst/>
-                <a:uFillTx/>
-                <a:latin typeface="Calibri"/>
-              </a:rPr>
-              <a:t>d</a:t>
-            </a:r>
-            <a:r>
-              <a:rPr lang="en-US" sz="4400" b="0" u="none" strike="noStrike">
-                <a:solidFill>
-                  <a:schemeClr val="dk1"/>
-                </a:solidFill>
-                <a:effectLst/>
-                <a:uFillTx/>
-                <a:latin typeface="Calibri"/>
-              </a:rPr>
-              <a:t>i</a:t>
-            </a:r>
-            <a:r>
-              <a:rPr lang="en-US" sz="4400" b="0" u="none" strike="noStrike">
-                <a:solidFill>
-                  <a:schemeClr val="dk1"/>
-                </a:solidFill>
-                <a:effectLst/>
-                <a:uFillTx/>
-                <a:latin typeface="Calibri"/>
-              </a:rPr>
-              <a:t>t </a:t>
-            </a:r>
-            <a:r>
-              <a:rPr lang="en-US" sz="4400" b="0" u="none" strike="noStrike">
-                <a:solidFill>
-                  <a:schemeClr val="dk1"/>
-                </a:solidFill>
-                <a:effectLst/>
-                <a:uFillTx/>
-                <a:latin typeface="Calibri"/>
-              </a:rPr>
-              <a:t>M</a:t>
-            </a:r>
-            <a:r>
-              <a:rPr lang="en-US" sz="4400" b="0" u="none" strike="noStrike">
-                <a:solidFill>
-                  <a:schemeClr val="dk1"/>
-                </a:solidFill>
-                <a:effectLst/>
-                <a:uFillTx/>
-                <a:latin typeface="Calibri"/>
-              </a:rPr>
-              <a:t>a</a:t>
-            </a:r>
-            <a:r>
-              <a:rPr lang="en-US" sz="4400" b="0" u="none" strike="noStrike">
-                <a:solidFill>
-                  <a:schemeClr val="dk1"/>
-                </a:solidFill>
-                <a:effectLst/>
-                <a:uFillTx/>
-                <a:latin typeface="Calibri"/>
-              </a:rPr>
-              <a:t>s</a:t>
-            </a:r>
-            <a:r>
-              <a:rPr lang="en-US" sz="4400" b="0" u="none" strike="noStrike">
-                <a:solidFill>
-                  <a:schemeClr val="dk1"/>
-                </a:solidFill>
-                <a:effectLst/>
-                <a:uFillTx/>
-                <a:latin typeface="Calibri"/>
-              </a:rPr>
-              <a:t>t</a:t>
-            </a:r>
-            <a:r>
-              <a:rPr lang="en-US" sz="4400" b="0" u="none" strike="noStrike">
-                <a:solidFill>
-                  <a:schemeClr val="dk1"/>
-                </a:solidFill>
-                <a:effectLst/>
-                <a:uFillTx/>
-                <a:latin typeface="Calibri"/>
-              </a:rPr>
-              <a:t>e</a:t>
-            </a:r>
-            <a:r>
-              <a:rPr lang="en-US" sz="4400" b="0" u="none" strike="noStrike">
-                <a:solidFill>
-                  <a:schemeClr val="dk1"/>
-                </a:solidFill>
-                <a:effectLst/>
-                <a:uFillTx/>
-                <a:latin typeface="Calibri"/>
-              </a:rPr>
-              <a:t>r </a:t>
-            </a:r>
-            <a:r>
-              <a:rPr lang="en-US" sz="4400" b="0" u="none" strike="noStrike">
-                <a:solidFill>
-                  <a:schemeClr val="dk1"/>
-                </a:solidFill>
-                <a:effectLst/>
-                <a:uFillTx/>
-                <a:latin typeface="Calibri"/>
-              </a:rPr>
-              <a:t>t</a:t>
-            </a:r>
-            <a:r>
-              <a:rPr lang="en-US" sz="4400" b="0" u="none" strike="noStrike">
-                <a:solidFill>
-                  <a:schemeClr val="dk1"/>
-                </a:solidFill>
-                <a:effectLst/>
-                <a:uFillTx/>
-                <a:latin typeface="Calibri"/>
-              </a:rPr>
-              <a:t>i</a:t>
-            </a:r>
-            <a:r>
-              <a:rPr lang="en-US" sz="4400" b="0" u="none" strike="noStrike">
-                <a:solidFill>
-                  <a:schemeClr val="dk1"/>
-                </a:solidFill>
-                <a:effectLst/>
-                <a:uFillTx/>
-                <a:latin typeface="Calibri"/>
-              </a:rPr>
-              <a:t>t</a:t>
-            </a:r>
-            <a:r>
-              <a:rPr lang="en-US" sz="4400" b="0" u="none" strike="noStrike">
-                <a:solidFill>
-                  <a:schemeClr val="dk1"/>
-                </a:solidFill>
-                <a:effectLst/>
-                <a:uFillTx/>
-                <a:latin typeface="Calibri"/>
-              </a:rPr>
-              <a:t>l</a:t>
-            </a:r>
-            <a:r>
-              <a:rPr lang="en-US" sz="4400" b="0" u="none" strike="noStrike">
-                <a:solidFill>
-                  <a:schemeClr val="dk1"/>
-                </a:solidFill>
-                <a:effectLst/>
-                <a:uFillTx/>
-                <a:latin typeface="Calibri"/>
-              </a:rPr>
-              <a:t>e</a:t>
-            </a:r>
-            <a:r>
-              <a:rPr lang="en-US" sz="4400" b="0" u="none" strike="noStrike">
-                <a:solidFill>
-                  <a:schemeClr val="dk1"/>
-                </a:solidFill>
-                <a:effectLst/>
-                <a:uFillTx/>
-                <a:latin typeface="Calibri"/>
-              </a:rPr>
-              <a:t> </a:t>
-            </a:r>
-            <a:r>
-              <a:rPr lang="en-US" sz="4400" b="0" u="none" strike="noStrike">
-                <a:solidFill>
-                  <a:schemeClr val="dk1"/>
-                </a:solidFill>
-                <a:effectLst/>
-                <a:uFillTx/>
-                <a:latin typeface="Calibri"/>
-              </a:rPr>
-              <a:t>s</a:t>
-            </a:r>
-            <a:r>
-              <a:rPr lang="en-US" sz="4400" b="0" u="none" strike="noStrike">
-                <a:solidFill>
-                  <a:schemeClr val="dk1"/>
-                </a:solidFill>
-                <a:effectLst/>
-                <a:uFillTx/>
-                <a:latin typeface="Calibri"/>
-              </a:rPr>
-              <a:t>t</a:t>
-            </a:r>
-            <a:r>
-              <a:rPr lang="en-US" sz="4400" b="0" u="none" strike="noStrike">
-                <a:solidFill>
-                  <a:schemeClr val="dk1"/>
-                </a:solidFill>
-                <a:effectLst/>
-                <a:uFillTx/>
-                <a:latin typeface="Calibri"/>
-              </a:rPr>
-              <a:t>y</a:t>
-            </a:r>
-            <a:r>
-              <a:rPr lang="en-US" sz="4400" b="0" u="none" strike="noStrike">
-                <a:solidFill>
-                  <a:schemeClr val="dk1"/>
-                </a:solidFill>
-                <a:effectLst/>
-                <a:uFillTx/>
-                <a:latin typeface="Calibri"/>
-              </a:rPr>
-              <a:t>l</a:t>
-            </a:r>
-            <a:r>
-              <a:rPr lang="en-US" sz="4400" b="0" u="none" strike="noStrike">
-                <a:solidFill>
-                  <a:schemeClr val="dk1"/>
-                </a:solidFill>
-                <a:effectLst/>
-                <a:uFillTx/>
-                <a:latin typeface="Calibri"/>
-              </a:rPr>
-              <a:t>e</a:t>
+              <a:t>Click to edit Master title style</a:t>
             </a:r>
             <a:endParaRPr lang="en-US" sz="4400" b="0" u="none" strike="noStrike">
               <a:solidFill>
@@ -8018,7 +7875,7 @@
                 <a:tab pos="0" algn="l"/>
               </a:tabLst>
             </a:pPr>
-            <a:fld id="{4843E284-73BD-4EEA-ADDB-EDE352149EC6}" type="slidenum">
+            <a:fld id="{1ED7E16B-C707-47A4-9466-F2AB306A103F}" type="slidenum">
               <a:rPr lang="en-US" sz="1200" b="0" u="none" strike="noStrike">
                 <a:solidFill>
                   <a:schemeClr val="dk1">
@@ -8109,63 +7966,7 @@
       </p:grpSpPr>
       <p:sp>
         <p:nvSpPr>
-          <p:cNvPr id="61" name="Rectangle 1"/>
-          <p:cNvSpPr/>
-          <p:nvPr/>
-        </p:nvSpPr>
-        <p:spPr>
-          <a:xfrm>
-            <a:off x="0" y="2560320"/>
-            <a:ext cx="108720" cy="1827720"/>
-          </a:xfrm>
-          <a:prstGeom prst="rect">
-            <a:avLst/>
-          </a:prstGeom>
-          <a:solidFill>
-            <a:srgbClr val="2563EB"/>
-          </a:solidFill>
-          <a:ln>
-            <a:noFill/>
-          </a:ln>
-          <a:effectLst>
-            <a:outerShdw blurRad="39960" dir="5400000" dist="23040" rotWithShape="0">
-              <a:srgbClr val="000000">
-                <a:alpha val="35000"/>
-              </a:srgbClr>
-            </a:outerShdw>
-          </a:effectLst>
-        </p:spPr>
-        <p:style>
-          <a:lnRef idx="1">
-            <a:schemeClr val="accent1"/>
-          </a:lnRef>
-          <a:fillRef idx="3">
-            <a:schemeClr val="accent1"/>
-          </a:fillRef>
-          <a:effectRef idx="2">
-            <a:schemeClr val="accent1"/>
-          </a:effectRef>
-          <a:fontRef idx="minor"/>
-        </p:style>
-        <p:txBody>
-          <a:bodyPr lIns="54360" tIns="45000" rIns="54360" bIns="45000" anchor="ctr">
-            <a:noAutofit/>
-          </a:bodyPr>
-          <a:p>
-            <a:endParaRPr lang="en-US" sz="1800" b="0" u="none" strike="noStrike">
-              <a:solidFill>
-                <a:schemeClr val="lt1"/>
-              </a:solidFill>
-              <a:effectLst/>
-              <a:uFillTx/>
-              <a:latin typeface="Calibri"/>
-            </a:endParaRPr>
-          </a:p>
-        </p:txBody>
-      </p:sp>
-      <p:sp>
-        <p:nvSpPr>
-          <p:cNvPr id="62" name="TextBox 2"/>
+          <p:cNvPr id="61" name="TextBox 2"/>
           <p:cNvSpPr/>
           <p:nvPr/>
         </p:nvSpPr>
@@ -8207,7 +8008,18 @@
                 <a:uFillTx/>
                 <a:latin typeface="Calibri"/>
               </a:rPr>
-              <a:t>Scotland Yard</a:t>
+              <a:t>Scotlan</a:t>
+            </a:r>
+            <a:r>
+              <a:rPr lang="en-US" sz="6000" b="1" u="none" strike="noStrike">
+                <a:solidFill>
+                  <a:srgbClr val="FFFFFF"/>
+                </a:solidFill>
+                <a:effectLst/>
+                <a:uFillTx/>
+                <a:latin typeface="Calibri"/>
+              </a:rPr>
+              <a:t>d Yard</a:t>
             </a:r>
             <a:endParaRPr lang="en-US" sz="6000" b="0" u="none" strike="noStrike">
               <a:solidFill>
@@ -8222,7 +8034,7 @@
       </p:sp>
       <p:sp>
         <p:nvSpPr>
-          <p:cNvPr id="63" name="TextBox 3"/>
+          <p:cNvPr id="62" name="TextBox 3"/>
           <p:cNvSpPr/>
           <p:nvPr/>
         </p:nvSpPr>
@@ -8279,7 +8091,7 @@
       </p:sp>
       <p:sp>
         <p:nvSpPr>
-          <p:cNvPr id="64" name="TextBox 5"/>
+          <p:cNvPr id="63" name="TextBox 5"/>
           <p:cNvSpPr/>
           <p:nvPr/>
         </p:nvSpPr>
@@ -8321,18 +8133,7 @@
                 <a:uFillTx/>
                 <a:latin typeface="Calibri"/>
               </a:rPr>
-              <a:t>Ming Bao  ·  ENGR489  ·  Victoria University of Wellington  </a:t>
-            </a:r>
-            <a:r>
-              <a:rPr lang="en-US" sz="1400" b="0" u="none" strike="noStrike">
-                <a:solidFill>
-                  <a:srgbClr val="94A3B8"/>
-                </a:solidFill>
-                <a:effectLst/>
-                <a:uFillTx/>
-                <a:latin typeface="Calibri"/>
-              </a:rPr>
-              <a:t>·  June 2026</a:t>
+              <a:t>Ming Bao  ·  ENGR489  ·  Victoria University of Wellington  ·  June 2026</a:t>
             </a:r>
             <a:endParaRPr lang="en-US" sz="1400" b="0" u="none" strike="noStrike">
               <a:solidFill>
@@ -8347,7 +8148,7 @@
       </p:sp>
       <p:sp>
         <p:nvSpPr>
-          <p:cNvPr id="65" name="Oval 6"/>
+          <p:cNvPr id="64" name="Oval 6"/>
           <p:cNvSpPr/>
           <p:nvPr/>
         </p:nvSpPr>
@@ -8406,7 +8207,7 @@
       </p:sp>
       <p:sp>
         <p:nvSpPr>
-          <p:cNvPr id="66" name="Oval 7"/>
+          <p:cNvPr id="65" name="Oval 7"/>
           <p:cNvSpPr/>
           <p:nvPr/>
         </p:nvSpPr>
@@ -8465,7 +8266,7 @@
       </p:sp>
       <p:sp>
         <p:nvSpPr>
-          <p:cNvPr id="67" name="Oval 8"/>
+          <p:cNvPr id="66" name="Oval 8"/>
           <p:cNvSpPr/>
           <p:nvPr/>
         </p:nvSpPr>
@@ -8524,7 +8325,7 @@
       </p:sp>
       <p:sp>
         <p:nvSpPr>
-          <p:cNvPr id="68" name="Oval 9"/>
+          <p:cNvPr id="67" name="Oval 9"/>
           <p:cNvSpPr/>
           <p:nvPr/>
         </p:nvSpPr>
@@ -8620,7 +8421,7 @@
       </p:grpSpPr>
       <p:sp>
         <p:nvSpPr>
-          <p:cNvPr id="122" name="Rectangle 2"/>
+          <p:cNvPr id="120" name="Rectangle 2"/>
           <p:cNvSpPr/>
           <p:nvPr/>
         </p:nvSpPr>
@@ -8676,7 +8477,7 @@
       </p:sp>
       <p:sp>
         <p:nvSpPr>
-          <p:cNvPr id="123" name="TextBox 17"/>
+          <p:cNvPr id="121" name="TextBox 17"/>
           <p:cNvSpPr/>
           <p:nvPr/>
         </p:nvSpPr>
@@ -8733,7 +8534,7 @@
       </p:sp>
       <p:graphicFrame>
         <p:nvGraphicFramePr>
-          <p:cNvPr id="124" name="Table 2"/>
+          <p:cNvPr id="122" name="Table 2"/>
           <p:cNvGraphicFramePr/>
           <p:nvPr/>
         </p:nvGraphicFramePr>
@@ -9686,7 +9487,7 @@
       </p:graphicFrame>
       <p:sp>
         <p:nvSpPr>
-          <p:cNvPr id="125" name="TextBox 25"/>
+          <p:cNvPr id="123" name="TextBox 25"/>
           <p:cNvSpPr/>
           <p:nvPr/>
         </p:nvSpPr>
@@ -9743,7 +9544,7 @@
       </p:sp>
       <p:sp>
         <p:nvSpPr>
-          <p:cNvPr id="126" name="TextBox 26"/>
+          <p:cNvPr id="124" name="TextBox 26"/>
           <p:cNvSpPr/>
           <p:nvPr/>
         </p:nvSpPr>
@@ -9785,18 +9586,7 @@
                 <a:uFillTx/>
                 <a:latin typeface="Calibri"/>
               </a:rPr>
-              <a:t>• Game engine (move validation, catch detection, </a:t>
-            </a:r>
-            <a:r>
-              <a:rPr lang="en-US" sz="1300" b="0" u="none" strike="noStrike">
-                <a:solidFill>
-                  <a:srgbClr val="CBD5E1"/>
-                </a:solidFill>
-                <a:effectLst/>
-                <a:uFillTx/>
-                <a:latin typeface="Calibri"/>
-              </a:rPr>
-              <a:t>win conditions) not yet implemented</a:t>
+              <a:t>• Game engine (move validation, catch detection, win conditions) not yet implemented</a:t>
             </a:r>
             <a:endParaRPr lang="en-US" sz="1300" b="0" u="none" strike="noStrike">
               <a:solidFill>
@@ -9811,7 +9601,7 @@
       </p:sp>
       <p:sp>
         <p:nvSpPr>
-          <p:cNvPr id="127" name="TextBox 27"/>
+          <p:cNvPr id="125" name="TextBox 27"/>
           <p:cNvSpPr/>
           <p:nvPr/>
         </p:nvSpPr>
@@ -9868,7 +9658,7 @@
       </p:sp>
       <p:sp>
         <p:nvSpPr>
-          <p:cNvPr id="128" name="TextBox 28"/>
+          <p:cNvPr id="126" name="TextBox 28"/>
           <p:cNvSpPr/>
           <p:nvPr/>
         </p:nvSpPr>
@@ -9962,7 +9752,7 @@
       </p:grpSpPr>
       <p:sp>
         <p:nvSpPr>
-          <p:cNvPr id="129" name="Rectangle 1"/>
+          <p:cNvPr id="127" name="Rectangle 1"/>
           <p:cNvSpPr/>
           <p:nvPr/>
         </p:nvSpPr>
@@ -10018,7 +9808,7 @@
       </p:sp>
       <p:sp>
         <p:nvSpPr>
-          <p:cNvPr id="130" name="TextBox 2"/>
+          <p:cNvPr id="128" name="TextBox 2"/>
           <p:cNvSpPr/>
           <p:nvPr/>
         </p:nvSpPr>
@@ -10075,7 +9865,7 @@
       </p:sp>
       <p:sp>
         <p:nvSpPr>
-          <p:cNvPr id="131" name="TextBox 10"/>
+          <p:cNvPr id="129" name="TextBox 10"/>
           <p:cNvSpPr/>
           <p:nvPr/>
         </p:nvSpPr>
@@ -10132,7 +9922,7 @@
       </p:sp>
       <p:pic>
         <p:nvPicPr>
-          <p:cNvPr id="132" name=""/>
+          <p:cNvPr id="130" name=""/>
           <p:cNvPicPr/>
           <p:nvPr/>
         </p:nvPicPr>
@@ -10156,7 +9946,7 @@
       </p:pic>
       <p:sp>
         <p:nvSpPr>
-          <p:cNvPr id="133" name=""/>
+          <p:cNvPr id="131" name=""/>
           <p:cNvSpPr/>
           <p:nvPr/>
         </p:nvSpPr>
@@ -10236,7 +10026,7 @@
       </p:grpSpPr>
       <p:sp>
         <p:nvSpPr>
-          <p:cNvPr id="134" name="Rectangle 1"/>
+          <p:cNvPr id="132" name="Rectangle 1"/>
           <p:cNvSpPr/>
           <p:nvPr/>
         </p:nvSpPr>
@@ -10292,7 +10082,7 @@
       </p:sp>
       <p:sp>
         <p:nvSpPr>
-          <p:cNvPr id="135" name="TextBox 2"/>
+          <p:cNvPr id="133" name="TextBox 2"/>
           <p:cNvSpPr/>
           <p:nvPr/>
         </p:nvSpPr>
@@ -10349,7 +10139,7 @@
       </p:sp>
       <p:sp>
         <p:nvSpPr>
-          <p:cNvPr id="136" name="Rectangle 3"/>
+          <p:cNvPr id="134" name="Rectangle 3"/>
           <p:cNvSpPr/>
           <p:nvPr/>
         </p:nvSpPr>
@@ -10405,7 +10195,7 @@
       </p:sp>
       <p:sp>
         <p:nvSpPr>
-          <p:cNvPr id="137" name="TextBox 4"/>
+          <p:cNvPr id="135" name="TextBox 4"/>
           <p:cNvSpPr/>
           <p:nvPr/>
         </p:nvSpPr>
@@ -10462,7 +10252,7 @@
       </p:sp>
       <p:sp>
         <p:nvSpPr>
-          <p:cNvPr id="138" name="TextBox 5"/>
+          <p:cNvPr id="136" name="TextBox 5"/>
           <p:cNvSpPr/>
           <p:nvPr/>
         </p:nvSpPr>
@@ -10519,7 +10309,7 @@
       </p:sp>
       <p:sp>
         <p:nvSpPr>
-          <p:cNvPr id="139" name="TextBox 6"/>
+          <p:cNvPr id="137" name="TextBox 6"/>
           <p:cNvSpPr/>
           <p:nvPr/>
         </p:nvSpPr>
@@ -10576,7 +10366,7 @@
       </p:sp>
       <p:sp>
         <p:nvSpPr>
-          <p:cNvPr id="140" name="TextBox 7"/>
+          <p:cNvPr id="138" name="TextBox 7"/>
           <p:cNvSpPr/>
           <p:nvPr/>
         </p:nvSpPr>
@@ -10633,7 +10423,7 @@
       </p:sp>
       <p:sp>
         <p:nvSpPr>
-          <p:cNvPr id="141" name="TextBox 8"/>
+          <p:cNvPr id="139" name="TextBox 8"/>
           <p:cNvSpPr/>
           <p:nvPr/>
         </p:nvSpPr>
@@ -10690,7 +10480,7 @@
       </p:sp>
       <p:sp>
         <p:nvSpPr>
-          <p:cNvPr id="142" name="TextBox 9"/>
+          <p:cNvPr id="140" name="TextBox 9"/>
           <p:cNvSpPr/>
           <p:nvPr/>
         </p:nvSpPr>
@@ -10747,7 +10537,7 @@
       </p:sp>
       <p:sp>
         <p:nvSpPr>
-          <p:cNvPr id="143" name="TextBox 10"/>
+          <p:cNvPr id="141" name="TextBox 10"/>
           <p:cNvSpPr/>
           <p:nvPr/>
         </p:nvSpPr>
@@ -10804,7 +10594,7 @@
       </p:sp>
       <p:sp>
         <p:nvSpPr>
-          <p:cNvPr id="144" name="Rectangle 11"/>
+          <p:cNvPr id="142" name="Rectangle 11"/>
           <p:cNvSpPr/>
           <p:nvPr/>
         </p:nvSpPr>
@@ -10860,7 +10650,7 @@
       </p:sp>
       <p:sp>
         <p:nvSpPr>
-          <p:cNvPr id="145" name="TextBox 12"/>
+          <p:cNvPr id="143" name="TextBox 12"/>
           <p:cNvSpPr/>
           <p:nvPr/>
         </p:nvSpPr>
@@ -10917,7 +10707,7 @@
       </p:sp>
       <p:sp>
         <p:nvSpPr>
-          <p:cNvPr id="146" name="TextBox 13"/>
+          <p:cNvPr id="144" name="TextBox 13"/>
           <p:cNvSpPr/>
           <p:nvPr/>
         </p:nvSpPr>
@@ -10959,7 +10749,18 @@
                 <a:uFillTx/>
                 <a:latin typeface="Calibri"/>
               </a:rPr>
-              <a:t>• Build Wellington node/edge graph</a:t>
+              <a:t>• Build Wellington </a:t>
+            </a:r>
+            <a:r>
+              <a:rPr lang="en-US" sz="1100" b="0" u="none" strike="noStrike">
+                <a:solidFill>
+                  <a:srgbClr val="CBD5E1"/>
+                </a:solidFill>
+                <a:effectLst/>
+                <a:uFillTx/>
+                <a:latin typeface="Calibri"/>
+              </a:rPr>
+              <a:t>node/edge graph</a:t>
             </a:r>
             <a:endParaRPr lang="en-US" sz="1100" b="0" u="none" strike="noStrike">
               <a:solidFill>
@@ -10974,7 +10775,7 @@
       </p:sp>
       <p:sp>
         <p:nvSpPr>
-          <p:cNvPr id="147" name="TextBox 14"/>
+          <p:cNvPr id="145" name="TextBox 14"/>
           <p:cNvSpPr/>
           <p:nvPr/>
         </p:nvSpPr>
@@ -11031,7 +10832,7 @@
       </p:sp>
       <p:sp>
         <p:nvSpPr>
-          <p:cNvPr id="148" name="TextBox 15"/>
+          <p:cNvPr id="146" name="TextBox 15"/>
           <p:cNvSpPr/>
           <p:nvPr/>
         </p:nvSpPr>
@@ -11088,7 +10889,7 @@
       </p:sp>
       <p:sp>
         <p:nvSpPr>
-          <p:cNvPr id="149" name="TextBox 16"/>
+          <p:cNvPr id="147" name="TextBox 16"/>
           <p:cNvSpPr/>
           <p:nvPr/>
         </p:nvSpPr>
@@ -11145,7 +10946,7 @@
       </p:sp>
       <p:sp>
         <p:nvSpPr>
-          <p:cNvPr id="150" name="Rectangle 17"/>
+          <p:cNvPr id="148" name="Rectangle 17"/>
           <p:cNvSpPr/>
           <p:nvPr/>
         </p:nvSpPr>
@@ -11201,7 +11002,7 @@
       </p:sp>
       <p:sp>
         <p:nvSpPr>
-          <p:cNvPr id="151" name="TextBox 18"/>
+          <p:cNvPr id="149" name="TextBox 18"/>
           <p:cNvSpPr/>
           <p:nvPr/>
         </p:nvSpPr>
@@ -11258,7 +11059,7 @@
       </p:sp>
       <p:sp>
         <p:nvSpPr>
-          <p:cNvPr id="152" name="TextBox 19"/>
+          <p:cNvPr id="150" name="TextBox 19"/>
           <p:cNvSpPr/>
           <p:nvPr/>
         </p:nvSpPr>
@@ -11315,7 +11116,7 @@
       </p:sp>
       <p:sp>
         <p:nvSpPr>
-          <p:cNvPr id="153" name="TextBox 20"/>
+          <p:cNvPr id="151" name="TextBox 20"/>
           <p:cNvSpPr/>
           <p:nvPr/>
         </p:nvSpPr>
@@ -11372,7 +11173,7 @@
       </p:sp>
       <p:sp>
         <p:nvSpPr>
-          <p:cNvPr id="154" name="TextBox 23"/>
+          <p:cNvPr id="152" name="TextBox 23"/>
           <p:cNvSpPr/>
           <p:nvPr/>
         </p:nvSpPr>
@@ -11466,7 +11267,7 @@
       </p:grpSpPr>
       <p:sp>
         <p:nvSpPr>
-          <p:cNvPr id="155" name="Rectangle 1"/>
+          <p:cNvPr id="153" name="Rectangle 1"/>
           <p:cNvSpPr/>
           <p:nvPr/>
         </p:nvSpPr>
@@ -11522,7 +11323,7 @@
       </p:sp>
       <p:sp>
         <p:nvSpPr>
-          <p:cNvPr id="156" name="TextBox 2"/>
+          <p:cNvPr id="154" name="TextBox 2"/>
           <p:cNvSpPr/>
           <p:nvPr/>
         </p:nvSpPr>
@@ -11579,7 +11380,7 @@
       </p:sp>
       <p:sp>
         <p:nvSpPr>
-          <p:cNvPr id="157" name="TextBox 3"/>
+          <p:cNvPr id="155" name="TextBox 3"/>
           <p:cNvSpPr/>
           <p:nvPr/>
         </p:nvSpPr>
@@ -11636,7 +11437,7 @@
       </p:sp>
       <p:sp>
         <p:nvSpPr>
-          <p:cNvPr id="158" name="TextBox 4"/>
+          <p:cNvPr id="156" name="TextBox 4"/>
           <p:cNvSpPr/>
           <p:nvPr/>
         </p:nvSpPr>
@@ -11693,7 +11494,7 @@
       </p:sp>
       <p:sp>
         <p:nvSpPr>
-          <p:cNvPr id="159" name="TextBox 5"/>
+          <p:cNvPr id="157" name="TextBox 5"/>
           <p:cNvSpPr/>
           <p:nvPr/>
         </p:nvSpPr>
@@ -11750,7 +11551,7 @@
       </p:sp>
       <p:sp>
         <p:nvSpPr>
-          <p:cNvPr id="160" name="TextBox 6"/>
+          <p:cNvPr id="158" name="TextBox 6"/>
           <p:cNvSpPr/>
           <p:nvPr/>
         </p:nvSpPr>
@@ -11807,7 +11608,7 @@
       </p:sp>
       <p:sp>
         <p:nvSpPr>
-          <p:cNvPr id="161" name="TextBox 7"/>
+          <p:cNvPr id="159" name="TextBox 7"/>
           <p:cNvSpPr/>
           <p:nvPr/>
         </p:nvSpPr>
@@ -11849,18 +11650,7 @@
                 <a:uFillTx/>
                 <a:latin typeface="Calibri"/>
               </a:rPr>
-              <a:t>• ✅ Working backend:  6 endpoints, WebSocket, role </a:t>
-            </a:r>
-            <a:r>
-              <a:rPr lang="en-US" sz="1600" b="0" u="none" strike="noStrike">
-                <a:solidFill>
-                  <a:srgbClr val="22C55E"/>
-                </a:solidFill>
-                <a:effectLst/>
-                <a:uFillTx/>
-                <a:latin typeface="Calibri"/>
-              </a:rPr>
-              <a:t>assignment, 104 tests passing</a:t>
+              <a:t>• ✅ Working backend:  6 endpoints, WebSocket, role assignment, 104 tests passing</a:t>
             </a:r>
             <a:endParaRPr lang="en-US" sz="1600" b="0" u="none" strike="noStrike">
               <a:solidFill>
@@ -11875,7 +11665,7 @@
       </p:sp>
       <p:sp>
         <p:nvSpPr>
-          <p:cNvPr id="162" name="TextBox 8"/>
+          <p:cNvPr id="160" name="TextBox 8"/>
           <p:cNvSpPr/>
           <p:nvPr/>
         </p:nvSpPr>
@@ -11932,7 +11722,7 @@
       </p:sp>
       <p:sp>
         <p:nvSpPr>
-          <p:cNvPr id="163" name="TextBox 9"/>
+          <p:cNvPr id="161" name="TextBox 9"/>
           <p:cNvSpPr/>
           <p:nvPr/>
         </p:nvSpPr>
@@ -11989,7 +11779,7 @@
       </p:sp>
       <p:sp>
         <p:nvSpPr>
-          <p:cNvPr id="164" name="Rectangle 10"/>
+          <p:cNvPr id="162" name="Rectangle 10"/>
           <p:cNvSpPr/>
           <p:nvPr/>
         </p:nvSpPr>
@@ -12045,7 +11835,7 @@
       </p:sp>
       <p:sp>
         <p:nvSpPr>
-          <p:cNvPr id="165" name="TextBox 11"/>
+          <p:cNvPr id="163" name="TextBox 11"/>
           <p:cNvSpPr/>
           <p:nvPr/>
         </p:nvSpPr>
@@ -12102,7 +11892,7 @@
       </p:sp>
       <p:sp>
         <p:nvSpPr>
-          <p:cNvPr id="166" name="TextBox 13"/>
+          <p:cNvPr id="164" name="TextBox 13"/>
           <p:cNvSpPr/>
           <p:nvPr/>
         </p:nvSpPr>
@@ -12196,14 +11986,14 @@
       </p:grpSpPr>
       <p:sp>
         <p:nvSpPr>
-          <p:cNvPr id="69" name="Rectangle 1"/>
+          <p:cNvPr id="68" name="Rectangle 1"/>
           <p:cNvSpPr/>
           <p:nvPr/>
         </p:nvSpPr>
         <p:spPr>
           <a:xfrm>
             <a:off x="502920" y="320040"/>
-            <a:ext cx="63000" cy="821880"/>
+            <a:ext cx="63000" cy="365760"/>
           </a:xfrm>
           <a:prstGeom prst="rect">
             <a:avLst/>
@@ -12252,7 +12042,7 @@
       </p:sp>
       <p:sp>
         <p:nvSpPr>
-          <p:cNvPr id="70" name="TextBox 2"/>
+          <p:cNvPr id="69" name="TextBox 2"/>
           <p:cNvSpPr/>
           <p:nvPr/>
         </p:nvSpPr>
@@ -12309,64 +12099,7 @@
       </p:sp>
       <p:sp>
         <p:nvSpPr>
-          <p:cNvPr id="71" name="TextBox 3"/>
-          <p:cNvSpPr/>
-          <p:nvPr/>
-        </p:nvSpPr>
-        <p:spPr>
-          <a:xfrm>
-            <a:off x="667440" y="841320"/>
-            <a:ext cx="11184840" cy="364680"/>
-          </a:xfrm>
-          <a:prstGeom prst="rect">
-            <a:avLst/>
-          </a:prstGeom>
-          <a:noFill/>
-          <a:ln w="0">
-            <a:noFill/>
-          </a:ln>
-        </p:spPr>
-        <p:style>
-          <a:lnRef idx="0"/>
-          <a:fillRef idx="0"/>
-          <a:effectRef idx="0"/>
-          <a:fontRef idx="minor"/>
-        </p:style>
-        <p:txBody>
-          <a:bodyPr lIns="90000" tIns="45000" rIns="90000" bIns="45000" anchor="t">
-            <a:spAutoFit/>
-          </a:bodyPr>
-          <a:p>
-            <a:pPr defTabSz="457200">
-              <a:lnSpc>
-                <a:spcPct val="100000"/>
-              </a:lnSpc>
-            </a:pPr>
-            <a:r>
-              <a:rPr lang="en-US" sz="1500" b="0" i="1" u="none" strike="noStrike">
-                <a:solidFill>
-                  <a:srgbClr val="60A5FA"/>
-                </a:solidFill>
-                <a:effectLst/>
-                <a:uFillTx/>
-                <a:latin typeface="Calibri"/>
-              </a:rPr>
-              <a:t>Board games don't scale to the real world</a:t>
-            </a:r>
-            <a:endParaRPr lang="en-US" sz="1500" b="0" u="none" strike="noStrike">
-              <a:solidFill>
-                <a:srgbClr val="FFFFFF"/>
-              </a:solidFill>
-              <a:effectLst/>
-              <a:uFillTx/>
-              <a:latin typeface="Arial"/>
-            </a:endParaRPr>
-          </a:p>
-        </p:txBody>
-      </p:sp>
-      <p:sp>
-        <p:nvSpPr>
-          <p:cNvPr id="72" name="TextBox 4"/>
+          <p:cNvPr id="70" name="TextBox 4"/>
           <p:cNvSpPr/>
           <p:nvPr/>
         </p:nvSpPr>
@@ -12423,7 +12156,7 @@
       </p:sp>
       <p:sp>
         <p:nvSpPr>
-          <p:cNvPr id="73" name="TextBox 5"/>
+          <p:cNvPr id="71" name="TextBox 5"/>
           <p:cNvSpPr/>
           <p:nvPr/>
         </p:nvSpPr>
@@ -12480,7 +12213,7 @@
       </p:sp>
       <p:sp>
         <p:nvSpPr>
-          <p:cNvPr id="74" name="TextBox 7"/>
+          <p:cNvPr id="72" name="TextBox 7"/>
           <p:cNvSpPr/>
           <p:nvPr/>
         </p:nvSpPr>
@@ -12537,7 +12270,7 @@
       </p:sp>
       <p:sp>
         <p:nvSpPr>
-          <p:cNvPr id="75" name="TextBox 8"/>
+          <p:cNvPr id="73" name="TextBox 8"/>
           <p:cNvSpPr/>
           <p:nvPr/>
         </p:nvSpPr>
@@ -12594,13 +12327,13 @@
       </p:sp>
       <p:sp>
         <p:nvSpPr>
-          <p:cNvPr id="76" name="Rectangle 9"/>
+          <p:cNvPr id="74" name="Rectangle 9"/>
           <p:cNvSpPr/>
           <p:nvPr/>
         </p:nvSpPr>
         <p:spPr>
           <a:xfrm>
-            <a:off x="502920" y="3065400"/>
+            <a:off x="457200" y="3914640"/>
             <a:ext cx="11184840" cy="657360"/>
           </a:xfrm>
           <a:prstGeom prst="rect">
@@ -12650,13 +12383,13 @@
       </p:sp>
       <p:sp>
         <p:nvSpPr>
-          <p:cNvPr id="77" name="TextBox 10"/>
+          <p:cNvPr id="75" name="TextBox 10"/>
           <p:cNvSpPr/>
           <p:nvPr/>
         </p:nvSpPr>
         <p:spPr>
           <a:xfrm>
-            <a:off x="685800" y="3111120"/>
+            <a:off x="640080" y="3960360"/>
             <a:ext cx="10819080" cy="547560"/>
           </a:xfrm>
           <a:prstGeom prst="rect">
@@ -12744,7 +12477,7 @@
       </p:grpSpPr>
       <p:sp>
         <p:nvSpPr>
-          <p:cNvPr id="78" name="Rectangle 1"/>
+          <p:cNvPr id="76" name="Rectangle 1"/>
           <p:cNvSpPr/>
           <p:nvPr/>
         </p:nvSpPr>
@@ -12800,7 +12533,7 @@
       </p:sp>
       <p:sp>
         <p:nvSpPr>
-          <p:cNvPr id="79" name="TextBox 2"/>
+          <p:cNvPr id="77" name="TextBox 2"/>
           <p:cNvSpPr/>
           <p:nvPr/>
         </p:nvSpPr>
@@ -12857,7 +12590,7 @@
       </p:sp>
       <p:sp>
         <p:nvSpPr>
-          <p:cNvPr id="80" name=""/>
+          <p:cNvPr id="78" name=""/>
           <p:cNvSpPr txBox="1"/>
           <p:nvPr/>
         </p:nvSpPr>
@@ -13197,7 +12930,7 @@
       </p:grpSpPr>
       <p:sp>
         <p:nvSpPr>
-          <p:cNvPr id="81" name="Rectangle 1"/>
+          <p:cNvPr id="79" name="Rectangle 1"/>
           <p:cNvSpPr/>
           <p:nvPr/>
         </p:nvSpPr>
@@ -13253,7 +12986,7 @@
       </p:sp>
       <p:sp>
         <p:nvSpPr>
-          <p:cNvPr id="82" name="TextBox 2"/>
+          <p:cNvPr id="80" name="TextBox 2"/>
           <p:cNvSpPr/>
           <p:nvPr/>
         </p:nvSpPr>
@@ -13310,7 +13043,7 @@
       </p:sp>
       <p:pic>
         <p:nvPicPr>
-          <p:cNvPr id="83" name=""/>
+          <p:cNvPr id="81" name=""/>
           <p:cNvPicPr/>
           <p:nvPr/>
         </p:nvPicPr>
@@ -13371,7 +13104,7 @@
       </p:grpSpPr>
       <p:sp>
         <p:nvSpPr>
-          <p:cNvPr id="84" name="Rectangle 1"/>
+          <p:cNvPr id="82" name="Rectangle 1"/>
           <p:cNvSpPr/>
           <p:nvPr/>
         </p:nvSpPr>
@@ -13427,7 +13160,7 @@
       </p:sp>
       <p:sp>
         <p:nvSpPr>
-          <p:cNvPr id="85" name="TextBox 2"/>
+          <p:cNvPr id="83" name="TextBox 2"/>
           <p:cNvSpPr/>
           <p:nvPr/>
         </p:nvSpPr>
@@ -13499,7 +13232,7 @@
       </p:sp>
       <p:sp>
         <p:nvSpPr>
-          <p:cNvPr id="86" name="Rectangle 4"/>
+          <p:cNvPr id="84" name="Rectangle 4"/>
           <p:cNvSpPr/>
           <p:nvPr/>
         </p:nvSpPr>
@@ -13555,7 +13288,7 @@
       </p:sp>
       <p:sp>
         <p:nvSpPr>
-          <p:cNvPr id="87" name="TextBox 5"/>
+          <p:cNvPr id="85" name="TextBox 5"/>
           <p:cNvSpPr/>
           <p:nvPr/>
         </p:nvSpPr>
@@ -13612,7 +13345,7 @@
       </p:sp>
       <p:graphicFrame>
         <p:nvGraphicFramePr>
-          <p:cNvPr id="88" name="Table 6"/>
+          <p:cNvPr id="86" name="Table 6"/>
           <p:cNvGraphicFramePr/>
           <p:nvPr/>
         </p:nvGraphicFramePr>
@@ -15000,7 +14733,7 @@
       </p:grpSpPr>
       <p:sp>
         <p:nvSpPr>
-          <p:cNvPr id="89" name="Rectangle 1"/>
+          <p:cNvPr id="87" name="Rectangle 1"/>
           <p:cNvSpPr/>
           <p:nvPr/>
         </p:nvSpPr>
@@ -15056,7 +14789,7 @@
       </p:sp>
       <p:sp>
         <p:nvSpPr>
-          <p:cNvPr id="90" name="TextBox 2"/>
+          <p:cNvPr id="88" name="TextBox 2"/>
           <p:cNvSpPr/>
           <p:nvPr/>
         </p:nvSpPr>
@@ -15113,7 +14846,7 @@
       </p:sp>
       <p:pic>
         <p:nvPicPr>
-          <p:cNvPr id="91" name=""/>
+          <p:cNvPr id="89" name=""/>
           <p:cNvPicPr/>
           <p:nvPr/>
         </p:nvPicPr>
@@ -15174,7 +14907,7 @@
       </p:grpSpPr>
       <p:sp>
         <p:nvSpPr>
-          <p:cNvPr id="92" name="Rectangle 1"/>
+          <p:cNvPr id="90" name="Rectangle 1"/>
           <p:cNvSpPr/>
           <p:nvPr/>
         </p:nvSpPr>
@@ -15230,7 +14963,7 @@
       </p:sp>
       <p:sp>
         <p:nvSpPr>
-          <p:cNvPr id="93" name="TextBox 2"/>
+          <p:cNvPr id="91" name="TextBox 2"/>
           <p:cNvSpPr/>
           <p:nvPr/>
         </p:nvSpPr>
@@ -15287,7 +15020,7 @@
       </p:sp>
       <p:sp>
         <p:nvSpPr>
-          <p:cNvPr id="94" name="TextBox 3"/>
+          <p:cNvPr id="92" name="TextBox 3"/>
           <p:cNvSpPr/>
           <p:nvPr/>
         </p:nvSpPr>
@@ -15329,18 +15062,7 @@
                 <a:uFillTx/>
                 <a:latin typeface="Calibri"/>
               </a:rPr>
-              <a:t>Sprint 1–2 complete — Lobby + Role </a:t>
-            </a:r>
-            <a:r>
-              <a:rPr lang="en-US" sz="1500" b="0" i="1" u="none" strike="noStrike">
-                <a:solidFill>
-                  <a:srgbClr val="60A5FA"/>
-                </a:solidFill>
-                <a:effectLst/>
-                <a:uFillTx/>
-                <a:latin typeface="Calibri"/>
-              </a:rPr>
-              <a:t>Assignment</a:t>
+              <a:t>Sprint 1–2 complete — Lobby + Role Assignment</a:t>
             </a:r>
             <a:endParaRPr lang="en-US" sz="1500" b="0" u="none" strike="noStrike">
               <a:solidFill>
@@ -15355,7 +15077,7 @@
       </p:sp>
       <p:graphicFrame>
         <p:nvGraphicFramePr>
-          <p:cNvPr id="95" name="Table 4"/>
+          <p:cNvPr id="93" name="Table 4"/>
           <p:cNvGraphicFramePr/>
           <p:nvPr/>
         </p:nvGraphicFramePr>
@@ -16694,7 +16416,7 @@
       </p:graphicFrame>
       <p:sp>
         <p:nvSpPr>
-          <p:cNvPr id="96" name="TextBox 5"/>
+          <p:cNvPr id="94" name="TextBox 5"/>
           <p:cNvSpPr/>
           <p:nvPr/>
         </p:nvSpPr>
@@ -16751,7 +16473,7 @@
       </p:sp>
       <p:sp>
         <p:nvSpPr>
-          <p:cNvPr id="97" name="TextBox 6"/>
+          <p:cNvPr id="95" name="TextBox 6"/>
           <p:cNvSpPr/>
           <p:nvPr/>
         </p:nvSpPr>
@@ -16845,7 +16567,7 @@
       </p:grpSpPr>
       <p:sp>
         <p:nvSpPr>
-          <p:cNvPr id="98" name="Rectangle 1"/>
+          <p:cNvPr id="96" name="Rectangle 1"/>
           <p:cNvSpPr/>
           <p:nvPr/>
         </p:nvSpPr>
@@ -16901,7 +16623,7 @@
       </p:sp>
       <p:sp>
         <p:nvSpPr>
-          <p:cNvPr id="99" name="TextBox 2"/>
+          <p:cNvPr id="97" name="TextBox 2"/>
           <p:cNvSpPr/>
           <p:nvPr/>
         </p:nvSpPr>
@@ -16958,7 +16680,7 @@
       </p:sp>
       <p:sp>
         <p:nvSpPr>
-          <p:cNvPr id="100" name="TextBox 3"/>
+          <p:cNvPr id="98" name="TextBox 3"/>
           <p:cNvSpPr/>
           <p:nvPr/>
         </p:nvSpPr>
@@ -17015,7 +16737,7 @@
       </p:sp>
       <p:sp>
         <p:nvSpPr>
-          <p:cNvPr id="101" name="Rectangle 4"/>
+          <p:cNvPr id="99" name="Rectangle 4"/>
           <p:cNvSpPr/>
           <p:nvPr/>
         </p:nvSpPr>
@@ -17071,7 +16793,7 @@
       </p:sp>
       <p:sp>
         <p:nvSpPr>
-          <p:cNvPr id="102" name="TextBox 5"/>
+          <p:cNvPr id="100" name="TextBox 5"/>
           <p:cNvSpPr/>
           <p:nvPr/>
         </p:nvSpPr>
@@ -17128,7 +16850,7 @@
       </p:sp>
       <p:sp>
         <p:nvSpPr>
-          <p:cNvPr id="103" name="TextBox 6"/>
+          <p:cNvPr id="101" name="TextBox 6"/>
           <p:cNvSpPr/>
           <p:nvPr/>
         </p:nvSpPr>
@@ -17185,7 +16907,7 @@
       </p:sp>
       <p:sp>
         <p:nvSpPr>
-          <p:cNvPr id="104" name="Rectangle 7"/>
+          <p:cNvPr id="102" name="Rectangle 7"/>
           <p:cNvSpPr/>
           <p:nvPr/>
         </p:nvSpPr>
@@ -17241,7 +16963,7 @@
       </p:sp>
       <p:sp>
         <p:nvSpPr>
-          <p:cNvPr id="105" name="TextBox 8"/>
+          <p:cNvPr id="103" name="TextBox 8"/>
           <p:cNvSpPr/>
           <p:nvPr/>
         </p:nvSpPr>
@@ -17298,7 +17020,7 @@
       </p:sp>
       <p:sp>
         <p:nvSpPr>
-          <p:cNvPr id="106" name="TextBox 9"/>
+          <p:cNvPr id="104" name="TextBox 9"/>
           <p:cNvSpPr/>
           <p:nvPr/>
         </p:nvSpPr>
@@ -17355,7 +17077,7 @@
       </p:sp>
       <p:sp>
         <p:nvSpPr>
-          <p:cNvPr id="107" name="Rectangle 10"/>
+          <p:cNvPr id="105" name="Rectangle 10"/>
           <p:cNvSpPr/>
           <p:nvPr/>
         </p:nvSpPr>
@@ -17411,7 +17133,7 @@
       </p:sp>
       <p:sp>
         <p:nvSpPr>
-          <p:cNvPr id="108" name="TextBox 11"/>
+          <p:cNvPr id="106" name="TextBox 11"/>
           <p:cNvSpPr/>
           <p:nvPr/>
         </p:nvSpPr>
@@ -17468,7 +17190,7 @@
       </p:sp>
       <p:sp>
         <p:nvSpPr>
-          <p:cNvPr id="109" name="TextBox 12"/>
+          <p:cNvPr id="107" name="TextBox 12"/>
           <p:cNvSpPr/>
           <p:nvPr/>
         </p:nvSpPr>
@@ -17525,7 +17247,7 @@
       </p:sp>
       <p:sp>
         <p:nvSpPr>
-          <p:cNvPr id="110" name="Rectangle 13"/>
+          <p:cNvPr id="108" name="Rectangle 13"/>
           <p:cNvSpPr/>
           <p:nvPr/>
         </p:nvSpPr>
@@ -17581,7 +17303,7 @@
       </p:sp>
       <p:sp>
         <p:nvSpPr>
-          <p:cNvPr id="111" name="TextBox 14"/>
+          <p:cNvPr id="109" name="TextBox 14"/>
           <p:cNvSpPr/>
           <p:nvPr/>
         </p:nvSpPr>
@@ -17638,7 +17360,7 @@
       </p:sp>
       <p:sp>
         <p:nvSpPr>
-          <p:cNvPr id="112" name="TextBox 15"/>
+          <p:cNvPr id="110" name="TextBox 15"/>
           <p:cNvSpPr/>
           <p:nvPr/>
         </p:nvSpPr>
@@ -17732,7 +17454,7 @@
       </p:grpSpPr>
       <p:sp>
         <p:nvSpPr>
-          <p:cNvPr id="113" name="Rectangle 1"/>
+          <p:cNvPr id="111" name="Rectangle 1"/>
           <p:cNvSpPr/>
           <p:nvPr/>
         </p:nvSpPr>
@@ -17788,7 +17510,7 @@
       </p:sp>
       <p:sp>
         <p:nvSpPr>
-          <p:cNvPr id="114" name="TextBox 2"/>
+          <p:cNvPr id="112" name="TextBox 2"/>
           <p:cNvSpPr/>
           <p:nvPr/>
         </p:nvSpPr>
@@ -17845,7 +17567,7 @@
       </p:sp>
       <p:sp>
         <p:nvSpPr>
-          <p:cNvPr id="115" name="TextBox 3"/>
+          <p:cNvPr id="113" name="TextBox 3"/>
           <p:cNvSpPr/>
           <p:nvPr/>
         </p:nvSpPr>
@@ -17902,7 +17624,7 @@
       </p:sp>
       <p:graphicFrame>
         <p:nvGraphicFramePr>
-          <p:cNvPr id="116" name="Table 4"/>
+          <p:cNvPr id="114" name="Table 4"/>
           <p:cNvGraphicFramePr/>
           <p:nvPr/>
         </p:nvGraphicFramePr>
@@ -19053,7 +18775,7 @@
       </p:graphicFrame>
       <p:sp>
         <p:nvSpPr>
-          <p:cNvPr id="117" name="TextBox 5"/>
+          <p:cNvPr id="115" name="TextBox 5"/>
           <p:cNvSpPr/>
           <p:nvPr/>
         </p:nvSpPr>
@@ -19095,18 +18817,7 @@
                 <a:uFillTx/>
                 <a:latin typeface="Calibri"/>
               </a:rPr>
-              <a:t>Philosophy:  Tests target specific invariants, not just </a:t>
-            </a:r>
-            <a:r>
-              <a:rPr lang="en-US" sz="1300" b="1" u="none" strike="noStrike">
-                <a:solidFill>
-                  <a:srgbClr val="60A5FA"/>
-                </a:solidFill>
-                <a:effectLst/>
-                <a:uFillTx/>
-                <a:latin typeface="Calibri"/>
-              </a:rPr>
-              <a:t>happy paths</a:t>
+              <a:t>Philosophy:  Tests target specific invariants, not just happy paths</a:t>
             </a:r>
             <a:endParaRPr lang="en-US" sz="1300" b="0" u="none" strike="noStrike">
               <a:solidFill>
@@ -19121,7 +18832,7 @@
       </p:sp>
       <p:sp>
         <p:nvSpPr>
-          <p:cNvPr id="118" name="TextBox 6"/>
+          <p:cNvPr id="116" name="TextBox 6"/>
           <p:cNvSpPr/>
           <p:nvPr/>
         </p:nvSpPr>
@@ -19211,7 +18922,7 @@
       </p:sp>
       <p:sp>
         <p:nvSpPr>
-          <p:cNvPr id="119" name="TextBox 7"/>
+          <p:cNvPr id="117" name="TextBox 7"/>
           <p:cNvSpPr/>
           <p:nvPr/>
         </p:nvSpPr>
@@ -19253,40 +18964,7 @@
                 <a:uFillTx/>
                 <a:latin typeface="Calibri"/>
               </a:rPr>
-              <a:t>eg. </a:t>
-            </a:r>
-            <a:r>
-              <a:rPr lang="en-US" sz="1300" b="0" u="none" strike="noStrike">
-                <a:solidFill>
-                  <a:srgbClr val="CBD5E1"/>
-                </a:solidFill>
-                <a:effectLst/>
-                <a:uFillTx/>
-                <a:latin typeface="Calibri"/>
-              </a:rPr>
-              <a:t>leaveGame_mrXLeaves_mrXRemoved</a:t>
-            </a:r>
-            <a:r>
-              <a:rPr lang="en-US" sz="1300" b="0" u="none" strike="noStrike">
-                <a:solidFill>
-                  <a:srgbClr val="CBD5E1"/>
-                </a:solidFill>
-                <a:effectLst/>
-                <a:uFillTx/>
-                <a:latin typeface="Calibri"/>
-              </a:rPr>
-              <a:t>FromPlayerList  — previous tests only </a:t>
-            </a:r>
-            <a:r>
-              <a:rPr lang="en-US" sz="1300" b="0" u="none" strike="noStrike">
-                <a:solidFill>
-                  <a:srgbClr val="CBD5E1"/>
-                </a:solidFill>
-                <a:effectLst/>
-                <a:uFillTx/>
-                <a:latin typeface="Calibri"/>
-              </a:rPr>
-              <a:t>checked phase, not player list</a:t>
+              <a:t>eg. leaveGame_mrXLeaves_mrXRemovedFromPlayerList  — previous tests only checked phase, not player list</a:t>
             </a:r>
             <a:endParaRPr lang="en-US" sz="1300" b="0" u="none" strike="noStrike">
               <a:solidFill>
@@ -19301,7 +18979,7 @@
       </p:sp>
       <p:sp>
         <p:nvSpPr>
-          <p:cNvPr id="120" name="TextBox 8"/>
+          <p:cNvPr id="118" name="TextBox 8"/>
           <p:cNvSpPr/>
           <p:nvPr/>
         </p:nvSpPr>
@@ -19343,7 +19021,7 @@
                 <a:uFillTx/>
                 <a:latin typeface="Calibri"/>
               </a:rPr>
-              <a:t>eg. joinGame_lowercaseCodeIsNormalized  — catches missing </a:t>
+              <a:t>eg. joinGame_lowercaseCodeIsNormalized  — catches </a:t>
             </a:r>
             <a:r>
               <a:rPr lang="en-US" sz="1300" b="0" u="none" strike="noStrike">
@@ -19354,7 +19032,7 @@
                 <a:uFillTx/>
                 <a:latin typeface="Calibri"/>
               </a:rPr>
-              <a:t>toUpperCase() in joinGame()</a:t>
+              <a:t>missing toUpperCase() in joinGame()</a:t>
             </a:r>
             <a:endParaRPr lang="en-US" sz="1300" b="0" u="none" strike="noStrike">
               <a:solidFill>
@@ -19369,7 +19047,7 @@
       </p:sp>
       <p:sp>
         <p:nvSpPr>
-          <p:cNvPr id="121" name="TextBox 9"/>
+          <p:cNvPr id="119" name="TextBox 9"/>
           <p:cNvSpPr/>
           <p:nvPr/>
         </p:nvSpPr>

--- a/documentation/presentation/presentation.pptx
+++ b/documentation/presentation/presentation.pptx
@@ -25,8 +25,8 @@
 </file>
 
 <file path=ppt/slideLayouts/slideLayout1.xml><?xml version="1.0" encoding="utf-8"?>
-<p:sldLayout xmlns:a="http://schemas.openxmlformats.org/drawingml/2006/main" xmlns:p="http://schemas.openxmlformats.org/presentationml/2006/main" xmlns:r="http://schemas.openxmlformats.org/officeDocument/2006/relationships" xmlns:p14="http://schemas.microsoft.com/office/powerpoint/2010/main" xmlns:p15="http://schemas.microsoft.com/office/powerpoint/2012/main" xmlns:mc="http://schemas.openxmlformats.org/markup-compatibility/2006" type="twoObj" preserve="1">
-  <p:cSld name="Two Content">
+<p:sldLayout xmlns:a="http://schemas.openxmlformats.org/drawingml/2006/main" xmlns:p="http://schemas.openxmlformats.org/presentationml/2006/main" xmlns:r="http://schemas.openxmlformats.org/officeDocument/2006/relationships" xmlns:p14="http://schemas.microsoft.com/office/powerpoint/2010/main" xmlns:p15="http://schemas.microsoft.com/office/powerpoint/2012/main" xmlns:mc="http://schemas.openxmlformats.org/markup-compatibility/2006" type="vertTitleAndTx" preserve="1">
+  <p:cSld name="Vertical Title and Text">
     <p:bg>
       <p:bgPr>
         <a:solidFill>
@@ -60,8 +60,8 @@
         </p:nvSpPr>
         <p:spPr>
           <a:xfrm>
-            <a:off x="457200" y="274680"/>
-            <a:ext cx="8228520" cy="1141920"/>
+            <a:off x="6629400" y="274680"/>
+            <a:ext cx="2055960" cy="5850000"/>
           </a:xfrm>
           <a:prstGeom prst="rect">
             <a:avLst/>
@@ -72,7 +72,7 @@
           </a:ln>
         </p:spPr>
         <p:txBody>
-          <a:bodyPr lIns="91440" tIns="45720" rIns="91440" bIns="45720" anchor="ctr">
+          <a:bodyPr lIns="91440" tIns="45720" rIns="91440" bIns="45720" anchor="ctr" vert="eaVert">
             <a:noAutofit/>
           </a:bodyPr>
           <a:lstStyle>
@@ -113,51 +113,7 @@
                 <a:uFillTx/>
                 <a:latin typeface="Calibri"/>
               </a:rPr>
-              <a:t>Click </a:t>
-            </a:r>
-            <a:r>
-              <a:rPr lang="en-US" sz="4400" b="0" u="none" strike="noStrike">
-                <a:solidFill>
-                  <a:schemeClr val="dk1"/>
-                </a:solidFill>
-                <a:effectLst/>
-                <a:uFillTx/>
-                <a:latin typeface="Calibri"/>
-              </a:rPr>
-              <a:t>to edit </a:t>
-            </a:r>
-            <a:r>
-              <a:rPr lang="en-US" sz="4400" b="0" u="none" strike="noStrike">
-                <a:solidFill>
-                  <a:schemeClr val="dk1"/>
-                </a:solidFill>
-                <a:effectLst/>
-                <a:uFillTx/>
-                <a:latin typeface="Calibri"/>
-              </a:rPr>
-              <a:t>Master </a:t>
-            </a:r>
-            <a:r>
-              <a:rPr lang="en-US" sz="4400" b="0" u="none" strike="noStrike">
-                <a:solidFill>
-                  <a:schemeClr val="dk1"/>
-                </a:solidFill>
-                <a:effectLst/>
-                <a:uFillTx/>
-                <a:latin typeface="Calibri"/>
-              </a:rPr>
-              <a:t>title </a:t>
-            </a:r>
-            <a:r>
-              <a:rPr lang="en-US" sz="4400" b="0" u="none" strike="noStrike">
-                <a:solidFill>
-                  <a:schemeClr val="dk1"/>
-                </a:solidFill>
-                <a:effectLst/>
-                <a:uFillTx/>
-                <a:latin typeface="Calibri"/>
-              </a:rPr>
-              <a:t>style</a:t>
+              <a:t>Click to edit Master title style</a:t>
             </a:r>
             <a:endParaRPr lang="en-US" sz="4400" b="0" u="none" strike="noStrike">
               <a:solidFill>
@@ -182,8 +138,8 @@
         </p:nvSpPr>
         <p:spPr>
           <a:xfrm>
-            <a:off x="457200" y="1600200"/>
-            <a:ext cx="4037400" cy="4524840"/>
+            <a:off x="457200" y="274680"/>
+            <a:ext cx="6018480" cy="5850000"/>
           </a:xfrm>
           <a:prstGeom prst="rect">
             <a:avLst/>
@@ -194,11 +150,32 @@
           </a:ln>
         </p:spPr>
         <p:txBody>
-          <a:bodyPr lIns="91440" tIns="45720" rIns="91440" bIns="45720" anchor="t">
+          <a:bodyPr lIns="91440" tIns="45720" rIns="91440" bIns="45720" anchor="t" vert="eaVert">
             <a:noAutofit/>
           </a:bodyPr>
           <a:lstStyle>
             <a:lvl1pPr algn="l" defTabSz="457200">
+              <a:lnSpc>
+                <a:spcPct val="100000"/>
+              </a:lnSpc>
+              <a:spcBef>
+                <a:spcPts val="641"/>
+              </a:spcBef>
+              <a:buClr>
+                <a:srgbClr val="000000"/>
+              </a:buClr>
+              <a:buFont typeface="Arial"/>
+              <a:buChar char="•"/>
+              <a:defRPr lang="en-US" sz="3200" b="0" u="none" strike="noStrike">
+                <a:solidFill>
+                  <a:schemeClr val="dk1"/>
+                </a:solidFill>
+                <a:effectLst/>
+                <a:uFillTx/>
+                <a:latin typeface="Calibri"/>
+              </a:defRPr>
+            </a:lvl1pPr>
+            <a:lvl2pPr lvl="1" algn="l" defTabSz="457200">
               <a:lnSpc>
                 <a:spcPct val="100000"/>
               </a:lnSpc>
@@ -209,7 +186,7 @@
                 <a:srgbClr val="000000"/>
               </a:buClr>
               <a:buFont typeface="Arial"/>
-              <a:buChar char="•"/>
+              <a:buChar char="–"/>
               <a:defRPr lang="en-US" sz="2800" b="0" u="none" strike="noStrike">
                 <a:solidFill>
                   <a:schemeClr val="dk1"/>
@@ -218,8 +195,8 @@
                 <a:uFillTx/>
                 <a:latin typeface="Calibri"/>
               </a:defRPr>
-            </a:lvl1pPr>
-            <a:lvl2pPr lvl="1" algn="l" defTabSz="457200">
+            </a:lvl2pPr>
+            <a:lvl3pPr lvl="2" algn="l" defTabSz="457200">
               <a:lnSpc>
                 <a:spcPct val="100000"/>
               </a:lnSpc>
@@ -230,7 +207,7 @@
                 <a:srgbClr val="000000"/>
               </a:buClr>
               <a:buFont typeface="Arial"/>
-              <a:buChar char="–"/>
+              <a:buChar char="•"/>
               <a:defRPr lang="en-US" sz="2400" b="0" u="none" strike="noStrike">
                 <a:solidFill>
                   <a:schemeClr val="dk1"/>
@@ -239,8 +216,8 @@
                 <a:uFillTx/>
                 <a:latin typeface="Calibri"/>
               </a:defRPr>
-            </a:lvl2pPr>
-            <a:lvl3pPr lvl="2" algn="l" defTabSz="457200">
+            </a:lvl3pPr>
+            <a:lvl4pPr lvl="3" algn="l" defTabSz="457200">
               <a:lnSpc>
                 <a:spcPct val="100000"/>
               </a:lnSpc>
@@ -251,29 +228,8 @@
                 <a:srgbClr val="000000"/>
               </a:buClr>
               <a:buFont typeface="Arial"/>
-              <a:buChar char="•"/>
+              <a:buChar char="–"/>
               <a:defRPr lang="en-US" sz="2000" b="0" u="none" strike="noStrike">
-                <a:solidFill>
-                  <a:schemeClr val="dk1"/>
-                </a:solidFill>
-                <a:effectLst/>
-                <a:uFillTx/>
-                <a:latin typeface="Calibri"/>
-              </a:defRPr>
-            </a:lvl3pPr>
-            <a:lvl4pPr lvl="3" algn="l" defTabSz="457200">
-              <a:lnSpc>
-                <a:spcPct val="100000"/>
-              </a:lnSpc>
-              <a:spcBef>
-                <a:spcPts val="360"/>
-              </a:spcBef>
-              <a:buClr>
-                <a:srgbClr val="000000"/>
-              </a:buClr>
-              <a:buFont typeface="Arial"/>
-              <a:buChar char="–"/>
-              <a:defRPr lang="en-US" sz="1800" b="0" u="none" strike="noStrike">
                 <a:solidFill>
                   <a:schemeClr val="dk1"/>
                 </a:solidFill>
@@ -287,14 +243,14 @@
                 <a:spcPct val="100000"/>
               </a:lnSpc>
               <a:spcBef>
-                <a:spcPts val="360"/>
+                <a:spcPts val="400"/>
               </a:spcBef>
               <a:buClr>
                 <a:srgbClr val="000000"/>
               </a:buClr>
               <a:buFont typeface="Arial"/>
               <a:buChar char="»"/>
-              <a:defRPr lang="en-US" sz="1800" b="0" u="none" strike="noStrike">
+              <a:defRPr lang="en-US" sz="2000" b="0" u="none" strike="noStrike">
                 <a:solidFill>
                   <a:schemeClr val="dk1"/>
                 </a:solidFill>
@@ -310,7 +266,7 @@
                 <a:spcPct val="100000"/>
               </a:lnSpc>
               <a:spcBef>
-                <a:spcPts val="561"/>
+                <a:spcPts val="641"/>
               </a:spcBef>
               <a:buClr>
                 <a:srgbClr val="000000"/>
@@ -319,7 +275,7 @@
               <a:buChar char="•"/>
             </a:pPr>
             <a:r>
-              <a:rPr lang="en-US" sz="2800" b="0" u="none" strike="noStrike">
+              <a:rPr lang="en-US" sz="3200" b="0" u="none" strike="noStrike">
                 <a:solidFill>
                   <a:schemeClr val="dk1"/>
                 </a:solidFill>
@@ -329,7 +285,7 @@
               </a:rPr>
               <a:t>Click to edit Master text styles</a:t>
             </a:r>
-            <a:endParaRPr lang="en-US" sz="2800" b="0" u="none" strike="noStrike">
+            <a:endParaRPr lang="en-US" sz="3200" b="0" u="none" strike="noStrike">
               <a:solidFill>
                 <a:schemeClr val="dk1"/>
               </a:solidFill>
@@ -344,7 +300,7 @@
                 <a:spcPct val="100000"/>
               </a:lnSpc>
               <a:spcBef>
-                <a:spcPts val="479"/>
+                <a:spcPts val="561"/>
               </a:spcBef>
               <a:buClr>
                 <a:srgbClr val="000000"/>
@@ -353,7 +309,7 @@
               <a:buChar char="–"/>
             </a:pPr>
             <a:r>
-              <a:rPr lang="en-US" sz="2400" b="0" u="none" strike="noStrike">
+              <a:rPr lang="en-US" sz="2800" b="0" u="none" strike="noStrike">
                 <a:solidFill>
                   <a:schemeClr val="dk1"/>
                 </a:solidFill>
@@ -363,7 +319,7 @@
               </a:rPr>
               <a:t>Second level</a:t>
             </a:r>
-            <a:endParaRPr lang="en-US" sz="2400" b="0" u="none" strike="noStrike">
+            <a:endParaRPr lang="en-US" sz="2800" b="0" u="none" strike="noStrike">
               <a:solidFill>
                 <a:schemeClr val="dk1"/>
               </a:solidFill>
@@ -378,7 +334,7 @@
                 <a:spcPct val="100000"/>
               </a:lnSpc>
               <a:spcBef>
-                <a:spcPts val="400"/>
+                <a:spcPts val="479"/>
               </a:spcBef>
               <a:buClr>
                 <a:srgbClr val="000000"/>
@@ -387,7 +343,7 @@
               <a:buChar char="•"/>
             </a:pPr>
             <a:r>
-              <a:rPr lang="en-US" sz="2000" b="0" u="none" strike="noStrike">
+              <a:rPr lang="en-US" sz="2400" b="0" u="none" strike="noStrike">
                 <a:solidFill>
                   <a:schemeClr val="dk1"/>
                 </a:solidFill>
@@ -397,7 +353,7 @@
               </a:rPr>
               <a:t>Third level</a:t>
             </a:r>
-            <a:endParaRPr lang="en-US" sz="2000" b="0" u="none" strike="noStrike">
+            <a:endParaRPr lang="en-US" sz="2400" b="0" u="none" strike="noStrike">
               <a:solidFill>
                 <a:schemeClr val="dk1"/>
               </a:solidFill>
@@ -412,7 +368,7 @@
                 <a:spcPct val="100000"/>
               </a:lnSpc>
               <a:spcBef>
-                <a:spcPts val="360"/>
+                <a:spcPts val="400"/>
               </a:spcBef>
               <a:buClr>
                 <a:srgbClr val="000000"/>
@@ -421,7 +377,7 @@
               <a:buChar char="–"/>
             </a:pPr>
             <a:r>
-              <a:rPr lang="en-US" sz="1800" b="0" u="none" strike="noStrike">
+              <a:rPr lang="en-US" sz="2000" b="0" u="none" strike="noStrike">
                 <a:solidFill>
                   <a:schemeClr val="dk1"/>
                 </a:solidFill>
@@ -431,7 +387,7 @@
               </a:rPr>
               <a:t>Fourth level</a:t>
             </a:r>
-            <a:endParaRPr lang="en-US" sz="1800" b="0" u="none" strike="noStrike">
+            <a:endParaRPr lang="en-US" sz="2000" b="0" u="none" strike="noStrike">
               <a:solidFill>
                 <a:schemeClr val="dk1"/>
               </a:solidFill>
@@ -446,7 +402,7 @@
                 <a:spcPct val="100000"/>
               </a:lnSpc>
               <a:spcBef>
-                <a:spcPts val="360"/>
+                <a:spcPts val="400"/>
               </a:spcBef>
               <a:buClr>
                 <a:srgbClr val="000000"/>
@@ -455,7 +411,7 @@
               <a:buChar char="»"/>
             </a:pPr>
             <a:r>
-              <a:rPr lang="en-US" sz="1800" b="0" u="none" strike="noStrike">
+              <a:rPr lang="en-US" sz="2000" b="0" u="none" strike="noStrike">
                 <a:solidFill>
                   <a:schemeClr val="dk1"/>
                 </a:solidFill>
@@ -465,7 +421,7 @@
               </a:rPr>
               <a:t>Fifth level</a:t>
             </a:r>
-            <a:endParaRPr lang="en-US" sz="1800" b="0" u="none" strike="noStrike">
+            <a:endParaRPr lang="en-US" sz="2000" b="0" u="none" strike="noStrike">
               <a:solidFill>
                 <a:schemeClr val="dk1"/>
               </a:solidFill>
@@ -479,312 +435,6 @@
       <p:sp>
         <p:nvSpPr>
           <p:cNvPr id="4" name="PlaceHolder 3"/>
-          <p:cNvSpPr>
-            <a:spLocks noGrp="1"/>
-          </p:cNvSpPr>
-          <p:nvPr>
-            <p:ph type="body"/>
-          </p:nvPr>
-        </p:nvSpPr>
-        <p:spPr>
-          <a:xfrm>
-            <a:off x="4648320" y="1600200"/>
-            <a:ext cx="4037400" cy="4524840"/>
-          </a:xfrm>
-          <a:prstGeom prst="rect">
-            <a:avLst/>
-          </a:prstGeom>
-          <a:noFill/>
-          <a:ln w="0">
-            <a:noFill/>
-          </a:ln>
-        </p:spPr>
-        <p:txBody>
-          <a:bodyPr lIns="91440" tIns="45720" rIns="91440" bIns="45720" anchor="t">
-            <a:noAutofit/>
-          </a:bodyPr>
-          <a:lstStyle>
-            <a:lvl1pPr algn="l" defTabSz="457200">
-              <a:lnSpc>
-                <a:spcPct val="100000"/>
-              </a:lnSpc>
-              <a:spcBef>
-                <a:spcPts val="561"/>
-              </a:spcBef>
-              <a:buClr>
-                <a:srgbClr val="000000"/>
-              </a:buClr>
-              <a:buFont typeface="Arial"/>
-              <a:buChar char="•"/>
-              <a:defRPr lang="en-US" sz="2800" b="0" u="none" strike="noStrike">
-                <a:solidFill>
-                  <a:schemeClr val="dk1"/>
-                </a:solidFill>
-                <a:effectLst/>
-                <a:uFillTx/>
-                <a:latin typeface="Calibri"/>
-              </a:defRPr>
-            </a:lvl1pPr>
-            <a:lvl2pPr lvl="1" algn="l" defTabSz="457200">
-              <a:lnSpc>
-                <a:spcPct val="100000"/>
-              </a:lnSpc>
-              <a:spcBef>
-                <a:spcPts val="479"/>
-              </a:spcBef>
-              <a:buClr>
-                <a:srgbClr val="000000"/>
-              </a:buClr>
-              <a:buFont typeface="Arial"/>
-              <a:buChar char="–"/>
-              <a:defRPr lang="en-US" sz="2400" b="0" u="none" strike="noStrike">
-                <a:solidFill>
-                  <a:schemeClr val="dk1"/>
-                </a:solidFill>
-                <a:effectLst/>
-                <a:uFillTx/>
-                <a:latin typeface="Calibri"/>
-              </a:defRPr>
-            </a:lvl2pPr>
-            <a:lvl3pPr lvl="2" algn="l" defTabSz="457200">
-              <a:lnSpc>
-                <a:spcPct val="100000"/>
-              </a:lnSpc>
-              <a:spcBef>
-                <a:spcPts val="400"/>
-              </a:spcBef>
-              <a:buClr>
-                <a:srgbClr val="000000"/>
-              </a:buClr>
-              <a:buFont typeface="Arial"/>
-              <a:buChar char="•"/>
-              <a:defRPr lang="en-US" sz="2000" b="0" u="none" strike="noStrike">
-                <a:solidFill>
-                  <a:schemeClr val="dk1"/>
-                </a:solidFill>
-                <a:effectLst/>
-                <a:uFillTx/>
-                <a:latin typeface="Calibri"/>
-              </a:defRPr>
-            </a:lvl3pPr>
-            <a:lvl4pPr lvl="3" algn="l" defTabSz="457200">
-              <a:lnSpc>
-                <a:spcPct val="100000"/>
-              </a:lnSpc>
-              <a:spcBef>
-                <a:spcPts val="360"/>
-              </a:spcBef>
-              <a:buClr>
-                <a:srgbClr val="000000"/>
-              </a:buClr>
-              <a:buFont typeface="Arial"/>
-              <a:buChar char="–"/>
-              <a:defRPr lang="en-US" sz="1800" b="0" u="none" strike="noStrike">
-                <a:solidFill>
-                  <a:schemeClr val="dk1"/>
-                </a:solidFill>
-                <a:effectLst/>
-                <a:uFillTx/>
-                <a:latin typeface="Calibri"/>
-              </a:defRPr>
-            </a:lvl4pPr>
-            <a:lvl5pPr lvl="4" algn="l" defTabSz="457200">
-              <a:lnSpc>
-                <a:spcPct val="100000"/>
-              </a:lnSpc>
-              <a:spcBef>
-                <a:spcPts val="360"/>
-              </a:spcBef>
-              <a:buClr>
-                <a:srgbClr val="000000"/>
-              </a:buClr>
-              <a:buFont typeface="Arial"/>
-              <a:buChar char="»"/>
-              <a:defRPr lang="en-US" sz="1800" b="0" u="none" strike="noStrike">
-                <a:solidFill>
-                  <a:schemeClr val="dk1"/>
-                </a:solidFill>
-                <a:effectLst/>
-                <a:uFillTx/>
-                <a:latin typeface="Calibri"/>
-              </a:defRPr>
-            </a:lvl5pPr>
-          </a:lstStyle>
-          <a:p>
-            <a:pPr marL="343080" indent="-343080" algn="l" defTabSz="457200">
-              <a:lnSpc>
-                <a:spcPct val="100000"/>
-              </a:lnSpc>
-              <a:spcBef>
-                <a:spcPts val="561"/>
-              </a:spcBef>
-              <a:buClr>
-                <a:srgbClr val="000000"/>
-              </a:buClr>
-              <a:buFont typeface="Arial"/>
-              <a:buChar char="•"/>
-            </a:pPr>
-            <a:r>
-              <a:rPr lang="en-US" sz="2800" b="0" u="none" strike="noStrike">
-                <a:solidFill>
-                  <a:schemeClr val="dk1"/>
-                </a:solidFill>
-                <a:effectLst/>
-                <a:uFillTx/>
-                <a:latin typeface="Calibri"/>
-              </a:rPr>
-              <a:t>Click to edit Master text styles</a:t>
-            </a:r>
-            <a:endParaRPr lang="en-US" sz="2800" b="0" u="none" strike="noStrike">
-              <a:solidFill>
-                <a:schemeClr val="dk1"/>
-              </a:solidFill>
-              <a:effectLst/>
-              <a:uFillTx/>
-              <a:latin typeface="Calibri"/>
-            </a:endParaRPr>
-          </a:p>
-          <a:p>
-            <a:pPr marL="743040" lvl="1" indent="-285840" algn="l" defTabSz="457200">
-              <a:lnSpc>
-                <a:spcPct val="100000"/>
-              </a:lnSpc>
-              <a:spcBef>
-                <a:spcPts val="479"/>
-              </a:spcBef>
-              <a:buClr>
-                <a:srgbClr val="000000"/>
-              </a:buClr>
-              <a:buFont typeface="Arial"/>
-              <a:buChar char="–"/>
-            </a:pPr>
-            <a:r>
-              <a:rPr lang="en-US" sz="2400" b="0" u="none" strike="noStrike">
-                <a:solidFill>
-                  <a:schemeClr val="dk1"/>
-                </a:solidFill>
-                <a:effectLst/>
-                <a:uFillTx/>
-                <a:latin typeface="Calibri"/>
-              </a:rPr>
-              <a:t>Second level</a:t>
-            </a:r>
-            <a:endParaRPr lang="en-US" sz="2400" b="0" u="none" strike="noStrike">
-              <a:solidFill>
-                <a:schemeClr val="dk1"/>
-              </a:solidFill>
-              <a:effectLst/>
-              <a:uFillTx/>
-              <a:latin typeface="Calibri"/>
-            </a:endParaRPr>
-          </a:p>
-          <a:p>
-            <a:pPr marL="1143000" lvl="2" indent="-228600" algn="l" defTabSz="457200">
-              <a:lnSpc>
-                <a:spcPct val="100000"/>
-              </a:lnSpc>
-              <a:spcBef>
-                <a:spcPts val="400"/>
-              </a:spcBef>
-              <a:buClr>
-                <a:srgbClr val="000000"/>
-              </a:buClr>
-              <a:buFont typeface="Arial"/>
-              <a:buChar char="•"/>
-            </a:pPr>
-            <a:r>
-              <a:rPr lang="en-US" sz="2000" b="0" u="none" strike="noStrike">
-                <a:solidFill>
-                  <a:schemeClr val="dk1"/>
-                </a:solidFill>
-                <a:effectLst/>
-                <a:uFillTx/>
-                <a:latin typeface="Calibri"/>
-              </a:rPr>
-              <a:t>Third level</a:t>
-            </a:r>
-            <a:endParaRPr lang="en-US" sz="2000" b="0" u="none" strike="noStrike">
-              <a:solidFill>
-                <a:schemeClr val="dk1"/>
-              </a:solidFill>
-              <a:effectLst/>
-              <a:uFillTx/>
-              <a:latin typeface="Calibri"/>
-            </a:endParaRPr>
-          </a:p>
-          <a:p>
-            <a:pPr marL="1600200" lvl="3" indent="-228600" algn="l" defTabSz="457200">
-              <a:lnSpc>
-                <a:spcPct val="100000"/>
-              </a:lnSpc>
-              <a:spcBef>
-                <a:spcPts val="360"/>
-              </a:spcBef>
-              <a:buClr>
-                <a:srgbClr val="000000"/>
-              </a:buClr>
-              <a:buFont typeface="Arial"/>
-              <a:buChar char="–"/>
-            </a:pPr>
-            <a:r>
-              <a:rPr lang="en-US" sz="1800" b="0" u="none" strike="noStrike">
-                <a:solidFill>
-                  <a:schemeClr val="dk1"/>
-                </a:solidFill>
-                <a:effectLst/>
-                <a:uFillTx/>
-                <a:latin typeface="Calibri"/>
-              </a:rPr>
-              <a:t>Fourth level</a:t>
-            </a:r>
-            <a:endParaRPr lang="en-US" sz="1800" b="0" u="none" strike="noStrike">
-              <a:solidFill>
-                <a:schemeClr val="dk1"/>
-              </a:solidFill>
-              <a:effectLst/>
-              <a:uFillTx/>
-              <a:latin typeface="Calibri"/>
-            </a:endParaRPr>
-          </a:p>
-          <a:p>
-            <a:pPr marL="2057400" lvl="4" indent="-228600" algn="l" defTabSz="457200">
-              <a:lnSpc>
-                <a:spcPct val="100000"/>
-              </a:lnSpc>
-              <a:spcBef>
-                <a:spcPts val="360"/>
-              </a:spcBef>
-              <a:buClr>
-                <a:srgbClr val="000000"/>
-              </a:buClr>
-              <a:buFont typeface="Arial"/>
-              <a:buChar char="»"/>
-            </a:pPr>
-            <a:r>
-              <a:rPr lang="en-US" sz="1800" b="0" u="none" strike="noStrike">
-                <a:solidFill>
-                  <a:schemeClr val="dk1"/>
-                </a:solidFill>
-                <a:effectLst/>
-                <a:uFillTx/>
-                <a:latin typeface="Calibri"/>
-              </a:rPr>
-              <a:t>Fifth level</a:t>
-            </a:r>
-            <a:endParaRPr lang="en-US" sz="1800" b="0" u="none" strike="noStrike">
-              <a:solidFill>
-                <a:schemeClr val="dk1"/>
-              </a:solidFill>
-              <a:effectLst/>
-              <a:uFillTx/>
-              <a:latin typeface="Calibri"/>
-            </a:endParaRPr>
-          </a:p>
-        </p:txBody>
-      </p:sp>
-      <p:sp>
-        <p:nvSpPr>
-          <p:cNvPr id="5" name="PlaceHolder 4"/>
           <p:cNvSpPr>
             <a:spLocks noGrp="1"/>
           </p:cNvSpPr>
@@ -795,7 +445,7 @@
         <p:spPr>
           <a:xfrm>
             <a:off x="457200" y="6356520"/>
-            <a:ext cx="2132640" cy="363960"/>
+            <a:ext cx="2132280" cy="363600"/>
           </a:xfrm>
           <a:prstGeom prst="rect">
             <a:avLst/>
@@ -866,7 +516,7 @@
       </p:sp>
       <p:sp>
         <p:nvSpPr>
-          <p:cNvPr id="6" name="PlaceHolder 5"/>
+          <p:cNvPr id="5" name="PlaceHolder 4"/>
           <p:cNvSpPr>
             <a:spLocks noGrp="1"/>
           </p:cNvSpPr>
@@ -877,7 +527,7 @@
         <p:spPr>
           <a:xfrm>
             <a:off x="3124080" y="6356520"/>
-            <a:ext cx="2894400" cy="363960"/>
+            <a:ext cx="2894040" cy="363600"/>
           </a:xfrm>
           <a:prstGeom prst="rect">
             <a:avLst/>
@@ -944,7 +594,7 @@
       </p:sp>
       <p:sp>
         <p:nvSpPr>
-          <p:cNvPr id="7" name="PlaceHolder 6"/>
+          <p:cNvPr id="6" name="PlaceHolder 5"/>
           <p:cNvSpPr>
             <a:spLocks noGrp="1"/>
           </p:cNvSpPr>
@@ -955,7 +605,7 @@
         <p:spPr>
           <a:xfrm>
             <a:off x="6553080" y="6356520"/>
-            <a:ext cx="2132640" cy="363960"/>
+            <a:ext cx="2132280" cy="363600"/>
           </a:xfrm>
           <a:prstGeom prst="rect">
             <a:avLst/>
@@ -1000,7 +650,7 @@
                 <a:tab pos="0" algn="l"/>
               </a:tabLst>
             </a:pPr>
-            <a:fld id="{29D302CD-D98C-42B7-808E-DE31D7DD9471}" type="slidenum">
+            <a:fld id="{02D08BC9-2C84-4811-B6A3-16181195172C}" type="slidenum">
               <a:rPr lang="en-US" sz="1200" b="0" u="none" strike="noStrike">
                 <a:solidFill>
                   <a:schemeClr val="dk1">
@@ -1030,8 +680,8 @@
 </file>
 
 <file path=ppt/slideLayouts/slideLayout10.xml><?xml version="1.0" encoding="utf-8"?>
-<p:sldLayout xmlns:a="http://schemas.openxmlformats.org/drawingml/2006/main" xmlns:p="http://schemas.openxmlformats.org/presentationml/2006/main" xmlns:r="http://schemas.openxmlformats.org/officeDocument/2006/relationships" xmlns:p14="http://schemas.microsoft.com/office/powerpoint/2010/main" xmlns:p15="http://schemas.microsoft.com/office/powerpoint/2012/main" xmlns:mc="http://schemas.openxmlformats.org/markup-compatibility/2006" type="obj" preserve="1">
-  <p:cSld name="Title and Content">
+<p:sldLayout xmlns:a="http://schemas.openxmlformats.org/drawingml/2006/main" xmlns:p="http://schemas.openxmlformats.org/presentationml/2006/main" xmlns:r="http://schemas.openxmlformats.org/officeDocument/2006/relationships" xmlns:p14="http://schemas.microsoft.com/office/powerpoint/2010/main" xmlns:p15="http://schemas.microsoft.com/office/powerpoint/2012/main" xmlns:mc="http://schemas.openxmlformats.org/markup-compatibility/2006" type="title" preserve="1">
+  <p:cSld name="Title Slide">
     <p:bg>
       <p:bgPr>
         <a:solidFill>
@@ -1055,7 +705,7 @@
       </p:grpSpPr>
       <p:sp>
         <p:nvSpPr>
-          <p:cNvPr id="51" name="PlaceHolder 1"/>
+          <p:cNvPr id="52" name="PlaceHolder 1"/>
           <p:cNvSpPr>
             <a:spLocks noGrp="1"/>
           </p:cNvSpPr>
@@ -1065,8 +715,8 @@
         </p:nvSpPr>
         <p:spPr>
           <a:xfrm>
-            <a:off x="457200" y="274680"/>
-            <a:ext cx="8228520" cy="1141920"/>
+            <a:off x="685800" y="2130480"/>
+            <a:ext cx="7770960" cy="1468440"/>
           </a:xfrm>
           <a:prstGeom prst="rect">
             <a:avLst/>
@@ -1133,313 +783,7 @@
       </p:sp>
       <p:sp>
         <p:nvSpPr>
-          <p:cNvPr id="52" name="PlaceHolder 2"/>
-          <p:cNvSpPr>
-            <a:spLocks noGrp="1"/>
-          </p:cNvSpPr>
-          <p:nvPr>
-            <p:ph type="body"/>
-          </p:nvPr>
-        </p:nvSpPr>
-        <p:spPr>
-          <a:xfrm>
-            <a:off x="457200" y="1600200"/>
-            <a:ext cx="8228520" cy="4524840"/>
-          </a:xfrm>
-          <a:prstGeom prst="rect">
-            <a:avLst/>
-          </a:prstGeom>
-          <a:noFill/>
-          <a:ln w="0">
-            <a:noFill/>
-          </a:ln>
-        </p:spPr>
-        <p:txBody>
-          <a:bodyPr lIns="91440" tIns="45720" rIns="91440" bIns="45720" anchor="t">
-            <a:noAutofit/>
-          </a:bodyPr>
-          <a:lstStyle>
-            <a:lvl1pPr algn="l" defTabSz="457200">
-              <a:lnSpc>
-                <a:spcPct val="100000"/>
-              </a:lnSpc>
-              <a:spcBef>
-                <a:spcPts val="641"/>
-              </a:spcBef>
-              <a:buClr>
-                <a:srgbClr val="000000"/>
-              </a:buClr>
-              <a:buFont typeface="Arial"/>
-              <a:buChar char="•"/>
-              <a:defRPr lang="en-US" sz="3200" b="0" u="none" strike="noStrike">
-                <a:solidFill>
-                  <a:schemeClr val="dk1"/>
-                </a:solidFill>
-                <a:effectLst/>
-                <a:uFillTx/>
-                <a:latin typeface="Calibri"/>
-              </a:defRPr>
-            </a:lvl1pPr>
-            <a:lvl2pPr lvl="1" algn="l" defTabSz="457200">
-              <a:lnSpc>
-                <a:spcPct val="100000"/>
-              </a:lnSpc>
-              <a:spcBef>
-                <a:spcPts val="561"/>
-              </a:spcBef>
-              <a:buClr>
-                <a:srgbClr val="000000"/>
-              </a:buClr>
-              <a:buFont typeface="Arial"/>
-              <a:buChar char="–"/>
-              <a:defRPr lang="en-US" sz="2800" b="0" u="none" strike="noStrike">
-                <a:solidFill>
-                  <a:schemeClr val="dk1"/>
-                </a:solidFill>
-                <a:effectLst/>
-                <a:uFillTx/>
-                <a:latin typeface="Calibri"/>
-              </a:defRPr>
-            </a:lvl2pPr>
-            <a:lvl3pPr lvl="2" algn="l" defTabSz="457200">
-              <a:lnSpc>
-                <a:spcPct val="100000"/>
-              </a:lnSpc>
-              <a:spcBef>
-                <a:spcPts val="479"/>
-              </a:spcBef>
-              <a:buClr>
-                <a:srgbClr val="000000"/>
-              </a:buClr>
-              <a:buFont typeface="Arial"/>
-              <a:buChar char="•"/>
-              <a:defRPr lang="en-US" sz="2400" b="0" u="none" strike="noStrike">
-                <a:solidFill>
-                  <a:schemeClr val="dk1"/>
-                </a:solidFill>
-                <a:effectLst/>
-                <a:uFillTx/>
-                <a:latin typeface="Calibri"/>
-              </a:defRPr>
-            </a:lvl3pPr>
-            <a:lvl4pPr lvl="3" algn="l" defTabSz="457200">
-              <a:lnSpc>
-                <a:spcPct val="100000"/>
-              </a:lnSpc>
-              <a:spcBef>
-                <a:spcPts val="400"/>
-              </a:spcBef>
-              <a:buClr>
-                <a:srgbClr val="000000"/>
-              </a:buClr>
-              <a:buFont typeface="Arial"/>
-              <a:buChar char="–"/>
-              <a:defRPr lang="en-US" sz="2000" b="0" u="none" strike="noStrike">
-                <a:solidFill>
-                  <a:schemeClr val="dk1"/>
-                </a:solidFill>
-                <a:effectLst/>
-                <a:uFillTx/>
-                <a:latin typeface="Calibri"/>
-              </a:defRPr>
-            </a:lvl4pPr>
-            <a:lvl5pPr lvl="4" algn="l" defTabSz="457200">
-              <a:lnSpc>
-                <a:spcPct val="100000"/>
-              </a:lnSpc>
-              <a:spcBef>
-                <a:spcPts val="400"/>
-              </a:spcBef>
-              <a:buClr>
-                <a:srgbClr val="000000"/>
-              </a:buClr>
-              <a:buFont typeface="Arial"/>
-              <a:buChar char="»"/>
-              <a:defRPr lang="en-US" sz="2000" b="0" u="none" strike="noStrike">
-                <a:solidFill>
-                  <a:schemeClr val="dk1"/>
-                </a:solidFill>
-                <a:effectLst/>
-                <a:uFillTx/>
-                <a:latin typeface="Calibri"/>
-              </a:defRPr>
-            </a:lvl5pPr>
-          </a:lstStyle>
-          <a:p>
-            <a:pPr marL="343080" indent="-343080" algn="l" defTabSz="457200">
-              <a:lnSpc>
-                <a:spcPct val="100000"/>
-              </a:lnSpc>
-              <a:spcBef>
-                <a:spcPts val="641"/>
-              </a:spcBef>
-              <a:buClr>
-                <a:srgbClr val="000000"/>
-              </a:buClr>
-              <a:buFont typeface="Arial"/>
-              <a:buChar char="•"/>
-            </a:pPr>
-            <a:r>
-              <a:rPr lang="en-US" sz="3200" b="0" u="none" strike="noStrike">
-                <a:solidFill>
-                  <a:schemeClr val="dk1"/>
-                </a:solidFill>
-                <a:effectLst/>
-                <a:uFillTx/>
-                <a:latin typeface="Calibri"/>
-              </a:rPr>
-              <a:t>Click to edit Master text styles</a:t>
-            </a:r>
-            <a:endParaRPr lang="en-US" sz="3200" b="0" u="none" strike="noStrike">
-              <a:solidFill>
-                <a:schemeClr val="dk1"/>
-              </a:solidFill>
-              <a:effectLst/>
-              <a:uFillTx/>
-              <a:latin typeface="Calibri"/>
-            </a:endParaRPr>
-          </a:p>
-          <a:p>
-            <a:pPr marL="743040" lvl="1" indent="-285840" algn="l" defTabSz="457200">
-              <a:lnSpc>
-                <a:spcPct val="100000"/>
-              </a:lnSpc>
-              <a:spcBef>
-                <a:spcPts val="561"/>
-              </a:spcBef>
-              <a:buClr>
-                <a:srgbClr val="000000"/>
-              </a:buClr>
-              <a:buFont typeface="Arial"/>
-              <a:buChar char="–"/>
-            </a:pPr>
-            <a:r>
-              <a:rPr lang="en-US" sz="2800" b="0" u="none" strike="noStrike">
-                <a:solidFill>
-                  <a:schemeClr val="dk1"/>
-                </a:solidFill>
-                <a:effectLst/>
-                <a:uFillTx/>
-                <a:latin typeface="Calibri"/>
-              </a:rPr>
-              <a:t>Second level</a:t>
-            </a:r>
-            <a:endParaRPr lang="en-US" sz="2800" b="0" u="none" strike="noStrike">
-              <a:solidFill>
-                <a:schemeClr val="dk1"/>
-              </a:solidFill>
-              <a:effectLst/>
-              <a:uFillTx/>
-              <a:latin typeface="Calibri"/>
-            </a:endParaRPr>
-          </a:p>
-          <a:p>
-            <a:pPr marL="1143000" lvl="2" indent="-228600" algn="l" defTabSz="457200">
-              <a:lnSpc>
-                <a:spcPct val="100000"/>
-              </a:lnSpc>
-              <a:spcBef>
-                <a:spcPts val="479"/>
-              </a:spcBef>
-              <a:buClr>
-                <a:srgbClr val="000000"/>
-              </a:buClr>
-              <a:buFont typeface="Arial"/>
-              <a:buChar char="•"/>
-            </a:pPr>
-            <a:r>
-              <a:rPr lang="en-US" sz="2400" b="0" u="none" strike="noStrike">
-                <a:solidFill>
-                  <a:schemeClr val="dk1"/>
-                </a:solidFill>
-                <a:effectLst/>
-                <a:uFillTx/>
-                <a:latin typeface="Calibri"/>
-              </a:rPr>
-              <a:t>Third level</a:t>
-            </a:r>
-            <a:endParaRPr lang="en-US" sz="2400" b="0" u="none" strike="noStrike">
-              <a:solidFill>
-                <a:schemeClr val="dk1"/>
-              </a:solidFill>
-              <a:effectLst/>
-              <a:uFillTx/>
-              <a:latin typeface="Calibri"/>
-            </a:endParaRPr>
-          </a:p>
-          <a:p>
-            <a:pPr marL="1600200" lvl="3" indent="-228600" algn="l" defTabSz="457200">
-              <a:lnSpc>
-                <a:spcPct val="100000"/>
-              </a:lnSpc>
-              <a:spcBef>
-                <a:spcPts val="400"/>
-              </a:spcBef>
-              <a:buClr>
-                <a:srgbClr val="000000"/>
-              </a:buClr>
-              <a:buFont typeface="Arial"/>
-              <a:buChar char="–"/>
-            </a:pPr>
-            <a:r>
-              <a:rPr lang="en-US" sz="2000" b="0" u="none" strike="noStrike">
-                <a:solidFill>
-                  <a:schemeClr val="dk1"/>
-                </a:solidFill>
-                <a:effectLst/>
-                <a:uFillTx/>
-                <a:latin typeface="Calibri"/>
-              </a:rPr>
-              <a:t>Fourth level</a:t>
-            </a:r>
-            <a:endParaRPr lang="en-US" sz="2000" b="0" u="none" strike="noStrike">
-              <a:solidFill>
-                <a:schemeClr val="dk1"/>
-              </a:solidFill>
-              <a:effectLst/>
-              <a:uFillTx/>
-              <a:latin typeface="Calibri"/>
-            </a:endParaRPr>
-          </a:p>
-          <a:p>
-            <a:pPr marL="2057400" lvl="4" indent="-228600" algn="l" defTabSz="457200">
-              <a:lnSpc>
-                <a:spcPct val="100000"/>
-              </a:lnSpc>
-              <a:spcBef>
-                <a:spcPts val="400"/>
-              </a:spcBef>
-              <a:buClr>
-                <a:srgbClr val="000000"/>
-              </a:buClr>
-              <a:buFont typeface="Arial"/>
-              <a:buChar char="»"/>
-            </a:pPr>
-            <a:r>
-              <a:rPr lang="en-US" sz="2000" b="0" u="none" strike="noStrike">
-                <a:solidFill>
-                  <a:schemeClr val="dk1"/>
-                </a:solidFill>
-                <a:effectLst/>
-                <a:uFillTx/>
-                <a:latin typeface="Calibri"/>
-              </a:rPr>
-              <a:t>Fifth level</a:t>
-            </a:r>
-            <a:endParaRPr lang="en-US" sz="2000" b="0" u="none" strike="noStrike">
-              <a:solidFill>
-                <a:schemeClr val="dk1"/>
-              </a:solidFill>
-              <a:effectLst/>
-              <a:uFillTx/>
-              <a:latin typeface="Calibri"/>
-            </a:endParaRPr>
-          </a:p>
-        </p:txBody>
-      </p:sp>
-      <p:sp>
-        <p:nvSpPr>
-          <p:cNvPr id="53" name="PlaceHolder 3"/>
+          <p:cNvPr id="53" name="PlaceHolder 2"/>
           <p:cNvSpPr>
             <a:spLocks noGrp="1"/>
           </p:cNvSpPr>
@@ -1450,7 +794,7 @@
         <p:spPr>
           <a:xfrm>
             <a:off x="457200" y="6356520"/>
-            <a:ext cx="2132640" cy="363960"/>
+            <a:ext cx="2132280" cy="363600"/>
           </a:xfrm>
           <a:prstGeom prst="rect">
             <a:avLst/>
@@ -1521,7 +865,7 @@
       </p:sp>
       <p:sp>
         <p:nvSpPr>
-          <p:cNvPr id="54" name="PlaceHolder 4"/>
+          <p:cNvPr id="54" name="PlaceHolder 3"/>
           <p:cNvSpPr>
             <a:spLocks noGrp="1"/>
           </p:cNvSpPr>
@@ -1532,7 +876,7 @@
         <p:spPr>
           <a:xfrm>
             <a:off x="3124080" y="6356520"/>
-            <a:ext cx="2894400" cy="363960"/>
+            <a:ext cx="2894040" cy="363600"/>
           </a:xfrm>
           <a:prstGeom prst="rect">
             <a:avLst/>
@@ -1599,7 +943,7 @@
       </p:sp>
       <p:sp>
         <p:nvSpPr>
-          <p:cNvPr id="55" name="PlaceHolder 5"/>
+          <p:cNvPr id="55" name="PlaceHolder 4"/>
           <p:cNvSpPr>
             <a:spLocks noGrp="1"/>
           </p:cNvSpPr>
@@ -1610,7 +954,7 @@
         <p:spPr>
           <a:xfrm>
             <a:off x="6553080" y="6356520"/>
-            <a:ext cx="2132640" cy="363960"/>
+            <a:ext cx="2132280" cy="363600"/>
           </a:xfrm>
           <a:prstGeom prst="rect">
             <a:avLst/>
@@ -1655,7 +999,7 @@
                 <a:tab pos="0" algn="l"/>
               </a:tabLst>
             </a:pPr>
-            <a:fld id="{A73B8F69-5CB0-49D2-872C-64239F8D7CB9}" type="slidenum">
+            <a:fld id="{B0A84340-2033-4271-B818-1903C28E3372}" type="slidenum">
               <a:rPr lang="en-US" sz="1200" b="0" u="none" strike="noStrike">
                 <a:solidFill>
                   <a:schemeClr val="dk1">
@@ -1685,8 +1029,8 @@
 </file>
 
 <file path=ppt/slideLayouts/slideLayout11.xml><?xml version="1.0" encoding="utf-8"?>
-<p:sldLayout xmlns:a="http://schemas.openxmlformats.org/drawingml/2006/main" xmlns:p="http://schemas.openxmlformats.org/presentationml/2006/main" xmlns:r="http://schemas.openxmlformats.org/officeDocument/2006/relationships" xmlns:p14="http://schemas.microsoft.com/office/powerpoint/2010/main" xmlns:p15="http://schemas.microsoft.com/office/powerpoint/2012/main" xmlns:mc="http://schemas.openxmlformats.org/markup-compatibility/2006" type="blank" preserve="1">
-  <p:cSld name="Section Header">
+<p:sldLayout xmlns:a="http://schemas.openxmlformats.org/drawingml/2006/main" xmlns:p="http://schemas.openxmlformats.org/presentationml/2006/main" xmlns:r="http://schemas.openxmlformats.org/officeDocument/2006/relationships" xmlns:p14="http://schemas.microsoft.com/office/powerpoint/2010/main" xmlns:p15="http://schemas.microsoft.com/office/powerpoint/2012/main" xmlns:mc="http://schemas.openxmlformats.org/markup-compatibility/2006" type="vertTx" preserve="1">
+  <p:cSld name="Title and Vertical Text">
     <p:bg>
       <p:bgPr>
         <a:solidFill>
@@ -1720,8 +1064,1318 @@
         </p:nvSpPr>
         <p:spPr>
           <a:xfrm>
+            <a:off x="457200" y="274680"/>
+            <a:ext cx="8228160" cy="1141560"/>
+          </a:xfrm>
+          <a:prstGeom prst="rect">
+            <a:avLst/>
+          </a:prstGeom>
+          <a:noFill/>
+          <a:ln w="0">
+            <a:noFill/>
+          </a:ln>
+        </p:spPr>
+        <p:txBody>
+          <a:bodyPr lIns="91440" tIns="45720" rIns="91440" bIns="45720" anchor="ctr">
+            <a:noAutofit/>
+          </a:bodyPr>
+          <a:lstStyle>
+            <a:lvl1pPr indent="0" algn="ctr" defTabSz="457200">
+              <a:lnSpc>
+                <a:spcPct val="100000"/>
+              </a:lnSpc>
+              <a:buNone/>
+              <a:tabLst>
+                <a:tab pos="0" algn="l"/>
+              </a:tabLst>
+              <a:defRPr lang="en-US" sz="4400" b="0" u="none" strike="noStrike">
+                <a:solidFill>
+                  <a:schemeClr val="dk1"/>
+                </a:solidFill>
+                <a:effectLst/>
+                <a:uFillTx/>
+                <a:latin typeface="Calibri"/>
+              </a:defRPr>
+            </a:lvl1pPr>
+          </a:lstStyle>
+          <a:p>
+            <a:pPr indent="0" algn="ctr" defTabSz="457200">
+              <a:lnSpc>
+                <a:spcPct val="100000"/>
+              </a:lnSpc>
+              <a:buNone/>
+              <a:tabLst>
+                <a:tab pos="0" algn="l"/>
+              </a:tabLst>
+            </a:pPr>
+            <a:r>
+              <a:rPr lang="en-US" sz="4400" b="0" u="none" strike="noStrike">
+                <a:solidFill>
+                  <a:schemeClr val="dk1"/>
+                </a:solidFill>
+                <a:effectLst/>
+                <a:uFillTx/>
+                <a:latin typeface="Calibri"/>
+              </a:rPr>
+              <a:t>Click to edit Master title style</a:t>
+            </a:r>
+            <a:endParaRPr lang="en-US" sz="4400" b="0" u="none" strike="noStrike">
+              <a:solidFill>
+                <a:schemeClr val="dk1"/>
+              </a:solidFill>
+              <a:effectLst/>
+              <a:uFillTx/>
+              <a:latin typeface="Calibri"/>
+            </a:endParaRPr>
+          </a:p>
+        </p:txBody>
+      </p:sp>
+      <p:sp>
+        <p:nvSpPr>
+          <p:cNvPr id="57" name="PlaceHolder 2"/>
+          <p:cNvSpPr>
+            <a:spLocks noGrp="1"/>
+          </p:cNvSpPr>
+          <p:nvPr>
+            <p:ph type="body"/>
+          </p:nvPr>
+        </p:nvSpPr>
+        <p:spPr>
+          <a:xfrm>
+            <a:off x="457200" y="1600200"/>
+            <a:ext cx="8228160" cy="4524480"/>
+          </a:xfrm>
+          <a:prstGeom prst="rect">
+            <a:avLst/>
+          </a:prstGeom>
+          <a:noFill/>
+          <a:ln w="0">
+            <a:noFill/>
+          </a:ln>
+        </p:spPr>
+        <p:txBody>
+          <a:bodyPr lIns="91440" tIns="45720" rIns="91440" bIns="45720" anchor="t" vert="eaVert">
+            <a:noAutofit/>
+          </a:bodyPr>
+          <a:lstStyle>
+            <a:lvl1pPr algn="l" defTabSz="457200">
+              <a:lnSpc>
+                <a:spcPct val="100000"/>
+              </a:lnSpc>
+              <a:spcBef>
+                <a:spcPts val="641"/>
+              </a:spcBef>
+              <a:buClr>
+                <a:srgbClr val="000000"/>
+              </a:buClr>
+              <a:buFont typeface="Arial"/>
+              <a:buChar char="•"/>
+              <a:defRPr lang="en-US" sz="3200" b="0" u="none" strike="noStrike">
+                <a:solidFill>
+                  <a:schemeClr val="dk1"/>
+                </a:solidFill>
+                <a:effectLst/>
+                <a:uFillTx/>
+                <a:latin typeface="Calibri"/>
+              </a:defRPr>
+            </a:lvl1pPr>
+            <a:lvl2pPr lvl="1" algn="l" defTabSz="457200">
+              <a:lnSpc>
+                <a:spcPct val="100000"/>
+              </a:lnSpc>
+              <a:spcBef>
+                <a:spcPts val="561"/>
+              </a:spcBef>
+              <a:buClr>
+                <a:srgbClr val="000000"/>
+              </a:buClr>
+              <a:buFont typeface="Arial"/>
+              <a:buChar char="–"/>
+              <a:defRPr lang="en-US" sz="2800" b="0" u="none" strike="noStrike">
+                <a:solidFill>
+                  <a:schemeClr val="dk1"/>
+                </a:solidFill>
+                <a:effectLst/>
+                <a:uFillTx/>
+                <a:latin typeface="Calibri"/>
+              </a:defRPr>
+            </a:lvl2pPr>
+            <a:lvl3pPr lvl="2" algn="l" defTabSz="457200">
+              <a:lnSpc>
+                <a:spcPct val="100000"/>
+              </a:lnSpc>
+              <a:spcBef>
+                <a:spcPts val="479"/>
+              </a:spcBef>
+              <a:buClr>
+                <a:srgbClr val="000000"/>
+              </a:buClr>
+              <a:buFont typeface="Arial"/>
+              <a:buChar char="•"/>
+              <a:defRPr lang="en-US" sz="2400" b="0" u="none" strike="noStrike">
+                <a:solidFill>
+                  <a:schemeClr val="dk1"/>
+                </a:solidFill>
+                <a:effectLst/>
+                <a:uFillTx/>
+                <a:latin typeface="Calibri"/>
+              </a:defRPr>
+            </a:lvl3pPr>
+            <a:lvl4pPr lvl="3" algn="l" defTabSz="457200">
+              <a:lnSpc>
+                <a:spcPct val="100000"/>
+              </a:lnSpc>
+              <a:spcBef>
+                <a:spcPts val="400"/>
+              </a:spcBef>
+              <a:buClr>
+                <a:srgbClr val="000000"/>
+              </a:buClr>
+              <a:buFont typeface="Arial"/>
+              <a:buChar char="–"/>
+              <a:defRPr lang="en-US" sz="2000" b="0" u="none" strike="noStrike">
+                <a:solidFill>
+                  <a:schemeClr val="dk1"/>
+                </a:solidFill>
+                <a:effectLst/>
+                <a:uFillTx/>
+                <a:latin typeface="Calibri"/>
+              </a:defRPr>
+            </a:lvl4pPr>
+            <a:lvl5pPr lvl="4" algn="l" defTabSz="457200">
+              <a:lnSpc>
+                <a:spcPct val="100000"/>
+              </a:lnSpc>
+              <a:spcBef>
+                <a:spcPts val="400"/>
+              </a:spcBef>
+              <a:buClr>
+                <a:srgbClr val="000000"/>
+              </a:buClr>
+              <a:buFont typeface="Arial"/>
+              <a:buChar char="»"/>
+              <a:defRPr lang="en-US" sz="2000" b="0" u="none" strike="noStrike">
+                <a:solidFill>
+                  <a:schemeClr val="dk1"/>
+                </a:solidFill>
+                <a:effectLst/>
+                <a:uFillTx/>
+                <a:latin typeface="Calibri"/>
+              </a:defRPr>
+            </a:lvl5pPr>
+          </a:lstStyle>
+          <a:p>
+            <a:pPr marL="343080" indent="-343080" algn="l" defTabSz="457200">
+              <a:lnSpc>
+                <a:spcPct val="100000"/>
+              </a:lnSpc>
+              <a:spcBef>
+                <a:spcPts val="641"/>
+              </a:spcBef>
+              <a:buClr>
+                <a:srgbClr val="000000"/>
+              </a:buClr>
+              <a:buFont typeface="Arial"/>
+              <a:buChar char="•"/>
+            </a:pPr>
+            <a:r>
+              <a:rPr lang="en-US" sz="3200" b="0" u="none" strike="noStrike">
+                <a:solidFill>
+                  <a:schemeClr val="dk1"/>
+                </a:solidFill>
+                <a:effectLst/>
+                <a:uFillTx/>
+                <a:latin typeface="Calibri"/>
+              </a:rPr>
+              <a:t>Click to edit Master text styles</a:t>
+            </a:r>
+            <a:endParaRPr lang="en-US" sz="3200" b="0" u="none" strike="noStrike">
+              <a:solidFill>
+                <a:schemeClr val="dk1"/>
+              </a:solidFill>
+              <a:effectLst/>
+              <a:uFillTx/>
+              <a:latin typeface="Calibri"/>
+            </a:endParaRPr>
+          </a:p>
+          <a:p>
+            <a:pPr marL="743040" lvl="1" indent="-285840" algn="l" defTabSz="457200">
+              <a:lnSpc>
+                <a:spcPct val="100000"/>
+              </a:lnSpc>
+              <a:spcBef>
+                <a:spcPts val="561"/>
+              </a:spcBef>
+              <a:buClr>
+                <a:srgbClr val="000000"/>
+              </a:buClr>
+              <a:buFont typeface="Arial"/>
+              <a:buChar char="–"/>
+            </a:pPr>
+            <a:r>
+              <a:rPr lang="en-US" sz="2800" b="0" u="none" strike="noStrike">
+                <a:solidFill>
+                  <a:schemeClr val="dk1"/>
+                </a:solidFill>
+                <a:effectLst/>
+                <a:uFillTx/>
+                <a:latin typeface="Calibri"/>
+              </a:rPr>
+              <a:t>Second level</a:t>
+            </a:r>
+            <a:endParaRPr lang="en-US" sz="2800" b="0" u="none" strike="noStrike">
+              <a:solidFill>
+                <a:schemeClr val="dk1"/>
+              </a:solidFill>
+              <a:effectLst/>
+              <a:uFillTx/>
+              <a:latin typeface="Calibri"/>
+            </a:endParaRPr>
+          </a:p>
+          <a:p>
+            <a:pPr marL="1143000" lvl="2" indent="-228600" algn="l" defTabSz="457200">
+              <a:lnSpc>
+                <a:spcPct val="100000"/>
+              </a:lnSpc>
+              <a:spcBef>
+                <a:spcPts val="479"/>
+              </a:spcBef>
+              <a:buClr>
+                <a:srgbClr val="000000"/>
+              </a:buClr>
+              <a:buFont typeface="Arial"/>
+              <a:buChar char="•"/>
+            </a:pPr>
+            <a:r>
+              <a:rPr lang="en-US" sz="2400" b="0" u="none" strike="noStrike">
+                <a:solidFill>
+                  <a:schemeClr val="dk1"/>
+                </a:solidFill>
+                <a:effectLst/>
+                <a:uFillTx/>
+                <a:latin typeface="Calibri"/>
+              </a:rPr>
+              <a:t>Third level</a:t>
+            </a:r>
+            <a:endParaRPr lang="en-US" sz="2400" b="0" u="none" strike="noStrike">
+              <a:solidFill>
+                <a:schemeClr val="dk1"/>
+              </a:solidFill>
+              <a:effectLst/>
+              <a:uFillTx/>
+              <a:latin typeface="Calibri"/>
+            </a:endParaRPr>
+          </a:p>
+          <a:p>
+            <a:pPr marL="1600200" lvl="3" indent="-228600" algn="l" defTabSz="457200">
+              <a:lnSpc>
+                <a:spcPct val="100000"/>
+              </a:lnSpc>
+              <a:spcBef>
+                <a:spcPts val="400"/>
+              </a:spcBef>
+              <a:buClr>
+                <a:srgbClr val="000000"/>
+              </a:buClr>
+              <a:buFont typeface="Arial"/>
+              <a:buChar char="–"/>
+            </a:pPr>
+            <a:r>
+              <a:rPr lang="en-US" sz="2000" b="0" u="none" strike="noStrike">
+                <a:solidFill>
+                  <a:schemeClr val="dk1"/>
+                </a:solidFill>
+                <a:effectLst/>
+                <a:uFillTx/>
+                <a:latin typeface="Calibri"/>
+              </a:rPr>
+              <a:t>Fourth level</a:t>
+            </a:r>
+            <a:endParaRPr lang="en-US" sz="2000" b="0" u="none" strike="noStrike">
+              <a:solidFill>
+                <a:schemeClr val="dk1"/>
+              </a:solidFill>
+              <a:effectLst/>
+              <a:uFillTx/>
+              <a:latin typeface="Calibri"/>
+            </a:endParaRPr>
+          </a:p>
+          <a:p>
+            <a:pPr marL="2057400" lvl="4" indent="-228600" algn="l" defTabSz="457200">
+              <a:lnSpc>
+                <a:spcPct val="100000"/>
+              </a:lnSpc>
+              <a:spcBef>
+                <a:spcPts val="400"/>
+              </a:spcBef>
+              <a:buClr>
+                <a:srgbClr val="000000"/>
+              </a:buClr>
+              <a:buFont typeface="Arial"/>
+              <a:buChar char="»"/>
+            </a:pPr>
+            <a:r>
+              <a:rPr lang="en-US" sz="2000" b="0" u="none" strike="noStrike">
+                <a:solidFill>
+                  <a:schemeClr val="dk1"/>
+                </a:solidFill>
+                <a:effectLst/>
+                <a:uFillTx/>
+                <a:latin typeface="Calibri"/>
+              </a:rPr>
+              <a:t>Fifth level</a:t>
+            </a:r>
+            <a:endParaRPr lang="en-US" sz="2000" b="0" u="none" strike="noStrike">
+              <a:solidFill>
+                <a:schemeClr val="dk1"/>
+              </a:solidFill>
+              <a:effectLst/>
+              <a:uFillTx/>
+              <a:latin typeface="Calibri"/>
+            </a:endParaRPr>
+          </a:p>
+        </p:txBody>
+      </p:sp>
+      <p:sp>
+        <p:nvSpPr>
+          <p:cNvPr id="58" name="PlaceHolder 3"/>
+          <p:cNvSpPr>
+            <a:spLocks noGrp="1"/>
+          </p:cNvSpPr>
+          <p:nvPr>
+            <p:ph type="dt" idx="31"/>
+          </p:nvPr>
+        </p:nvSpPr>
+        <p:spPr>
+          <a:xfrm>
+            <a:off x="457200" y="6356520"/>
+            <a:ext cx="2132280" cy="363600"/>
+          </a:xfrm>
+          <a:prstGeom prst="rect">
+            <a:avLst/>
+          </a:prstGeom>
+          <a:noFill/>
+          <a:ln w="0">
+            <a:noFill/>
+          </a:ln>
+        </p:spPr>
+        <p:txBody>
+          <a:bodyPr lIns="91440" tIns="45720" rIns="91440" bIns="45720" anchor="ctr">
+            <a:noAutofit/>
+          </a:bodyPr>
+          <a:lstStyle>
+            <a:lvl1pPr indent="0" algn="l" defTabSz="457200">
+              <a:lnSpc>
+                <a:spcPct val="100000"/>
+              </a:lnSpc>
+              <a:buNone/>
+              <a:tabLst>
+                <a:tab pos="0" algn="l"/>
+              </a:tabLst>
+              <a:defRPr lang="en-US" sz="1200" b="0" u="none" strike="noStrike">
+                <a:solidFill>
+                  <a:schemeClr val="dk1">
+                    <a:tint val="75000"/>
+                  </a:schemeClr>
+                </a:solidFill>
+                <a:effectLst/>
+                <a:uFillTx/>
+                <a:latin typeface="Calibri"/>
+              </a:defRPr>
+            </a:lvl1pPr>
+          </a:lstStyle>
+          <a:p>
+            <a:pPr indent="0" algn="l" defTabSz="457200">
+              <a:lnSpc>
+                <a:spcPct val="100000"/>
+              </a:lnSpc>
+              <a:buNone/>
+              <a:tabLst>
+                <a:tab pos="0" algn="l"/>
+              </a:tabLst>
+            </a:pPr>
+            <a:r>
+              <a:rPr lang="en-US" sz="1200" b="0" u="none" strike="noStrike">
+                <a:solidFill>
+                  <a:schemeClr val="dk1">
+                    <a:tint val="75000"/>
+                  </a:schemeClr>
+                </a:solidFill>
+                <a:effectLst/>
+                <a:uFillTx/>
+                <a:latin typeface="Calibri"/>
+              </a:rPr>
+              <a:t>&lt;date/time&gt;</a:t>
+            </a:r>
+            <a:endParaRPr lang="en-US" sz="1200" b="0" u="none" strike="noStrike">
+              <a:solidFill>
+                <a:srgbClr val="000000"/>
+              </a:solidFill>
+              <a:effectLst/>
+              <a:uFillTx/>
+              <a:latin typeface="Times New Roman"/>
+            </a:endParaRPr>
+          </a:p>
+        </p:txBody>
+      </p:sp>
+      <p:sp>
+        <p:nvSpPr>
+          <p:cNvPr id="59" name="PlaceHolder 4"/>
+          <p:cNvSpPr>
+            <a:spLocks noGrp="1"/>
+          </p:cNvSpPr>
+          <p:nvPr>
+            <p:ph type="ftr" idx="32"/>
+          </p:nvPr>
+        </p:nvSpPr>
+        <p:spPr>
+          <a:xfrm>
+            <a:off x="3124080" y="6356520"/>
+            <a:ext cx="2894040" cy="363600"/>
+          </a:xfrm>
+          <a:prstGeom prst="rect">
+            <a:avLst/>
+          </a:prstGeom>
+          <a:noFill/>
+          <a:ln w="0">
+            <a:noFill/>
+          </a:ln>
+        </p:spPr>
+        <p:txBody>
+          <a:bodyPr lIns="91440" tIns="45720" rIns="91440" bIns="45720" anchor="ctr">
+            <a:noAutofit/>
+          </a:bodyPr>
+          <a:lstStyle>
+            <a:lvl1pPr indent="0" algn="ctr">
+              <a:lnSpc>
+                <a:spcPct val="100000"/>
+              </a:lnSpc>
+              <a:buNone/>
+              <a:tabLst>
+                <a:tab pos="0" algn="l"/>
+              </a:tabLst>
+              <a:defRPr lang="en-US" sz="1400" b="0" u="none" strike="noStrike">
+                <a:solidFill>
+                  <a:srgbClr val="000000"/>
+                </a:solidFill>
+                <a:effectLst/>
+                <a:uFillTx/>
+                <a:latin typeface="Times New Roman"/>
+              </a:defRPr>
+            </a:lvl1pPr>
+          </a:lstStyle>
+          <a:p>
+            <a:pPr indent="0" algn="ctr">
+              <a:lnSpc>
+                <a:spcPct val="100000"/>
+              </a:lnSpc>
+              <a:buNone/>
+              <a:tabLst>
+                <a:tab pos="0" algn="l"/>
+              </a:tabLst>
+            </a:pPr>
+            <a:r>
+              <a:rPr lang="en-US" sz="1400" b="0" u="none" strike="noStrike">
+                <a:solidFill>
+                  <a:srgbClr val="000000"/>
+                </a:solidFill>
+                <a:effectLst/>
+                <a:uFillTx/>
+                <a:latin typeface="Times New Roman"/>
+              </a:rPr>
+              <a:t>&lt;footer&gt;</a:t>
+            </a:r>
+            <a:endParaRPr lang="en-US" sz="1400" b="0" u="none" strike="noStrike">
+              <a:solidFill>
+                <a:srgbClr val="000000"/>
+              </a:solidFill>
+              <a:effectLst/>
+              <a:uFillTx/>
+              <a:latin typeface="Times New Roman"/>
+            </a:endParaRPr>
+          </a:p>
+        </p:txBody>
+      </p:sp>
+      <p:sp>
+        <p:nvSpPr>
+          <p:cNvPr id="60" name="PlaceHolder 5"/>
+          <p:cNvSpPr>
+            <a:spLocks noGrp="1"/>
+          </p:cNvSpPr>
+          <p:nvPr>
+            <p:ph type="sldNum" idx="33"/>
+          </p:nvPr>
+        </p:nvSpPr>
+        <p:spPr>
+          <a:xfrm>
+            <a:off x="6553080" y="6356520"/>
+            <a:ext cx="2132280" cy="363600"/>
+          </a:xfrm>
+          <a:prstGeom prst="rect">
+            <a:avLst/>
+          </a:prstGeom>
+          <a:noFill/>
+          <a:ln w="0">
+            <a:noFill/>
+          </a:ln>
+        </p:spPr>
+        <p:txBody>
+          <a:bodyPr lIns="91440" tIns="45720" rIns="91440" bIns="45720" anchor="ctr">
+            <a:noAutofit/>
+          </a:bodyPr>
+          <a:lstStyle>
+            <a:lvl1pPr indent="0" algn="r" defTabSz="457200">
+              <a:lnSpc>
+                <a:spcPct val="100000"/>
+              </a:lnSpc>
+              <a:buNone/>
+              <a:tabLst>
+                <a:tab pos="0" algn="l"/>
+              </a:tabLst>
+              <a:defRPr lang="en-US" sz="1200" b="0" u="none" strike="noStrike">
+                <a:solidFill>
+                  <a:schemeClr val="dk1">
+                    <a:tint val="75000"/>
+                  </a:schemeClr>
+                </a:solidFill>
+                <a:effectLst/>
+                <a:uFillTx/>
+                <a:latin typeface="Calibri"/>
+              </a:defRPr>
+            </a:lvl1pPr>
+          </a:lstStyle>
+          <a:p>
+            <a:pPr indent="0" algn="r" defTabSz="457200">
+              <a:lnSpc>
+                <a:spcPct val="100000"/>
+              </a:lnSpc>
+              <a:buNone/>
+              <a:tabLst>
+                <a:tab pos="0" algn="l"/>
+              </a:tabLst>
+            </a:pPr>
+            <a:fld id="{860D3D67-CA01-4E85-AB79-7DB621AE138B}" type="slidenum">
+              <a:rPr lang="en-US" sz="1200" b="0" u="none" strike="noStrike">
+                <a:solidFill>
+                  <a:schemeClr val="dk1">
+                    <a:tint val="75000"/>
+                  </a:schemeClr>
+                </a:solidFill>
+                <a:effectLst/>
+                <a:uFillTx/>
+                <a:latin typeface="Calibri"/>
+              </a:rPr>
+              <a:t>&lt;number&gt;</a:t>
+            </a:fld>
+            <a:endParaRPr lang="en-US" sz="1200" b="0" u="none" strike="noStrike">
+              <a:solidFill>
+                <a:srgbClr val="000000"/>
+              </a:solidFill>
+              <a:effectLst/>
+              <a:uFillTx/>
+              <a:latin typeface="Times New Roman"/>
+            </a:endParaRPr>
+          </a:p>
+        </p:txBody>
+      </p:sp>
+    </p:spTree>
+  </p:cSld>
+</p:sldLayout>
+</file>
+
+<file path=ppt/slideLayouts/slideLayout2.xml><?xml version="1.0" encoding="utf-8"?>
+<p:sldLayout xmlns:a="http://schemas.openxmlformats.org/drawingml/2006/main" xmlns:p="http://schemas.openxmlformats.org/presentationml/2006/main" xmlns:r="http://schemas.openxmlformats.org/officeDocument/2006/relationships" xmlns:p14="http://schemas.microsoft.com/office/powerpoint/2010/main" xmlns:p15="http://schemas.microsoft.com/office/powerpoint/2012/main" xmlns:mc="http://schemas.openxmlformats.org/markup-compatibility/2006" type="obj" preserve="1">
+  <p:cSld name="Title and Content">
+    <p:bg>
+      <p:bgPr>
+        <a:solidFill>
+          <a:srgbClr val="FFFFFF"/>
+        </a:solidFill>
+      </p:bgPr>
+    </p:bg>
+    <p:spTree>
+      <p:nvGrpSpPr>
+        <p:cNvPr id="1" name=""/>
+        <p:cNvGrpSpPr/>
+        <p:nvPr/>
+      </p:nvGrpSpPr>
+      <p:grpSpPr>
+        <a:xfrm>
+          <a:off x="0" y="0"/>
+          <a:ext cx="0" cy="0"/>
+          <a:chOff x="0" y="0"/>
+          <a:chExt cx="0" cy="0"/>
+        </a:xfrm>
+      </p:grpSpPr>
+      <p:sp>
+        <p:nvSpPr>
+          <p:cNvPr id="7" name="PlaceHolder 1"/>
+          <p:cNvSpPr>
+            <a:spLocks noGrp="1"/>
+          </p:cNvSpPr>
+          <p:nvPr>
+            <p:ph type="title"/>
+          </p:nvPr>
+        </p:nvSpPr>
+        <p:spPr>
+          <a:xfrm>
+            <a:off x="457200" y="274680"/>
+            <a:ext cx="8228160" cy="1141560"/>
+          </a:xfrm>
+          <a:prstGeom prst="rect">
+            <a:avLst/>
+          </a:prstGeom>
+          <a:noFill/>
+          <a:ln w="0">
+            <a:noFill/>
+          </a:ln>
+        </p:spPr>
+        <p:txBody>
+          <a:bodyPr lIns="91440" tIns="45720" rIns="91440" bIns="45720" anchor="ctr">
+            <a:noAutofit/>
+          </a:bodyPr>
+          <a:lstStyle>
+            <a:lvl1pPr indent="0" algn="ctr" defTabSz="457200">
+              <a:lnSpc>
+                <a:spcPct val="100000"/>
+              </a:lnSpc>
+              <a:buNone/>
+              <a:tabLst>
+                <a:tab pos="0" algn="l"/>
+              </a:tabLst>
+              <a:defRPr lang="en-US" sz="4400" b="0" u="none" strike="noStrike">
+                <a:solidFill>
+                  <a:schemeClr val="dk1"/>
+                </a:solidFill>
+                <a:effectLst/>
+                <a:uFillTx/>
+                <a:latin typeface="Calibri"/>
+              </a:defRPr>
+            </a:lvl1pPr>
+          </a:lstStyle>
+          <a:p>
+            <a:pPr indent="0" algn="ctr" defTabSz="457200">
+              <a:lnSpc>
+                <a:spcPct val="100000"/>
+              </a:lnSpc>
+              <a:buNone/>
+              <a:tabLst>
+                <a:tab pos="0" algn="l"/>
+              </a:tabLst>
+            </a:pPr>
+            <a:r>
+              <a:rPr lang="en-US" sz="4400" b="0" u="none" strike="noStrike">
+                <a:solidFill>
+                  <a:schemeClr val="dk1"/>
+                </a:solidFill>
+                <a:effectLst/>
+                <a:uFillTx/>
+                <a:latin typeface="Calibri"/>
+              </a:rPr>
+              <a:t>Click to edit Master title style</a:t>
+            </a:r>
+            <a:endParaRPr lang="en-US" sz="4400" b="0" u="none" strike="noStrike">
+              <a:solidFill>
+                <a:schemeClr val="dk1"/>
+              </a:solidFill>
+              <a:effectLst/>
+              <a:uFillTx/>
+              <a:latin typeface="Calibri"/>
+            </a:endParaRPr>
+          </a:p>
+        </p:txBody>
+      </p:sp>
+      <p:sp>
+        <p:nvSpPr>
+          <p:cNvPr id="8" name="PlaceHolder 2"/>
+          <p:cNvSpPr>
+            <a:spLocks noGrp="1"/>
+          </p:cNvSpPr>
+          <p:nvPr>
+            <p:ph type="body"/>
+          </p:nvPr>
+        </p:nvSpPr>
+        <p:spPr>
+          <a:xfrm>
+            <a:off x="457200" y="1600200"/>
+            <a:ext cx="8228160" cy="4524480"/>
+          </a:xfrm>
+          <a:prstGeom prst="rect">
+            <a:avLst/>
+          </a:prstGeom>
+          <a:noFill/>
+          <a:ln w="0">
+            <a:noFill/>
+          </a:ln>
+        </p:spPr>
+        <p:txBody>
+          <a:bodyPr lIns="91440" tIns="45720" rIns="91440" bIns="45720" anchor="t">
+            <a:noAutofit/>
+          </a:bodyPr>
+          <a:lstStyle>
+            <a:lvl1pPr algn="l" defTabSz="457200">
+              <a:lnSpc>
+                <a:spcPct val="100000"/>
+              </a:lnSpc>
+              <a:spcBef>
+                <a:spcPts val="641"/>
+              </a:spcBef>
+              <a:buClr>
+                <a:srgbClr val="000000"/>
+              </a:buClr>
+              <a:buFont typeface="Arial"/>
+              <a:buChar char="•"/>
+              <a:defRPr lang="en-US" sz="3200" b="0" u="none" strike="noStrike">
+                <a:solidFill>
+                  <a:schemeClr val="dk1"/>
+                </a:solidFill>
+                <a:effectLst/>
+                <a:uFillTx/>
+                <a:latin typeface="Calibri"/>
+              </a:defRPr>
+            </a:lvl1pPr>
+            <a:lvl2pPr lvl="1" algn="l" defTabSz="457200">
+              <a:lnSpc>
+                <a:spcPct val="100000"/>
+              </a:lnSpc>
+              <a:spcBef>
+                <a:spcPts val="561"/>
+              </a:spcBef>
+              <a:buClr>
+                <a:srgbClr val="000000"/>
+              </a:buClr>
+              <a:buFont typeface="Arial"/>
+              <a:buChar char="–"/>
+              <a:defRPr lang="en-US" sz="2800" b="0" u="none" strike="noStrike">
+                <a:solidFill>
+                  <a:schemeClr val="dk1"/>
+                </a:solidFill>
+                <a:effectLst/>
+                <a:uFillTx/>
+                <a:latin typeface="Calibri"/>
+              </a:defRPr>
+            </a:lvl2pPr>
+            <a:lvl3pPr lvl="2" algn="l" defTabSz="457200">
+              <a:lnSpc>
+                <a:spcPct val="100000"/>
+              </a:lnSpc>
+              <a:spcBef>
+                <a:spcPts val="479"/>
+              </a:spcBef>
+              <a:buClr>
+                <a:srgbClr val="000000"/>
+              </a:buClr>
+              <a:buFont typeface="Arial"/>
+              <a:buChar char="•"/>
+              <a:defRPr lang="en-US" sz="2400" b="0" u="none" strike="noStrike">
+                <a:solidFill>
+                  <a:schemeClr val="dk1"/>
+                </a:solidFill>
+                <a:effectLst/>
+                <a:uFillTx/>
+                <a:latin typeface="Calibri"/>
+              </a:defRPr>
+            </a:lvl3pPr>
+            <a:lvl4pPr lvl="3" algn="l" defTabSz="457200">
+              <a:lnSpc>
+                <a:spcPct val="100000"/>
+              </a:lnSpc>
+              <a:spcBef>
+                <a:spcPts val="400"/>
+              </a:spcBef>
+              <a:buClr>
+                <a:srgbClr val="000000"/>
+              </a:buClr>
+              <a:buFont typeface="Arial"/>
+              <a:buChar char="–"/>
+              <a:defRPr lang="en-US" sz="2000" b="0" u="none" strike="noStrike">
+                <a:solidFill>
+                  <a:schemeClr val="dk1"/>
+                </a:solidFill>
+                <a:effectLst/>
+                <a:uFillTx/>
+                <a:latin typeface="Calibri"/>
+              </a:defRPr>
+            </a:lvl4pPr>
+            <a:lvl5pPr lvl="4" algn="l" defTabSz="457200">
+              <a:lnSpc>
+                <a:spcPct val="100000"/>
+              </a:lnSpc>
+              <a:spcBef>
+                <a:spcPts val="400"/>
+              </a:spcBef>
+              <a:buClr>
+                <a:srgbClr val="000000"/>
+              </a:buClr>
+              <a:buFont typeface="Arial"/>
+              <a:buChar char="»"/>
+              <a:defRPr lang="en-US" sz="2000" b="0" u="none" strike="noStrike">
+                <a:solidFill>
+                  <a:schemeClr val="dk1"/>
+                </a:solidFill>
+                <a:effectLst/>
+                <a:uFillTx/>
+                <a:latin typeface="Calibri"/>
+              </a:defRPr>
+            </a:lvl5pPr>
+          </a:lstStyle>
+          <a:p>
+            <a:pPr marL="343080" indent="-343080" algn="l" defTabSz="457200">
+              <a:lnSpc>
+                <a:spcPct val="100000"/>
+              </a:lnSpc>
+              <a:spcBef>
+                <a:spcPts val="641"/>
+              </a:spcBef>
+              <a:buClr>
+                <a:srgbClr val="000000"/>
+              </a:buClr>
+              <a:buFont typeface="Arial"/>
+              <a:buChar char="•"/>
+            </a:pPr>
+            <a:r>
+              <a:rPr lang="en-US" sz="3200" b="0" u="none" strike="noStrike">
+                <a:solidFill>
+                  <a:schemeClr val="dk1"/>
+                </a:solidFill>
+                <a:effectLst/>
+                <a:uFillTx/>
+                <a:latin typeface="Calibri"/>
+              </a:rPr>
+              <a:t>Click to edit Master text styles</a:t>
+            </a:r>
+            <a:endParaRPr lang="en-US" sz="3200" b="0" u="none" strike="noStrike">
+              <a:solidFill>
+                <a:schemeClr val="dk1"/>
+              </a:solidFill>
+              <a:effectLst/>
+              <a:uFillTx/>
+              <a:latin typeface="Calibri"/>
+            </a:endParaRPr>
+          </a:p>
+          <a:p>
+            <a:pPr marL="743040" lvl="1" indent="-285840" algn="l" defTabSz="457200">
+              <a:lnSpc>
+                <a:spcPct val="100000"/>
+              </a:lnSpc>
+              <a:spcBef>
+                <a:spcPts val="561"/>
+              </a:spcBef>
+              <a:buClr>
+                <a:srgbClr val="000000"/>
+              </a:buClr>
+              <a:buFont typeface="Arial"/>
+              <a:buChar char="–"/>
+            </a:pPr>
+            <a:r>
+              <a:rPr lang="en-US" sz="2800" b="0" u="none" strike="noStrike">
+                <a:solidFill>
+                  <a:schemeClr val="dk1"/>
+                </a:solidFill>
+                <a:effectLst/>
+                <a:uFillTx/>
+                <a:latin typeface="Calibri"/>
+              </a:rPr>
+              <a:t>Second level</a:t>
+            </a:r>
+            <a:endParaRPr lang="en-US" sz="2800" b="0" u="none" strike="noStrike">
+              <a:solidFill>
+                <a:schemeClr val="dk1"/>
+              </a:solidFill>
+              <a:effectLst/>
+              <a:uFillTx/>
+              <a:latin typeface="Calibri"/>
+            </a:endParaRPr>
+          </a:p>
+          <a:p>
+            <a:pPr marL="1143000" lvl="2" indent="-228600" algn="l" defTabSz="457200">
+              <a:lnSpc>
+                <a:spcPct val="100000"/>
+              </a:lnSpc>
+              <a:spcBef>
+                <a:spcPts val="479"/>
+              </a:spcBef>
+              <a:buClr>
+                <a:srgbClr val="000000"/>
+              </a:buClr>
+              <a:buFont typeface="Arial"/>
+              <a:buChar char="•"/>
+            </a:pPr>
+            <a:r>
+              <a:rPr lang="en-US" sz="2400" b="0" u="none" strike="noStrike">
+                <a:solidFill>
+                  <a:schemeClr val="dk1"/>
+                </a:solidFill>
+                <a:effectLst/>
+                <a:uFillTx/>
+                <a:latin typeface="Calibri"/>
+              </a:rPr>
+              <a:t>Third level</a:t>
+            </a:r>
+            <a:endParaRPr lang="en-US" sz="2400" b="0" u="none" strike="noStrike">
+              <a:solidFill>
+                <a:schemeClr val="dk1"/>
+              </a:solidFill>
+              <a:effectLst/>
+              <a:uFillTx/>
+              <a:latin typeface="Calibri"/>
+            </a:endParaRPr>
+          </a:p>
+          <a:p>
+            <a:pPr marL="1600200" lvl="3" indent="-228600" algn="l" defTabSz="457200">
+              <a:lnSpc>
+                <a:spcPct val="100000"/>
+              </a:lnSpc>
+              <a:spcBef>
+                <a:spcPts val="400"/>
+              </a:spcBef>
+              <a:buClr>
+                <a:srgbClr val="000000"/>
+              </a:buClr>
+              <a:buFont typeface="Arial"/>
+              <a:buChar char="–"/>
+            </a:pPr>
+            <a:r>
+              <a:rPr lang="en-US" sz="2000" b="0" u="none" strike="noStrike">
+                <a:solidFill>
+                  <a:schemeClr val="dk1"/>
+                </a:solidFill>
+                <a:effectLst/>
+                <a:uFillTx/>
+                <a:latin typeface="Calibri"/>
+              </a:rPr>
+              <a:t>Fourth level</a:t>
+            </a:r>
+            <a:endParaRPr lang="en-US" sz="2000" b="0" u="none" strike="noStrike">
+              <a:solidFill>
+                <a:schemeClr val="dk1"/>
+              </a:solidFill>
+              <a:effectLst/>
+              <a:uFillTx/>
+              <a:latin typeface="Calibri"/>
+            </a:endParaRPr>
+          </a:p>
+          <a:p>
+            <a:pPr marL="2057400" lvl="4" indent="-228600" algn="l" defTabSz="457200">
+              <a:lnSpc>
+                <a:spcPct val="100000"/>
+              </a:lnSpc>
+              <a:spcBef>
+                <a:spcPts val="400"/>
+              </a:spcBef>
+              <a:buClr>
+                <a:srgbClr val="000000"/>
+              </a:buClr>
+              <a:buFont typeface="Arial"/>
+              <a:buChar char="»"/>
+            </a:pPr>
+            <a:r>
+              <a:rPr lang="en-US" sz="2000" b="0" u="none" strike="noStrike">
+                <a:solidFill>
+                  <a:schemeClr val="dk1"/>
+                </a:solidFill>
+                <a:effectLst/>
+                <a:uFillTx/>
+                <a:latin typeface="Calibri"/>
+              </a:rPr>
+              <a:t>Fifth level</a:t>
+            </a:r>
+            <a:endParaRPr lang="en-US" sz="2000" b="0" u="none" strike="noStrike">
+              <a:solidFill>
+                <a:schemeClr val="dk1"/>
+              </a:solidFill>
+              <a:effectLst/>
+              <a:uFillTx/>
+              <a:latin typeface="Calibri"/>
+            </a:endParaRPr>
+          </a:p>
+        </p:txBody>
+      </p:sp>
+      <p:sp>
+        <p:nvSpPr>
+          <p:cNvPr id="9" name="PlaceHolder 3"/>
+          <p:cNvSpPr>
+            <a:spLocks noGrp="1"/>
+          </p:cNvSpPr>
+          <p:nvPr>
+            <p:ph type="dt" idx="4"/>
+          </p:nvPr>
+        </p:nvSpPr>
+        <p:spPr>
+          <a:xfrm>
+            <a:off x="457200" y="6356520"/>
+            <a:ext cx="2132280" cy="363600"/>
+          </a:xfrm>
+          <a:prstGeom prst="rect">
+            <a:avLst/>
+          </a:prstGeom>
+          <a:noFill/>
+          <a:ln w="0">
+            <a:noFill/>
+          </a:ln>
+        </p:spPr>
+        <p:txBody>
+          <a:bodyPr lIns="91440" tIns="45720" rIns="91440" bIns="45720" anchor="ctr">
+            <a:noAutofit/>
+          </a:bodyPr>
+          <a:lstStyle>
+            <a:lvl1pPr indent="0" algn="l" defTabSz="457200">
+              <a:lnSpc>
+                <a:spcPct val="100000"/>
+              </a:lnSpc>
+              <a:buNone/>
+              <a:tabLst>
+                <a:tab pos="0" algn="l"/>
+              </a:tabLst>
+              <a:defRPr lang="en-US" sz="1200" b="0" u="none" strike="noStrike">
+                <a:solidFill>
+                  <a:schemeClr val="dk1">
+                    <a:tint val="75000"/>
+                  </a:schemeClr>
+                </a:solidFill>
+                <a:effectLst/>
+                <a:uFillTx/>
+                <a:latin typeface="Calibri"/>
+              </a:defRPr>
+            </a:lvl1pPr>
+          </a:lstStyle>
+          <a:p>
+            <a:pPr indent="0" algn="l" defTabSz="457200">
+              <a:lnSpc>
+                <a:spcPct val="100000"/>
+              </a:lnSpc>
+              <a:buNone/>
+              <a:tabLst>
+                <a:tab pos="0" algn="l"/>
+              </a:tabLst>
+            </a:pPr>
+            <a:r>
+              <a:rPr lang="en-US" sz="1200" b="0" u="none" strike="noStrike">
+                <a:solidFill>
+                  <a:schemeClr val="dk1">
+                    <a:tint val="75000"/>
+                  </a:schemeClr>
+                </a:solidFill>
+                <a:effectLst/>
+                <a:uFillTx/>
+                <a:latin typeface="Calibri"/>
+              </a:rPr>
+              <a:t>&lt;date/time&gt;</a:t>
+            </a:r>
+            <a:endParaRPr lang="en-US" sz="1200" b="0" u="none" strike="noStrike">
+              <a:solidFill>
+                <a:srgbClr val="000000"/>
+              </a:solidFill>
+              <a:effectLst/>
+              <a:uFillTx/>
+              <a:latin typeface="Times New Roman"/>
+            </a:endParaRPr>
+          </a:p>
+        </p:txBody>
+      </p:sp>
+      <p:sp>
+        <p:nvSpPr>
+          <p:cNvPr id="10" name="PlaceHolder 4"/>
+          <p:cNvSpPr>
+            <a:spLocks noGrp="1"/>
+          </p:cNvSpPr>
+          <p:nvPr>
+            <p:ph type="ftr" idx="5"/>
+          </p:nvPr>
+        </p:nvSpPr>
+        <p:spPr>
+          <a:xfrm>
+            <a:off x="3124080" y="6356520"/>
+            <a:ext cx="2894040" cy="363600"/>
+          </a:xfrm>
+          <a:prstGeom prst="rect">
+            <a:avLst/>
+          </a:prstGeom>
+          <a:noFill/>
+          <a:ln w="0">
+            <a:noFill/>
+          </a:ln>
+        </p:spPr>
+        <p:txBody>
+          <a:bodyPr lIns="91440" tIns="45720" rIns="91440" bIns="45720" anchor="ctr">
+            <a:noAutofit/>
+          </a:bodyPr>
+          <a:lstStyle>
+            <a:lvl1pPr indent="0" algn="ctr">
+              <a:lnSpc>
+                <a:spcPct val="100000"/>
+              </a:lnSpc>
+              <a:buNone/>
+              <a:tabLst>
+                <a:tab pos="0" algn="l"/>
+              </a:tabLst>
+              <a:defRPr lang="en-US" sz="1400" b="0" u="none" strike="noStrike">
+                <a:solidFill>
+                  <a:srgbClr val="000000"/>
+                </a:solidFill>
+                <a:effectLst/>
+                <a:uFillTx/>
+                <a:latin typeface="Times New Roman"/>
+              </a:defRPr>
+            </a:lvl1pPr>
+          </a:lstStyle>
+          <a:p>
+            <a:pPr indent="0" algn="ctr">
+              <a:lnSpc>
+                <a:spcPct val="100000"/>
+              </a:lnSpc>
+              <a:buNone/>
+              <a:tabLst>
+                <a:tab pos="0" algn="l"/>
+              </a:tabLst>
+            </a:pPr>
+            <a:r>
+              <a:rPr lang="en-US" sz="1400" b="0" u="none" strike="noStrike">
+                <a:solidFill>
+                  <a:srgbClr val="000000"/>
+                </a:solidFill>
+                <a:effectLst/>
+                <a:uFillTx/>
+                <a:latin typeface="Times New Roman"/>
+              </a:rPr>
+              <a:t>&lt;footer&gt;</a:t>
+            </a:r>
+            <a:endParaRPr lang="en-US" sz="1400" b="0" u="none" strike="noStrike">
+              <a:solidFill>
+                <a:srgbClr val="000000"/>
+              </a:solidFill>
+              <a:effectLst/>
+              <a:uFillTx/>
+              <a:latin typeface="Times New Roman"/>
+            </a:endParaRPr>
+          </a:p>
+        </p:txBody>
+      </p:sp>
+      <p:sp>
+        <p:nvSpPr>
+          <p:cNvPr id="11" name="PlaceHolder 5"/>
+          <p:cNvSpPr>
+            <a:spLocks noGrp="1"/>
+          </p:cNvSpPr>
+          <p:nvPr>
+            <p:ph type="sldNum" idx="6"/>
+          </p:nvPr>
+        </p:nvSpPr>
+        <p:spPr>
+          <a:xfrm>
+            <a:off x="6553080" y="6356520"/>
+            <a:ext cx="2132280" cy="363600"/>
+          </a:xfrm>
+          <a:prstGeom prst="rect">
+            <a:avLst/>
+          </a:prstGeom>
+          <a:noFill/>
+          <a:ln w="0">
+            <a:noFill/>
+          </a:ln>
+        </p:spPr>
+        <p:txBody>
+          <a:bodyPr lIns="91440" tIns="45720" rIns="91440" bIns="45720" anchor="ctr">
+            <a:noAutofit/>
+          </a:bodyPr>
+          <a:lstStyle>
+            <a:lvl1pPr indent="0" algn="r" defTabSz="457200">
+              <a:lnSpc>
+                <a:spcPct val="100000"/>
+              </a:lnSpc>
+              <a:buNone/>
+              <a:tabLst>
+                <a:tab pos="0" algn="l"/>
+              </a:tabLst>
+              <a:defRPr lang="en-US" sz="1200" b="0" u="none" strike="noStrike">
+                <a:solidFill>
+                  <a:schemeClr val="dk1">
+                    <a:tint val="75000"/>
+                  </a:schemeClr>
+                </a:solidFill>
+                <a:effectLst/>
+                <a:uFillTx/>
+                <a:latin typeface="Calibri"/>
+              </a:defRPr>
+            </a:lvl1pPr>
+          </a:lstStyle>
+          <a:p>
+            <a:pPr indent="0" algn="r" defTabSz="457200">
+              <a:lnSpc>
+                <a:spcPct val="100000"/>
+              </a:lnSpc>
+              <a:buNone/>
+              <a:tabLst>
+                <a:tab pos="0" algn="l"/>
+              </a:tabLst>
+            </a:pPr>
+            <a:fld id="{AB872010-E382-4E68-AB2A-FCFCF8D579CB}" type="slidenum">
+              <a:rPr lang="en-US" sz="1200" b="0" u="none" strike="noStrike">
+                <a:solidFill>
+                  <a:schemeClr val="dk1">
+                    <a:tint val="75000"/>
+                  </a:schemeClr>
+                </a:solidFill>
+                <a:effectLst/>
+                <a:uFillTx/>
+                <a:latin typeface="Calibri"/>
+              </a:rPr>
+              <a:t>&lt;number&gt;</a:t>
+            </a:fld>
+            <a:endParaRPr lang="en-US" sz="1200" b="0" u="none" strike="noStrike">
+              <a:solidFill>
+                <a:srgbClr val="000000"/>
+              </a:solidFill>
+              <a:effectLst/>
+              <a:uFillTx/>
+              <a:latin typeface="Times New Roman"/>
+            </a:endParaRPr>
+          </a:p>
+        </p:txBody>
+      </p:sp>
+    </p:spTree>
+  </p:cSld>
+</p:sldLayout>
+</file>
+
+<file path=ppt/slideLayouts/slideLayout3.xml><?xml version="1.0" encoding="utf-8"?>
+<p:sldLayout xmlns:a="http://schemas.openxmlformats.org/drawingml/2006/main" xmlns:p="http://schemas.openxmlformats.org/presentationml/2006/main" xmlns:r="http://schemas.openxmlformats.org/officeDocument/2006/relationships" xmlns:p14="http://schemas.microsoft.com/office/powerpoint/2010/main" xmlns:p15="http://schemas.microsoft.com/office/powerpoint/2012/main" xmlns:mc="http://schemas.openxmlformats.org/markup-compatibility/2006" type="blank" preserve="1">
+  <p:cSld name="Section Header">
+    <p:bg>
+      <p:bgPr>
+        <a:solidFill>
+          <a:srgbClr val="FFFFFF"/>
+        </a:solidFill>
+      </p:bgPr>
+    </p:bg>
+    <p:spTree>
+      <p:nvGrpSpPr>
+        <p:cNvPr id="1" name=""/>
+        <p:cNvGrpSpPr/>
+        <p:nvPr/>
+      </p:nvGrpSpPr>
+      <p:grpSpPr>
+        <a:xfrm>
+          <a:off x="0" y="0"/>
+          <a:ext cx="0" cy="0"/>
+          <a:chOff x="0" y="0"/>
+          <a:chExt cx="0" cy="0"/>
+        </a:xfrm>
+      </p:grpSpPr>
+      <p:sp>
+        <p:nvSpPr>
+          <p:cNvPr id="12" name="PlaceHolder 1"/>
+          <p:cNvSpPr>
+            <a:spLocks noGrp="1"/>
+          </p:cNvSpPr>
+          <p:nvPr>
+            <p:ph type="title"/>
+          </p:nvPr>
+        </p:nvSpPr>
+        <p:spPr>
+          <a:xfrm>
             <a:off x="722160" y="4406760"/>
-            <a:ext cx="7771320" cy="1361160"/>
+            <a:ext cx="7770960" cy="1360800"/>
           </a:xfrm>
           <a:prstGeom prst="rect">
             <a:avLst/>
@@ -1788,7 +2442,7 @@
       </p:sp>
       <p:sp>
         <p:nvSpPr>
-          <p:cNvPr id="57" name="PlaceHolder 2"/>
+          <p:cNvPr id="13" name="PlaceHolder 2"/>
           <p:cNvSpPr>
             <a:spLocks noGrp="1"/>
           </p:cNvSpPr>
@@ -1799,7 +2453,7 @@
         <p:spPr>
           <a:xfrm>
             <a:off x="722160" y="2906640"/>
-            <a:ext cx="7771320" cy="1499040"/>
+            <a:ext cx="7770960" cy="1498680"/>
           </a:xfrm>
           <a:prstGeom prst="rect">
             <a:avLst/>
@@ -1878,18 +2532,18 @@
       </p:sp>
       <p:sp>
         <p:nvSpPr>
-          <p:cNvPr id="58" name="PlaceHolder 3"/>
+          <p:cNvPr id="14" name="PlaceHolder 3"/>
           <p:cNvSpPr>
             <a:spLocks noGrp="1"/>
           </p:cNvSpPr>
           <p:nvPr>
-            <p:ph type="dt" idx="31"/>
+            <p:ph type="dt" idx="7"/>
           </p:nvPr>
         </p:nvSpPr>
         <p:spPr>
           <a:xfrm>
             <a:off x="457200" y="6356520"/>
-            <a:ext cx="2132640" cy="363960"/>
+            <a:ext cx="2132280" cy="363600"/>
           </a:xfrm>
           <a:prstGeom prst="rect">
             <a:avLst/>
@@ -1960,18 +2614,18 @@
       </p:sp>
       <p:sp>
         <p:nvSpPr>
-          <p:cNvPr id="59" name="PlaceHolder 4"/>
+          <p:cNvPr id="15" name="PlaceHolder 4"/>
           <p:cNvSpPr>
             <a:spLocks noGrp="1"/>
           </p:cNvSpPr>
           <p:nvPr>
-            <p:ph type="ftr" idx="32"/>
+            <p:ph type="ftr" idx="8"/>
           </p:nvPr>
         </p:nvSpPr>
         <p:spPr>
           <a:xfrm>
             <a:off x="3124080" y="6356520"/>
-            <a:ext cx="2894400" cy="363960"/>
+            <a:ext cx="2894040" cy="363600"/>
           </a:xfrm>
           <a:prstGeom prst="rect">
             <a:avLst/>
@@ -2038,18 +2692,18 @@
       </p:sp>
       <p:sp>
         <p:nvSpPr>
-          <p:cNvPr id="60" name="PlaceHolder 5"/>
+          <p:cNvPr id="16" name="PlaceHolder 5"/>
           <p:cNvSpPr>
             <a:spLocks noGrp="1"/>
           </p:cNvSpPr>
           <p:nvPr>
-            <p:ph type="sldNum" idx="33"/>
+            <p:ph type="sldNum" idx="9"/>
           </p:nvPr>
         </p:nvSpPr>
         <p:spPr>
           <a:xfrm>
             <a:off x="6553080" y="6356520"/>
-            <a:ext cx="2132640" cy="363960"/>
+            <a:ext cx="2132280" cy="363600"/>
           </a:xfrm>
           <a:prstGeom prst="rect">
             <a:avLst/>
@@ -2094,7 +2748,7 @@
                 <a:tab pos="0" algn="l"/>
               </a:tabLst>
             </a:pPr>
-            <a:fld id="{210DBB7E-39DB-4B51-93E1-CD3E7B90D17B}" type="slidenum">
+            <a:fld id="{3AFE5316-BAFF-434E-AAF1-4B8D7D134B7F}" type="slidenum">
               <a:rPr lang="en-US" sz="1200" b="0" u="none" strike="noStrike">
                 <a:solidFill>
                   <a:schemeClr val="dk1">
@@ -2123,7 +2777,968 @@
 </p:sldLayout>
 </file>
 
-<file path=ppt/slideLayouts/slideLayout2.xml><?xml version="1.0" encoding="utf-8"?>
+<file path=ppt/slideLayouts/slideLayout4.xml><?xml version="1.0" encoding="utf-8"?>
+<p:sldLayout xmlns:a="http://schemas.openxmlformats.org/drawingml/2006/main" xmlns:p="http://schemas.openxmlformats.org/presentationml/2006/main" xmlns:r="http://schemas.openxmlformats.org/officeDocument/2006/relationships" xmlns:p14="http://schemas.microsoft.com/office/powerpoint/2010/main" xmlns:p15="http://schemas.microsoft.com/office/powerpoint/2012/main" xmlns:mc="http://schemas.openxmlformats.org/markup-compatibility/2006" type="twoObj" preserve="1">
+  <p:cSld name="Two Content">
+    <p:bg>
+      <p:bgPr>
+        <a:solidFill>
+          <a:srgbClr val="FFFFFF"/>
+        </a:solidFill>
+      </p:bgPr>
+    </p:bg>
+    <p:spTree>
+      <p:nvGrpSpPr>
+        <p:cNvPr id="1" name=""/>
+        <p:cNvGrpSpPr/>
+        <p:nvPr/>
+      </p:nvGrpSpPr>
+      <p:grpSpPr>
+        <a:xfrm>
+          <a:off x="0" y="0"/>
+          <a:ext cx="0" cy="0"/>
+          <a:chOff x="0" y="0"/>
+          <a:chExt cx="0" cy="0"/>
+        </a:xfrm>
+      </p:grpSpPr>
+      <p:sp>
+        <p:nvSpPr>
+          <p:cNvPr id="17" name="PlaceHolder 1"/>
+          <p:cNvSpPr>
+            <a:spLocks noGrp="1"/>
+          </p:cNvSpPr>
+          <p:nvPr>
+            <p:ph type="title"/>
+          </p:nvPr>
+        </p:nvSpPr>
+        <p:spPr>
+          <a:xfrm>
+            <a:off x="457200" y="274680"/>
+            <a:ext cx="8228160" cy="1141560"/>
+          </a:xfrm>
+          <a:prstGeom prst="rect">
+            <a:avLst/>
+          </a:prstGeom>
+          <a:noFill/>
+          <a:ln w="0">
+            <a:noFill/>
+          </a:ln>
+        </p:spPr>
+        <p:txBody>
+          <a:bodyPr lIns="91440" tIns="45720" rIns="91440" bIns="45720" anchor="ctr">
+            <a:noAutofit/>
+          </a:bodyPr>
+          <a:lstStyle>
+            <a:lvl1pPr indent="0" algn="ctr" defTabSz="457200">
+              <a:lnSpc>
+                <a:spcPct val="100000"/>
+              </a:lnSpc>
+              <a:buNone/>
+              <a:tabLst>
+                <a:tab pos="0" algn="l"/>
+              </a:tabLst>
+              <a:defRPr lang="en-US" sz="4400" b="0" u="none" strike="noStrike">
+                <a:solidFill>
+                  <a:schemeClr val="dk1"/>
+                </a:solidFill>
+                <a:effectLst/>
+                <a:uFillTx/>
+                <a:latin typeface="Calibri"/>
+              </a:defRPr>
+            </a:lvl1pPr>
+          </a:lstStyle>
+          <a:p>
+            <a:pPr indent="0" algn="ctr" defTabSz="457200">
+              <a:lnSpc>
+                <a:spcPct val="100000"/>
+              </a:lnSpc>
+              <a:buNone/>
+              <a:tabLst>
+                <a:tab pos="0" algn="l"/>
+              </a:tabLst>
+            </a:pPr>
+            <a:r>
+              <a:rPr lang="en-US" sz="4400" b="0" u="none" strike="noStrike">
+                <a:solidFill>
+                  <a:schemeClr val="dk1"/>
+                </a:solidFill>
+                <a:effectLst/>
+                <a:uFillTx/>
+                <a:latin typeface="Calibri"/>
+              </a:rPr>
+              <a:t>Click to edit Master title style</a:t>
+            </a:r>
+            <a:endParaRPr lang="en-US" sz="4400" b="0" u="none" strike="noStrike">
+              <a:solidFill>
+                <a:schemeClr val="dk1"/>
+              </a:solidFill>
+              <a:effectLst/>
+              <a:uFillTx/>
+              <a:latin typeface="Calibri"/>
+            </a:endParaRPr>
+          </a:p>
+        </p:txBody>
+      </p:sp>
+      <p:sp>
+        <p:nvSpPr>
+          <p:cNvPr id="18" name="PlaceHolder 2"/>
+          <p:cNvSpPr>
+            <a:spLocks noGrp="1"/>
+          </p:cNvSpPr>
+          <p:nvPr>
+            <p:ph type="body"/>
+          </p:nvPr>
+        </p:nvSpPr>
+        <p:spPr>
+          <a:xfrm>
+            <a:off x="457200" y="1600200"/>
+            <a:ext cx="4037040" cy="4524480"/>
+          </a:xfrm>
+          <a:prstGeom prst="rect">
+            <a:avLst/>
+          </a:prstGeom>
+          <a:noFill/>
+          <a:ln w="0">
+            <a:noFill/>
+          </a:ln>
+        </p:spPr>
+        <p:txBody>
+          <a:bodyPr lIns="91440" tIns="45720" rIns="91440" bIns="45720" anchor="t">
+            <a:noAutofit/>
+          </a:bodyPr>
+          <a:lstStyle>
+            <a:lvl1pPr algn="l" defTabSz="457200">
+              <a:lnSpc>
+                <a:spcPct val="100000"/>
+              </a:lnSpc>
+              <a:spcBef>
+                <a:spcPts val="561"/>
+              </a:spcBef>
+              <a:buClr>
+                <a:srgbClr val="000000"/>
+              </a:buClr>
+              <a:buFont typeface="Arial"/>
+              <a:buChar char="•"/>
+              <a:defRPr lang="en-US" sz="2800" b="0" u="none" strike="noStrike">
+                <a:solidFill>
+                  <a:schemeClr val="dk1"/>
+                </a:solidFill>
+                <a:effectLst/>
+                <a:uFillTx/>
+                <a:latin typeface="Calibri"/>
+              </a:defRPr>
+            </a:lvl1pPr>
+            <a:lvl2pPr lvl="1" algn="l" defTabSz="457200">
+              <a:lnSpc>
+                <a:spcPct val="100000"/>
+              </a:lnSpc>
+              <a:spcBef>
+                <a:spcPts val="479"/>
+              </a:spcBef>
+              <a:buClr>
+                <a:srgbClr val="000000"/>
+              </a:buClr>
+              <a:buFont typeface="Arial"/>
+              <a:buChar char="–"/>
+              <a:defRPr lang="en-US" sz="2400" b="0" u="none" strike="noStrike">
+                <a:solidFill>
+                  <a:schemeClr val="dk1"/>
+                </a:solidFill>
+                <a:effectLst/>
+                <a:uFillTx/>
+                <a:latin typeface="Calibri"/>
+              </a:defRPr>
+            </a:lvl2pPr>
+            <a:lvl3pPr lvl="2" algn="l" defTabSz="457200">
+              <a:lnSpc>
+                <a:spcPct val="100000"/>
+              </a:lnSpc>
+              <a:spcBef>
+                <a:spcPts val="400"/>
+              </a:spcBef>
+              <a:buClr>
+                <a:srgbClr val="000000"/>
+              </a:buClr>
+              <a:buFont typeface="Arial"/>
+              <a:buChar char="•"/>
+              <a:defRPr lang="en-US" sz="2000" b="0" u="none" strike="noStrike">
+                <a:solidFill>
+                  <a:schemeClr val="dk1"/>
+                </a:solidFill>
+                <a:effectLst/>
+                <a:uFillTx/>
+                <a:latin typeface="Calibri"/>
+              </a:defRPr>
+            </a:lvl3pPr>
+            <a:lvl4pPr lvl="3" algn="l" defTabSz="457200">
+              <a:lnSpc>
+                <a:spcPct val="100000"/>
+              </a:lnSpc>
+              <a:spcBef>
+                <a:spcPts val="360"/>
+              </a:spcBef>
+              <a:buClr>
+                <a:srgbClr val="000000"/>
+              </a:buClr>
+              <a:buFont typeface="Arial"/>
+              <a:buChar char="–"/>
+              <a:defRPr lang="en-US" sz="1800" b="0" u="none" strike="noStrike">
+                <a:solidFill>
+                  <a:schemeClr val="dk1"/>
+                </a:solidFill>
+                <a:effectLst/>
+                <a:uFillTx/>
+                <a:latin typeface="Calibri"/>
+              </a:defRPr>
+            </a:lvl4pPr>
+            <a:lvl5pPr lvl="4" algn="l" defTabSz="457200">
+              <a:lnSpc>
+                <a:spcPct val="100000"/>
+              </a:lnSpc>
+              <a:spcBef>
+                <a:spcPts val="360"/>
+              </a:spcBef>
+              <a:buClr>
+                <a:srgbClr val="000000"/>
+              </a:buClr>
+              <a:buFont typeface="Arial"/>
+              <a:buChar char="»"/>
+              <a:defRPr lang="en-US" sz="1800" b="0" u="none" strike="noStrike">
+                <a:solidFill>
+                  <a:schemeClr val="dk1"/>
+                </a:solidFill>
+                <a:effectLst/>
+                <a:uFillTx/>
+                <a:latin typeface="Calibri"/>
+              </a:defRPr>
+            </a:lvl5pPr>
+          </a:lstStyle>
+          <a:p>
+            <a:pPr marL="343080" indent="-343080" algn="l" defTabSz="457200">
+              <a:lnSpc>
+                <a:spcPct val="100000"/>
+              </a:lnSpc>
+              <a:spcBef>
+                <a:spcPts val="561"/>
+              </a:spcBef>
+              <a:buClr>
+                <a:srgbClr val="000000"/>
+              </a:buClr>
+              <a:buFont typeface="Arial"/>
+              <a:buChar char="•"/>
+            </a:pPr>
+            <a:r>
+              <a:rPr lang="en-US" sz="2800" b="0" u="none" strike="noStrike">
+                <a:solidFill>
+                  <a:schemeClr val="dk1"/>
+                </a:solidFill>
+                <a:effectLst/>
+                <a:uFillTx/>
+                <a:latin typeface="Calibri"/>
+              </a:rPr>
+              <a:t>Click to edit Master text styles</a:t>
+            </a:r>
+            <a:endParaRPr lang="en-US" sz="2800" b="0" u="none" strike="noStrike">
+              <a:solidFill>
+                <a:schemeClr val="dk1"/>
+              </a:solidFill>
+              <a:effectLst/>
+              <a:uFillTx/>
+              <a:latin typeface="Calibri"/>
+            </a:endParaRPr>
+          </a:p>
+          <a:p>
+            <a:pPr marL="743040" lvl="1" indent="-285840" algn="l" defTabSz="457200">
+              <a:lnSpc>
+                <a:spcPct val="100000"/>
+              </a:lnSpc>
+              <a:spcBef>
+                <a:spcPts val="479"/>
+              </a:spcBef>
+              <a:buClr>
+                <a:srgbClr val="000000"/>
+              </a:buClr>
+              <a:buFont typeface="Arial"/>
+              <a:buChar char="–"/>
+            </a:pPr>
+            <a:r>
+              <a:rPr lang="en-US" sz="2400" b="0" u="none" strike="noStrike">
+                <a:solidFill>
+                  <a:schemeClr val="dk1"/>
+                </a:solidFill>
+                <a:effectLst/>
+                <a:uFillTx/>
+                <a:latin typeface="Calibri"/>
+              </a:rPr>
+              <a:t>Second level</a:t>
+            </a:r>
+            <a:endParaRPr lang="en-US" sz="2400" b="0" u="none" strike="noStrike">
+              <a:solidFill>
+                <a:schemeClr val="dk1"/>
+              </a:solidFill>
+              <a:effectLst/>
+              <a:uFillTx/>
+              <a:latin typeface="Calibri"/>
+            </a:endParaRPr>
+          </a:p>
+          <a:p>
+            <a:pPr marL="1143000" lvl="2" indent="-228600" algn="l" defTabSz="457200">
+              <a:lnSpc>
+                <a:spcPct val="100000"/>
+              </a:lnSpc>
+              <a:spcBef>
+                <a:spcPts val="400"/>
+              </a:spcBef>
+              <a:buClr>
+                <a:srgbClr val="000000"/>
+              </a:buClr>
+              <a:buFont typeface="Arial"/>
+              <a:buChar char="•"/>
+            </a:pPr>
+            <a:r>
+              <a:rPr lang="en-US" sz="2000" b="0" u="none" strike="noStrike">
+                <a:solidFill>
+                  <a:schemeClr val="dk1"/>
+                </a:solidFill>
+                <a:effectLst/>
+                <a:uFillTx/>
+                <a:latin typeface="Calibri"/>
+              </a:rPr>
+              <a:t>Third level</a:t>
+            </a:r>
+            <a:endParaRPr lang="en-US" sz="2000" b="0" u="none" strike="noStrike">
+              <a:solidFill>
+                <a:schemeClr val="dk1"/>
+              </a:solidFill>
+              <a:effectLst/>
+              <a:uFillTx/>
+              <a:latin typeface="Calibri"/>
+            </a:endParaRPr>
+          </a:p>
+          <a:p>
+            <a:pPr marL="1600200" lvl="3" indent="-228600" algn="l" defTabSz="457200">
+              <a:lnSpc>
+                <a:spcPct val="100000"/>
+              </a:lnSpc>
+              <a:spcBef>
+                <a:spcPts val="360"/>
+              </a:spcBef>
+              <a:buClr>
+                <a:srgbClr val="000000"/>
+              </a:buClr>
+              <a:buFont typeface="Arial"/>
+              <a:buChar char="–"/>
+            </a:pPr>
+            <a:r>
+              <a:rPr lang="en-US" sz="1800" b="0" u="none" strike="noStrike">
+                <a:solidFill>
+                  <a:schemeClr val="dk1"/>
+                </a:solidFill>
+                <a:effectLst/>
+                <a:uFillTx/>
+                <a:latin typeface="Calibri"/>
+              </a:rPr>
+              <a:t>Fourth level</a:t>
+            </a:r>
+            <a:endParaRPr lang="en-US" sz="1800" b="0" u="none" strike="noStrike">
+              <a:solidFill>
+                <a:schemeClr val="dk1"/>
+              </a:solidFill>
+              <a:effectLst/>
+              <a:uFillTx/>
+              <a:latin typeface="Calibri"/>
+            </a:endParaRPr>
+          </a:p>
+          <a:p>
+            <a:pPr marL="2057400" lvl="4" indent="-228600" algn="l" defTabSz="457200">
+              <a:lnSpc>
+                <a:spcPct val="100000"/>
+              </a:lnSpc>
+              <a:spcBef>
+                <a:spcPts val="360"/>
+              </a:spcBef>
+              <a:buClr>
+                <a:srgbClr val="000000"/>
+              </a:buClr>
+              <a:buFont typeface="Arial"/>
+              <a:buChar char="»"/>
+            </a:pPr>
+            <a:r>
+              <a:rPr lang="en-US" sz="1800" b="0" u="none" strike="noStrike">
+                <a:solidFill>
+                  <a:schemeClr val="dk1"/>
+                </a:solidFill>
+                <a:effectLst/>
+                <a:uFillTx/>
+                <a:latin typeface="Calibri"/>
+              </a:rPr>
+              <a:t>Fifth level</a:t>
+            </a:r>
+            <a:endParaRPr lang="en-US" sz="1800" b="0" u="none" strike="noStrike">
+              <a:solidFill>
+                <a:schemeClr val="dk1"/>
+              </a:solidFill>
+              <a:effectLst/>
+              <a:uFillTx/>
+              <a:latin typeface="Calibri"/>
+            </a:endParaRPr>
+          </a:p>
+        </p:txBody>
+      </p:sp>
+      <p:sp>
+        <p:nvSpPr>
+          <p:cNvPr id="19" name="PlaceHolder 3"/>
+          <p:cNvSpPr>
+            <a:spLocks noGrp="1"/>
+          </p:cNvSpPr>
+          <p:nvPr>
+            <p:ph type="body"/>
+          </p:nvPr>
+        </p:nvSpPr>
+        <p:spPr>
+          <a:xfrm>
+            <a:off x="4648320" y="1600200"/>
+            <a:ext cx="4037040" cy="4524480"/>
+          </a:xfrm>
+          <a:prstGeom prst="rect">
+            <a:avLst/>
+          </a:prstGeom>
+          <a:noFill/>
+          <a:ln w="0">
+            <a:noFill/>
+          </a:ln>
+        </p:spPr>
+        <p:txBody>
+          <a:bodyPr lIns="91440" tIns="45720" rIns="91440" bIns="45720" anchor="t">
+            <a:noAutofit/>
+          </a:bodyPr>
+          <a:lstStyle>
+            <a:lvl1pPr algn="l" defTabSz="457200">
+              <a:lnSpc>
+                <a:spcPct val="100000"/>
+              </a:lnSpc>
+              <a:spcBef>
+                <a:spcPts val="561"/>
+              </a:spcBef>
+              <a:buClr>
+                <a:srgbClr val="000000"/>
+              </a:buClr>
+              <a:buFont typeface="Arial"/>
+              <a:buChar char="•"/>
+              <a:defRPr lang="en-US" sz="2800" b="0" u="none" strike="noStrike">
+                <a:solidFill>
+                  <a:schemeClr val="dk1"/>
+                </a:solidFill>
+                <a:effectLst/>
+                <a:uFillTx/>
+                <a:latin typeface="Calibri"/>
+              </a:defRPr>
+            </a:lvl1pPr>
+            <a:lvl2pPr lvl="1" algn="l" defTabSz="457200">
+              <a:lnSpc>
+                <a:spcPct val="100000"/>
+              </a:lnSpc>
+              <a:spcBef>
+                <a:spcPts val="479"/>
+              </a:spcBef>
+              <a:buClr>
+                <a:srgbClr val="000000"/>
+              </a:buClr>
+              <a:buFont typeface="Arial"/>
+              <a:buChar char="–"/>
+              <a:defRPr lang="en-US" sz="2400" b="0" u="none" strike="noStrike">
+                <a:solidFill>
+                  <a:schemeClr val="dk1"/>
+                </a:solidFill>
+                <a:effectLst/>
+                <a:uFillTx/>
+                <a:latin typeface="Calibri"/>
+              </a:defRPr>
+            </a:lvl2pPr>
+            <a:lvl3pPr lvl="2" algn="l" defTabSz="457200">
+              <a:lnSpc>
+                <a:spcPct val="100000"/>
+              </a:lnSpc>
+              <a:spcBef>
+                <a:spcPts val="400"/>
+              </a:spcBef>
+              <a:buClr>
+                <a:srgbClr val="000000"/>
+              </a:buClr>
+              <a:buFont typeface="Arial"/>
+              <a:buChar char="•"/>
+              <a:defRPr lang="en-US" sz="2000" b="0" u="none" strike="noStrike">
+                <a:solidFill>
+                  <a:schemeClr val="dk1"/>
+                </a:solidFill>
+                <a:effectLst/>
+                <a:uFillTx/>
+                <a:latin typeface="Calibri"/>
+              </a:defRPr>
+            </a:lvl3pPr>
+            <a:lvl4pPr lvl="3" algn="l" defTabSz="457200">
+              <a:lnSpc>
+                <a:spcPct val="100000"/>
+              </a:lnSpc>
+              <a:spcBef>
+                <a:spcPts val="360"/>
+              </a:spcBef>
+              <a:buClr>
+                <a:srgbClr val="000000"/>
+              </a:buClr>
+              <a:buFont typeface="Arial"/>
+              <a:buChar char="–"/>
+              <a:defRPr lang="en-US" sz="1800" b="0" u="none" strike="noStrike">
+                <a:solidFill>
+                  <a:schemeClr val="dk1"/>
+                </a:solidFill>
+                <a:effectLst/>
+                <a:uFillTx/>
+                <a:latin typeface="Calibri"/>
+              </a:defRPr>
+            </a:lvl4pPr>
+            <a:lvl5pPr lvl="4" algn="l" defTabSz="457200">
+              <a:lnSpc>
+                <a:spcPct val="100000"/>
+              </a:lnSpc>
+              <a:spcBef>
+                <a:spcPts val="360"/>
+              </a:spcBef>
+              <a:buClr>
+                <a:srgbClr val="000000"/>
+              </a:buClr>
+              <a:buFont typeface="Arial"/>
+              <a:buChar char="»"/>
+              <a:defRPr lang="en-US" sz="1800" b="0" u="none" strike="noStrike">
+                <a:solidFill>
+                  <a:schemeClr val="dk1"/>
+                </a:solidFill>
+                <a:effectLst/>
+                <a:uFillTx/>
+                <a:latin typeface="Calibri"/>
+              </a:defRPr>
+            </a:lvl5pPr>
+          </a:lstStyle>
+          <a:p>
+            <a:pPr marL="343080" indent="-343080" algn="l" defTabSz="457200">
+              <a:lnSpc>
+                <a:spcPct val="100000"/>
+              </a:lnSpc>
+              <a:spcBef>
+                <a:spcPts val="561"/>
+              </a:spcBef>
+              <a:buClr>
+                <a:srgbClr val="000000"/>
+              </a:buClr>
+              <a:buFont typeface="Arial"/>
+              <a:buChar char="•"/>
+            </a:pPr>
+            <a:r>
+              <a:rPr lang="en-US" sz="2800" b="0" u="none" strike="noStrike">
+                <a:solidFill>
+                  <a:schemeClr val="dk1"/>
+                </a:solidFill>
+                <a:effectLst/>
+                <a:uFillTx/>
+                <a:latin typeface="Calibri"/>
+              </a:rPr>
+              <a:t>Click to edit Master text styles</a:t>
+            </a:r>
+            <a:endParaRPr lang="en-US" sz="2800" b="0" u="none" strike="noStrike">
+              <a:solidFill>
+                <a:schemeClr val="dk1"/>
+              </a:solidFill>
+              <a:effectLst/>
+              <a:uFillTx/>
+              <a:latin typeface="Calibri"/>
+            </a:endParaRPr>
+          </a:p>
+          <a:p>
+            <a:pPr marL="743040" lvl="1" indent="-285840" algn="l" defTabSz="457200">
+              <a:lnSpc>
+                <a:spcPct val="100000"/>
+              </a:lnSpc>
+              <a:spcBef>
+                <a:spcPts val="479"/>
+              </a:spcBef>
+              <a:buClr>
+                <a:srgbClr val="000000"/>
+              </a:buClr>
+              <a:buFont typeface="Arial"/>
+              <a:buChar char="–"/>
+            </a:pPr>
+            <a:r>
+              <a:rPr lang="en-US" sz="2400" b="0" u="none" strike="noStrike">
+                <a:solidFill>
+                  <a:schemeClr val="dk1"/>
+                </a:solidFill>
+                <a:effectLst/>
+                <a:uFillTx/>
+                <a:latin typeface="Calibri"/>
+              </a:rPr>
+              <a:t>Second level</a:t>
+            </a:r>
+            <a:endParaRPr lang="en-US" sz="2400" b="0" u="none" strike="noStrike">
+              <a:solidFill>
+                <a:schemeClr val="dk1"/>
+              </a:solidFill>
+              <a:effectLst/>
+              <a:uFillTx/>
+              <a:latin typeface="Calibri"/>
+            </a:endParaRPr>
+          </a:p>
+          <a:p>
+            <a:pPr marL="1143000" lvl="2" indent="-228600" algn="l" defTabSz="457200">
+              <a:lnSpc>
+                <a:spcPct val="100000"/>
+              </a:lnSpc>
+              <a:spcBef>
+                <a:spcPts val="400"/>
+              </a:spcBef>
+              <a:buClr>
+                <a:srgbClr val="000000"/>
+              </a:buClr>
+              <a:buFont typeface="Arial"/>
+              <a:buChar char="•"/>
+            </a:pPr>
+            <a:r>
+              <a:rPr lang="en-US" sz="2000" b="0" u="none" strike="noStrike">
+                <a:solidFill>
+                  <a:schemeClr val="dk1"/>
+                </a:solidFill>
+                <a:effectLst/>
+                <a:uFillTx/>
+                <a:latin typeface="Calibri"/>
+              </a:rPr>
+              <a:t>Third level</a:t>
+            </a:r>
+            <a:endParaRPr lang="en-US" sz="2000" b="0" u="none" strike="noStrike">
+              <a:solidFill>
+                <a:schemeClr val="dk1"/>
+              </a:solidFill>
+              <a:effectLst/>
+              <a:uFillTx/>
+              <a:latin typeface="Calibri"/>
+            </a:endParaRPr>
+          </a:p>
+          <a:p>
+            <a:pPr marL="1600200" lvl="3" indent="-228600" algn="l" defTabSz="457200">
+              <a:lnSpc>
+                <a:spcPct val="100000"/>
+              </a:lnSpc>
+              <a:spcBef>
+                <a:spcPts val="360"/>
+              </a:spcBef>
+              <a:buClr>
+                <a:srgbClr val="000000"/>
+              </a:buClr>
+              <a:buFont typeface="Arial"/>
+              <a:buChar char="–"/>
+            </a:pPr>
+            <a:r>
+              <a:rPr lang="en-US" sz="1800" b="0" u="none" strike="noStrike">
+                <a:solidFill>
+                  <a:schemeClr val="dk1"/>
+                </a:solidFill>
+                <a:effectLst/>
+                <a:uFillTx/>
+                <a:latin typeface="Calibri"/>
+              </a:rPr>
+              <a:t>Fourth level</a:t>
+            </a:r>
+            <a:endParaRPr lang="en-US" sz="1800" b="0" u="none" strike="noStrike">
+              <a:solidFill>
+                <a:schemeClr val="dk1"/>
+              </a:solidFill>
+              <a:effectLst/>
+              <a:uFillTx/>
+              <a:latin typeface="Calibri"/>
+            </a:endParaRPr>
+          </a:p>
+          <a:p>
+            <a:pPr marL="2057400" lvl="4" indent="-228600" algn="l" defTabSz="457200">
+              <a:lnSpc>
+                <a:spcPct val="100000"/>
+              </a:lnSpc>
+              <a:spcBef>
+                <a:spcPts val="360"/>
+              </a:spcBef>
+              <a:buClr>
+                <a:srgbClr val="000000"/>
+              </a:buClr>
+              <a:buFont typeface="Arial"/>
+              <a:buChar char="»"/>
+            </a:pPr>
+            <a:r>
+              <a:rPr lang="en-US" sz="1800" b="0" u="none" strike="noStrike">
+                <a:solidFill>
+                  <a:schemeClr val="dk1"/>
+                </a:solidFill>
+                <a:effectLst/>
+                <a:uFillTx/>
+                <a:latin typeface="Calibri"/>
+              </a:rPr>
+              <a:t>Fifth level</a:t>
+            </a:r>
+            <a:endParaRPr lang="en-US" sz="1800" b="0" u="none" strike="noStrike">
+              <a:solidFill>
+                <a:schemeClr val="dk1"/>
+              </a:solidFill>
+              <a:effectLst/>
+              <a:uFillTx/>
+              <a:latin typeface="Calibri"/>
+            </a:endParaRPr>
+          </a:p>
+        </p:txBody>
+      </p:sp>
+      <p:sp>
+        <p:nvSpPr>
+          <p:cNvPr id="20" name="PlaceHolder 4"/>
+          <p:cNvSpPr>
+            <a:spLocks noGrp="1"/>
+          </p:cNvSpPr>
+          <p:nvPr>
+            <p:ph type="dt" idx="10"/>
+          </p:nvPr>
+        </p:nvSpPr>
+        <p:spPr>
+          <a:xfrm>
+            <a:off x="457200" y="6356520"/>
+            <a:ext cx="2132280" cy="363600"/>
+          </a:xfrm>
+          <a:prstGeom prst="rect">
+            <a:avLst/>
+          </a:prstGeom>
+          <a:noFill/>
+          <a:ln w="0">
+            <a:noFill/>
+          </a:ln>
+        </p:spPr>
+        <p:txBody>
+          <a:bodyPr lIns="91440" tIns="45720" rIns="91440" bIns="45720" anchor="ctr">
+            <a:noAutofit/>
+          </a:bodyPr>
+          <a:lstStyle>
+            <a:lvl1pPr indent="0" algn="l" defTabSz="457200">
+              <a:lnSpc>
+                <a:spcPct val="100000"/>
+              </a:lnSpc>
+              <a:buNone/>
+              <a:tabLst>
+                <a:tab pos="0" algn="l"/>
+              </a:tabLst>
+              <a:defRPr lang="en-US" sz="1200" b="0" u="none" strike="noStrike">
+                <a:solidFill>
+                  <a:schemeClr val="dk1">
+                    <a:tint val="75000"/>
+                  </a:schemeClr>
+                </a:solidFill>
+                <a:effectLst/>
+                <a:uFillTx/>
+                <a:latin typeface="Calibri"/>
+              </a:defRPr>
+            </a:lvl1pPr>
+          </a:lstStyle>
+          <a:p>
+            <a:pPr indent="0" algn="l" defTabSz="457200">
+              <a:lnSpc>
+                <a:spcPct val="100000"/>
+              </a:lnSpc>
+              <a:buNone/>
+              <a:tabLst>
+                <a:tab pos="0" algn="l"/>
+              </a:tabLst>
+            </a:pPr>
+            <a:r>
+              <a:rPr lang="en-US" sz="1200" b="0" u="none" strike="noStrike">
+                <a:solidFill>
+                  <a:schemeClr val="dk1">
+                    <a:tint val="75000"/>
+                  </a:schemeClr>
+                </a:solidFill>
+                <a:effectLst/>
+                <a:uFillTx/>
+                <a:latin typeface="Calibri"/>
+              </a:rPr>
+              <a:t>&lt;date/time&gt;</a:t>
+            </a:r>
+            <a:endParaRPr lang="en-US" sz="1200" b="0" u="none" strike="noStrike">
+              <a:solidFill>
+                <a:srgbClr val="000000"/>
+              </a:solidFill>
+              <a:effectLst/>
+              <a:uFillTx/>
+              <a:latin typeface="Times New Roman"/>
+            </a:endParaRPr>
+          </a:p>
+        </p:txBody>
+      </p:sp>
+      <p:sp>
+        <p:nvSpPr>
+          <p:cNvPr id="21" name="PlaceHolder 5"/>
+          <p:cNvSpPr>
+            <a:spLocks noGrp="1"/>
+          </p:cNvSpPr>
+          <p:nvPr>
+            <p:ph type="ftr" idx="11"/>
+          </p:nvPr>
+        </p:nvSpPr>
+        <p:spPr>
+          <a:xfrm>
+            <a:off x="3124080" y="6356520"/>
+            <a:ext cx="2894040" cy="363600"/>
+          </a:xfrm>
+          <a:prstGeom prst="rect">
+            <a:avLst/>
+          </a:prstGeom>
+          <a:noFill/>
+          <a:ln w="0">
+            <a:noFill/>
+          </a:ln>
+        </p:spPr>
+        <p:txBody>
+          <a:bodyPr lIns="91440" tIns="45720" rIns="91440" bIns="45720" anchor="ctr">
+            <a:noAutofit/>
+          </a:bodyPr>
+          <a:lstStyle>
+            <a:lvl1pPr indent="0" algn="ctr">
+              <a:lnSpc>
+                <a:spcPct val="100000"/>
+              </a:lnSpc>
+              <a:buNone/>
+              <a:tabLst>
+                <a:tab pos="0" algn="l"/>
+              </a:tabLst>
+              <a:defRPr lang="en-US" sz="1400" b="0" u="none" strike="noStrike">
+                <a:solidFill>
+                  <a:srgbClr val="000000"/>
+                </a:solidFill>
+                <a:effectLst/>
+                <a:uFillTx/>
+                <a:latin typeface="Times New Roman"/>
+              </a:defRPr>
+            </a:lvl1pPr>
+          </a:lstStyle>
+          <a:p>
+            <a:pPr indent="0" algn="ctr">
+              <a:lnSpc>
+                <a:spcPct val="100000"/>
+              </a:lnSpc>
+              <a:buNone/>
+              <a:tabLst>
+                <a:tab pos="0" algn="l"/>
+              </a:tabLst>
+            </a:pPr>
+            <a:r>
+              <a:rPr lang="en-US" sz="1400" b="0" u="none" strike="noStrike">
+                <a:solidFill>
+                  <a:srgbClr val="000000"/>
+                </a:solidFill>
+                <a:effectLst/>
+                <a:uFillTx/>
+                <a:latin typeface="Times New Roman"/>
+              </a:rPr>
+              <a:t>&lt;footer&gt;</a:t>
+            </a:r>
+            <a:endParaRPr lang="en-US" sz="1400" b="0" u="none" strike="noStrike">
+              <a:solidFill>
+                <a:srgbClr val="000000"/>
+              </a:solidFill>
+              <a:effectLst/>
+              <a:uFillTx/>
+              <a:latin typeface="Times New Roman"/>
+            </a:endParaRPr>
+          </a:p>
+        </p:txBody>
+      </p:sp>
+      <p:sp>
+        <p:nvSpPr>
+          <p:cNvPr id="22" name="PlaceHolder 6"/>
+          <p:cNvSpPr>
+            <a:spLocks noGrp="1"/>
+          </p:cNvSpPr>
+          <p:nvPr>
+            <p:ph type="sldNum" idx="12"/>
+          </p:nvPr>
+        </p:nvSpPr>
+        <p:spPr>
+          <a:xfrm>
+            <a:off x="6553080" y="6356520"/>
+            <a:ext cx="2132280" cy="363600"/>
+          </a:xfrm>
+          <a:prstGeom prst="rect">
+            <a:avLst/>
+          </a:prstGeom>
+          <a:noFill/>
+          <a:ln w="0">
+            <a:noFill/>
+          </a:ln>
+        </p:spPr>
+        <p:txBody>
+          <a:bodyPr lIns="91440" tIns="45720" rIns="91440" bIns="45720" anchor="ctr">
+            <a:noAutofit/>
+          </a:bodyPr>
+          <a:lstStyle>
+            <a:lvl1pPr indent="0" algn="r" defTabSz="457200">
+              <a:lnSpc>
+                <a:spcPct val="100000"/>
+              </a:lnSpc>
+              <a:buNone/>
+              <a:tabLst>
+                <a:tab pos="0" algn="l"/>
+              </a:tabLst>
+              <a:defRPr lang="en-US" sz="1200" b="0" u="none" strike="noStrike">
+                <a:solidFill>
+                  <a:schemeClr val="dk1">
+                    <a:tint val="75000"/>
+                  </a:schemeClr>
+                </a:solidFill>
+                <a:effectLst/>
+                <a:uFillTx/>
+                <a:latin typeface="Calibri"/>
+              </a:defRPr>
+            </a:lvl1pPr>
+          </a:lstStyle>
+          <a:p>
+            <a:pPr indent="0" algn="r" defTabSz="457200">
+              <a:lnSpc>
+                <a:spcPct val="100000"/>
+              </a:lnSpc>
+              <a:buNone/>
+              <a:tabLst>
+                <a:tab pos="0" algn="l"/>
+              </a:tabLst>
+            </a:pPr>
+            <a:fld id="{17DEB137-0A7E-48EF-A761-1B3D72544725}" type="slidenum">
+              <a:rPr lang="en-US" sz="1200" b="0" u="none" strike="noStrike">
+                <a:solidFill>
+                  <a:schemeClr val="dk1">
+                    <a:tint val="75000"/>
+                  </a:schemeClr>
+                </a:solidFill>
+                <a:effectLst/>
+                <a:uFillTx/>
+                <a:latin typeface="Calibri"/>
+              </a:rPr>
+              <a:t>&lt;number&gt;</a:t>
+            </a:fld>
+            <a:endParaRPr lang="en-US" sz="1200" b="0" u="none" strike="noStrike">
+              <a:solidFill>
+                <a:srgbClr val="000000"/>
+              </a:solidFill>
+              <a:effectLst/>
+              <a:uFillTx/>
+              <a:latin typeface="Times New Roman"/>
+            </a:endParaRPr>
+          </a:p>
+        </p:txBody>
+      </p:sp>
+    </p:spTree>
+  </p:cSld>
+</p:sldLayout>
+</file>
+
+<file path=ppt/slideLayouts/slideLayout5.xml><?xml version="1.0" encoding="utf-8"?>
 <p:sldLayout xmlns:a="http://schemas.openxmlformats.org/drawingml/2006/main" xmlns:p="http://schemas.openxmlformats.org/presentationml/2006/main" xmlns:r="http://schemas.openxmlformats.org/officeDocument/2006/relationships" xmlns:p14="http://schemas.microsoft.com/office/powerpoint/2010/main" xmlns:p15="http://schemas.microsoft.com/office/powerpoint/2012/main" xmlns:mc="http://schemas.openxmlformats.org/markup-compatibility/2006" type="blank" preserve="1">
   <p:cSld name="Comparison">
     <p:bg>
@@ -2149,7 +3764,7 @@
       </p:grpSpPr>
       <p:sp>
         <p:nvSpPr>
-          <p:cNvPr id="8" name="PlaceHolder 1"/>
+          <p:cNvPr id="23" name="PlaceHolder 1"/>
           <p:cNvSpPr>
             <a:spLocks noGrp="1"/>
           </p:cNvSpPr>
@@ -2160,7 +3775,7 @@
         <p:spPr>
           <a:xfrm>
             <a:off x="457200" y="274680"/>
-            <a:ext cx="8228520" cy="1141920"/>
+            <a:ext cx="8228160" cy="1141560"/>
           </a:xfrm>
           <a:prstGeom prst="rect">
             <a:avLst/>
@@ -2212,51 +3827,7 @@
                 <a:uFillTx/>
                 <a:latin typeface="Calibri"/>
               </a:rPr>
-              <a:t>Click </a:t>
-            </a:r>
-            <a:r>
-              <a:rPr lang="en-US" sz="4400" b="0" u="none" strike="noStrike">
-                <a:solidFill>
-                  <a:schemeClr val="dk1"/>
-                </a:solidFill>
-                <a:effectLst/>
-                <a:uFillTx/>
-                <a:latin typeface="Calibri"/>
-              </a:rPr>
-              <a:t>to edit </a:t>
-            </a:r>
-            <a:r>
-              <a:rPr lang="en-US" sz="4400" b="0" u="none" strike="noStrike">
-                <a:solidFill>
-                  <a:schemeClr val="dk1"/>
-                </a:solidFill>
-                <a:effectLst/>
-                <a:uFillTx/>
-                <a:latin typeface="Calibri"/>
-              </a:rPr>
-              <a:t>Master </a:t>
-            </a:r>
-            <a:r>
-              <a:rPr lang="en-US" sz="4400" b="0" u="none" strike="noStrike">
-                <a:solidFill>
-                  <a:schemeClr val="dk1"/>
-                </a:solidFill>
-                <a:effectLst/>
-                <a:uFillTx/>
-                <a:latin typeface="Calibri"/>
-              </a:rPr>
-              <a:t>title </a:t>
-            </a:r>
-            <a:r>
-              <a:rPr lang="en-US" sz="4400" b="0" u="none" strike="noStrike">
-                <a:solidFill>
-                  <a:schemeClr val="dk1"/>
-                </a:solidFill>
-                <a:effectLst/>
-                <a:uFillTx/>
-                <a:latin typeface="Calibri"/>
-              </a:rPr>
-              <a:t>style</a:t>
+              <a:t>Click to edit Master title style</a:t>
             </a:r>
             <a:endParaRPr lang="en-US" sz="4400" b="0" u="none" strike="noStrike">
               <a:solidFill>
@@ -2271,7 +3842,7 @@
       </p:sp>
       <p:sp>
         <p:nvSpPr>
-          <p:cNvPr id="9" name="PlaceHolder 2"/>
+          <p:cNvPr id="24" name="PlaceHolder 2"/>
           <p:cNvSpPr>
             <a:spLocks noGrp="1"/>
           </p:cNvSpPr>
@@ -2282,7 +3853,7 @@
         <p:spPr>
           <a:xfrm>
             <a:off x="457200" y="1535040"/>
-            <a:ext cx="4039200" cy="638640"/>
+            <a:ext cx="4038840" cy="638280"/>
           </a:xfrm>
           <a:prstGeom prst="rect">
             <a:avLst/>
@@ -2355,7 +3926,7 @@
       </p:sp>
       <p:sp>
         <p:nvSpPr>
-          <p:cNvPr id="10" name="PlaceHolder 3"/>
+          <p:cNvPr id="25" name="PlaceHolder 3"/>
           <p:cNvSpPr>
             <a:spLocks noGrp="1"/>
           </p:cNvSpPr>
@@ -2366,7 +3937,7 @@
         <p:spPr>
           <a:xfrm>
             <a:off x="457200" y="2174760"/>
-            <a:ext cx="4039200" cy="3950280"/>
+            <a:ext cx="4038840" cy="3949920"/>
           </a:xfrm>
           <a:prstGeom prst="rect">
             <a:avLst/>
@@ -2691,7 +4262,7 @@
       </p:sp>
       <p:sp>
         <p:nvSpPr>
-          <p:cNvPr id="11" name="PlaceHolder 4"/>
+          <p:cNvPr id="26" name="PlaceHolder 4"/>
           <p:cNvSpPr>
             <a:spLocks noGrp="1"/>
           </p:cNvSpPr>
@@ -2702,7 +4273,7 @@
         <p:spPr>
           <a:xfrm>
             <a:off x="4645080" y="1535040"/>
-            <a:ext cx="4040640" cy="638640"/>
+            <a:ext cx="4040280" cy="638280"/>
           </a:xfrm>
           <a:prstGeom prst="rect">
             <a:avLst/>
@@ -2775,7 +4346,7 @@
       </p:sp>
       <p:sp>
         <p:nvSpPr>
-          <p:cNvPr id="12" name="PlaceHolder 5"/>
+          <p:cNvPr id="27" name="PlaceHolder 5"/>
           <p:cNvSpPr>
             <a:spLocks noGrp="1"/>
           </p:cNvSpPr>
@@ -2786,7 +4357,7 @@
         <p:spPr>
           <a:xfrm>
             <a:off x="4645080" y="2174760"/>
-            <a:ext cx="4040640" cy="3950280"/>
+            <a:ext cx="4040280" cy="3949920"/>
           </a:xfrm>
           <a:prstGeom prst="rect">
             <a:avLst/>
@@ -3111,18 +4682,18 @@
       </p:sp>
       <p:sp>
         <p:nvSpPr>
-          <p:cNvPr id="13" name="PlaceHolder 6"/>
+          <p:cNvPr id="28" name="PlaceHolder 6"/>
           <p:cNvSpPr>
             <a:spLocks noGrp="1"/>
           </p:cNvSpPr>
           <p:nvPr>
-            <p:ph type="dt" idx="4"/>
+            <p:ph type="dt" idx="13"/>
           </p:nvPr>
         </p:nvSpPr>
         <p:spPr>
           <a:xfrm>
             <a:off x="457200" y="6356520"/>
-            <a:ext cx="2132640" cy="363960"/>
+            <a:ext cx="2132280" cy="363600"/>
           </a:xfrm>
           <a:prstGeom prst="rect">
             <a:avLst/>
@@ -3193,18 +4764,18 @@
       </p:sp>
       <p:sp>
         <p:nvSpPr>
-          <p:cNvPr id="14" name="PlaceHolder 7"/>
+          <p:cNvPr id="29" name="PlaceHolder 7"/>
           <p:cNvSpPr>
             <a:spLocks noGrp="1"/>
           </p:cNvSpPr>
           <p:nvPr>
-            <p:ph type="ftr" idx="5"/>
+            <p:ph type="ftr" idx="14"/>
           </p:nvPr>
         </p:nvSpPr>
         <p:spPr>
           <a:xfrm>
             <a:off x="3124080" y="6356520"/>
-            <a:ext cx="2894400" cy="363960"/>
+            <a:ext cx="2894040" cy="363600"/>
           </a:xfrm>
           <a:prstGeom prst="rect">
             <a:avLst/>
@@ -3271,18 +4842,18 @@
       </p:sp>
       <p:sp>
         <p:nvSpPr>
-          <p:cNvPr id="15" name="PlaceHolder 8"/>
+          <p:cNvPr id="30" name="PlaceHolder 8"/>
           <p:cNvSpPr>
             <a:spLocks noGrp="1"/>
           </p:cNvSpPr>
           <p:nvPr>
-            <p:ph type="sldNum" idx="6"/>
+            <p:ph type="sldNum" idx="15"/>
           </p:nvPr>
         </p:nvSpPr>
         <p:spPr>
           <a:xfrm>
             <a:off x="6553080" y="6356520"/>
-            <a:ext cx="2132640" cy="363960"/>
+            <a:ext cx="2132280" cy="363600"/>
           </a:xfrm>
           <a:prstGeom prst="rect">
             <a:avLst/>
@@ -3327,1993 +4898,7 @@
                 <a:tab pos="0" algn="l"/>
               </a:tabLst>
             </a:pPr>
-            <a:fld id="{A8AD439F-331E-4DDE-AA18-56A22D72B0F0}" type="slidenum">
-              <a:rPr lang="en-US" sz="1200" b="0" u="none" strike="noStrike">
-                <a:solidFill>
-                  <a:schemeClr val="dk1">
-                    <a:tint val="75000"/>
-                  </a:schemeClr>
-                </a:solidFill>
-                <a:effectLst/>
-                <a:uFillTx/>
-                <a:latin typeface="Calibri"/>
-              </a:rPr>
-              <a:t>&lt;number&gt;</a:t>
-            </a:fld>
-            <a:endParaRPr lang="en-US" sz="1200" b="0" u="none" strike="noStrike">
-              <a:solidFill>
-                <a:srgbClr val="000000"/>
-              </a:solidFill>
-              <a:effectLst/>
-              <a:uFillTx/>
-              <a:latin typeface="Times New Roman"/>
-            </a:endParaRPr>
-          </a:p>
-        </p:txBody>
-      </p:sp>
-    </p:spTree>
-  </p:cSld>
-</p:sldLayout>
-</file>
-
-<file path=ppt/slideLayouts/slideLayout3.xml><?xml version="1.0" encoding="utf-8"?>
-<p:sldLayout xmlns:a="http://schemas.openxmlformats.org/drawingml/2006/main" xmlns:p="http://schemas.openxmlformats.org/presentationml/2006/main" xmlns:r="http://schemas.openxmlformats.org/officeDocument/2006/relationships" xmlns:p14="http://schemas.microsoft.com/office/powerpoint/2010/main" xmlns:p15="http://schemas.microsoft.com/office/powerpoint/2012/main" xmlns:mc="http://schemas.openxmlformats.org/markup-compatibility/2006" type="titleOnly" preserve="1">
-  <p:cSld name="Title Only">
-    <p:bg>
-      <p:bgPr>
-        <a:solidFill>
-          <a:srgbClr val="FFFFFF"/>
-        </a:solidFill>
-      </p:bgPr>
-    </p:bg>
-    <p:spTree>
-      <p:nvGrpSpPr>
-        <p:cNvPr id="1" name=""/>
-        <p:cNvGrpSpPr/>
-        <p:nvPr/>
-      </p:nvGrpSpPr>
-      <p:grpSpPr>
-        <a:xfrm>
-          <a:off x="0" y="0"/>
-          <a:ext cx="0" cy="0"/>
-          <a:chOff x="0" y="0"/>
-          <a:chExt cx="0" cy="0"/>
-        </a:xfrm>
-      </p:grpSpPr>
-      <p:sp>
-        <p:nvSpPr>
-          <p:cNvPr id="16" name="PlaceHolder 1"/>
-          <p:cNvSpPr>
-            <a:spLocks noGrp="1"/>
-          </p:cNvSpPr>
-          <p:nvPr>
-            <p:ph type="title"/>
-          </p:nvPr>
-        </p:nvSpPr>
-        <p:spPr>
-          <a:xfrm>
-            <a:off x="457200" y="274680"/>
-            <a:ext cx="8228520" cy="1141920"/>
-          </a:xfrm>
-          <a:prstGeom prst="rect">
-            <a:avLst/>
-          </a:prstGeom>
-          <a:noFill/>
-          <a:ln w="0">
-            <a:noFill/>
-          </a:ln>
-        </p:spPr>
-        <p:txBody>
-          <a:bodyPr lIns="91440" tIns="45720" rIns="91440" bIns="45720" anchor="ctr">
-            <a:noAutofit/>
-          </a:bodyPr>
-          <a:lstStyle>
-            <a:lvl1pPr indent="0" algn="ctr" defTabSz="457200">
-              <a:lnSpc>
-                <a:spcPct val="100000"/>
-              </a:lnSpc>
-              <a:buNone/>
-              <a:tabLst>
-                <a:tab pos="0" algn="l"/>
-              </a:tabLst>
-              <a:defRPr lang="en-US" sz="4400" b="0" u="none" strike="noStrike">
-                <a:solidFill>
-                  <a:schemeClr val="dk1"/>
-                </a:solidFill>
-                <a:effectLst/>
-                <a:uFillTx/>
-                <a:latin typeface="Calibri"/>
-              </a:defRPr>
-            </a:lvl1pPr>
-          </a:lstStyle>
-          <a:p>
-            <a:pPr indent="0" algn="ctr" defTabSz="457200">
-              <a:lnSpc>
-                <a:spcPct val="100000"/>
-              </a:lnSpc>
-              <a:buNone/>
-              <a:tabLst>
-                <a:tab pos="0" algn="l"/>
-              </a:tabLst>
-            </a:pPr>
-            <a:r>
-              <a:rPr lang="en-US" sz="4400" b="0" u="none" strike="noStrike">
-                <a:solidFill>
-                  <a:schemeClr val="dk1"/>
-                </a:solidFill>
-                <a:effectLst/>
-                <a:uFillTx/>
-                <a:latin typeface="Calibri"/>
-              </a:rPr>
-              <a:t>Click </a:t>
-            </a:r>
-            <a:r>
-              <a:rPr lang="en-US" sz="4400" b="0" u="none" strike="noStrike">
-                <a:solidFill>
-                  <a:schemeClr val="dk1"/>
-                </a:solidFill>
-                <a:effectLst/>
-                <a:uFillTx/>
-                <a:latin typeface="Calibri"/>
-              </a:rPr>
-              <a:t>to edit </a:t>
-            </a:r>
-            <a:r>
-              <a:rPr lang="en-US" sz="4400" b="0" u="none" strike="noStrike">
-                <a:solidFill>
-                  <a:schemeClr val="dk1"/>
-                </a:solidFill>
-                <a:effectLst/>
-                <a:uFillTx/>
-                <a:latin typeface="Calibri"/>
-              </a:rPr>
-              <a:t>Master </a:t>
-            </a:r>
-            <a:r>
-              <a:rPr lang="en-US" sz="4400" b="0" u="none" strike="noStrike">
-                <a:solidFill>
-                  <a:schemeClr val="dk1"/>
-                </a:solidFill>
-                <a:effectLst/>
-                <a:uFillTx/>
-                <a:latin typeface="Calibri"/>
-              </a:rPr>
-              <a:t>title </a:t>
-            </a:r>
-            <a:r>
-              <a:rPr lang="en-US" sz="4400" b="0" u="none" strike="noStrike">
-                <a:solidFill>
-                  <a:schemeClr val="dk1"/>
-                </a:solidFill>
-                <a:effectLst/>
-                <a:uFillTx/>
-                <a:latin typeface="Calibri"/>
-              </a:rPr>
-              <a:t>style</a:t>
-            </a:r>
-            <a:endParaRPr lang="en-US" sz="4400" b="0" u="none" strike="noStrike">
-              <a:solidFill>
-                <a:schemeClr val="dk1"/>
-              </a:solidFill>
-              <a:effectLst/>
-              <a:uFillTx/>
-              <a:latin typeface="Calibri"/>
-            </a:endParaRPr>
-          </a:p>
-        </p:txBody>
-      </p:sp>
-      <p:sp>
-        <p:nvSpPr>
-          <p:cNvPr id="17" name="PlaceHolder 2"/>
-          <p:cNvSpPr>
-            <a:spLocks noGrp="1"/>
-          </p:cNvSpPr>
-          <p:nvPr>
-            <p:ph type="dt" idx="7"/>
-          </p:nvPr>
-        </p:nvSpPr>
-        <p:spPr>
-          <a:xfrm>
-            <a:off x="457200" y="6356520"/>
-            <a:ext cx="2132640" cy="363960"/>
-          </a:xfrm>
-          <a:prstGeom prst="rect">
-            <a:avLst/>
-          </a:prstGeom>
-          <a:noFill/>
-          <a:ln w="0">
-            <a:noFill/>
-          </a:ln>
-        </p:spPr>
-        <p:txBody>
-          <a:bodyPr lIns="91440" tIns="45720" rIns="91440" bIns="45720" anchor="ctr">
-            <a:noAutofit/>
-          </a:bodyPr>
-          <a:lstStyle>
-            <a:lvl1pPr indent="0" algn="l" defTabSz="457200">
-              <a:lnSpc>
-                <a:spcPct val="100000"/>
-              </a:lnSpc>
-              <a:buNone/>
-              <a:tabLst>
-                <a:tab pos="0" algn="l"/>
-              </a:tabLst>
-              <a:defRPr lang="en-US" sz="1200" b="0" u="none" strike="noStrike">
-                <a:solidFill>
-                  <a:schemeClr val="dk1">
-                    <a:tint val="75000"/>
-                  </a:schemeClr>
-                </a:solidFill>
-                <a:effectLst/>
-                <a:uFillTx/>
-                <a:latin typeface="Calibri"/>
-              </a:defRPr>
-            </a:lvl1pPr>
-          </a:lstStyle>
-          <a:p>
-            <a:pPr indent="0" algn="l" defTabSz="457200">
-              <a:lnSpc>
-                <a:spcPct val="100000"/>
-              </a:lnSpc>
-              <a:buNone/>
-              <a:tabLst>
-                <a:tab pos="0" algn="l"/>
-              </a:tabLst>
-            </a:pPr>
-            <a:r>
-              <a:rPr lang="en-US" sz="1200" b="0" u="none" strike="noStrike">
-                <a:solidFill>
-                  <a:schemeClr val="dk1">
-                    <a:tint val="75000"/>
-                  </a:schemeClr>
-                </a:solidFill>
-                <a:effectLst/>
-                <a:uFillTx/>
-                <a:latin typeface="Calibri"/>
-              </a:rPr>
-              <a:t>&lt;date/time&gt;</a:t>
-            </a:r>
-            <a:endParaRPr lang="en-US" sz="1200" b="0" u="none" strike="noStrike">
-              <a:solidFill>
-                <a:srgbClr val="000000"/>
-              </a:solidFill>
-              <a:effectLst/>
-              <a:uFillTx/>
-              <a:latin typeface="Times New Roman"/>
-            </a:endParaRPr>
-          </a:p>
-        </p:txBody>
-      </p:sp>
-      <p:sp>
-        <p:nvSpPr>
-          <p:cNvPr id="18" name="PlaceHolder 3"/>
-          <p:cNvSpPr>
-            <a:spLocks noGrp="1"/>
-          </p:cNvSpPr>
-          <p:nvPr>
-            <p:ph type="ftr" idx="8"/>
-          </p:nvPr>
-        </p:nvSpPr>
-        <p:spPr>
-          <a:xfrm>
-            <a:off x="3124080" y="6356520"/>
-            <a:ext cx="2894400" cy="363960"/>
-          </a:xfrm>
-          <a:prstGeom prst="rect">
-            <a:avLst/>
-          </a:prstGeom>
-          <a:noFill/>
-          <a:ln w="0">
-            <a:noFill/>
-          </a:ln>
-        </p:spPr>
-        <p:txBody>
-          <a:bodyPr lIns="91440" tIns="45720" rIns="91440" bIns="45720" anchor="ctr">
-            <a:noAutofit/>
-          </a:bodyPr>
-          <a:lstStyle>
-            <a:lvl1pPr indent="0" algn="ctr">
-              <a:lnSpc>
-                <a:spcPct val="100000"/>
-              </a:lnSpc>
-              <a:buNone/>
-              <a:tabLst>
-                <a:tab pos="0" algn="l"/>
-              </a:tabLst>
-              <a:defRPr lang="en-US" sz="1400" b="0" u="none" strike="noStrike">
-                <a:solidFill>
-                  <a:srgbClr val="000000"/>
-                </a:solidFill>
-                <a:effectLst/>
-                <a:uFillTx/>
-                <a:latin typeface="Times New Roman"/>
-              </a:defRPr>
-            </a:lvl1pPr>
-          </a:lstStyle>
-          <a:p>
-            <a:pPr indent="0" algn="ctr">
-              <a:lnSpc>
-                <a:spcPct val="100000"/>
-              </a:lnSpc>
-              <a:buNone/>
-              <a:tabLst>
-                <a:tab pos="0" algn="l"/>
-              </a:tabLst>
-            </a:pPr>
-            <a:r>
-              <a:rPr lang="en-US" sz="1400" b="0" u="none" strike="noStrike">
-                <a:solidFill>
-                  <a:srgbClr val="000000"/>
-                </a:solidFill>
-                <a:effectLst/>
-                <a:uFillTx/>
-                <a:latin typeface="Times New Roman"/>
-              </a:rPr>
-              <a:t>&lt;footer&gt;</a:t>
-            </a:r>
-            <a:endParaRPr lang="en-US" sz="1400" b="0" u="none" strike="noStrike">
-              <a:solidFill>
-                <a:srgbClr val="000000"/>
-              </a:solidFill>
-              <a:effectLst/>
-              <a:uFillTx/>
-              <a:latin typeface="Times New Roman"/>
-            </a:endParaRPr>
-          </a:p>
-        </p:txBody>
-      </p:sp>
-      <p:sp>
-        <p:nvSpPr>
-          <p:cNvPr id="19" name="PlaceHolder 4"/>
-          <p:cNvSpPr>
-            <a:spLocks noGrp="1"/>
-          </p:cNvSpPr>
-          <p:nvPr>
-            <p:ph type="sldNum" idx="9"/>
-          </p:nvPr>
-        </p:nvSpPr>
-        <p:spPr>
-          <a:xfrm>
-            <a:off x="6553080" y="6356520"/>
-            <a:ext cx="2132640" cy="363960"/>
-          </a:xfrm>
-          <a:prstGeom prst="rect">
-            <a:avLst/>
-          </a:prstGeom>
-          <a:noFill/>
-          <a:ln w="0">
-            <a:noFill/>
-          </a:ln>
-        </p:spPr>
-        <p:txBody>
-          <a:bodyPr lIns="91440" tIns="45720" rIns="91440" bIns="45720" anchor="ctr">
-            <a:noAutofit/>
-          </a:bodyPr>
-          <a:lstStyle>
-            <a:lvl1pPr indent="0" algn="r" defTabSz="457200">
-              <a:lnSpc>
-                <a:spcPct val="100000"/>
-              </a:lnSpc>
-              <a:buNone/>
-              <a:tabLst>
-                <a:tab pos="0" algn="l"/>
-              </a:tabLst>
-              <a:defRPr lang="en-US" sz="1200" b="0" u="none" strike="noStrike">
-                <a:solidFill>
-                  <a:schemeClr val="dk1">
-                    <a:tint val="75000"/>
-                  </a:schemeClr>
-                </a:solidFill>
-                <a:effectLst/>
-                <a:uFillTx/>
-                <a:latin typeface="Calibri"/>
-              </a:defRPr>
-            </a:lvl1pPr>
-          </a:lstStyle>
-          <a:p>
-            <a:pPr indent="0" algn="r" defTabSz="457200">
-              <a:lnSpc>
-                <a:spcPct val="100000"/>
-              </a:lnSpc>
-              <a:buNone/>
-              <a:tabLst>
-                <a:tab pos="0" algn="l"/>
-              </a:tabLst>
-            </a:pPr>
-            <a:fld id="{289F35BB-D7AF-4EEE-98C5-2D74520C7451}" type="slidenum">
-              <a:rPr lang="en-US" sz="1200" b="0" u="none" strike="noStrike">
-                <a:solidFill>
-                  <a:schemeClr val="dk1">
-                    <a:tint val="75000"/>
-                  </a:schemeClr>
-                </a:solidFill>
-                <a:effectLst/>
-                <a:uFillTx/>
-                <a:latin typeface="Calibri"/>
-              </a:rPr>
-              <a:t>&lt;number&gt;</a:t>
-            </a:fld>
-            <a:endParaRPr lang="en-US" sz="1200" b="0" u="none" strike="noStrike">
-              <a:solidFill>
-                <a:srgbClr val="000000"/>
-              </a:solidFill>
-              <a:effectLst/>
-              <a:uFillTx/>
-              <a:latin typeface="Times New Roman"/>
-            </a:endParaRPr>
-          </a:p>
-        </p:txBody>
-      </p:sp>
-    </p:spTree>
-  </p:cSld>
-</p:sldLayout>
-</file>
-
-<file path=ppt/slideLayouts/slideLayout4.xml><?xml version="1.0" encoding="utf-8"?>
-<p:sldLayout xmlns:a="http://schemas.openxmlformats.org/drawingml/2006/main" xmlns:p="http://schemas.openxmlformats.org/presentationml/2006/main" xmlns:r="http://schemas.openxmlformats.org/officeDocument/2006/relationships" xmlns:p14="http://schemas.microsoft.com/office/powerpoint/2010/main" xmlns:p15="http://schemas.microsoft.com/office/powerpoint/2012/main" xmlns:mc="http://schemas.openxmlformats.org/markup-compatibility/2006" type="blank" preserve="1">
-  <p:cSld name="Blank">
-    <p:bg>
-      <p:bgPr>
-        <a:solidFill>
-          <a:srgbClr val="FFFFFF"/>
-        </a:solidFill>
-      </p:bgPr>
-    </p:bg>
-    <p:spTree>
-      <p:nvGrpSpPr>
-        <p:cNvPr id="1" name=""/>
-        <p:cNvGrpSpPr/>
-        <p:nvPr/>
-      </p:nvGrpSpPr>
-      <p:grpSpPr>
-        <a:xfrm>
-          <a:off x="0" y="0"/>
-          <a:ext cx="0" cy="0"/>
-          <a:chOff x="0" y="0"/>
-          <a:chExt cx="0" cy="0"/>
-        </a:xfrm>
-      </p:grpSpPr>
-      <p:sp>
-        <p:nvSpPr>
-          <p:cNvPr id="20" name="PlaceHolder 1"/>
-          <p:cNvSpPr>
-            <a:spLocks noGrp="1"/>
-          </p:cNvSpPr>
-          <p:nvPr>
-            <p:ph type="dt" idx="10"/>
-          </p:nvPr>
-        </p:nvSpPr>
-        <p:spPr>
-          <a:xfrm>
-            <a:off x="457200" y="6356520"/>
-            <a:ext cx="2132640" cy="363960"/>
-          </a:xfrm>
-          <a:prstGeom prst="rect">
-            <a:avLst/>
-          </a:prstGeom>
-          <a:noFill/>
-          <a:ln w="0">
-            <a:noFill/>
-          </a:ln>
-        </p:spPr>
-        <p:txBody>
-          <a:bodyPr lIns="91440" tIns="45720" rIns="91440" bIns="45720" anchor="ctr">
-            <a:noAutofit/>
-          </a:bodyPr>
-          <a:lstStyle>
-            <a:lvl1pPr indent="0" algn="l" defTabSz="457200">
-              <a:lnSpc>
-                <a:spcPct val="100000"/>
-              </a:lnSpc>
-              <a:buNone/>
-              <a:tabLst>
-                <a:tab pos="0" algn="l"/>
-              </a:tabLst>
-              <a:defRPr lang="en-US" sz="1200" b="0" u="none" strike="noStrike">
-                <a:solidFill>
-                  <a:schemeClr val="dk1">
-                    <a:tint val="75000"/>
-                  </a:schemeClr>
-                </a:solidFill>
-                <a:effectLst/>
-                <a:uFillTx/>
-                <a:latin typeface="Calibri"/>
-              </a:defRPr>
-            </a:lvl1pPr>
-          </a:lstStyle>
-          <a:p>
-            <a:pPr indent="0" algn="l" defTabSz="457200">
-              <a:lnSpc>
-                <a:spcPct val="100000"/>
-              </a:lnSpc>
-              <a:buNone/>
-              <a:tabLst>
-                <a:tab pos="0" algn="l"/>
-              </a:tabLst>
-            </a:pPr>
-            <a:r>
-              <a:rPr lang="en-US" sz="1200" b="0" u="none" strike="noStrike">
-                <a:solidFill>
-                  <a:schemeClr val="dk1">
-                    <a:tint val="75000"/>
-                  </a:schemeClr>
-                </a:solidFill>
-                <a:effectLst/>
-                <a:uFillTx/>
-                <a:latin typeface="Calibri"/>
-              </a:rPr>
-              <a:t>&lt;date/time&gt;</a:t>
-            </a:r>
-            <a:endParaRPr lang="en-US" sz="1200" b="0" u="none" strike="noStrike">
-              <a:solidFill>
-                <a:srgbClr val="000000"/>
-              </a:solidFill>
-              <a:effectLst/>
-              <a:uFillTx/>
-              <a:latin typeface="Times New Roman"/>
-            </a:endParaRPr>
-          </a:p>
-        </p:txBody>
-      </p:sp>
-      <p:sp>
-        <p:nvSpPr>
-          <p:cNvPr id="21" name="PlaceHolder 2"/>
-          <p:cNvSpPr>
-            <a:spLocks noGrp="1"/>
-          </p:cNvSpPr>
-          <p:nvPr>
-            <p:ph type="ftr" idx="11"/>
-          </p:nvPr>
-        </p:nvSpPr>
-        <p:spPr>
-          <a:xfrm>
-            <a:off x="3124080" y="6356520"/>
-            <a:ext cx="2894400" cy="363960"/>
-          </a:xfrm>
-          <a:prstGeom prst="rect">
-            <a:avLst/>
-          </a:prstGeom>
-          <a:noFill/>
-          <a:ln w="0">
-            <a:noFill/>
-          </a:ln>
-        </p:spPr>
-        <p:txBody>
-          <a:bodyPr lIns="91440" tIns="45720" rIns="91440" bIns="45720" anchor="ctr">
-            <a:noAutofit/>
-          </a:bodyPr>
-          <a:lstStyle>
-            <a:lvl1pPr indent="0" algn="ctr">
-              <a:lnSpc>
-                <a:spcPct val="100000"/>
-              </a:lnSpc>
-              <a:buNone/>
-              <a:tabLst>
-                <a:tab pos="0" algn="l"/>
-              </a:tabLst>
-              <a:defRPr lang="en-US" sz="1400" b="0" u="none" strike="noStrike">
-                <a:solidFill>
-                  <a:srgbClr val="000000"/>
-                </a:solidFill>
-                <a:effectLst/>
-                <a:uFillTx/>
-                <a:latin typeface="Times New Roman"/>
-              </a:defRPr>
-            </a:lvl1pPr>
-          </a:lstStyle>
-          <a:p>
-            <a:pPr indent="0" algn="ctr">
-              <a:lnSpc>
-                <a:spcPct val="100000"/>
-              </a:lnSpc>
-              <a:buNone/>
-              <a:tabLst>
-                <a:tab pos="0" algn="l"/>
-              </a:tabLst>
-            </a:pPr>
-            <a:r>
-              <a:rPr lang="en-US" sz="1400" b="0" u="none" strike="noStrike">
-                <a:solidFill>
-                  <a:srgbClr val="000000"/>
-                </a:solidFill>
-                <a:effectLst/>
-                <a:uFillTx/>
-                <a:latin typeface="Times New Roman"/>
-              </a:rPr>
-              <a:t>&lt;footer&gt;</a:t>
-            </a:r>
-            <a:endParaRPr lang="en-US" sz="1400" b="0" u="none" strike="noStrike">
-              <a:solidFill>
-                <a:srgbClr val="000000"/>
-              </a:solidFill>
-              <a:effectLst/>
-              <a:uFillTx/>
-              <a:latin typeface="Times New Roman"/>
-            </a:endParaRPr>
-          </a:p>
-        </p:txBody>
-      </p:sp>
-      <p:sp>
-        <p:nvSpPr>
-          <p:cNvPr id="22" name="PlaceHolder 3"/>
-          <p:cNvSpPr>
-            <a:spLocks noGrp="1"/>
-          </p:cNvSpPr>
-          <p:nvPr>
-            <p:ph type="sldNum" idx="12"/>
-          </p:nvPr>
-        </p:nvSpPr>
-        <p:spPr>
-          <a:xfrm>
-            <a:off x="6553080" y="6356520"/>
-            <a:ext cx="2132640" cy="363960"/>
-          </a:xfrm>
-          <a:prstGeom prst="rect">
-            <a:avLst/>
-          </a:prstGeom>
-          <a:noFill/>
-          <a:ln w="0">
-            <a:noFill/>
-          </a:ln>
-        </p:spPr>
-        <p:txBody>
-          <a:bodyPr lIns="91440" tIns="45720" rIns="91440" bIns="45720" anchor="ctr">
-            <a:noAutofit/>
-          </a:bodyPr>
-          <a:lstStyle>
-            <a:lvl1pPr indent="0" algn="r" defTabSz="457200">
-              <a:lnSpc>
-                <a:spcPct val="100000"/>
-              </a:lnSpc>
-              <a:buNone/>
-              <a:tabLst>
-                <a:tab pos="0" algn="l"/>
-              </a:tabLst>
-              <a:defRPr lang="en-US" sz="1200" b="0" u="none" strike="noStrike">
-                <a:solidFill>
-                  <a:schemeClr val="dk1">
-                    <a:tint val="75000"/>
-                  </a:schemeClr>
-                </a:solidFill>
-                <a:effectLst/>
-                <a:uFillTx/>
-                <a:latin typeface="Calibri"/>
-              </a:defRPr>
-            </a:lvl1pPr>
-          </a:lstStyle>
-          <a:p>
-            <a:pPr indent="0" algn="r" defTabSz="457200">
-              <a:lnSpc>
-                <a:spcPct val="100000"/>
-              </a:lnSpc>
-              <a:buNone/>
-              <a:tabLst>
-                <a:tab pos="0" algn="l"/>
-              </a:tabLst>
-            </a:pPr>
-            <a:fld id="{A79877AB-044A-45F0-8D57-BA3F2C6BD881}" type="slidenum">
-              <a:rPr lang="en-US" sz="1200" b="0" u="none" strike="noStrike">
-                <a:solidFill>
-                  <a:schemeClr val="dk1">
-                    <a:tint val="75000"/>
-                  </a:schemeClr>
-                </a:solidFill>
-                <a:effectLst/>
-                <a:uFillTx/>
-                <a:latin typeface="Calibri"/>
-              </a:rPr>
-              <a:t>&lt;number&gt;</a:t>
-            </a:fld>
-            <a:endParaRPr lang="en-US" sz="1200" b="0" u="none" strike="noStrike">
-              <a:solidFill>
-                <a:srgbClr val="000000"/>
-              </a:solidFill>
-              <a:effectLst/>
-              <a:uFillTx/>
-              <a:latin typeface="Times New Roman"/>
-            </a:endParaRPr>
-          </a:p>
-        </p:txBody>
-      </p:sp>
-      <p:sp>
-        <p:nvSpPr>
-          <p:cNvPr id="23" name="PlaceHolder 4"/>
-          <p:cNvSpPr>
-            <a:spLocks noGrp="1"/>
-          </p:cNvSpPr>
-          <p:nvPr>
-            <p:ph type="title"/>
-          </p:nvPr>
-        </p:nvSpPr>
-        <p:spPr>
-          <a:xfrm>
-            <a:off x="609480" y="273600"/>
-            <a:ext cx="10971360" cy="1144080"/>
-          </a:xfrm>
-          <a:prstGeom prst="rect">
-            <a:avLst/>
-          </a:prstGeom>
-          <a:noFill/>
-          <a:ln w="0">
-            <a:noFill/>
-          </a:ln>
-        </p:spPr>
-        <p:txBody>
-          <a:bodyPr lIns="0" tIns="0" rIns="0" bIns="0" anchor="ctr">
-            <a:noAutofit/>
-          </a:bodyPr>
-          <a:lstStyle>
-            <a:lvl1pPr indent="0" algn="ctr" defTabSz="457200">
-              <a:lnSpc>
-                <a:spcPct val="100000"/>
-              </a:lnSpc>
-              <a:buNone/>
-              <a:tabLst>
-                <a:tab pos="0" algn="l"/>
-              </a:tabLst>
-              <a:defRPr lang="en-US" sz="4400" b="0" u="none" strike="noStrike">
-                <a:solidFill>
-                  <a:schemeClr val="dk1"/>
-                </a:solidFill>
-                <a:effectLst/>
-                <a:uFillTx/>
-                <a:latin typeface="Calibri"/>
-              </a:defRPr>
-            </a:lvl1pPr>
-          </a:lstStyle>
-          <a:p>
-            <a:pPr indent="0" algn="ctr" defTabSz="457200">
-              <a:lnSpc>
-                <a:spcPct val="100000"/>
-              </a:lnSpc>
-              <a:buNone/>
-              <a:tabLst>
-                <a:tab pos="0" algn="l"/>
-              </a:tabLst>
-            </a:pPr>
-            <a:r>
-              <a:rPr lang="en-US" sz="4400" b="0" u="none" strike="noStrike">
-                <a:solidFill>
-                  <a:schemeClr val="dk1"/>
-                </a:solidFill>
-                <a:effectLst/>
-                <a:uFillTx/>
-                <a:latin typeface="Calibri"/>
-              </a:rPr>
-              <a:t>Click </a:t>
-            </a:r>
-            <a:r>
-              <a:rPr lang="en-US" sz="4400" b="0" u="none" strike="noStrike">
-                <a:solidFill>
-                  <a:schemeClr val="dk1"/>
-                </a:solidFill>
-                <a:effectLst/>
-                <a:uFillTx/>
-                <a:latin typeface="Calibri"/>
-              </a:rPr>
-              <a:t>to edit </a:t>
-            </a:r>
-            <a:r>
-              <a:rPr lang="en-US" sz="4400" b="0" u="none" strike="noStrike">
-                <a:solidFill>
-                  <a:schemeClr val="dk1"/>
-                </a:solidFill>
-                <a:effectLst/>
-                <a:uFillTx/>
-                <a:latin typeface="Calibri"/>
-              </a:rPr>
-              <a:t>the </a:t>
-            </a:r>
-            <a:r>
-              <a:rPr lang="en-US" sz="4400" b="0" u="none" strike="noStrike">
-                <a:solidFill>
-                  <a:schemeClr val="dk1"/>
-                </a:solidFill>
-                <a:effectLst/>
-                <a:uFillTx/>
-                <a:latin typeface="Calibri"/>
-              </a:rPr>
-              <a:t>title </a:t>
-            </a:r>
-            <a:r>
-              <a:rPr lang="en-US" sz="4400" b="0" u="none" strike="noStrike">
-                <a:solidFill>
-                  <a:schemeClr val="dk1"/>
-                </a:solidFill>
-                <a:effectLst/>
-                <a:uFillTx/>
-                <a:latin typeface="Calibri"/>
-              </a:rPr>
-              <a:t>text </a:t>
-            </a:r>
-            <a:r>
-              <a:rPr lang="en-US" sz="4400" b="0" u="none" strike="noStrike">
-                <a:solidFill>
-                  <a:schemeClr val="dk1"/>
-                </a:solidFill>
-                <a:effectLst/>
-                <a:uFillTx/>
-                <a:latin typeface="Calibri"/>
-              </a:rPr>
-              <a:t>format</a:t>
-            </a:r>
-            <a:endParaRPr lang="en-US" sz="4400" b="0" u="none" strike="noStrike">
-              <a:solidFill>
-                <a:schemeClr val="dk1"/>
-              </a:solidFill>
-              <a:effectLst/>
-              <a:uFillTx/>
-              <a:latin typeface="Calibri"/>
-            </a:endParaRPr>
-          </a:p>
-        </p:txBody>
-      </p:sp>
-      <p:sp>
-        <p:nvSpPr>
-          <p:cNvPr id="24" name="PlaceHolder 5"/>
-          <p:cNvSpPr>
-            <a:spLocks noGrp="1"/>
-          </p:cNvSpPr>
-          <p:nvPr>
-            <p:ph type="body"/>
-          </p:nvPr>
-        </p:nvSpPr>
-        <p:spPr>
-          <a:xfrm>
-            <a:off x="609480" y="1604520"/>
-            <a:ext cx="10971360" cy="3976560"/>
-          </a:xfrm>
-          <a:prstGeom prst="rect">
-            <a:avLst/>
-          </a:prstGeom>
-          <a:noFill/>
-          <a:ln w="0">
-            <a:noFill/>
-          </a:ln>
-        </p:spPr>
-        <p:txBody>
-          <a:bodyPr lIns="0" tIns="0" rIns="0" bIns="0" anchor="t">
-            <a:normAutofit/>
-          </a:bodyPr>
-          <a:lstStyle>
-            <a:lvl1pPr algn="l" defTabSz="457200">
-              <a:lnSpc>
-                <a:spcPct val="100000"/>
-              </a:lnSpc>
-              <a:spcBef>
-                <a:spcPts val="641"/>
-              </a:spcBef>
-              <a:buClr>
-                <a:srgbClr val="000000"/>
-              </a:buClr>
-              <a:buFont typeface="Arial"/>
-              <a:buChar char="•"/>
-              <a:defRPr lang="en-US" sz="3200" b="0" u="none" strike="noStrike">
-                <a:solidFill>
-                  <a:schemeClr val="dk1"/>
-                </a:solidFill>
-                <a:effectLst/>
-                <a:uFillTx/>
-                <a:latin typeface="Calibri"/>
-              </a:defRPr>
-            </a:lvl1pPr>
-            <a:lvl2pPr lvl="1" algn="l" defTabSz="457200">
-              <a:lnSpc>
-                <a:spcPct val="100000"/>
-              </a:lnSpc>
-              <a:spcBef>
-                <a:spcPts val="561"/>
-              </a:spcBef>
-              <a:buClr>
-                <a:srgbClr val="000000"/>
-              </a:buClr>
-              <a:buSzPct val="75000"/>
-              <a:buFont typeface="Symbol" charset="2"/>
-              <a:buChar char=""/>
-              <a:defRPr lang="en-US" sz="2800" b="0" u="none" strike="noStrike">
-                <a:solidFill>
-                  <a:schemeClr val="dk1"/>
-                </a:solidFill>
-                <a:effectLst/>
-                <a:uFillTx/>
-                <a:latin typeface="Calibri"/>
-              </a:defRPr>
-            </a:lvl2pPr>
-            <a:lvl3pPr lvl="2" algn="l" defTabSz="457200">
-              <a:lnSpc>
-                <a:spcPct val="100000"/>
-              </a:lnSpc>
-              <a:spcBef>
-                <a:spcPts val="479"/>
-              </a:spcBef>
-              <a:buClr>
-                <a:srgbClr val="000000"/>
-              </a:buClr>
-              <a:buSzPct val="45000"/>
-              <a:buFont typeface="Wingdings" charset="2"/>
-              <a:buChar char=""/>
-              <a:defRPr lang="en-US" sz="2400" b="0" u="none" strike="noStrike">
-                <a:solidFill>
-                  <a:schemeClr val="dk1"/>
-                </a:solidFill>
-                <a:effectLst/>
-                <a:uFillTx/>
-                <a:latin typeface="Calibri"/>
-              </a:defRPr>
-            </a:lvl3pPr>
-            <a:lvl4pPr lvl="3" algn="l" defTabSz="457200">
-              <a:lnSpc>
-                <a:spcPct val="100000"/>
-              </a:lnSpc>
-              <a:spcBef>
-                <a:spcPts val="400"/>
-              </a:spcBef>
-              <a:buClr>
-                <a:srgbClr val="000000"/>
-              </a:buClr>
-              <a:buSzPct val="75000"/>
-              <a:buFont typeface="Symbol" charset="2"/>
-              <a:buChar char=""/>
-              <a:defRPr lang="en-US" sz="2000" b="0" u="none" strike="noStrike">
-                <a:solidFill>
-                  <a:schemeClr val="dk1"/>
-                </a:solidFill>
-                <a:effectLst/>
-                <a:uFillTx/>
-                <a:latin typeface="Calibri"/>
-              </a:defRPr>
-            </a:lvl4pPr>
-            <a:lvl5pPr lvl="4" algn="l" defTabSz="457200">
-              <a:lnSpc>
-                <a:spcPct val="100000"/>
-              </a:lnSpc>
-              <a:spcBef>
-                <a:spcPts val="400"/>
-              </a:spcBef>
-              <a:buClr>
-                <a:srgbClr val="000000"/>
-              </a:buClr>
-              <a:buSzPct val="45000"/>
-              <a:buFont typeface="Wingdings" charset="2"/>
-              <a:buChar char=""/>
-              <a:defRPr lang="en-US" sz="2000" b="0" u="none" strike="noStrike">
-                <a:solidFill>
-                  <a:schemeClr val="dk1"/>
-                </a:solidFill>
-                <a:effectLst/>
-                <a:uFillTx/>
-                <a:latin typeface="Calibri"/>
-              </a:defRPr>
-            </a:lvl5pPr>
-            <a:lvl6pPr lvl="5" algn="l" defTabSz="457200">
-              <a:lnSpc>
-                <a:spcPct val="100000"/>
-              </a:lnSpc>
-              <a:spcBef>
-                <a:spcPts val="283"/>
-              </a:spcBef>
-              <a:buClr>
-                <a:srgbClr val="000000"/>
-              </a:buClr>
-              <a:buSzPct val="45000"/>
-              <a:buFont typeface="Wingdings" charset="2"/>
-              <a:buChar char=""/>
-              <a:defRPr lang="en-US" sz="2000" b="0" u="none" strike="noStrike">
-                <a:solidFill>
-                  <a:schemeClr val="dk1"/>
-                </a:solidFill>
-                <a:effectLst/>
-                <a:uFillTx/>
-                <a:latin typeface="Calibri"/>
-              </a:defRPr>
-            </a:lvl6pPr>
-            <a:lvl7pPr lvl="6" algn="l" defTabSz="457200">
-              <a:lnSpc>
-                <a:spcPct val="100000"/>
-              </a:lnSpc>
-              <a:spcBef>
-                <a:spcPts val="283"/>
-              </a:spcBef>
-              <a:buClr>
-                <a:srgbClr val="000000"/>
-              </a:buClr>
-              <a:buSzPct val="45000"/>
-              <a:buFont typeface="Wingdings" charset="2"/>
-              <a:buChar char=""/>
-              <a:defRPr lang="en-US" sz="2000" b="0" u="none" strike="noStrike">
-                <a:solidFill>
-                  <a:schemeClr val="dk1"/>
-                </a:solidFill>
-                <a:effectLst/>
-                <a:uFillTx/>
-                <a:latin typeface="Calibri"/>
-              </a:defRPr>
-            </a:lvl7pPr>
-          </a:lstStyle>
-          <a:p>
-            <a:pPr marL="343080" indent="-343080" algn="l" defTabSz="457200">
-              <a:lnSpc>
-                <a:spcPct val="100000"/>
-              </a:lnSpc>
-              <a:spcBef>
-                <a:spcPts val="641"/>
-              </a:spcBef>
-              <a:buClr>
-                <a:srgbClr val="000000"/>
-              </a:buClr>
-              <a:buFont typeface="Arial"/>
-              <a:buChar char="•"/>
-            </a:pPr>
-            <a:r>
-              <a:rPr lang="en-US" sz="3200" b="0" u="none" strike="noStrike">
-                <a:solidFill>
-                  <a:schemeClr val="dk1"/>
-                </a:solidFill>
-                <a:effectLst/>
-                <a:uFillTx/>
-                <a:latin typeface="Calibri"/>
-              </a:rPr>
-              <a:t>Click to edit the outline text format</a:t>
-            </a:r>
-            <a:endParaRPr lang="en-US" sz="3200" b="0" u="none" strike="noStrike">
-              <a:solidFill>
-                <a:schemeClr val="dk1"/>
-              </a:solidFill>
-              <a:effectLst/>
-              <a:uFillTx/>
-              <a:latin typeface="Calibri"/>
-            </a:endParaRPr>
-          </a:p>
-          <a:p>
-            <a:pPr marL="864000" lvl="1" indent="-324000" algn="l" defTabSz="457200">
-              <a:lnSpc>
-                <a:spcPct val="100000"/>
-              </a:lnSpc>
-              <a:spcBef>
-                <a:spcPts val="561"/>
-              </a:spcBef>
-              <a:buClr>
-                <a:srgbClr val="000000"/>
-              </a:buClr>
-              <a:buSzPct val="75000"/>
-              <a:buFont typeface="Symbol" charset="2"/>
-              <a:buChar char=""/>
-            </a:pPr>
-            <a:r>
-              <a:rPr lang="en-US" sz="2800" b="0" u="none" strike="noStrike">
-                <a:solidFill>
-                  <a:schemeClr val="dk1"/>
-                </a:solidFill>
-                <a:effectLst/>
-                <a:uFillTx/>
-                <a:latin typeface="Calibri"/>
-              </a:rPr>
-              <a:t>Second Outline Level</a:t>
-            </a:r>
-            <a:endParaRPr lang="en-US" sz="2800" b="0" u="none" strike="noStrike">
-              <a:solidFill>
-                <a:schemeClr val="dk1"/>
-              </a:solidFill>
-              <a:effectLst/>
-              <a:uFillTx/>
-              <a:latin typeface="Calibri"/>
-            </a:endParaRPr>
-          </a:p>
-          <a:p>
-            <a:pPr marL="1296000" lvl="2" indent="-288000" algn="l" defTabSz="457200">
-              <a:lnSpc>
-                <a:spcPct val="100000"/>
-              </a:lnSpc>
-              <a:spcBef>
-                <a:spcPts val="479"/>
-              </a:spcBef>
-              <a:buClr>
-                <a:srgbClr val="000000"/>
-              </a:buClr>
-              <a:buSzPct val="45000"/>
-              <a:buFont typeface="Wingdings" charset="2"/>
-              <a:buChar char=""/>
-            </a:pPr>
-            <a:r>
-              <a:rPr lang="en-US" sz="2400" b="0" u="none" strike="noStrike">
-                <a:solidFill>
-                  <a:schemeClr val="dk1"/>
-                </a:solidFill>
-                <a:effectLst/>
-                <a:uFillTx/>
-                <a:latin typeface="Calibri"/>
-              </a:rPr>
-              <a:t>Third Outline Level</a:t>
-            </a:r>
-            <a:endParaRPr lang="en-US" sz="2400" b="0" u="none" strike="noStrike">
-              <a:solidFill>
-                <a:schemeClr val="dk1"/>
-              </a:solidFill>
-              <a:effectLst/>
-              <a:uFillTx/>
-              <a:latin typeface="Calibri"/>
-            </a:endParaRPr>
-          </a:p>
-          <a:p>
-            <a:pPr marL="1728000" lvl="3" indent="-216000" algn="l" defTabSz="457200">
-              <a:lnSpc>
-                <a:spcPct val="100000"/>
-              </a:lnSpc>
-              <a:spcBef>
-                <a:spcPts val="400"/>
-              </a:spcBef>
-              <a:buClr>
-                <a:srgbClr val="000000"/>
-              </a:buClr>
-              <a:buSzPct val="75000"/>
-              <a:buFont typeface="Symbol" charset="2"/>
-              <a:buChar char=""/>
-            </a:pPr>
-            <a:r>
-              <a:rPr lang="en-US" sz="2000" b="0" u="none" strike="noStrike">
-                <a:solidFill>
-                  <a:schemeClr val="dk1"/>
-                </a:solidFill>
-                <a:effectLst/>
-                <a:uFillTx/>
-                <a:latin typeface="Calibri"/>
-              </a:rPr>
-              <a:t>Fourth Outline Level</a:t>
-            </a:r>
-            <a:endParaRPr lang="en-US" sz="2000" b="0" u="none" strike="noStrike">
-              <a:solidFill>
-                <a:schemeClr val="dk1"/>
-              </a:solidFill>
-              <a:effectLst/>
-              <a:uFillTx/>
-              <a:latin typeface="Calibri"/>
-            </a:endParaRPr>
-          </a:p>
-          <a:p>
-            <a:pPr marL="2160000" lvl="4" indent="-216000" algn="l" defTabSz="457200">
-              <a:lnSpc>
-                <a:spcPct val="100000"/>
-              </a:lnSpc>
-              <a:spcBef>
-                <a:spcPts val="400"/>
-              </a:spcBef>
-              <a:buClr>
-                <a:srgbClr val="000000"/>
-              </a:buClr>
-              <a:buSzPct val="45000"/>
-              <a:buFont typeface="Wingdings" charset="2"/>
-              <a:buChar char=""/>
-            </a:pPr>
-            <a:r>
-              <a:rPr lang="en-US" sz="2000" b="0" u="none" strike="noStrike">
-                <a:solidFill>
-                  <a:schemeClr val="dk1"/>
-                </a:solidFill>
-                <a:effectLst/>
-                <a:uFillTx/>
-                <a:latin typeface="Calibri"/>
-              </a:rPr>
-              <a:t>Fifth Outline Level</a:t>
-            </a:r>
-            <a:endParaRPr lang="en-US" sz="2000" b="0" u="none" strike="noStrike">
-              <a:solidFill>
-                <a:schemeClr val="dk1"/>
-              </a:solidFill>
-              <a:effectLst/>
-              <a:uFillTx/>
-              <a:latin typeface="Calibri"/>
-            </a:endParaRPr>
-          </a:p>
-          <a:p>
-            <a:pPr marL="2592000" lvl="5" indent="-216000" algn="l" defTabSz="457200">
-              <a:lnSpc>
-                <a:spcPct val="100000"/>
-              </a:lnSpc>
-              <a:spcBef>
-                <a:spcPts val="283"/>
-              </a:spcBef>
-              <a:buClr>
-                <a:srgbClr val="000000"/>
-              </a:buClr>
-              <a:buSzPct val="45000"/>
-              <a:buFont typeface="Wingdings" charset="2"/>
-              <a:buChar char=""/>
-            </a:pPr>
-            <a:r>
-              <a:rPr lang="en-US" sz="2000" b="0" u="none" strike="noStrike">
-                <a:solidFill>
-                  <a:schemeClr val="dk1"/>
-                </a:solidFill>
-                <a:effectLst/>
-                <a:uFillTx/>
-                <a:latin typeface="Calibri"/>
-              </a:rPr>
-              <a:t>Sixth Outline Level</a:t>
-            </a:r>
-            <a:endParaRPr lang="en-US" sz="2000" b="0" u="none" strike="noStrike">
-              <a:solidFill>
-                <a:schemeClr val="dk1"/>
-              </a:solidFill>
-              <a:effectLst/>
-              <a:uFillTx/>
-              <a:latin typeface="Calibri"/>
-            </a:endParaRPr>
-          </a:p>
-          <a:p>
-            <a:pPr marL="3024000" lvl="6" indent="-216000" algn="l" defTabSz="457200">
-              <a:lnSpc>
-                <a:spcPct val="100000"/>
-              </a:lnSpc>
-              <a:spcBef>
-                <a:spcPts val="283"/>
-              </a:spcBef>
-              <a:buClr>
-                <a:srgbClr val="000000"/>
-              </a:buClr>
-              <a:buSzPct val="45000"/>
-              <a:buFont typeface="Wingdings" charset="2"/>
-              <a:buChar char=""/>
-            </a:pPr>
-            <a:r>
-              <a:rPr lang="en-US" sz="2000" b="0" u="none" strike="noStrike">
-                <a:solidFill>
-                  <a:schemeClr val="dk1"/>
-                </a:solidFill>
-                <a:effectLst/>
-                <a:uFillTx/>
-                <a:latin typeface="Calibri"/>
-              </a:rPr>
-              <a:t>Seventh Outline Level</a:t>
-            </a:r>
-            <a:endParaRPr lang="en-US" sz="2000" b="0" u="none" strike="noStrike">
-              <a:solidFill>
-                <a:schemeClr val="dk1"/>
-              </a:solidFill>
-              <a:effectLst/>
-              <a:uFillTx/>
-              <a:latin typeface="Calibri"/>
-            </a:endParaRPr>
-          </a:p>
-        </p:txBody>
-      </p:sp>
-    </p:spTree>
-  </p:cSld>
-</p:sldLayout>
-</file>
-
-<file path=ppt/slideLayouts/slideLayout5.xml><?xml version="1.0" encoding="utf-8"?>
-<p:sldLayout xmlns:a="http://schemas.openxmlformats.org/drawingml/2006/main" xmlns:p="http://schemas.openxmlformats.org/presentationml/2006/main" xmlns:r="http://schemas.openxmlformats.org/officeDocument/2006/relationships" xmlns:p14="http://schemas.microsoft.com/office/powerpoint/2010/main" xmlns:p15="http://schemas.microsoft.com/office/powerpoint/2012/main" xmlns:mc="http://schemas.openxmlformats.org/markup-compatibility/2006" type="blank" preserve="1">
-  <p:cSld name="Content with Caption">
-    <p:bg>
-      <p:bgPr>
-        <a:solidFill>
-          <a:srgbClr val="FFFFFF"/>
-        </a:solidFill>
-      </p:bgPr>
-    </p:bg>
-    <p:spTree>
-      <p:nvGrpSpPr>
-        <p:cNvPr id="1" name=""/>
-        <p:cNvGrpSpPr/>
-        <p:nvPr/>
-      </p:nvGrpSpPr>
-      <p:grpSpPr>
-        <a:xfrm>
-          <a:off x="0" y="0"/>
-          <a:ext cx="0" cy="0"/>
-          <a:chOff x="0" y="0"/>
-          <a:chExt cx="0" cy="0"/>
-        </a:xfrm>
-      </p:grpSpPr>
-      <p:sp>
-        <p:nvSpPr>
-          <p:cNvPr id="25" name="PlaceHolder 1"/>
-          <p:cNvSpPr>
-            <a:spLocks noGrp="1"/>
-          </p:cNvSpPr>
-          <p:nvPr>
-            <p:ph type="title"/>
-          </p:nvPr>
-        </p:nvSpPr>
-        <p:spPr>
-          <a:xfrm>
-            <a:off x="457200" y="272880"/>
-            <a:ext cx="3007080" cy="1161000"/>
-          </a:xfrm>
-          <a:prstGeom prst="rect">
-            <a:avLst/>
-          </a:prstGeom>
-          <a:noFill/>
-          <a:ln w="0">
-            <a:noFill/>
-          </a:ln>
-        </p:spPr>
-        <p:txBody>
-          <a:bodyPr lIns="91440" tIns="45720" rIns="91440" bIns="45720" anchor="b">
-            <a:noAutofit/>
-          </a:bodyPr>
-          <a:lstStyle>
-            <a:lvl1pPr indent="0" algn="l" defTabSz="457200">
-              <a:lnSpc>
-                <a:spcPct val="100000"/>
-              </a:lnSpc>
-              <a:buNone/>
-              <a:tabLst>
-                <a:tab pos="0" algn="l"/>
-              </a:tabLst>
-              <a:defRPr lang="en-US" sz="2000" b="1" u="none" strike="noStrike">
-                <a:solidFill>
-                  <a:schemeClr val="dk1"/>
-                </a:solidFill>
-                <a:effectLst/>
-                <a:uFillTx/>
-                <a:latin typeface="Calibri"/>
-              </a:defRPr>
-            </a:lvl1pPr>
-          </a:lstStyle>
-          <a:p>
-            <a:pPr indent="0" algn="l" defTabSz="457200">
-              <a:lnSpc>
-                <a:spcPct val="100000"/>
-              </a:lnSpc>
-              <a:buNone/>
-              <a:tabLst>
-                <a:tab pos="0" algn="l"/>
-              </a:tabLst>
-            </a:pPr>
-            <a:r>
-              <a:rPr lang="en-US" sz="2000" b="1" u="none" strike="noStrike">
-                <a:solidFill>
-                  <a:schemeClr val="dk1"/>
-                </a:solidFill>
-                <a:effectLst/>
-                <a:uFillTx/>
-                <a:latin typeface="Calibri"/>
-              </a:rPr>
-              <a:t>Click to edit </a:t>
-            </a:r>
-            <a:r>
-              <a:rPr lang="en-US" sz="2000" b="1" u="none" strike="noStrike">
-                <a:solidFill>
-                  <a:schemeClr val="dk1"/>
-                </a:solidFill>
-                <a:effectLst/>
-                <a:uFillTx/>
-                <a:latin typeface="Calibri"/>
-              </a:rPr>
-              <a:t>Master title </a:t>
-            </a:r>
-            <a:r>
-              <a:rPr lang="en-US" sz="2000" b="1" u="none" strike="noStrike">
-                <a:solidFill>
-                  <a:schemeClr val="dk1"/>
-                </a:solidFill>
-                <a:effectLst/>
-                <a:uFillTx/>
-                <a:latin typeface="Calibri"/>
-              </a:rPr>
-              <a:t>style</a:t>
-            </a:r>
-            <a:endParaRPr lang="en-US" sz="2000" b="1" u="none" strike="noStrike">
-              <a:solidFill>
-                <a:schemeClr val="dk1"/>
-              </a:solidFill>
-              <a:effectLst/>
-              <a:uFillTx/>
-              <a:latin typeface="Calibri"/>
-            </a:endParaRPr>
-          </a:p>
-        </p:txBody>
-      </p:sp>
-      <p:sp>
-        <p:nvSpPr>
-          <p:cNvPr id="26" name="PlaceHolder 2"/>
-          <p:cNvSpPr>
-            <a:spLocks noGrp="1"/>
-          </p:cNvSpPr>
-          <p:nvPr>
-            <p:ph type="body"/>
-          </p:nvPr>
-        </p:nvSpPr>
-        <p:spPr>
-          <a:xfrm>
-            <a:off x="3575160" y="272880"/>
-            <a:ext cx="5110560" cy="5852160"/>
-          </a:xfrm>
-          <a:prstGeom prst="rect">
-            <a:avLst/>
-          </a:prstGeom>
-          <a:noFill/>
-          <a:ln w="0">
-            <a:noFill/>
-          </a:ln>
-        </p:spPr>
-        <p:txBody>
-          <a:bodyPr lIns="91440" tIns="45720" rIns="91440" bIns="45720" anchor="t">
-            <a:noAutofit/>
-          </a:bodyPr>
-          <a:lstStyle>
-            <a:lvl1pPr algn="l" defTabSz="457200">
-              <a:lnSpc>
-                <a:spcPct val="100000"/>
-              </a:lnSpc>
-              <a:spcBef>
-                <a:spcPts val="641"/>
-              </a:spcBef>
-              <a:buClr>
-                <a:srgbClr val="000000"/>
-              </a:buClr>
-              <a:buFont typeface="Arial"/>
-              <a:buChar char="•"/>
-              <a:defRPr lang="en-US" sz="3200" b="0" u="none" strike="noStrike">
-                <a:solidFill>
-                  <a:schemeClr val="dk1"/>
-                </a:solidFill>
-                <a:effectLst/>
-                <a:uFillTx/>
-                <a:latin typeface="Calibri"/>
-              </a:defRPr>
-            </a:lvl1pPr>
-            <a:lvl2pPr lvl="1" algn="l" defTabSz="457200">
-              <a:lnSpc>
-                <a:spcPct val="100000"/>
-              </a:lnSpc>
-              <a:spcBef>
-                <a:spcPts val="561"/>
-              </a:spcBef>
-              <a:buClr>
-                <a:srgbClr val="000000"/>
-              </a:buClr>
-              <a:buFont typeface="Arial"/>
-              <a:buChar char="–"/>
-              <a:defRPr lang="en-US" sz="2800" b="0" u="none" strike="noStrike">
-                <a:solidFill>
-                  <a:schemeClr val="dk1"/>
-                </a:solidFill>
-                <a:effectLst/>
-                <a:uFillTx/>
-                <a:latin typeface="Calibri"/>
-              </a:defRPr>
-            </a:lvl2pPr>
-            <a:lvl3pPr lvl="2" algn="l" defTabSz="457200">
-              <a:lnSpc>
-                <a:spcPct val="100000"/>
-              </a:lnSpc>
-              <a:spcBef>
-                <a:spcPts val="479"/>
-              </a:spcBef>
-              <a:buClr>
-                <a:srgbClr val="000000"/>
-              </a:buClr>
-              <a:buFont typeface="Arial"/>
-              <a:buChar char="•"/>
-              <a:defRPr lang="en-US" sz="2400" b="0" u="none" strike="noStrike">
-                <a:solidFill>
-                  <a:schemeClr val="dk1"/>
-                </a:solidFill>
-                <a:effectLst/>
-                <a:uFillTx/>
-                <a:latin typeface="Calibri"/>
-              </a:defRPr>
-            </a:lvl3pPr>
-            <a:lvl4pPr lvl="3" algn="l" defTabSz="457200">
-              <a:lnSpc>
-                <a:spcPct val="100000"/>
-              </a:lnSpc>
-              <a:spcBef>
-                <a:spcPts val="400"/>
-              </a:spcBef>
-              <a:buClr>
-                <a:srgbClr val="000000"/>
-              </a:buClr>
-              <a:buFont typeface="Arial"/>
-              <a:buChar char="–"/>
-              <a:defRPr lang="en-US" sz="2000" b="0" u="none" strike="noStrike">
-                <a:solidFill>
-                  <a:schemeClr val="dk1"/>
-                </a:solidFill>
-                <a:effectLst/>
-                <a:uFillTx/>
-                <a:latin typeface="Calibri"/>
-              </a:defRPr>
-            </a:lvl4pPr>
-            <a:lvl5pPr lvl="4" algn="l" defTabSz="457200">
-              <a:lnSpc>
-                <a:spcPct val="100000"/>
-              </a:lnSpc>
-              <a:spcBef>
-                <a:spcPts val="400"/>
-              </a:spcBef>
-              <a:buClr>
-                <a:srgbClr val="000000"/>
-              </a:buClr>
-              <a:buFont typeface="Arial"/>
-              <a:buChar char="»"/>
-              <a:defRPr lang="en-US" sz="2000" b="0" u="none" strike="noStrike">
-                <a:solidFill>
-                  <a:schemeClr val="dk1"/>
-                </a:solidFill>
-                <a:effectLst/>
-                <a:uFillTx/>
-                <a:latin typeface="Calibri"/>
-              </a:defRPr>
-            </a:lvl5pPr>
-          </a:lstStyle>
-          <a:p>
-            <a:pPr marL="343080" indent="-343080" algn="l" defTabSz="457200">
-              <a:lnSpc>
-                <a:spcPct val="100000"/>
-              </a:lnSpc>
-              <a:spcBef>
-                <a:spcPts val="641"/>
-              </a:spcBef>
-              <a:buClr>
-                <a:srgbClr val="000000"/>
-              </a:buClr>
-              <a:buFont typeface="Arial"/>
-              <a:buChar char="•"/>
-            </a:pPr>
-            <a:r>
-              <a:rPr lang="en-US" sz="3200" b="0" u="none" strike="noStrike">
-                <a:solidFill>
-                  <a:schemeClr val="dk1"/>
-                </a:solidFill>
-                <a:effectLst/>
-                <a:uFillTx/>
-                <a:latin typeface="Calibri"/>
-              </a:rPr>
-              <a:t>Click to edit Master text styles</a:t>
-            </a:r>
-            <a:endParaRPr lang="en-US" sz="3200" b="0" u="none" strike="noStrike">
-              <a:solidFill>
-                <a:schemeClr val="dk1"/>
-              </a:solidFill>
-              <a:effectLst/>
-              <a:uFillTx/>
-              <a:latin typeface="Calibri"/>
-            </a:endParaRPr>
-          </a:p>
-          <a:p>
-            <a:pPr marL="743040" lvl="1" indent="-285840" algn="l" defTabSz="457200">
-              <a:lnSpc>
-                <a:spcPct val="100000"/>
-              </a:lnSpc>
-              <a:spcBef>
-                <a:spcPts val="561"/>
-              </a:spcBef>
-              <a:buClr>
-                <a:srgbClr val="000000"/>
-              </a:buClr>
-              <a:buFont typeface="Arial"/>
-              <a:buChar char="–"/>
-            </a:pPr>
-            <a:r>
-              <a:rPr lang="en-US" sz="2800" b="0" u="none" strike="noStrike">
-                <a:solidFill>
-                  <a:schemeClr val="dk1"/>
-                </a:solidFill>
-                <a:effectLst/>
-                <a:uFillTx/>
-                <a:latin typeface="Calibri"/>
-              </a:rPr>
-              <a:t>Second level</a:t>
-            </a:r>
-            <a:endParaRPr lang="en-US" sz="2800" b="0" u="none" strike="noStrike">
-              <a:solidFill>
-                <a:schemeClr val="dk1"/>
-              </a:solidFill>
-              <a:effectLst/>
-              <a:uFillTx/>
-              <a:latin typeface="Calibri"/>
-            </a:endParaRPr>
-          </a:p>
-          <a:p>
-            <a:pPr marL="1143000" lvl="2" indent="-228600" algn="l" defTabSz="457200">
-              <a:lnSpc>
-                <a:spcPct val="100000"/>
-              </a:lnSpc>
-              <a:spcBef>
-                <a:spcPts val="479"/>
-              </a:spcBef>
-              <a:buClr>
-                <a:srgbClr val="000000"/>
-              </a:buClr>
-              <a:buFont typeface="Arial"/>
-              <a:buChar char="•"/>
-            </a:pPr>
-            <a:r>
-              <a:rPr lang="en-US" sz="2400" b="0" u="none" strike="noStrike">
-                <a:solidFill>
-                  <a:schemeClr val="dk1"/>
-                </a:solidFill>
-                <a:effectLst/>
-                <a:uFillTx/>
-                <a:latin typeface="Calibri"/>
-              </a:rPr>
-              <a:t>Third level</a:t>
-            </a:r>
-            <a:endParaRPr lang="en-US" sz="2400" b="0" u="none" strike="noStrike">
-              <a:solidFill>
-                <a:schemeClr val="dk1"/>
-              </a:solidFill>
-              <a:effectLst/>
-              <a:uFillTx/>
-              <a:latin typeface="Calibri"/>
-            </a:endParaRPr>
-          </a:p>
-          <a:p>
-            <a:pPr marL="1600200" lvl="3" indent="-228600" algn="l" defTabSz="457200">
-              <a:lnSpc>
-                <a:spcPct val="100000"/>
-              </a:lnSpc>
-              <a:spcBef>
-                <a:spcPts val="400"/>
-              </a:spcBef>
-              <a:buClr>
-                <a:srgbClr val="000000"/>
-              </a:buClr>
-              <a:buFont typeface="Arial"/>
-              <a:buChar char="–"/>
-            </a:pPr>
-            <a:r>
-              <a:rPr lang="en-US" sz="2000" b="0" u="none" strike="noStrike">
-                <a:solidFill>
-                  <a:schemeClr val="dk1"/>
-                </a:solidFill>
-                <a:effectLst/>
-                <a:uFillTx/>
-                <a:latin typeface="Calibri"/>
-              </a:rPr>
-              <a:t>Fourth level</a:t>
-            </a:r>
-            <a:endParaRPr lang="en-US" sz="2000" b="0" u="none" strike="noStrike">
-              <a:solidFill>
-                <a:schemeClr val="dk1"/>
-              </a:solidFill>
-              <a:effectLst/>
-              <a:uFillTx/>
-              <a:latin typeface="Calibri"/>
-            </a:endParaRPr>
-          </a:p>
-          <a:p>
-            <a:pPr marL="2057400" lvl="4" indent="-228600" algn="l" defTabSz="457200">
-              <a:lnSpc>
-                <a:spcPct val="100000"/>
-              </a:lnSpc>
-              <a:spcBef>
-                <a:spcPts val="400"/>
-              </a:spcBef>
-              <a:buClr>
-                <a:srgbClr val="000000"/>
-              </a:buClr>
-              <a:buFont typeface="Arial"/>
-              <a:buChar char="»"/>
-            </a:pPr>
-            <a:r>
-              <a:rPr lang="en-US" sz="2000" b="0" u="none" strike="noStrike">
-                <a:solidFill>
-                  <a:schemeClr val="dk1"/>
-                </a:solidFill>
-                <a:effectLst/>
-                <a:uFillTx/>
-                <a:latin typeface="Calibri"/>
-              </a:rPr>
-              <a:t>Fifth level</a:t>
-            </a:r>
-            <a:endParaRPr lang="en-US" sz="2000" b="0" u="none" strike="noStrike">
-              <a:solidFill>
-                <a:schemeClr val="dk1"/>
-              </a:solidFill>
-              <a:effectLst/>
-              <a:uFillTx/>
-              <a:latin typeface="Calibri"/>
-            </a:endParaRPr>
-          </a:p>
-        </p:txBody>
-      </p:sp>
-      <p:sp>
-        <p:nvSpPr>
-          <p:cNvPr id="27" name="PlaceHolder 3"/>
-          <p:cNvSpPr>
-            <a:spLocks noGrp="1"/>
-          </p:cNvSpPr>
-          <p:nvPr>
-            <p:ph type="body"/>
-          </p:nvPr>
-        </p:nvSpPr>
-        <p:spPr>
-          <a:xfrm>
-            <a:off x="457200" y="1434960"/>
-            <a:ext cx="3007080" cy="4690080"/>
-          </a:xfrm>
-          <a:prstGeom prst="rect">
-            <a:avLst/>
-          </a:prstGeom>
-          <a:noFill/>
-          <a:ln w="0">
-            <a:noFill/>
-          </a:ln>
-        </p:spPr>
-        <p:txBody>
-          <a:bodyPr lIns="91440" tIns="45720" rIns="91440" bIns="45720" anchor="t">
-            <a:noAutofit/>
-          </a:bodyPr>
-          <a:lstStyle>
-            <a:lvl1pPr indent="0" algn="l" defTabSz="457200">
-              <a:lnSpc>
-                <a:spcPct val="100000"/>
-              </a:lnSpc>
-              <a:spcBef>
-                <a:spcPts val="281"/>
-              </a:spcBef>
-              <a:buNone/>
-              <a:tabLst>
-                <a:tab pos="0" algn="l"/>
-              </a:tabLst>
-              <a:defRPr lang="en-US" sz="1400" b="0" u="none" strike="noStrike">
-                <a:solidFill>
-                  <a:schemeClr val="dk1"/>
-                </a:solidFill>
-                <a:effectLst/>
-                <a:uFillTx/>
-                <a:latin typeface="Calibri"/>
-              </a:defRPr>
-            </a:lvl1pPr>
-          </a:lstStyle>
-          <a:p>
-            <a:pPr indent="0" algn="l" defTabSz="457200">
-              <a:lnSpc>
-                <a:spcPct val="100000"/>
-              </a:lnSpc>
-              <a:spcBef>
-                <a:spcPts val="281"/>
-              </a:spcBef>
-              <a:buNone/>
-              <a:tabLst>
-                <a:tab pos="0" algn="l"/>
-              </a:tabLst>
-            </a:pPr>
-            <a:r>
-              <a:rPr lang="en-US" sz="1400" b="0" u="none" strike="noStrike">
-                <a:solidFill>
-                  <a:schemeClr val="dk1"/>
-                </a:solidFill>
-                <a:effectLst/>
-                <a:uFillTx/>
-                <a:latin typeface="Calibri"/>
-              </a:rPr>
-              <a:t>Click to edit Master text styles</a:t>
-            </a:r>
-            <a:endParaRPr lang="en-US" sz="1400" b="0" u="none" strike="noStrike">
-              <a:solidFill>
-                <a:schemeClr val="dk1"/>
-              </a:solidFill>
-              <a:effectLst/>
-              <a:uFillTx/>
-              <a:latin typeface="Calibri"/>
-            </a:endParaRPr>
-          </a:p>
-        </p:txBody>
-      </p:sp>
-      <p:sp>
-        <p:nvSpPr>
-          <p:cNvPr id="28" name="PlaceHolder 4"/>
-          <p:cNvSpPr>
-            <a:spLocks noGrp="1"/>
-          </p:cNvSpPr>
-          <p:nvPr>
-            <p:ph type="dt" idx="13"/>
-          </p:nvPr>
-        </p:nvSpPr>
-        <p:spPr>
-          <a:xfrm>
-            <a:off x="457200" y="6356520"/>
-            <a:ext cx="2132640" cy="363960"/>
-          </a:xfrm>
-          <a:prstGeom prst="rect">
-            <a:avLst/>
-          </a:prstGeom>
-          <a:noFill/>
-          <a:ln w="0">
-            <a:noFill/>
-          </a:ln>
-        </p:spPr>
-        <p:txBody>
-          <a:bodyPr lIns="91440" tIns="45720" rIns="91440" bIns="45720" anchor="ctr">
-            <a:noAutofit/>
-          </a:bodyPr>
-          <a:lstStyle>
-            <a:lvl1pPr indent="0" algn="l" defTabSz="457200">
-              <a:lnSpc>
-                <a:spcPct val="100000"/>
-              </a:lnSpc>
-              <a:buNone/>
-              <a:tabLst>
-                <a:tab pos="0" algn="l"/>
-              </a:tabLst>
-              <a:defRPr lang="en-US" sz="1200" b="0" u="none" strike="noStrike">
-                <a:solidFill>
-                  <a:schemeClr val="dk1">
-                    <a:tint val="75000"/>
-                  </a:schemeClr>
-                </a:solidFill>
-                <a:effectLst/>
-                <a:uFillTx/>
-                <a:latin typeface="Calibri"/>
-              </a:defRPr>
-            </a:lvl1pPr>
-          </a:lstStyle>
-          <a:p>
-            <a:pPr indent="0" algn="l" defTabSz="457200">
-              <a:lnSpc>
-                <a:spcPct val="100000"/>
-              </a:lnSpc>
-              <a:buNone/>
-              <a:tabLst>
-                <a:tab pos="0" algn="l"/>
-              </a:tabLst>
-            </a:pPr>
-            <a:r>
-              <a:rPr lang="en-US" sz="1200" b="0" u="none" strike="noStrike">
-                <a:solidFill>
-                  <a:schemeClr val="dk1">
-                    <a:tint val="75000"/>
-                  </a:schemeClr>
-                </a:solidFill>
-                <a:effectLst/>
-                <a:uFillTx/>
-                <a:latin typeface="Calibri"/>
-              </a:rPr>
-              <a:t>&lt;date/time&gt;</a:t>
-            </a:r>
-            <a:endParaRPr lang="en-US" sz="1200" b="0" u="none" strike="noStrike">
-              <a:solidFill>
-                <a:srgbClr val="000000"/>
-              </a:solidFill>
-              <a:effectLst/>
-              <a:uFillTx/>
-              <a:latin typeface="Times New Roman"/>
-            </a:endParaRPr>
-          </a:p>
-        </p:txBody>
-      </p:sp>
-      <p:sp>
-        <p:nvSpPr>
-          <p:cNvPr id="29" name="PlaceHolder 5"/>
-          <p:cNvSpPr>
-            <a:spLocks noGrp="1"/>
-          </p:cNvSpPr>
-          <p:nvPr>
-            <p:ph type="ftr" idx="14"/>
-          </p:nvPr>
-        </p:nvSpPr>
-        <p:spPr>
-          <a:xfrm>
-            <a:off x="3124080" y="6356520"/>
-            <a:ext cx="2894400" cy="363960"/>
-          </a:xfrm>
-          <a:prstGeom prst="rect">
-            <a:avLst/>
-          </a:prstGeom>
-          <a:noFill/>
-          <a:ln w="0">
-            <a:noFill/>
-          </a:ln>
-        </p:spPr>
-        <p:txBody>
-          <a:bodyPr lIns="91440" tIns="45720" rIns="91440" bIns="45720" anchor="ctr">
-            <a:noAutofit/>
-          </a:bodyPr>
-          <a:lstStyle>
-            <a:lvl1pPr indent="0" algn="ctr">
-              <a:lnSpc>
-                <a:spcPct val="100000"/>
-              </a:lnSpc>
-              <a:buNone/>
-              <a:tabLst>
-                <a:tab pos="0" algn="l"/>
-              </a:tabLst>
-              <a:defRPr lang="en-US" sz="1400" b="0" u="none" strike="noStrike">
-                <a:solidFill>
-                  <a:srgbClr val="000000"/>
-                </a:solidFill>
-                <a:effectLst/>
-                <a:uFillTx/>
-                <a:latin typeface="Times New Roman"/>
-              </a:defRPr>
-            </a:lvl1pPr>
-          </a:lstStyle>
-          <a:p>
-            <a:pPr indent="0" algn="ctr">
-              <a:lnSpc>
-                <a:spcPct val="100000"/>
-              </a:lnSpc>
-              <a:buNone/>
-              <a:tabLst>
-                <a:tab pos="0" algn="l"/>
-              </a:tabLst>
-            </a:pPr>
-            <a:r>
-              <a:rPr lang="en-US" sz="1400" b="0" u="none" strike="noStrike">
-                <a:solidFill>
-                  <a:srgbClr val="000000"/>
-                </a:solidFill>
-                <a:effectLst/>
-                <a:uFillTx/>
-                <a:latin typeface="Times New Roman"/>
-              </a:rPr>
-              <a:t>&lt;footer&gt;</a:t>
-            </a:r>
-            <a:endParaRPr lang="en-US" sz="1400" b="0" u="none" strike="noStrike">
-              <a:solidFill>
-                <a:srgbClr val="000000"/>
-              </a:solidFill>
-              <a:effectLst/>
-              <a:uFillTx/>
-              <a:latin typeface="Times New Roman"/>
-            </a:endParaRPr>
-          </a:p>
-        </p:txBody>
-      </p:sp>
-      <p:sp>
-        <p:nvSpPr>
-          <p:cNvPr id="30" name="PlaceHolder 6"/>
-          <p:cNvSpPr>
-            <a:spLocks noGrp="1"/>
-          </p:cNvSpPr>
-          <p:nvPr>
-            <p:ph type="sldNum" idx="15"/>
-          </p:nvPr>
-        </p:nvSpPr>
-        <p:spPr>
-          <a:xfrm>
-            <a:off x="6553080" y="6356520"/>
-            <a:ext cx="2132640" cy="363960"/>
-          </a:xfrm>
-          <a:prstGeom prst="rect">
-            <a:avLst/>
-          </a:prstGeom>
-          <a:noFill/>
-          <a:ln w="0">
-            <a:noFill/>
-          </a:ln>
-        </p:spPr>
-        <p:txBody>
-          <a:bodyPr lIns="91440" tIns="45720" rIns="91440" bIns="45720" anchor="ctr">
-            <a:noAutofit/>
-          </a:bodyPr>
-          <a:lstStyle>
-            <a:lvl1pPr indent="0" algn="r" defTabSz="457200">
-              <a:lnSpc>
-                <a:spcPct val="100000"/>
-              </a:lnSpc>
-              <a:buNone/>
-              <a:tabLst>
-                <a:tab pos="0" algn="l"/>
-              </a:tabLst>
-              <a:defRPr lang="en-US" sz="1200" b="0" u="none" strike="noStrike">
-                <a:solidFill>
-                  <a:schemeClr val="dk1">
-                    <a:tint val="75000"/>
-                  </a:schemeClr>
-                </a:solidFill>
-                <a:effectLst/>
-                <a:uFillTx/>
-                <a:latin typeface="Calibri"/>
-              </a:defRPr>
-            </a:lvl1pPr>
-          </a:lstStyle>
-          <a:p>
-            <a:pPr indent="0" algn="r" defTabSz="457200">
-              <a:lnSpc>
-                <a:spcPct val="100000"/>
-              </a:lnSpc>
-              <a:buNone/>
-              <a:tabLst>
-                <a:tab pos="0" algn="l"/>
-              </a:tabLst>
-            </a:pPr>
-            <a:fld id="{548F888A-A8DF-43DC-9FA0-C61AD76DADBD}" type="slidenum">
+            <a:fld id="{819E4AB5-03F9-4371-A36A-4A087DB258D1}" type="slidenum">
               <a:rPr lang="en-US" sz="1200" b="0" u="none" strike="noStrike">
                 <a:solidFill>
                   <a:schemeClr val="dk1">
@@ -5343,8 +4928,8 @@
 </file>
 
 <file path=ppt/slideLayouts/slideLayout6.xml><?xml version="1.0" encoding="utf-8"?>
-<p:sldLayout xmlns:a="http://schemas.openxmlformats.org/drawingml/2006/main" xmlns:p="http://schemas.openxmlformats.org/presentationml/2006/main" xmlns:r="http://schemas.openxmlformats.org/officeDocument/2006/relationships" xmlns:p14="http://schemas.microsoft.com/office/powerpoint/2010/main" xmlns:p15="http://schemas.microsoft.com/office/powerpoint/2012/main" xmlns:mc="http://schemas.openxmlformats.org/markup-compatibility/2006" type="blank" preserve="1">
-  <p:cSld name="Picture with Caption">
+<p:sldLayout xmlns:a="http://schemas.openxmlformats.org/drawingml/2006/main" xmlns:p="http://schemas.openxmlformats.org/presentationml/2006/main" xmlns:r="http://schemas.openxmlformats.org/officeDocument/2006/relationships" xmlns:p14="http://schemas.microsoft.com/office/powerpoint/2010/main" xmlns:p15="http://schemas.microsoft.com/office/powerpoint/2012/main" xmlns:mc="http://schemas.openxmlformats.org/markup-compatibility/2006" type="titleOnly" preserve="1">
+  <p:cSld name="Title Only">
     <p:bg>
       <p:bgPr>
         <a:solidFill>
@@ -5378,8 +4963,8 @@
         </p:nvSpPr>
         <p:spPr>
           <a:xfrm>
-            <a:off x="1792440" y="4800600"/>
-            <a:ext cx="5485320" cy="565560"/>
+            <a:off x="457200" y="274680"/>
+            <a:ext cx="8228160" cy="1141560"/>
           </a:xfrm>
           <a:prstGeom prst="rect">
             <a:avLst/>
@@ -5390,11 +4975,11 @@
           </a:ln>
         </p:spPr>
         <p:txBody>
-          <a:bodyPr lIns="91440" tIns="45720" rIns="91440" bIns="45720" anchor="b">
+          <a:bodyPr lIns="91440" tIns="45720" rIns="91440" bIns="45720" anchor="ctr">
             <a:noAutofit/>
           </a:bodyPr>
           <a:lstStyle>
-            <a:lvl1pPr indent="0" algn="l" defTabSz="457200">
+            <a:lvl1pPr indent="0" algn="ctr" defTabSz="457200">
               <a:lnSpc>
                 <a:spcPct val="100000"/>
               </a:lnSpc>
@@ -5402,7 +4987,7 @@
               <a:tabLst>
                 <a:tab pos="0" algn="l"/>
               </a:tabLst>
-              <a:defRPr lang="en-US" sz="2000" b="1" u="none" strike="noStrike">
+              <a:defRPr lang="en-US" sz="4400" b="0" u="none" strike="noStrike">
                 <a:solidFill>
                   <a:schemeClr val="dk1"/>
                 </a:solidFill>
@@ -5413,7 +4998,7 @@
             </a:lvl1pPr>
           </a:lstStyle>
           <a:p>
-            <a:pPr indent="0" algn="l" defTabSz="457200">
+            <a:pPr indent="0" algn="ctr" defTabSz="457200">
               <a:lnSpc>
                 <a:spcPct val="100000"/>
               </a:lnSpc>
@@ -5423,7 +5008,7 @@
               </a:tabLst>
             </a:pPr>
             <a:r>
-              <a:rPr lang="en-US" sz="2000" b="1" u="none" strike="noStrike">
+              <a:rPr lang="en-US" sz="4400" b="0" u="none" strike="noStrike">
                 <a:solidFill>
                   <a:schemeClr val="dk1"/>
                 </a:solidFill>
@@ -5431,9 +5016,31 @@
                 <a:uFillTx/>
                 <a:latin typeface="Calibri"/>
               </a:rPr>
-              <a:t>Click to edit Master title style</a:t>
+              <a:t>Click to edit </a:t>
             </a:r>
-            <a:endParaRPr lang="en-US" sz="2000" b="1" u="none" strike="noStrike">
+            <a:r>
+              <a:rPr lang="en-US" sz="4400" b="0" u="none" strike="noStrike">
+                <a:solidFill>
+                  <a:schemeClr val="dk1"/>
+                </a:solidFill>
+                <a:effectLst/>
+                <a:uFillTx/>
+                <a:latin typeface="Calibri"/>
+              </a:rPr>
+              <a:t>Master title </a:t>
+            </a:r>
+            <a:r>
+              <a:rPr lang="en-US" sz="4400" b="0" u="none" strike="noStrike">
+                <a:solidFill>
+                  <a:schemeClr val="dk1"/>
+                </a:solidFill>
+                <a:effectLst/>
+                <a:uFillTx/>
+                <a:latin typeface="Calibri"/>
+              </a:rPr>
+              <a:t>style</a:t>
+            </a:r>
+            <a:endParaRPr lang="en-US" sz="4400" b="0" u="none" strike="noStrike">
               <a:solidFill>
                 <a:schemeClr val="dk1"/>
               </a:solidFill>
@@ -5447,560 +5054,6 @@
       <p:sp>
         <p:nvSpPr>
           <p:cNvPr id="32" name="PlaceHolder 2"/>
-          <p:cNvSpPr>
-            <a:spLocks noGrp="1"/>
-          </p:cNvSpPr>
-          <p:nvPr>
-            <p:ph type="body"/>
-          </p:nvPr>
-        </p:nvSpPr>
-        <p:spPr>
-          <a:xfrm>
-            <a:off x="1792440" y="612720"/>
-            <a:ext cx="5485320" cy="4113720"/>
-          </a:xfrm>
-          <a:prstGeom prst="rect">
-            <a:avLst/>
-          </a:prstGeom>
-          <a:noFill/>
-          <a:ln w="0">
-            <a:noFill/>
-          </a:ln>
-        </p:spPr>
-        <p:txBody>
-          <a:bodyPr lIns="90000" tIns="45000" rIns="90000" bIns="45000" anchor="t">
-            <a:noAutofit/>
-          </a:bodyPr>
-          <a:lstStyle>
-            <a:lvl1pPr algn="l" defTabSz="457200">
-              <a:lnSpc>
-                <a:spcPct val="100000"/>
-              </a:lnSpc>
-              <a:spcBef>
-                <a:spcPts val="281"/>
-              </a:spcBef>
-              <a:buClr>
-                <a:srgbClr val="000000"/>
-              </a:buClr>
-              <a:buFont typeface="Arial"/>
-              <a:buChar char="•"/>
-              <a:tabLst>
-                <a:tab pos="0" algn="l"/>
-              </a:tabLst>
-              <a:defRPr lang="en-US" sz="3200" b="0" u="none" strike="noStrike">
-                <a:solidFill>
-                  <a:schemeClr val="dk1"/>
-                </a:solidFill>
-                <a:effectLst/>
-                <a:uFillTx/>
-                <a:latin typeface="Calibri"/>
-              </a:defRPr>
-            </a:lvl1pPr>
-            <a:lvl2pPr lvl="1" algn="l" defTabSz="457200">
-              <a:lnSpc>
-                <a:spcPct val="100000"/>
-              </a:lnSpc>
-              <a:spcBef>
-                <a:spcPts val="561"/>
-              </a:spcBef>
-              <a:buClr>
-                <a:srgbClr val="000000"/>
-              </a:buClr>
-              <a:buSzPct val="75000"/>
-              <a:buFont typeface="Symbol" charset="2"/>
-              <a:buChar char=""/>
-              <a:tabLst>
-                <a:tab pos="0" algn="l"/>
-              </a:tabLst>
-              <a:defRPr lang="en-US" sz="3200" b="0" u="none" strike="noStrike">
-                <a:solidFill>
-                  <a:schemeClr val="dk1"/>
-                </a:solidFill>
-                <a:effectLst/>
-                <a:uFillTx/>
-                <a:latin typeface="Calibri"/>
-              </a:defRPr>
-            </a:lvl2pPr>
-            <a:lvl3pPr lvl="2" algn="l" defTabSz="457200">
-              <a:lnSpc>
-                <a:spcPct val="100000"/>
-              </a:lnSpc>
-              <a:spcBef>
-                <a:spcPts val="479"/>
-              </a:spcBef>
-              <a:buClr>
-                <a:srgbClr val="000000"/>
-              </a:buClr>
-              <a:buSzPct val="45000"/>
-              <a:buFont typeface="Wingdings" charset="2"/>
-              <a:buChar char=""/>
-              <a:tabLst>
-                <a:tab pos="0" algn="l"/>
-              </a:tabLst>
-              <a:defRPr lang="en-US" sz="3200" b="0" u="none" strike="noStrike">
-                <a:solidFill>
-                  <a:schemeClr val="dk1"/>
-                </a:solidFill>
-                <a:effectLst/>
-                <a:uFillTx/>
-                <a:latin typeface="Calibri"/>
-              </a:defRPr>
-            </a:lvl3pPr>
-            <a:lvl4pPr lvl="3" algn="l" defTabSz="457200">
-              <a:lnSpc>
-                <a:spcPct val="100000"/>
-              </a:lnSpc>
-              <a:spcBef>
-                <a:spcPts val="400"/>
-              </a:spcBef>
-              <a:buClr>
-                <a:srgbClr val="000000"/>
-              </a:buClr>
-              <a:buSzPct val="75000"/>
-              <a:buFont typeface="Symbol" charset="2"/>
-              <a:buChar char=""/>
-              <a:tabLst>
-                <a:tab pos="0" algn="l"/>
-              </a:tabLst>
-              <a:defRPr lang="en-US" sz="3200" b="0" u="none" strike="noStrike">
-                <a:solidFill>
-                  <a:schemeClr val="dk1"/>
-                </a:solidFill>
-                <a:effectLst/>
-                <a:uFillTx/>
-                <a:latin typeface="Calibri"/>
-              </a:defRPr>
-            </a:lvl4pPr>
-            <a:lvl5pPr lvl="4" algn="l" defTabSz="457200">
-              <a:lnSpc>
-                <a:spcPct val="100000"/>
-              </a:lnSpc>
-              <a:spcBef>
-                <a:spcPts val="400"/>
-              </a:spcBef>
-              <a:buClr>
-                <a:srgbClr val="000000"/>
-              </a:buClr>
-              <a:buSzPct val="45000"/>
-              <a:buFont typeface="Wingdings" charset="2"/>
-              <a:buChar char=""/>
-              <a:tabLst>
-                <a:tab pos="0" algn="l"/>
-              </a:tabLst>
-              <a:defRPr lang="en-US" sz="3200" b="0" u="none" strike="noStrike">
-                <a:solidFill>
-                  <a:schemeClr val="dk1"/>
-                </a:solidFill>
-                <a:effectLst/>
-                <a:uFillTx/>
-                <a:latin typeface="Calibri"/>
-              </a:defRPr>
-            </a:lvl5pPr>
-            <a:lvl6pPr lvl="5" algn="l" defTabSz="457200">
-              <a:lnSpc>
-                <a:spcPct val="100000"/>
-              </a:lnSpc>
-              <a:spcBef>
-                <a:spcPts val="283"/>
-              </a:spcBef>
-              <a:buClr>
-                <a:srgbClr val="000000"/>
-              </a:buClr>
-              <a:buSzPct val="45000"/>
-              <a:buFont typeface="Wingdings" charset="2"/>
-              <a:buChar char=""/>
-              <a:tabLst>
-                <a:tab pos="0" algn="l"/>
-              </a:tabLst>
-              <a:defRPr lang="en-US" sz="3200" b="0" u="none" strike="noStrike">
-                <a:solidFill>
-                  <a:schemeClr val="dk1"/>
-                </a:solidFill>
-                <a:effectLst/>
-                <a:uFillTx/>
-                <a:latin typeface="Calibri"/>
-              </a:defRPr>
-            </a:lvl6pPr>
-            <a:lvl7pPr lvl="6" algn="l" defTabSz="457200">
-              <a:lnSpc>
-                <a:spcPct val="100000"/>
-              </a:lnSpc>
-              <a:spcBef>
-                <a:spcPts val="283"/>
-              </a:spcBef>
-              <a:buClr>
-                <a:srgbClr val="000000"/>
-              </a:buClr>
-              <a:buSzPct val="45000"/>
-              <a:buFont typeface="Wingdings" charset="2"/>
-              <a:buChar char=""/>
-              <a:tabLst>
-                <a:tab pos="0" algn="l"/>
-              </a:tabLst>
-              <a:defRPr lang="en-US" sz="3200" b="0" u="none" strike="noStrike">
-                <a:solidFill>
-                  <a:schemeClr val="dk1"/>
-                </a:solidFill>
-                <a:effectLst/>
-                <a:uFillTx/>
-                <a:latin typeface="Calibri"/>
-              </a:defRPr>
-            </a:lvl7pPr>
-          </a:lstStyle>
-          <a:p>
-            <a:pPr marL="432000" indent="-324000" algn="l" defTabSz="457200">
-              <a:lnSpc>
-                <a:spcPct val="100000"/>
-              </a:lnSpc>
-              <a:spcBef>
-                <a:spcPts val="281"/>
-              </a:spcBef>
-              <a:buClr>
-                <a:srgbClr val="000000"/>
-              </a:buClr>
-              <a:buFont typeface="Arial"/>
-              <a:buChar char="•"/>
-              <a:tabLst>
-                <a:tab pos="0" algn="l"/>
-              </a:tabLst>
-            </a:pPr>
-            <a:r>
-              <a:rPr lang="en-US" sz="3200" b="0" u="none" strike="noStrike">
-                <a:solidFill>
-                  <a:schemeClr val="dk1"/>
-                </a:solidFill>
-                <a:effectLst/>
-                <a:uFillTx/>
-                <a:latin typeface="Calibri"/>
-              </a:rPr>
-              <a:t>Click to edit the outline text format</a:t>
-            </a:r>
-            <a:endParaRPr lang="en-US" sz="3200" b="0" u="none" strike="noStrike">
-              <a:solidFill>
-                <a:schemeClr val="dk1"/>
-              </a:solidFill>
-              <a:effectLst/>
-              <a:uFillTx/>
-              <a:latin typeface="Calibri"/>
-            </a:endParaRPr>
-          </a:p>
-          <a:p>
-            <a:pPr marL="457200" lvl="1" indent="-324000" algn="l" defTabSz="457200">
-              <a:lnSpc>
-                <a:spcPct val="100000"/>
-              </a:lnSpc>
-              <a:spcBef>
-                <a:spcPts val="561"/>
-              </a:spcBef>
-              <a:buClr>
-                <a:srgbClr val="000000"/>
-              </a:buClr>
-              <a:buSzPct val="75000"/>
-              <a:buFont typeface="Symbol" charset="2"/>
-              <a:buChar char=""/>
-              <a:tabLst>
-                <a:tab pos="0" algn="l"/>
-              </a:tabLst>
-            </a:pPr>
-            <a:r>
-              <a:rPr lang="en-US" sz="3200" b="0" u="none" strike="noStrike">
-                <a:solidFill>
-                  <a:schemeClr val="dk1"/>
-                </a:solidFill>
-                <a:effectLst/>
-                <a:uFillTx/>
-                <a:latin typeface="Calibri"/>
-              </a:rPr>
-              <a:t>Second Outline Level</a:t>
-            </a:r>
-            <a:endParaRPr lang="en-US" sz="3200" b="0" u="none" strike="noStrike">
-              <a:solidFill>
-                <a:schemeClr val="dk1"/>
-              </a:solidFill>
-              <a:effectLst/>
-              <a:uFillTx/>
-              <a:latin typeface="Calibri"/>
-            </a:endParaRPr>
-          </a:p>
-          <a:p>
-            <a:pPr marL="914400" lvl="2" indent="-288000" algn="l" defTabSz="457200">
-              <a:lnSpc>
-                <a:spcPct val="100000"/>
-              </a:lnSpc>
-              <a:spcBef>
-                <a:spcPts val="479"/>
-              </a:spcBef>
-              <a:buClr>
-                <a:srgbClr val="000000"/>
-              </a:buClr>
-              <a:buSzPct val="45000"/>
-              <a:buFont typeface="Wingdings" charset="2"/>
-              <a:buChar char=""/>
-              <a:tabLst>
-                <a:tab pos="0" algn="l"/>
-              </a:tabLst>
-            </a:pPr>
-            <a:r>
-              <a:rPr lang="en-US" sz="3200" b="0" u="none" strike="noStrike">
-                <a:solidFill>
-                  <a:schemeClr val="dk1"/>
-                </a:solidFill>
-                <a:effectLst/>
-                <a:uFillTx/>
-                <a:latin typeface="Calibri"/>
-              </a:rPr>
-              <a:t>Third Outline Level</a:t>
-            </a:r>
-            <a:endParaRPr lang="en-US" sz="3200" b="0" u="none" strike="noStrike">
-              <a:solidFill>
-                <a:schemeClr val="dk1"/>
-              </a:solidFill>
-              <a:effectLst/>
-              <a:uFillTx/>
-              <a:latin typeface="Calibri"/>
-            </a:endParaRPr>
-          </a:p>
-          <a:p>
-            <a:pPr marL="1371600" lvl="3" indent="-216000" algn="l" defTabSz="457200">
-              <a:lnSpc>
-                <a:spcPct val="100000"/>
-              </a:lnSpc>
-              <a:spcBef>
-                <a:spcPts val="400"/>
-              </a:spcBef>
-              <a:buClr>
-                <a:srgbClr val="000000"/>
-              </a:buClr>
-              <a:buSzPct val="75000"/>
-              <a:buFont typeface="Symbol" charset="2"/>
-              <a:buChar char=""/>
-              <a:tabLst>
-                <a:tab pos="0" algn="l"/>
-              </a:tabLst>
-            </a:pPr>
-            <a:r>
-              <a:rPr lang="en-US" sz="3200" b="0" u="none" strike="noStrike">
-                <a:solidFill>
-                  <a:schemeClr val="dk1"/>
-                </a:solidFill>
-                <a:effectLst/>
-                <a:uFillTx/>
-                <a:latin typeface="Calibri"/>
-              </a:rPr>
-              <a:t>Fourth Outline Level</a:t>
-            </a:r>
-            <a:endParaRPr lang="en-US" sz="3200" b="0" u="none" strike="noStrike">
-              <a:solidFill>
-                <a:schemeClr val="dk1"/>
-              </a:solidFill>
-              <a:effectLst/>
-              <a:uFillTx/>
-              <a:latin typeface="Calibri"/>
-            </a:endParaRPr>
-          </a:p>
-          <a:p>
-            <a:pPr marL="1828800" lvl="4" indent="-216000" algn="l" defTabSz="457200">
-              <a:lnSpc>
-                <a:spcPct val="100000"/>
-              </a:lnSpc>
-              <a:spcBef>
-                <a:spcPts val="400"/>
-              </a:spcBef>
-              <a:buClr>
-                <a:srgbClr val="000000"/>
-              </a:buClr>
-              <a:buSzPct val="45000"/>
-              <a:buFont typeface="Wingdings" charset="2"/>
-              <a:buChar char=""/>
-              <a:tabLst>
-                <a:tab pos="0" algn="l"/>
-              </a:tabLst>
-            </a:pPr>
-            <a:r>
-              <a:rPr lang="en-US" sz="3200" b="0" u="none" strike="noStrike">
-                <a:solidFill>
-                  <a:schemeClr val="dk1"/>
-                </a:solidFill>
-                <a:effectLst/>
-                <a:uFillTx/>
-                <a:latin typeface="Calibri"/>
-              </a:rPr>
-              <a:t>Fifth Outline Level</a:t>
-            </a:r>
-            <a:endParaRPr lang="en-US" sz="3200" b="0" u="none" strike="noStrike">
-              <a:solidFill>
-                <a:schemeClr val="dk1"/>
-              </a:solidFill>
-              <a:effectLst/>
-              <a:uFillTx/>
-              <a:latin typeface="Calibri"/>
-            </a:endParaRPr>
-          </a:p>
-          <a:p>
-            <a:pPr marL="2286000" lvl="5" indent="-216000" algn="l" defTabSz="457200">
-              <a:lnSpc>
-                <a:spcPct val="100000"/>
-              </a:lnSpc>
-              <a:spcBef>
-                <a:spcPts val="283"/>
-              </a:spcBef>
-              <a:buClr>
-                <a:srgbClr val="000000"/>
-              </a:buClr>
-              <a:buSzPct val="45000"/>
-              <a:buFont typeface="Wingdings" charset="2"/>
-              <a:buChar char=""/>
-              <a:tabLst>
-                <a:tab pos="0" algn="l"/>
-              </a:tabLst>
-            </a:pPr>
-            <a:r>
-              <a:rPr lang="en-US" sz="3200" b="0" u="none" strike="noStrike">
-                <a:solidFill>
-                  <a:schemeClr val="dk1"/>
-                </a:solidFill>
-                <a:effectLst/>
-                <a:uFillTx/>
-                <a:latin typeface="Calibri"/>
-              </a:rPr>
-              <a:t>Sixth Outline Level</a:t>
-            </a:r>
-            <a:endParaRPr lang="en-US" sz="3200" b="0" u="none" strike="noStrike">
-              <a:solidFill>
-                <a:schemeClr val="dk1"/>
-              </a:solidFill>
-              <a:effectLst/>
-              <a:uFillTx/>
-              <a:latin typeface="Calibri"/>
-            </a:endParaRPr>
-          </a:p>
-          <a:p>
-            <a:pPr marL="2743200" lvl="6" indent="-216000" algn="l" defTabSz="457200">
-              <a:lnSpc>
-                <a:spcPct val="100000"/>
-              </a:lnSpc>
-              <a:spcBef>
-                <a:spcPts val="283"/>
-              </a:spcBef>
-              <a:buClr>
-                <a:srgbClr val="000000"/>
-              </a:buClr>
-              <a:buSzPct val="45000"/>
-              <a:buFont typeface="Wingdings" charset="2"/>
-              <a:buChar char=""/>
-              <a:tabLst>
-                <a:tab pos="0" algn="l"/>
-              </a:tabLst>
-            </a:pPr>
-            <a:r>
-              <a:rPr lang="en-US" sz="3200" b="0" u="none" strike="noStrike">
-                <a:solidFill>
-                  <a:schemeClr val="dk1"/>
-                </a:solidFill>
-                <a:effectLst/>
-                <a:uFillTx/>
-                <a:latin typeface="Calibri"/>
-              </a:rPr>
-              <a:t>Seventh Outline Level</a:t>
-            </a:r>
-            <a:endParaRPr lang="en-US" sz="3200" b="0" u="none" strike="noStrike">
-              <a:solidFill>
-                <a:schemeClr val="dk1"/>
-              </a:solidFill>
-              <a:effectLst/>
-              <a:uFillTx/>
-              <a:latin typeface="Calibri"/>
-            </a:endParaRPr>
-          </a:p>
-        </p:txBody>
-      </p:sp>
-      <p:sp>
-        <p:nvSpPr>
-          <p:cNvPr id="33" name="PlaceHolder 3"/>
-          <p:cNvSpPr>
-            <a:spLocks noGrp="1"/>
-          </p:cNvSpPr>
-          <p:nvPr>
-            <p:ph type="body"/>
-          </p:nvPr>
-        </p:nvSpPr>
-        <p:spPr>
-          <a:xfrm>
-            <a:off x="1792440" y="5367240"/>
-            <a:ext cx="5485320" cy="803880"/>
-          </a:xfrm>
-          <a:prstGeom prst="rect">
-            <a:avLst/>
-          </a:prstGeom>
-          <a:noFill/>
-          <a:ln w="0">
-            <a:noFill/>
-          </a:ln>
-        </p:spPr>
-        <p:txBody>
-          <a:bodyPr lIns="91440" tIns="45720" rIns="91440" bIns="45720" anchor="t">
-            <a:noAutofit/>
-          </a:bodyPr>
-          <a:lstStyle>
-            <a:lvl1pPr indent="0" algn="l" defTabSz="457200">
-              <a:lnSpc>
-                <a:spcPct val="100000"/>
-              </a:lnSpc>
-              <a:spcBef>
-                <a:spcPts val="281"/>
-              </a:spcBef>
-              <a:buNone/>
-              <a:tabLst>
-                <a:tab pos="0" algn="l"/>
-              </a:tabLst>
-              <a:defRPr lang="en-US" sz="1400" b="0" u="none" strike="noStrike">
-                <a:solidFill>
-                  <a:schemeClr val="dk1"/>
-                </a:solidFill>
-                <a:effectLst/>
-                <a:uFillTx/>
-                <a:latin typeface="Calibri"/>
-              </a:defRPr>
-            </a:lvl1pPr>
-          </a:lstStyle>
-          <a:p>
-            <a:pPr indent="0" algn="l" defTabSz="457200">
-              <a:lnSpc>
-                <a:spcPct val="100000"/>
-              </a:lnSpc>
-              <a:spcBef>
-                <a:spcPts val="281"/>
-              </a:spcBef>
-              <a:buNone/>
-              <a:tabLst>
-                <a:tab pos="0" algn="l"/>
-              </a:tabLst>
-            </a:pPr>
-            <a:r>
-              <a:rPr lang="en-US" sz="1400" b="0" u="none" strike="noStrike">
-                <a:solidFill>
-                  <a:schemeClr val="dk1"/>
-                </a:solidFill>
-                <a:effectLst/>
-                <a:uFillTx/>
-                <a:latin typeface="Calibri"/>
-              </a:rPr>
-              <a:t>Click to edit Master text styles</a:t>
-            </a:r>
-            <a:endParaRPr lang="en-US" sz="1400" b="0" u="none" strike="noStrike">
-              <a:solidFill>
-                <a:schemeClr val="dk1"/>
-              </a:solidFill>
-              <a:effectLst/>
-              <a:uFillTx/>
-              <a:latin typeface="Calibri"/>
-            </a:endParaRPr>
-          </a:p>
-        </p:txBody>
-      </p:sp>
-      <p:sp>
-        <p:nvSpPr>
-          <p:cNvPr id="34" name="PlaceHolder 4"/>
           <p:cNvSpPr>
             <a:spLocks noGrp="1"/>
           </p:cNvSpPr>
@@ -6011,7 +5064,7 @@
         <p:spPr>
           <a:xfrm>
             <a:off x="457200" y="6356520"/>
-            <a:ext cx="2132640" cy="363960"/>
+            <a:ext cx="2132280" cy="363600"/>
           </a:xfrm>
           <a:prstGeom prst="rect">
             <a:avLst/>
@@ -6082,7 +5135,7 @@
       </p:sp>
       <p:sp>
         <p:nvSpPr>
-          <p:cNvPr id="35" name="PlaceHolder 5"/>
+          <p:cNvPr id="33" name="PlaceHolder 3"/>
           <p:cNvSpPr>
             <a:spLocks noGrp="1"/>
           </p:cNvSpPr>
@@ -6093,7 +5146,7 @@
         <p:spPr>
           <a:xfrm>
             <a:off x="3124080" y="6356520"/>
-            <a:ext cx="2894400" cy="363960"/>
+            <a:ext cx="2894040" cy="363600"/>
           </a:xfrm>
           <a:prstGeom prst="rect">
             <a:avLst/>
@@ -6160,7 +5213,7 @@
       </p:sp>
       <p:sp>
         <p:nvSpPr>
-          <p:cNvPr id="36" name="PlaceHolder 6"/>
+          <p:cNvPr id="34" name="PlaceHolder 4"/>
           <p:cNvSpPr>
             <a:spLocks noGrp="1"/>
           </p:cNvSpPr>
@@ -6171,7 +5224,7 @@
         <p:spPr>
           <a:xfrm>
             <a:off x="6553080" y="6356520"/>
-            <a:ext cx="2132640" cy="363960"/>
+            <a:ext cx="2132280" cy="363600"/>
           </a:xfrm>
           <a:prstGeom prst="rect">
             <a:avLst/>
@@ -6216,7 +5269,7 @@
                 <a:tab pos="0" algn="l"/>
               </a:tabLst>
             </a:pPr>
-            <a:fld id="{8E995674-0C63-4323-8BE5-0EB3760C12A4}" type="slidenum">
+            <a:fld id="{4D47C8A6-24EA-4D33-A8C7-BEC8BD2BD3B1}" type="slidenum">
               <a:rPr lang="en-US" sz="1200" b="0" u="none" strike="noStrike">
                 <a:solidFill>
                   <a:schemeClr val="dk1">
@@ -6246,8 +5299,8 @@
 </file>
 
 <file path=ppt/slideLayouts/slideLayout7.xml><?xml version="1.0" encoding="utf-8"?>
-<p:sldLayout xmlns:a="http://schemas.openxmlformats.org/drawingml/2006/main" xmlns:p="http://schemas.openxmlformats.org/presentationml/2006/main" xmlns:r="http://schemas.openxmlformats.org/officeDocument/2006/relationships" xmlns:p14="http://schemas.microsoft.com/office/powerpoint/2010/main" xmlns:p15="http://schemas.microsoft.com/office/powerpoint/2012/main" xmlns:mc="http://schemas.openxmlformats.org/markup-compatibility/2006" type="title" preserve="1">
-  <p:cSld name="Title Slide">
+<p:sldLayout xmlns:a="http://schemas.openxmlformats.org/drawingml/2006/main" xmlns:p="http://schemas.openxmlformats.org/presentationml/2006/main" xmlns:r="http://schemas.openxmlformats.org/officeDocument/2006/relationships" xmlns:p14="http://schemas.microsoft.com/office/powerpoint/2010/main" xmlns:p15="http://schemas.microsoft.com/office/powerpoint/2012/main" xmlns:mc="http://schemas.openxmlformats.org/markup-compatibility/2006" type="blank" preserve="1">
+  <p:cSld name="Blank">
     <p:bg>
       <p:bgPr>
         <a:solidFill>
@@ -6271,85 +5324,7 @@
       </p:grpSpPr>
       <p:sp>
         <p:nvSpPr>
-          <p:cNvPr id="37" name="PlaceHolder 1"/>
-          <p:cNvSpPr>
-            <a:spLocks noGrp="1"/>
-          </p:cNvSpPr>
-          <p:nvPr>
-            <p:ph type="title"/>
-          </p:nvPr>
-        </p:nvSpPr>
-        <p:spPr>
-          <a:xfrm>
-            <a:off x="685800" y="2130480"/>
-            <a:ext cx="7771320" cy="1468800"/>
-          </a:xfrm>
-          <a:prstGeom prst="rect">
-            <a:avLst/>
-          </a:prstGeom>
-          <a:noFill/>
-          <a:ln w="0">
-            <a:noFill/>
-          </a:ln>
-        </p:spPr>
-        <p:txBody>
-          <a:bodyPr lIns="91440" tIns="45720" rIns="91440" bIns="45720" anchor="ctr">
-            <a:noAutofit/>
-          </a:bodyPr>
-          <a:lstStyle>
-            <a:lvl1pPr indent="0" algn="ctr" defTabSz="457200">
-              <a:lnSpc>
-                <a:spcPct val="100000"/>
-              </a:lnSpc>
-              <a:buNone/>
-              <a:tabLst>
-                <a:tab pos="0" algn="l"/>
-              </a:tabLst>
-              <a:defRPr lang="en-US" sz="4400" b="0" u="none" strike="noStrike">
-                <a:solidFill>
-                  <a:schemeClr val="dk1"/>
-                </a:solidFill>
-                <a:effectLst/>
-                <a:uFillTx/>
-                <a:latin typeface="Calibri"/>
-              </a:defRPr>
-            </a:lvl1pPr>
-          </a:lstStyle>
-          <a:p>
-            <a:pPr indent="0" algn="ctr" defTabSz="457200">
-              <a:lnSpc>
-                <a:spcPct val="100000"/>
-              </a:lnSpc>
-              <a:buNone/>
-              <a:tabLst>
-                <a:tab pos="0" algn="l"/>
-              </a:tabLst>
-            </a:pPr>
-            <a:r>
-              <a:rPr lang="en-US" sz="4400" b="0" u="none" strike="noStrike">
-                <a:solidFill>
-                  <a:schemeClr val="dk1"/>
-                </a:solidFill>
-                <a:effectLst/>
-                <a:uFillTx/>
-                <a:latin typeface="Calibri"/>
-              </a:rPr>
-              <a:t>Click to edit Master title style</a:t>
-            </a:r>
-            <a:endParaRPr lang="en-US" sz="4400" b="0" u="none" strike="noStrike">
-              <a:solidFill>
-                <a:schemeClr val="dk1"/>
-              </a:solidFill>
-              <a:effectLst/>
-              <a:uFillTx/>
-              <a:latin typeface="Calibri"/>
-            </a:endParaRPr>
-          </a:p>
-        </p:txBody>
-      </p:sp>
-      <p:sp>
-        <p:nvSpPr>
-          <p:cNvPr id="38" name="PlaceHolder 2"/>
+          <p:cNvPr id="35" name="PlaceHolder 1"/>
           <p:cNvSpPr>
             <a:spLocks noGrp="1"/>
           </p:cNvSpPr>
@@ -6360,7 +5335,7 @@
         <p:spPr>
           <a:xfrm>
             <a:off x="457200" y="6356520"/>
-            <a:ext cx="2132640" cy="363960"/>
+            <a:ext cx="2132280" cy="363600"/>
           </a:xfrm>
           <a:prstGeom prst="rect">
             <a:avLst/>
@@ -6431,7 +5406,7 @@
       </p:sp>
       <p:sp>
         <p:nvSpPr>
-          <p:cNvPr id="39" name="PlaceHolder 3"/>
+          <p:cNvPr id="36" name="PlaceHolder 2"/>
           <p:cNvSpPr>
             <a:spLocks noGrp="1"/>
           </p:cNvSpPr>
@@ -6442,7 +5417,7 @@
         <p:spPr>
           <a:xfrm>
             <a:off x="3124080" y="6356520"/>
-            <a:ext cx="2894400" cy="363960"/>
+            <a:ext cx="2894040" cy="363600"/>
           </a:xfrm>
           <a:prstGeom prst="rect">
             <a:avLst/>
@@ -6509,7 +5484,7 @@
       </p:sp>
       <p:sp>
         <p:nvSpPr>
-          <p:cNvPr id="40" name="PlaceHolder 4"/>
+          <p:cNvPr id="37" name="PlaceHolder 3"/>
           <p:cNvSpPr>
             <a:spLocks noGrp="1"/>
           </p:cNvSpPr>
@@ -6520,7 +5495,7 @@
         <p:spPr>
           <a:xfrm>
             <a:off x="6553080" y="6356520"/>
-            <a:ext cx="2132640" cy="363960"/>
+            <a:ext cx="2132280" cy="363600"/>
           </a:xfrm>
           <a:prstGeom prst="rect">
             <a:avLst/>
@@ -6565,7 +5540,7 @@
                 <a:tab pos="0" algn="l"/>
               </a:tabLst>
             </a:pPr>
-            <a:fld id="{DB2A8906-F4B0-4883-840C-9546257790EB}" type="slidenum">
+            <a:fld id="{BF162748-16EA-4DB5-B953-7350AB927637}" type="slidenum">
               <a:rPr lang="en-US" sz="1200" b="0" u="none" strike="noStrike">
                 <a:solidFill>
                   <a:schemeClr val="dk1">
@@ -6585,6 +5560,512 @@
               <a:effectLst/>
               <a:uFillTx/>
               <a:latin typeface="Times New Roman"/>
+            </a:endParaRPr>
+          </a:p>
+        </p:txBody>
+      </p:sp>
+      <p:sp>
+        <p:nvSpPr>
+          <p:cNvPr id="38" name="PlaceHolder 4"/>
+          <p:cNvSpPr>
+            <a:spLocks noGrp="1"/>
+          </p:cNvSpPr>
+          <p:nvPr>
+            <p:ph type="title"/>
+          </p:nvPr>
+        </p:nvSpPr>
+        <p:spPr>
+          <a:xfrm>
+            <a:off x="609480" y="273600"/>
+            <a:ext cx="10971000" cy="1143720"/>
+          </a:xfrm>
+          <a:prstGeom prst="rect">
+            <a:avLst/>
+          </a:prstGeom>
+          <a:noFill/>
+          <a:ln w="0">
+            <a:noFill/>
+          </a:ln>
+        </p:spPr>
+        <p:txBody>
+          <a:bodyPr lIns="0" tIns="0" rIns="0" bIns="0" anchor="ctr">
+            <a:noAutofit/>
+          </a:bodyPr>
+          <a:lstStyle>
+            <a:lvl1pPr indent="0" algn="ctr" defTabSz="457200">
+              <a:lnSpc>
+                <a:spcPct val="100000"/>
+              </a:lnSpc>
+              <a:buNone/>
+              <a:tabLst>
+                <a:tab pos="0" algn="l"/>
+              </a:tabLst>
+              <a:defRPr lang="en-US" sz="4400" b="0" u="none" strike="noStrike">
+                <a:solidFill>
+                  <a:schemeClr val="dk1"/>
+                </a:solidFill>
+                <a:effectLst/>
+                <a:uFillTx/>
+                <a:latin typeface="Calibri"/>
+              </a:defRPr>
+            </a:lvl1pPr>
+          </a:lstStyle>
+          <a:p>
+            <a:pPr indent="0" algn="ctr" defTabSz="457200">
+              <a:lnSpc>
+                <a:spcPct val="100000"/>
+              </a:lnSpc>
+              <a:buNone/>
+              <a:tabLst>
+                <a:tab pos="0" algn="l"/>
+              </a:tabLst>
+            </a:pPr>
+            <a:r>
+              <a:rPr lang="en-US" sz="4400" b="0" u="none" strike="noStrike">
+                <a:solidFill>
+                  <a:schemeClr val="dk1"/>
+                </a:solidFill>
+                <a:effectLst/>
+                <a:uFillTx/>
+                <a:latin typeface="Calibri"/>
+              </a:rPr>
+              <a:t>Click to edit the title text format</a:t>
+            </a:r>
+            <a:endParaRPr lang="en-US" sz="4400" b="0" u="none" strike="noStrike">
+              <a:solidFill>
+                <a:schemeClr val="dk1"/>
+              </a:solidFill>
+              <a:effectLst/>
+              <a:uFillTx/>
+              <a:latin typeface="Calibri"/>
+            </a:endParaRPr>
+          </a:p>
+        </p:txBody>
+      </p:sp>
+      <p:sp>
+        <p:nvSpPr>
+          <p:cNvPr id="39" name="PlaceHolder 5"/>
+          <p:cNvSpPr>
+            <a:spLocks noGrp="1"/>
+          </p:cNvSpPr>
+          <p:nvPr>
+            <p:ph type="body"/>
+          </p:nvPr>
+        </p:nvSpPr>
+        <p:spPr>
+          <a:xfrm>
+            <a:off x="609480" y="1604520"/>
+            <a:ext cx="10971000" cy="3976200"/>
+          </a:xfrm>
+          <a:prstGeom prst="rect">
+            <a:avLst/>
+          </a:prstGeom>
+          <a:noFill/>
+          <a:ln w="0">
+            <a:noFill/>
+          </a:ln>
+        </p:spPr>
+        <p:txBody>
+          <a:bodyPr lIns="0" tIns="0" rIns="0" bIns="0" anchor="t">
+            <a:normAutofit/>
+          </a:bodyPr>
+          <a:lstStyle>
+            <a:lvl1pPr algn="l" defTabSz="457200">
+              <a:lnSpc>
+                <a:spcPct val="100000"/>
+              </a:lnSpc>
+              <a:spcBef>
+                <a:spcPts val="641"/>
+              </a:spcBef>
+              <a:buClr>
+                <a:srgbClr val="000000"/>
+              </a:buClr>
+              <a:buFont typeface="Arial"/>
+              <a:buChar char="•"/>
+              <a:defRPr lang="en-US" sz="3200" b="0" u="none" strike="noStrike">
+                <a:solidFill>
+                  <a:schemeClr val="dk1"/>
+                </a:solidFill>
+                <a:effectLst/>
+                <a:uFillTx/>
+                <a:latin typeface="Calibri"/>
+              </a:defRPr>
+            </a:lvl1pPr>
+            <a:lvl2pPr lvl="1" algn="l" defTabSz="457200">
+              <a:lnSpc>
+                <a:spcPct val="100000"/>
+              </a:lnSpc>
+              <a:spcBef>
+                <a:spcPts val="561"/>
+              </a:spcBef>
+              <a:buClr>
+                <a:srgbClr val="000000"/>
+              </a:buClr>
+              <a:buSzPct val="75000"/>
+              <a:buFont typeface="Symbol" charset="2"/>
+              <a:buChar char=""/>
+              <a:defRPr lang="en-US" sz="2800" b="0" u="none" strike="noStrike">
+                <a:solidFill>
+                  <a:schemeClr val="dk1"/>
+                </a:solidFill>
+                <a:effectLst/>
+                <a:uFillTx/>
+                <a:latin typeface="Calibri"/>
+              </a:defRPr>
+            </a:lvl2pPr>
+            <a:lvl3pPr lvl="2" algn="l" defTabSz="457200">
+              <a:lnSpc>
+                <a:spcPct val="100000"/>
+              </a:lnSpc>
+              <a:spcBef>
+                <a:spcPts val="479"/>
+              </a:spcBef>
+              <a:buClr>
+                <a:srgbClr val="000000"/>
+              </a:buClr>
+              <a:buSzPct val="45000"/>
+              <a:buFont typeface="Wingdings" charset="2"/>
+              <a:buChar char=""/>
+              <a:defRPr lang="en-US" sz="2400" b="0" u="none" strike="noStrike">
+                <a:solidFill>
+                  <a:schemeClr val="dk1"/>
+                </a:solidFill>
+                <a:effectLst/>
+                <a:uFillTx/>
+                <a:latin typeface="Calibri"/>
+              </a:defRPr>
+            </a:lvl3pPr>
+            <a:lvl4pPr lvl="3" algn="l" defTabSz="457200">
+              <a:lnSpc>
+                <a:spcPct val="100000"/>
+              </a:lnSpc>
+              <a:spcBef>
+                <a:spcPts val="400"/>
+              </a:spcBef>
+              <a:buClr>
+                <a:srgbClr val="000000"/>
+              </a:buClr>
+              <a:buSzPct val="75000"/>
+              <a:buFont typeface="Symbol" charset="2"/>
+              <a:buChar char=""/>
+              <a:defRPr lang="en-US" sz="2000" b="0" u="none" strike="noStrike">
+                <a:solidFill>
+                  <a:schemeClr val="dk1"/>
+                </a:solidFill>
+                <a:effectLst/>
+                <a:uFillTx/>
+                <a:latin typeface="Calibri"/>
+              </a:defRPr>
+            </a:lvl4pPr>
+            <a:lvl5pPr lvl="4" algn="l" defTabSz="457200">
+              <a:lnSpc>
+                <a:spcPct val="100000"/>
+              </a:lnSpc>
+              <a:spcBef>
+                <a:spcPts val="400"/>
+              </a:spcBef>
+              <a:buClr>
+                <a:srgbClr val="000000"/>
+              </a:buClr>
+              <a:buSzPct val="45000"/>
+              <a:buFont typeface="Wingdings" charset="2"/>
+              <a:buChar char=""/>
+              <a:defRPr lang="en-US" sz="2000" b="0" u="none" strike="noStrike">
+                <a:solidFill>
+                  <a:schemeClr val="dk1"/>
+                </a:solidFill>
+                <a:effectLst/>
+                <a:uFillTx/>
+                <a:latin typeface="Calibri"/>
+              </a:defRPr>
+            </a:lvl5pPr>
+            <a:lvl6pPr lvl="5" algn="l" defTabSz="457200">
+              <a:lnSpc>
+                <a:spcPct val="100000"/>
+              </a:lnSpc>
+              <a:spcBef>
+                <a:spcPts val="283"/>
+              </a:spcBef>
+              <a:buClr>
+                <a:srgbClr val="000000"/>
+              </a:buClr>
+              <a:buSzPct val="45000"/>
+              <a:buFont typeface="Wingdings" charset="2"/>
+              <a:buChar char=""/>
+              <a:defRPr lang="en-US" sz="2000" b="0" u="none" strike="noStrike">
+                <a:solidFill>
+                  <a:schemeClr val="dk1"/>
+                </a:solidFill>
+                <a:effectLst/>
+                <a:uFillTx/>
+                <a:latin typeface="Calibri"/>
+              </a:defRPr>
+            </a:lvl6pPr>
+            <a:lvl7pPr lvl="6" algn="l" defTabSz="457200">
+              <a:lnSpc>
+                <a:spcPct val="100000"/>
+              </a:lnSpc>
+              <a:spcBef>
+                <a:spcPts val="283"/>
+              </a:spcBef>
+              <a:buClr>
+                <a:srgbClr val="000000"/>
+              </a:buClr>
+              <a:buSzPct val="45000"/>
+              <a:buFont typeface="Wingdings" charset="2"/>
+              <a:buChar char=""/>
+              <a:defRPr lang="en-US" sz="2000" b="0" u="none" strike="noStrike">
+                <a:solidFill>
+                  <a:schemeClr val="dk1"/>
+                </a:solidFill>
+                <a:effectLst/>
+                <a:uFillTx/>
+                <a:latin typeface="Calibri"/>
+              </a:defRPr>
+            </a:lvl7pPr>
+          </a:lstStyle>
+          <a:p>
+            <a:pPr marL="343080" indent="-343080" algn="l" defTabSz="457200">
+              <a:lnSpc>
+                <a:spcPct val="100000"/>
+              </a:lnSpc>
+              <a:spcBef>
+                <a:spcPts val="641"/>
+              </a:spcBef>
+              <a:buClr>
+                <a:srgbClr val="000000"/>
+              </a:buClr>
+              <a:buFont typeface="Arial"/>
+              <a:buChar char="•"/>
+            </a:pPr>
+            <a:r>
+              <a:rPr lang="en-US" sz="3200" b="0" u="none" strike="noStrike">
+                <a:solidFill>
+                  <a:schemeClr val="dk1"/>
+                </a:solidFill>
+                <a:effectLst/>
+                <a:uFillTx/>
+                <a:latin typeface="Calibri"/>
+              </a:rPr>
+              <a:t>Click to edit the outline text format</a:t>
+            </a:r>
+            <a:endParaRPr lang="en-US" sz="3200" b="0" u="none" strike="noStrike">
+              <a:solidFill>
+                <a:schemeClr val="dk1"/>
+              </a:solidFill>
+              <a:effectLst/>
+              <a:uFillTx/>
+              <a:latin typeface="Calibri"/>
+            </a:endParaRPr>
+          </a:p>
+          <a:p>
+            <a:pPr marL="864000" lvl="1" indent="-324000" algn="l" defTabSz="457200">
+              <a:lnSpc>
+                <a:spcPct val="100000"/>
+              </a:lnSpc>
+              <a:spcBef>
+                <a:spcPts val="561"/>
+              </a:spcBef>
+              <a:buClr>
+                <a:srgbClr val="000000"/>
+              </a:buClr>
+              <a:buSzPct val="75000"/>
+              <a:buFont typeface="Symbol" charset="2"/>
+              <a:buChar char=""/>
+            </a:pPr>
+            <a:r>
+              <a:rPr lang="en-US" sz="2800" b="0" u="none" strike="noStrike">
+                <a:solidFill>
+                  <a:schemeClr val="dk1"/>
+                </a:solidFill>
+                <a:effectLst/>
+                <a:uFillTx/>
+                <a:latin typeface="Calibri"/>
+              </a:rPr>
+              <a:t>Second Outline Level</a:t>
+            </a:r>
+            <a:endParaRPr lang="en-US" sz="2800" b="0" u="none" strike="noStrike">
+              <a:solidFill>
+                <a:schemeClr val="dk1"/>
+              </a:solidFill>
+              <a:effectLst/>
+              <a:uFillTx/>
+              <a:latin typeface="Calibri"/>
+            </a:endParaRPr>
+          </a:p>
+          <a:p>
+            <a:pPr marL="1296000" lvl="2" indent="-288000" algn="l" defTabSz="457200">
+              <a:lnSpc>
+                <a:spcPct val="100000"/>
+              </a:lnSpc>
+              <a:spcBef>
+                <a:spcPts val="479"/>
+              </a:spcBef>
+              <a:buClr>
+                <a:srgbClr val="000000"/>
+              </a:buClr>
+              <a:buSzPct val="45000"/>
+              <a:buFont typeface="Wingdings" charset="2"/>
+              <a:buChar char=""/>
+            </a:pPr>
+            <a:r>
+              <a:rPr lang="en-US" sz="2400" b="0" u="none" strike="noStrike">
+                <a:solidFill>
+                  <a:schemeClr val="dk1"/>
+                </a:solidFill>
+                <a:effectLst/>
+                <a:uFillTx/>
+                <a:latin typeface="Calibri"/>
+              </a:rPr>
+              <a:t>Third Outline Level</a:t>
+            </a:r>
+            <a:endParaRPr lang="en-US" sz="2400" b="0" u="none" strike="noStrike">
+              <a:solidFill>
+                <a:schemeClr val="dk1"/>
+              </a:solidFill>
+              <a:effectLst/>
+              <a:uFillTx/>
+              <a:latin typeface="Calibri"/>
+            </a:endParaRPr>
+          </a:p>
+          <a:p>
+            <a:pPr marL="1728000" lvl="3" indent="-216000" algn="l" defTabSz="457200">
+              <a:lnSpc>
+                <a:spcPct val="100000"/>
+              </a:lnSpc>
+              <a:spcBef>
+                <a:spcPts val="400"/>
+              </a:spcBef>
+              <a:buClr>
+                <a:srgbClr val="000000"/>
+              </a:buClr>
+              <a:buSzPct val="75000"/>
+              <a:buFont typeface="Symbol" charset="2"/>
+              <a:buChar char=""/>
+            </a:pPr>
+            <a:r>
+              <a:rPr lang="en-US" sz="2000" b="0" u="none" strike="noStrike">
+                <a:solidFill>
+                  <a:schemeClr val="dk1"/>
+                </a:solidFill>
+                <a:effectLst/>
+                <a:uFillTx/>
+                <a:latin typeface="Calibri"/>
+              </a:rPr>
+              <a:t>Fourth Outline Level</a:t>
+            </a:r>
+            <a:endParaRPr lang="en-US" sz="2000" b="0" u="none" strike="noStrike">
+              <a:solidFill>
+                <a:schemeClr val="dk1"/>
+              </a:solidFill>
+              <a:effectLst/>
+              <a:uFillTx/>
+              <a:latin typeface="Calibri"/>
+            </a:endParaRPr>
+          </a:p>
+          <a:p>
+            <a:pPr marL="2160000" lvl="4" indent="-216000" algn="l" defTabSz="457200">
+              <a:lnSpc>
+                <a:spcPct val="100000"/>
+              </a:lnSpc>
+              <a:spcBef>
+                <a:spcPts val="400"/>
+              </a:spcBef>
+              <a:buClr>
+                <a:srgbClr val="000000"/>
+              </a:buClr>
+              <a:buSzPct val="45000"/>
+              <a:buFont typeface="Wingdings" charset="2"/>
+              <a:buChar char=""/>
+            </a:pPr>
+            <a:r>
+              <a:rPr lang="en-US" sz="2000" b="0" u="none" strike="noStrike">
+                <a:solidFill>
+                  <a:schemeClr val="dk1"/>
+                </a:solidFill>
+                <a:effectLst/>
+                <a:uFillTx/>
+                <a:latin typeface="Calibri"/>
+              </a:rPr>
+              <a:t>Fifth Outline Level</a:t>
+            </a:r>
+            <a:endParaRPr lang="en-US" sz="2000" b="0" u="none" strike="noStrike">
+              <a:solidFill>
+                <a:schemeClr val="dk1"/>
+              </a:solidFill>
+              <a:effectLst/>
+              <a:uFillTx/>
+              <a:latin typeface="Calibri"/>
+            </a:endParaRPr>
+          </a:p>
+          <a:p>
+            <a:pPr marL="2592000" lvl="5" indent="-216000" algn="l" defTabSz="457200">
+              <a:lnSpc>
+                <a:spcPct val="100000"/>
+              </a:lnSpc>
+              <a:spcBef>
+                <a:spcPts val="283"/>
+              </a:spcBef>
+              <a:buClr>
+                <a:srgbClr val="000000"/>
+              </a:buClr>
+              <a:buSzPct val="45000"/>
+              <a:buFont typeface="Wingdings" charset="2"/>
+              <a:buChar char=""/>
+            </a:pPr>
+            <a:r>
+              <a:rPr lang="en-US" sz="2000" b="0" u="none" strike="noStrike">
+                <a:solidFill>
+                  <a:schemeClr val="dk1"/>
+                </a:solidFill>
+                <a:effectLst/>
+                <a:uFillTx/>
+                <a:latin typeface="Calibri"/>
+              </a:rPr>
+              <a:t>Sixth Outline Level</a:t>
+            </a:r>
+            <a:endParaRPr lang="en-US" sz="2000" b="0" u="none" strike="noStrike">
+              <a:solidFill>
+                <a:schemeClr val="dk1"/>
+              </a:solidFill>
+              <a:effectLst/>
+              <a:uFillTx/>
+              <a:latin typeface="Calibri"/>
+            </a:endParaRPr>
+          </a:p>
+          <a:p>
+            <a:pPr marL="3024000" lvl="6" indent="-216000" algn="l" defTabSz="457200">
+              <a:lnSpc>
+                <a:spcPct val="100000"/>
+              </a:lnSpc>
+              <a:spcBef>
+                <a:spcPts val="283"/>
+              </a:spcBef>
+              <a:buClr>
+                <a:srgbClr val="000000"/>
+              </a:buClr>
+              <a:buSzPct val="45000"/>
+              <a:buFont typeface="Wingdings" charset="2"/>
+              <a:buChar char=""/>
+            </a:pPr>
+            <a:r>
+              <a:rPr lang="en-US" sz="2000" b="0" u="none" strike="noStrike">
+                <a:solidFill>
+                  <a:schemeClr val="dk1"/>
+                </a:solidFill>
+                <a:effectLst/>
+                <a:uFillTx/>
+                <a:latin typeface="Calibri"/>
+              </a:rPr>
+              <a:t>Seventh Outline Level</a:t>
+            </a:r>
+            <a:endParaRPr lang="en-US" sz="2000" b="0" u="none" strike="noStrike">
+              <a:solidFill>
+                <a:schemeClr val="dk1"/>
+              </a:solidFill>
+              <a:effectLst/>
+              <a:uFillTx/>
+              <a:latin typeface="Calibri"/>
             </a:endParaRPr>
           </a:p>
         </p:txBody>
@@ -6595,8 +6076,8 @@
 </file>
 
 <file path=ppt/slideLayouts/slideLayout8.xml><?xml version="1.0" encoding="utf-8"?>
-<p:sldLayout xmlns:a="http://schemas.openxmlformats.org/drawingml/2006/main" xmlns:p="http://schemas.openxmlformats.org/presentationml/2006/main" xmlns:r="http://schemas.openxmlformats.org/officeDocument/2006/relationships" xmlns:p14="http://schemas.microsoft.com/office/powerpoint/2010/main" xmlns:p15="http://schemas.microsoft.com/office/powerpoint/2012/main" xmlns:mc="http://schemas.openxmlformats.org/markup-compatibility/2006" type="vertTx" preserve="1">
-  <p:cSld name="Title and Vertical Text">
+<p:sldLayout xmlns:a="http://schemas.openxmlformats.org/drawingml/2006/main" xmlns:p="http://schemas.openxmlformats.org/presentationml/2006/main" xmlns:r="http://schemas.openxmlformats.org/officeDocument/2006/relationships" xmlns:p14="http://schemas.microsoft.com/office/powerpoint/2010/main" xmlns:p15="http://schemas.microsoft.com/office/powerpoint/2012/main" xmlns:mc="http://schemas.openxmlformats.org/markup-compatibility/2006" type="blank" preserve="1">
+  <p:cSld name="Content with Caption">
     <p:bg>
       <p:bgPr>
         <a:solidFill>
@@ -6620,7 +6101,7 @@
       </p:grpSpPr>
       <p:sp>
         <p:nvSpPr>
-          <p:cNvPr id="41" name="PlaceHolder 1"/>
+          <p:cNvPr id="40" name="PlaceHolder 1"/>
           <p:cNvSpPr>
             <a:spLocks noGrp="1"/>
           </p:cNvSpPr>
@@ -6630,8 +6111,8 @@
         </p:nvSpPr>
         <p:spPr>
           <a:xfrm>
-            <a:off x="457200" y="274680"/>
-            <a:ext cx="8228520" cy="1141920"/>
+            <a:off x="457200" y="272880"/>
+            <a:ext cx="3006720" cy="1160640"/>
           </a:xfrm>
           <a:prstGeom prst="rect">
             <a:avLst/>
@@ -6642,11 +6123,11 @@
           </a:ln>
         </p:spPr>
         <p:txBody>
-          <a:bodyPr lIns="91440" tIns="45720" rIns="91440" bIns="45720" anchor="ctr">
+          <a:bodyPr lIns="91440" tIns="45720" rIns="91440" bIns="45720" anchor="b">
             <a:noAutofit/>
           </a:bodyPr>
           <a:lstStyle>
-            <a:lvl1pPr indent="0" algn="ctr" defTabSz="457200">
+            <a:lvl1pPr indent="0" algn="l" defTabSz="457200">
               <a:lnSpc>
                 <a:spcPct val="100000"/>
               </a:lnSpc>
@@ -6654,7 +6135,7 @@
               <a:tabLst>
                 <a:tab pos="0" algn="l"/>
               </a:tabLst>
-              <a:defRPr lang="en-US" sz="4400" b="0" u="none" strike="noStrike">
+              <a:defRPr lang="en-US" sz="2000" b="1" u="none" strike="noStrike">
                 <a:solidFill>
                   <a:schemeClr val="dk1"/>
                 </a:solidFill>
@@ -6665,7 +6146,7 @@
             </a:lvl1pPr>
           </a:lstStyle>
           <a:p>
-            <a:pPr indent="0" algn="ctr" defTabSz="457200">
+            <a:pPr indent="0" algn="l" defTabSz="457200">
               <a:lnSpc>
                 <a:spcPct val="100000"/>
               </a:lnSpc>
@@ -6675,7 +6156,7 @@
               </a:tabLst>
             </a:pPr>
             <a:r>
-              <a:rPr lang="en-US" sz="4400" b="0" u="none" strike="noStrike">
+              <a:rPr lang="en-US" sz="2000" b="1" u="none" strike="noStrike">
                 <a:solidFill>
                   <a:schemeClr val="dk1"/>
                 </a:solidFill>
@@ -6685,7 +6166,7 @@
               </a:rPr>
               <a:t>Click to edit Master title style</a:t>
             </a:r>
-            <a:endParaRPr lang="en-US" sz="4400" b="0" u="none" strike="noStrike">
+            <a:endParaRPr lang="en-US" sz="2000" b="1" u="none" strike="noStrike">
               <a:solidFill>
                 <a:schemeClr val="dk1"/>
               </a:solidFill>
@@ -6698,7 +6179,7 @@
       </p:sp>
       <p:sp>
         <p:nvSpPr>
-          <p:cNvPr id="42" name="PlaceHolder 2"/>
+          <p:cNvPr id="41" name="PlaceHolder 2"/>
           <p:cNvSpPr>
             <a:spLocks noGrp="1"/>
           </p:cNvSpPr>
@@ -6708,8 +6189,8 @@
         </p:nvSpPr>
         <p:spPr>
           <a:xfrm>
-            <a:off x="457200" y="1600200"/>
-            <a:ext cx="8228520" cy="4524840"/>
+            <a:off x="3575160" y="272880"/>
+            <a:ext cx="5110200" cy="5851800"/>
           </a:xfrm>
           <a:prstGeom prst="rect">
             <a:avLst/>
@@ -6720,7 +6201,7 @@
           </a:ln>
         </p:spPr>
         <p:txBody>
-          <a:bodyPr lIns="91440" tIns="45720" rIns="91440" bIns="45720" anchor="t" vert="eaVert">
+          <a:bodyPr lIns="91440" tIns="45720" rIns="91440" bIns="45720" anchor="t">
             <a:noAutofit/>
           </a:bodyPr>
           <a:lstStyle>
@@ -7004,7 +6485,91 @@
       </p:sp>
       <p:sp>
         <p:nvSpPr>
-          <p:cNvPr id="43" name="PlaceHolder 3"/>
+          <p:cNvPr id="42" name="PlaceHolder 3"/>
+          <p:cNvSpPr>
+            <a:spLocks noGrp="1"/>
+          </p:cNvSpPr>
+          <p:nvPr>
+            <p:ph type="body"/>
+          </p:nvPr>
+        </p:nvSpPr>
+        <p:spPr>
+          <a:xfrm>
+            <a:off x="457200" y="1434960"/>
+            <a:ext cx="3006720" cy="4689720"/>
+          </a:xfrm>
+          <a:prstGeom prst="rect">
+            <a:avLst/>
+          </a:prstGeom>
+          <a:noFill/>
+          <a:ln w="0">
+            <a:noFill/>
+          </a:ln>
+        </p:spPr>
+        <p:txBody>
+          <a:bodyPr lIns="91440" tIns="45720" rIns="91440" bIns="45720" anchor="t">
+            <a:noAutofit/>
+          </a:bodyPr>
+          <a:lstStyle>
+            <a:lvl1pPr indent="0" algn="l" defTabSz="457200">
+              <a:lnSpc>
+                <a:spcPct val="100000"/>
+              </a:lnSpc>
+              <a:spcBef>
+                <a:spcPts val="281"/>
+              </a:spcBef>
+              <a:buNone/>
+              <a:tabLst>
+                <a:tab pos="0" algn="l"/>
+              </a:tabLst>
+              <a:defRPr lang="en-US" sz="1400" b="0" u="none" strike="noStrike">
+                <a:solidFill>
+                  <a:schemeClr val="dk1"/>
+                </a:solidFill>
+                <a:effectLst/>
+                <a:uFillTx/>
+                <a:latin typeface="Calibri"/>
+              </a:defRPr>
+            </a:lvl1pPr>
+          </a:lstStyle>
+          <a:p>
+            <a:pPr indent="0" algn="l" defTabSz="457200">
+              <a:lnSpc>
+                <a:spcPct val="100000"/>
+              </a:lnSpc>
+              <a:spcBef>
+                <a:spcPts val="281"/>
+              </a:spcBef>
+              <a:buNone/>
+              <a:tabLst>
+                <a:tab pos="0" algn="l"/>
+              </a:tabLst>
+            </a:pPr>
+            <a:r>
+              <a:rPr lang="en-US" sz="1400" b="0" u="none" strike="noStrike">
+                <a:solidFill>
+                  <a:schemeClr val="dk1"/>
+                </a:solidFill>
+                <a:effectLst/>
+                <a:uFillTx/>
+                <a:latin typeface="Calibri"/>
+              </a:rPr>
+              <a:t>Click to edit Master text styles</a:t>
+            </a:r>
+            <a:endParaRPr lang="en-US" sz="1400" b="0" u="none" strike="noStrike">
+              <a:solidFill>
+                <a:schemeClr val="dk1"/>
+              </a:solidFill>
+              <a:effectLst/>
+              <a:uFillTx/>
+              <a:latin typeface="Calibri"/>
+            </a:endParaRPr>
+          </a:p>
+        </p:txBody>
+      </p:sp>
+      <p:sp>
+        <p:nvSpPr>
+          <p:cNvPr id="43" name="PlaceHolder 4"/>
           <p:cNvSpPr>
             <a:spLocks noGrp="1"/>
           </p:cNvSpPr>
@@ -7015,7 +6580,7 @@
         <p:spPr>
           <a:xfrm>
             <a:off x="457200" y="6356520"/>
-            <a:ext cx="2132640" cy="363960"/>
+            <a:ext cx="2132280" cy="363600"/>
           </a:xfrm>
           <a:prstGeom prst="rect">
             <a:avLst/>
@@ -7086,7 +6651,7 @@
       </p:sp>
       <p:sp>
         <p:nvSpPr>
-          <p:cNvPr id="44" name="PlaceHolder 4"/>
+          <p:cNvPr id="44" name="PlaceHolder 5"/>
           <p:cNvSpPr>
             <a:spLocks noGrp="1"/>
           </p:cNvSpPr>
@@ -7097,7 +6662,7 @@
         <p:spPr>
           <a:xfrm>
             <a:off x="3124080" y="6356520"/>
-            <a:ext cx="2894400" cy="363960"/>
+            <a:ext cx="2894040" cy="363600"/>
           </a:xfrm>
           <a:prstGeom prst="rect">
             <a:avLst/>
@@ -7164,7 +6729,7 @@
       </p:sp>
       <p:sp>
         <p:nvSpPr>
-          <p:cNvPr id="45" name="PlaceHolder 5"/>
+          <p:cNvPr id="45" name="PlaceHolder 6"/>
           <p:cNvSpPr>
             <a:spLocks noGrp="1"/>
           </p:cNvSpPr>
@@ -7175,7 +6740,7 @@
         <p:spPr>
           <a:xfrm>
             <a:off x="6553080" y="6356520"/>
-            <a:ext cx="2132640" cy="363960"/>
+            <a:ext cx="2132280" cy="363600"/>
           </a:xfrm>
           <a:prstGeom prst="rect">
             <a:avLst/>
@@ -7220,7 +6785,7 @@
                 <a:tab pos="0" algn="l"/>
               </a:tabLst>
             </a:pPr>
-            <a:fld id="{78513F20-A246-4A42-A5FC-D66C44F2AC21}" type="slidenum">
+            <a:fld id="{038E84C1-5B61-4CA1-99B7-34F0142427ED}" type="slidenum">
               <a:rPr lang="en-US" sz="1200" b="0" u="none" strike="noStrike">
                 <a:solidFill>
                   <a:schemeClr val="dk1">
@@ -7250,8 +6815,8 @@
 </file>
 
 <file path=ppt/slideLayouts/slideLayout9.xml><?xml version="1.0" encoding="utf-8"?>
-<p:sldLayout xmlns:a="http://schemas.openxmlformats.org/drawingml/2006/main" xmlns:p="http://schemas.openxmlformats.org/presentationml/2006/main" xmlns:r="http://schemas.openxmlformats.org/officeDocument/2006/relationships" xmlns:p14="http://schemas.microsoft.com/office/powerpoint/2010/main" xmlns:p15="http://schemas.microsoft.com/office/powerpoint/2012/main" xmlns:mc="http://schemas.openxmlformats.org/markup-compatibility/2006" type="vertTitleAndTx" preserve="1">
-  <p:cSld name="Vertical Title and Text">
+<p:sldLayout xmlns:a="http://schemas.openxmlformats.org/drawingml/2006/main" xmlns:p="http://schemas.openxmlformats.org/presentationml/2006/main" xmlns:r="http://schemas.openxmlformats.org/officeDocument/2006/relationships" xmlns:p14="http://schemas.microsoft.com/office/powerpoint/2010/main" xmlns:p15="http://schemas.microsoft.com/office/powerpoint/2012/main" xmlns:mc="http://schemas.openxmlformats.org/markup-compatibility/2006" type="blank" preserve="1">
+  <p:cSld name="Picture with Caption">
     <p:bg>
       <p:bgPr>
         <a:solidFill>
@@ -7285,8 +6850,8 @@
         </p:nvSpPr>
         <p:spPr>
           <a:xfrm>
-            <a:off x="6629400" y="274680"/>
-            <a:ext cx="2056320" cy="5850360"/>
+            <a:off x="1792440" y="4800600"/>
+            <a:ext cx="5484960" cy="565200"/>
           </a:xfrm>
           <a:prstGeom prst="rect">
             <a:avLst/>
@@ -7297,11 +6862,11 @@
           </a:ln>
         </p:spPr>
         <p:txBody>
-          <a:bodyPr lIns="91440" tIns="45720" rIns="91440" bIns="45720" anchor="ctr" vert="eaVert">
+          <a:bodyPr lIns="91440" tIns="45720" rIns="91440" bIns="45720" anchor="b">
             <a:noAutofit/>
           </a:bodyPr>
           <a:lstStyle>
-            <a:lvl1pPr indent="0" algn="ctr" defTabSz="457200">
+            <a:lvl1pPr indent="0" algn="l" defTabSz="457200">
               <a:lnSpc>
                 <a:spcPct val="100000"/>
               </a:lnSpc>
@@ -7309,7 +6874,7 @@
               <a:tabLst>
                 <a:tab pos="0" algn="l"/>
               </a:tabLst>
-              <a:defRPr lang="en-US" sz="4400" b="0" u="none" strike="noStrike">
+              <a:defRPr lang="en-US" sz="2000" b="1" u="none" strike="noStrike">
                 <a:solidFill>
                   <a:schemeClr val="dk1"/>
                 </a:solidFill>
@@ -7320,7 +6885,7 @@
             </a:lvl1pPr>
           </a:lstStyle>
           <a:p>
-            <a:pPr indent="0" algn="ctr" defTabSz="457200">
+            <a:pPr indent="0" algn="l" defTabSz="457200">
               <a:lnSpc>
                 <a:spcPct val="100000"/>
               </a:lnSpc>
@@ -7330,7 +6895,7 @@
               </a:tabLst>
             </a:pPr>
             <a:r>
-              <a:rPr lang="en-US" sz="4400" b="0" u="none" strike="noStrike">
+              <a:rPr lang="en-US" sz="2000" b="1" u="none" strike="noStrike">
                 <a:solidFill>
                   <a:schemeClr val="dk1"/>
                 </a:solidFill>
@@ -7340,7 +6905,7 @@
               </a:rPr>
               <a:t>Click to edit Master title style</a:t>
             </a:r>
-            <a:endParaRPr lang="en-US" sz="4400" b="0" u="none" strike="noStrike">
+            <a:endParaRPr lang="en-US" sz="2000" b="1" u="none" strike="noStrike">
               <a:solidFill>
                 <a:schemeClr val="dk1"/>
               </a:solidFill>
@@ -7363,8 +6928,8 @@
         </p:nvSpPr>
         <p:spPr>
           <a:xfrm>
-            <a:off x="457200" y="274680"/>
-            <a:ext cx="6018840" cy="5850360"/>
+            <a:off x="1792440" y="612720"/>
+            <a:ext cx="5484960" cy="4113360"/>
           </a:xfrm>
           <a:prstGeom prst="rect">
             <a:avLst/>
@@ -7375,7 +6940,7 @@
           </a:ln>
         </p:spPr>
         <p:txBody>
-          <a:bodyPr lIns="91440" tIns="45720" rIns="91440" bIns="45720" anchor="t" vert="eaVert">
+          <a:bodyPr lIns="90000" tIns="45000" rIns="90000" bIns="45000" anchor="t">
             <a:noAutofit/>
           </a:bodyPr>
           <a:lstStyle>
@@ -7384,13 +6949,16 @@
                 <a:spcPct val="100000"/>
               </a:lnSpc>
               <a:spcBef>
-                <a:spcPts val="641"/>
+                <a:spcPts val="281"/>
               </a:spcBef>
               <a:buClr>
                 <a:srgbClr val="000000"/>
               </a:buClr>
               <a:buFont typeface="Arial"/>
               <a:buChar char="•"/>
+              <a:tabLst>
+                <a:tab pos="0" algn="l"/>
+              </a:tabLst>
               <a:defRPr lang="en-US" sz="3200" b="0" u="none" strike="noStrike">
                 <a:solidFill>
                   <a:schemeClr val="dk1"/>
@@ -7410,9 +6978,13 @@
               <a:buClr>
                 <a:srgbClr val="000000"/>
               </a:buClr>
-              <a:buFont typeface="Arial"/>
-              <a:buChar char="–"/>
-              <a:defRPr lang="en-US" sz="2800" b="0" u="none" strike="noStrike">
+              <a:buSzPct val="75000"/>
+              <a:buFont typeface="Symbol" charset="2"/>
+              <a:buChar char=""/>
+              <a:tabLst>
+                <a:tab pos="0" algn="l"/>
+              </a:tabLst>
+              <a:defRPr lang="en-US" sz="3200" b="0" u="none" strike="noStrike">
                 <a:solidFill>
                   <a:schemeClr val="dk1"/>
                 </a:solidFill>
@@ -7431,9 +7003,13 @@
               <a:buClr>
                 <a:srgbClr val="000000"/>
               </a:buClr>
-              <a:buFont typeface="Arial"/>
-              <a:buChar char="•"/>
-              <a:defRPr lang="en-US" sz="2400" b="0" u="none" strike="noStrike">
+              <a:buSzPct val="45000"/>
+              <a:buFont typeface="Wingdings" charset="2"/>
+              <a:buChar char=""/>
+              <a:tabLst>
+                <a:tab pos="0" algn="l"/>
+              </a:tabLst>
+              <a:defRPr lang="en-US" sz="3200" b="0" u="none" strike="noStrike">
                 <a:solidFill>
                   <a:schemeClr val="dk1"/>
                 </a:solidFill>
@@ -7452,9 +7028,13 @@
               <a:buClr>
                 <a:srgbClr val="000000"/>
               </a:buClr>
-              <a:buFont typeface="Arial"/>
-              <a:buChar char="–"/>
-              <a:defRPr lang="en-US" sz="2000" b="0" u="none" strike="noStrike">
+              <a:buSzPct val="75000"/>
+              <a:buFont typeface="Symbol" charset="2"/>
+              <a:buChar char=""/>
+              <a:tabLst>
+                <a:tab pos="0" algn="l"/>
+              </a:tabLst>
+              <a:defRPr lang="en-US" sz="3200" b="0" u="none" strike="noStrike">
                 <a:solidFill>
                   <a:schemeClr val="dk1"/>
                 </a:solidFill>
@@ -7473,9 +7053,13 @@
               <a:buClr>
                 <a:srgbClr val="000000"/>
               </a:buClr>
-              <a:buFont typeface="Arial"/>
-              <a:buChar char="»"/>
-              <a:defRPr lang="en-US" sz="2000" b="0" u="none" strike="noStrike">
+              <a:buSzPct val="45000"/>
+              <a:buFont typeface="Wingdings" charset="2"/>
+              <a:buChar char=""/>
+              <a:tabLst>
+                <a:tab pos="0" algn="l"/>
+              </a:tabLst>
+              <a:defRPr lang="en-US" sz="3200" b="0" u="none" strike="noStrike">
                 <a:solidFill>
                   <a:schemeClr val="dk1"/>
                 </a:solidFill>
@@ -7484,20 +7068,73 @@
                 <a:latin typeface="Calibri"/>
               </a:defRPr>
             </a:lvl5pPr>
+            <a:lvl6pPr lvl="5" algn="l" defTabSz="457200">
+              <a:lnSpc>
+                <a:spcPct val="100000"/>
+              </a:lnSpc>
+              <a:spcBef>
+                <a:spcPts val="283"/>
+              </a:spcBef>
+              <a:buClr>
+                <a:srgbClr val="000000"/>
+              </a:buClr>
+              <a:buSzPct val="45000"/>
+              <a:buFont typeface="Wingdings" charset="2"/>
+              <a:buChar char=""/>
+              <a:tabLst>
+                <a:tab pos="0" algn="l"/>
+              </a:tabLst>
+              <a:defRPr lang="en-US" sz="3200" b="0" u="none" strike="noStrike">
+                <a:solidFill>
+                  <a:schemeClr val="dk1"/>
+                </a:solidFill>
+                <a:effectLst/>
+                <a:uFillTx/>
+                <a:latin typeface="Calibri"/>
+              </a:defRPr>
+            </a:lvl6pPr>
+            <a:lvl7pPr lvl="6" algn="l" defTabSz="457200">
+              <a:lnSpc>
+                <a:spcPct val="100000"/>
+              </a:lnSpc>
+              <a:spcBef>
+                <a:spcPts val="283"/>
+              </a:spcBef>
+              <a:buClr>
+                <a:srgbClr val="000000"/>
+              </a:buClr>
+              <a:buSzPct val="45000"/>
+              <a:buFont typeface="Wingdings" charset="2"/>
+              <a:buChar char=""/>
+              <a:tabLst>
+                <a:tab pos="0" algn="l"/>
+              </a:tabLst>
+              <a:defRPr lang="en-US" sz="3200" b="0" u="none" strike="noStrike">
+                <a:solidFill>
+                  <a:schemeClr val="dk1"/>
+                </a:solidFill>
+                <a:effectLst/>
+                <a:uFillTx/>
+                <a:latin typeface="Calibri"/>
+              </a:defRPr>
+            </a:lvl7pPr>
           </a:lstStyle>
           <a:p>
-            <a:pPr marL="343080" indent="-343080" algn="l" defTabSz="457200">
+            <a:pPr marL="432000" indent="-324000" algn="l" defTabSz="457200">
               <a:lnSpc>
                 <a:spcPct val="100000"/>
               </a:lnSpc>
               <a:spcBef>
-                <a:spcPts val="641"/>
+                <a:spcPts val="281"/>
               </a:spcBef>
               <a:buClr>
                 <a:srgbClr val="000000"/>
               </a:buClr>
               <a:buFont typeface="Arial"/>
               <a:buChar char="•"/>
+              <a:tabLst>
+                <a:tab pos="0" algn="l"/>
+              </a:tabLst>
             </a:pPr>
             <a:r>
               <a:rPr lang="en-US" sz="3200" b="0" u="none" strike="noStrike">
@@ -7508,7 +7145,7 @@
                 <a:uFillTx/>
                 <a:latin typeface="Calibri"/>
               </a:rPr>
-              <a:t>Click to edit Master text styles</a:t>
+              <a:t>Click to edit the outline text format</a:t>
             </a:r>
             <a:endParaRPr lang="en-US" sz="3200" b="0" u="none" strike="noStrike">
               <a:solidFill>
@@ -7520,7 +7157,7 @@
             </a:endParaRPr>
           </a:p>
           <a:p>
-            <a:pPr marL="743040" lvl="1" indent="-285840" algn="l" defTabSz="457200">
+            <a:pPr marL="457200" lvl="1" indent="-324000" algn="l" defTabSz="457200">
               <a:lnSpc>
                 <a:spcPct val="100000"/>
               </a:lnSpc>
@@ -7530,11 +7167,15 @@
               <a:buClr>
                 <a:srgbClr val="000000"/>
               </a:buClr>
-              <a:buFont typeface="Arial"/>
-              <a:buChar char="–"/>
+              <a:buSzPct val="75000"/>
+              <a:buFont typeface="Symbol" charset="2"/>
+              <a:buChar char=""/>
+              <a:tabLst>
+                <a:tab pos="0" algn="l"/>
+              </a:tabLst>
             </a:pPr>
             <a:r>
-              <a:rPr lang="en-US" sz="2800" b="0" u="none" strike="noStrike">
+              <a:rPr lang="en-US" sz="3200" b="0" u="none" strike="noStrike">
                 <a:solidFill>
                   <a:schemeClr val="dk1"/>
                 </a:solidFill>
@@ -7542,9 +7183,9 @@
                 <a:uFillTx/>
                 <a:latin typeface="Calibri"/>
               </a:rPr>
-              <a:t>Second level</a:t>
+              <a:t>Second Outline Level</a:t>
             </a:r>
-            <a:endParaRPr lang="en-US" sz="2800" b="0" u="none" strike="noStrike">
+            <a:endParaRPr lang="en-US" sz="3200" b="0" u="none" strike="noStrike">
               <a:solidFill>
                 <a:schemeClr val="dk1"/>
               </a:solidFill>
@@ -7554,7 +7195,7 @@
             </a:endParaRPr>
           </a:p>
           <a:p>
-            <a:pPr marL="1143000" lvl="2" indent="-228600" algn="l" defTabSz="457200">
+            <a:pPr marL="914400" lvl="2" indent="-288000" algn="l" defTabSz="457200">
               <a:lnSpc>
                 <a:spcPct val="100000"/>
               </a:lnSpc>
@@ -7564,11 +7205,15 @@
               <a:buClr>
                 <a:srgbClr val="000000"/>
               </a:buClr>
-              <a:buFont typeface="Arial"/>
-              <a:buChar char="•"/>
+              <a:buSzPct val="45000"/>
+              <a:buFont typeface="Wingdings" charset="2"/>
+              <a:buChar char=""/>
+              <a:tabLst>
+                <a:tab pos="0" algn="l"/>
+              </a:tabLst>
             </a:pPr>
             <a:r>
-              <a:rPr lang="en-US" sz="2400" b="0" u="none" strike="noStrike">
+              <a:rPr lang="en-US" sz="3200" b="0" u="none" strike="noStrike">
                 <a:solidFill>
                   <a:schemeClr val="dk1"/>
                 </a:solidFill>
@@ -7576,9 +7221,9 @@
                 <a:uFillTx/>
                 <a:latin typeface="Calibri"/>
               </a:rPr>
-              <a:t>Third level</a:t>
+              <a:t>Third Outline Level</a:t>
             </a:r>
-            <a:endParaRPr lang="en-US" sz="2400" b="0" u="none" strike="noStrike">
+            <a:endParaRPr lang="en-US" sz="3200" b="0" u="none" strike="noStrike">
               <a:solidFill>
                 <a:schemeClr val="dk1"/>
               </a:solidFill>
@@ -7588,7 +7233,7 @@
             </a:endParaRPr>
           </a:p>
           <a:p>
-            <a:pPr marL="1600200" lvl="3" indent="-228600" algn="l" defTabSz="457200">
+            <a:pPr marL="1371600" lvl="3" indent="-216000" algn="l" defTabSz="457200">
               <a:lnSpc>
                 <a:spcPct val="100000"/>
               </a:lnSpc>
@@ -7598,11 +7243,15 @@
               <a:buClr>
                 <a:srgbClr val="000000"/>
               </a:buClr>
-              <a:buFont typeface="Arial"/>
-              <a:buChar char="–"/>
+              <a:buSzPct val="75000"/>
+              <a:buFont typeface="Symbol" charset="2"/>
+              <a:buChar char=""/>
+              <a:tabLst>
+                <a:tab pos="0" algn="l"/>
+              </a:tabLst>
             </a:pPr>
             <a:r>
-              <a:rPr lang="en-US" sz="2000" b="0" u="none" strike="noStrike">
+              <a:rPr lang="en-US" sz="3200" b="0" u="none" strike="noStrike">
                 <a:solidFill>
                   <a:schemeClr val="dk1"/>
                 </a:solidFill>
@@ -7610,9 +7259,9 @@
                 <a:uFillTx/>
                 <a:latin typeface="Calibri"/>
               </a:rPr>
-              <a:t>Fourth level</a:t>
+              <a:t>Fourth Outline Level</a:t>
             </a:r>
-            <a:endParaRPr lang="en-US" sz="2000" b="0" u="none" strike="noStrike">
+            <a:endParaRPr lang="en-US" sz="3200" b="0" u="none" strike="noStrike">
               <a:solidFill>
                 <a:schemeClr val="dk1"/>
               </a:solidFill>
@@ -7622,7 +7271,7 @@
             </a:endParaRPr>
           </a:p>
           <a:p>
-            <a:pPr marL="2057400" lvl="4" indent="-228600" algn="l" defTabSz="457200">
+            <a:pPr marL="1828800" lvl="4" indent="-216000" algn="l" defTabSz="457200">
               <a:lnSpc>
                 <a:spcPct val="100000"/>
               </a:lnSpc>
@@ -7632,11 +7281,15 @@
               <a:buClr>
                 <a:srgbClr val="000000"/>
               </a:buClr>
-              <a:buFont typeface="Arial"/>
-              <a:buChar char="»"/>
+              <a:buSzPct val="45000"/>
+              <a:buFont typeface="Wingdings" charset="2"/>
+              <a:buChar char=""/>
+              <a:tabLst>
+                <a:tab pos="0" algn="l"/>
+              </a:tabLst>
             </a:pPr>
             <a:r>
-              <a:rPr lang="en-US" sz="2000" b="0" u="none" strike="noStrike">
+              <a:rPr lang="en-US" sz="3200" b="0" u="none" strike="noStrike">
                 <a:solidFill>
                   <a:schemeClr val="dk1"/>
                 </a:solidFill>
@@ -7644,9 +7297,85 @@
                 <a:uFillTx/>
                 <a:latin typeface="Calibri"/>
               </a:rPr>
-              <a:t>Fifth level</a:t>
+              <a:t>Fifth Outline Level</a:t>
             </a:r>
-            <a:endParaRPr lang="en-US" sz="2000" b="0" u="none" strike="noStrike">
+            <a:endParaRPr lang="en-US" sz="3200" b="0" u="none" strike="noStrike">
+              <a:solidFill>
+                <a:schemeClr val="dk1"/>
+              </a:solidFill>
+              <a:effectLst/>
+              <a:uFillTx/>
+              <a:latin typeface="Calibri"/>
+            </a:endParaRPr>
+          </a:p>
+          <a:p>
+            <a:pPr marL="2286000" lvl="5" indent="-216000" algn="l" defTabSz="457200">
+              <a:lnSpc>
+                <a:spcPct val="100000"/>
+              </a:lnSpc>
+              <a:spcBef>
+                <a:spcPts val="283"/>
+              </a:spcBef>
+              <a:buClr>
+                <a:srgbClr val="000000"/>
+              </a:buClr>
+              <a:buSzPct val="45000"/>
+              <a:buFont typeface="Wingdings" charset="2"/>
+              <a:buChar char=""/>
+              <a:tabLst>
+                <a:tab pos="0" algn="l"/>
+              </a:tabLst>
+            </a:pPr>
+            <a:r>
+              <a:rPr lang="en-US" sz="3200" b="0" u="none" strike="noStrike">
+                <a:solidFill>
+                  <a:schemeClr val="dk1"/>
+                </a:solidFill>
+                <a:effectLst/>
+                <a:uFillTx/>
+                <a:latin typeface="Calibri"/>
+              </a:rPr>
+              <a:t>Sixth Outline Level</a:t>
+            </a:r>
+            <a:endParaRPr lang="en-US" sz="3200" b="0" u="none" strike="noStrike">
+              <a:solidFill>
+                <a:schemeClr val="dk1"/>
+              </a:solidFill>
+              <a:effectLst/>
+              <a:uFillTx/>
+              <a:latin typeface="Calibri"/>
+            </a:endParaRPr>
+          </a:p>
+          <a:p>
+            <a:pPr marL="2743200" lvl="6" indent="-216000" algn="l" defTabSz="457200">
+              <a:lnSpc>
+                <a:spcPct val="100000"/>
+              </a:lnSpc>
+              <a:spcBef>
+                <a:spcPts val="283"/>
+              </a:spcBef>
+              <a:buClr>
+                <a:srgbClr val="000000"/>
+              </a:buClr>
+              <a:buSzPct val="45000"/>
+              <a:buFont typeface="Wingdings" charset="2"/>
+              <a:buChar char=""/>
+              <a:tabLst>
+                <a:tab pos="0" algn="l"/>
+              </a:tabLst>
+            </a:pPr>
+            <a:r>
+              <a:rPr lang="en-US" sz="3200" b="0" u="none" strike="noStrike">
+                <a:solidFill>
+                  <a:schemeClr val="dk1"/>
+                </a:solidFill>
+                <a:effectLst/>
+                <a:uFillTx/>
+                <a:latin typeface="Calibri"/>
+              </a:rPr>
+              <a:t>Seventh Outline Level</a:t>
+            </a:r>
+            <a:endParaRPr lang="en-US" sz="3200" b="0" u="none" strike="noStrike">
               <a:solidFill>
                 <a:schemeClr val="dk1"/>
               </a:solidFill>
@@ -7660,6 +7389,90 @@
       <p:sp>
         <p:nvSpPr>
           <p:cNvPr id="48" name="PlaceHolder 3"/>
+          <p:cNvSpPr>
+            <a:spLocks noGrp="1"/>
+          </p:cNvSpPr>
+          <p:nvPr>
+            <p:ph type="body"/>
+          </p:nvPr>
+        </p:nvSpPr>
+        <p:spPr>
+          <a:xfrm>
+            <a:off x="1792440" y="5367240"/>
+            <a:ext cx="5484960" cy="803520"/>
+          </a:xfrm>
+          <a:prstGeom prst="rect">
+            <a:avLst/>
+          </a:prstGeom>
+          <a:noFill/>
+          <a:ln w="0">
+            <a:noFill/>
+          </a:ln>
+        </p:spPr>
+        <p:txBody>
+          <a:bodyPr lIns="91440" tIns="45720" rIns="91440" bIns="45720" anchor="t">
+            <a:noAutofit/>
+          </a:bodyPr>
+          <a:lstStyle>
+            <a:lvl1pPr indent="0" algn="l" defTabSz="457200">
+              <a:lnSpc>
+                <a:spcPct val="100000"/>
+              </a:lnSpc>
+              <a:spcBef>
+                <a:spcPts val="281"/>
+              </a:spcBef>
+              <a:buNone/>
+              <a:tabLst>
+                <a:tab pos="0" algn="l"/>
+              </a:tabLst>
+              <a:defRPr lang="en-US" sz="1400" b="0" u="none" strike="noStrike">
+                <a:solidFill>
+                  <a:schemeClr val="dk1"/>
+                </a:solidFill>
+                <a:effectLst/>
+                <a:uFillTx/>
+                <a:latin typeface="Calibri"/>
+              </a:defRPr>
+            </a:lvl1pPr>
+          </a:lstStyle>
+          <a:p>
+            <a:pPr indent="0" algn="l" defTabSz="457200">
+              <a:lnSpc>
+                <a:spcPct val="100000"/>
+              </a:lnSpc>
+              <a:spcBef>
+                <a:spcPts val="281"/>
+              </a:spcBef>
+              <a:buNone/>
+              <a:tabLst>
+                <a:tab pos="0" algn="l"/>
+              </a:tabLst>
+            </a:pPr>
+            <a:r>
+              <a:rPr lang="en-US" sz="1400" b="0" u="none" strike="noStrike">
+                <a:solidFill>
+                  <a:schemeClr val="dk1"/>
+                </a:solidFill>
+                <a:effectLst/>
+                <a:uFillTx/>
+                <a:latin typeface="Calibri"/>
+              </a:rPr>
+              <a:t>Click to edit Master text styles</a:t>
+            </a:r>
+            <a:endParaRPr lang="en-US" sz="1400" b="0" u="none" strike="noStrike">
+              <a:solidFill>
+                <a:schemeClr val="dk1"/>
+              </a:solidFill>
+              <a:effectLst/>
+              <a:uFillTx/>
+              <a:latin typeface="Calibri"/>
+            </a:endParaRPr>
+          </a:p>
+        </p:txBody>
+      </p:sp>
+      <p:sp>
+        <p:nvSpPr>
+          <p:cNvPr id="49" name="PlaceHolder 4"/>
           <p:cNvSpPr>
             <a:spLocks noGrp="1"/>
           </p:cNvSpPr>
@@ -7670,7 +7483,7 @@
         <p:spPr>
           <a:xfrm>
             <a:off x="457200" y="6356520"/>
-            <a:ext cx="2132640" cy="363960"/>
+            <a:ext cx="2132280" cy="363600"/>
           </a:xfrm>
           <a:prstGeom prst="rect">
             <a:avLst/>
@@ -7741,7 +7554,7 @@
       </p:sp>
       <p:sp>
         <p:nvSpPr>
-          <p:cNvPr id="49" name="PlaceHolder 4"/>
+          <p:cNvPr id="50" name="PlaceHolder 5"/>
           <p:cNvSpPr>
             <a:spLocks noGrp="1"/>
           </p:cNvSpPr>
@@ -7752,7 +7565,7 @@
         <p:spPr>
           <a:xfrm>
             <a:off x="3124080" y="6356520"/>
-            <a:ext cx="2894400" cy="363960"/>
+            <a:ext cx="2894040" cy="363600"/>
           </a:xfrm>
           <a:prstGeom prst="rect">
             <a:avLst/>
@@ -7819,7 +7632,7 @@
       </p:sp>
       <p:sp>
         <p:nvSpPr>
-          <p:cNvPr id="50" name="PlaceHolder 5"/>
+          <p:cNvPr id="51" name="PlaceHolder 6"/>
           <p:cNvSpPr>
             <a:spLocks noGrp="1"/>
           </p:cNvSpPr>
@@ -7830,7 +7643,7 @@
         <p:spPr>
           <a:xfrm>
             <a:off x="6553080" y="6356520"/>
-            <a:ext cx="2132640" cy="363960"/>
+            <a:ext cx="2132280" cy="363600"/>
           </a:xfrm>
           <a:prstGeom prst="rect">
             <a:avLst/>
@@ -7875,7 +7688,7 @@
                 <a:tab pos="0" algn="l"/>
               </a:tabLst>
             </a:pPr>
-            <a:fld id="{1ED7E16B-C707-47A4-9466-F2AB306A103F}" type="slidenum">
+            <a:fld id="{A7546482-5187-4296-A3A3-3F4F1AAD9C3F}" type="slidenum">
               <a:rPr lang="en-US" sz="1200" b="0" u="none" strike="noStrike">
                 <a:solidFill>
                   <a:schemeClr val="dk1">
@@ -7973,7 +7786,7 @@
         <p:spPr>
           <a:xfrm>
             <a:off x="320040" y="1463040"/>
-            <a:ext cx="11550600" cy="1096200"/>
+            <a:ext cx="11550240" cy="1095840"/>
           </a:xfrm>
           <a:prstGeom prst="rect">
             <a:avLst/>
@@ -8008,18 +7821,7 @@
                 <a:uFillTx/>
                 <a:latin typeface="Calibri"/>
               </a:rPr>
-              <a:t>Scotlan</a:t>
-            </a:r>
-            <a:r>
-              <a:rPr lang="en-US" sz="6000" b="1" u="none" strike="noStrike">
-                <a:solidFill>
-                  <a:srgbClr val="FFFFFF"/>
-                </a:solidFill>
-                <a:effectLst/>
-                <a:uFillTx/>
-                <a:latin typeface="Calibri"/>
-              </a:rPr>
-              <a:t>d Yard</a:t>
+              <a:t>Scotland Yard</a:t>
             </a:r>
             <a:endParaRPr lang="en-US" sz="6000" b="0" u="none" strike="noStrike">
               <a:solidFill>
@@ -8041,7 +7843,7 @@
         <p:spPr>
           <a:xfrm>
             <a:off x="320040" y="2468880"/>
-            <a:ext cx="11550600" cy="639000"/>
+            <a:ext cx="11550240" cy="638640"/>
           </a:xfrm>
           <a:prstGeom prst="rect">
             <a:avLst/>
@@ -8098,7 +7900,7 @@
         <p:spPr>
           <a:xfrm>
             <a:off x="320040" y="5852160"/>
-            <a:ext cx="11550600" cy="364680"/>
+            <a:ext cx="11550240" cy="364320"/>
           </a:xfrm>
           <a:prstGeom prst="rect">
             <a:avLst/>
@@ -8155,7 +7957,7 @@
         <p:spPr>
           <a:xfrm>
             <a:off x="10314360" y="896040"/>
-            <a:ext cx="401400" cy="401400"/>
+            <a:ext cx="401040" cy="401040"/>
           </a:xfrm>
           <a:prstGeom prst="ellipse">
             <a:avLst/>
@@ -8214,7 +8016,7 @@
         <p:spPr>
           <a:xfrm>
             <a:off x="10991160" y="1755720"/>
-            <a:ext cx="327960" cy="327960"/>
+            <a:ext cx="327600" cy="327600"/>
           </a:xfrm>
           <a:prstGeom prst="ellipse">
             <a:avLst/>
@@ -8273,7 +8075,7 @@
         <p:spPr>
           <a:xfrm>
             <a:off x="9921240" y="2148840"/>
-            <a:ext cx="273240" cy="273240"/>
+            <a:ext cx="272880" cy="272880"/>
           </a:xfrm>
           <a:prstGeom prst="ellipse">
             <a:avLst/>
@@ -8332,7 +8134,7 @@
         <p:spPr>
           <a:xfrm>
             <a:off x="11411640" y="804600"/>
-            <a:ext cx="218520" cy="218520"/>
+            <a:ext cx="218160" cy="218160"/>
           </a:xfrm>
           <a:prstGeom prst="ellipse">
             <a:avLst/>
@@ -8428,7 +8230,7 @@
         <p:spPr>
           <a:xfrm>
             <a:off x="502920" y="320040"/>
-            <a:ext cx="63000" cy="365760"/>
+            <a:ext cx="62640" cy="365400"/>
           </a:xfrm>
           <a:prstGeom prst="rect">
             <a:avLst/>
@@ -8460,7 +8262,7 @@
           <a:fontRef idx="minor"/>
         </p:style>
         <p:txBody>
-          <a:bodyPr lIns="31680" tIns="45000" rIns="31680" bIns="45000" anchor="ctr">
+          <a:bodyPr lIns="31320" tIns="45000" rIns="31320" bIns="45000" anchor="ctr">
             <a:noAutofit/>
           </a:bodyPr>
           <a:p>
@@ -8484,7 +8286,7 @@
         <p:spPr>
           <a:xfrm>
             <a:off x="667440" y="274320"/>
-            <a:ext cx="11184840" cy="517320"/>
+            <a:ext cx="11184480" cy="516600"/>
           </a:xfrm>
           <a:prstGeom prst="rect">
             <a:avLst/>
@@ -8540,7 +8342,7 @@
         </p:nvGraphicFramePr>
         <p:xfrm>
           <a:off x="441000" y="930240"/>
-          <a:ext cx="10652400" cy="1461240"/>
+          <a:ext cx="10652400" cy="1609200"/>
         </p:xfrm>
         <a:graphic>
           <a:graphicData uri="http://schemas.openxmlformats.org/drawingml/2006/table">
@@ -8580,7 +8382,7 @@
                         </a:solidFill>
                         <a:effectLst/>
                         <a:uFillTx/>
-                        <a:latin typeface="Times New Roman"/>
+                        <a:latin typeface="Arial"/>
                       </a:endParaRPr>
                     </a:p>
                   </a:txBody>
@@ -8642,7 +8444,7 @@
                         </a:solidFill>
                         <a:effectLst/>
                         <a:uFillTx/>
-                        <a:latin typeface="Times New Roman"/>
+                        <a:latin typeface="Arial"/>
                       </a:endParaRPr>
                     </a:p>
                   </a:txBody>
@@ -8704,7 +8506,7 @@
                         </a:solidFill>
                         <a:effectLst/>
                         <a:uFillTx/>
-                        <a:latin typeface="Times New Roman"/>
+                        <a:latin typeface="Arial"/>
                       </a:endParaRPr>
                     </a:p>
                   </a:txBody>
@@ -8762,13 +8564,13 @@
                         </a:rPr>
                         <a:t>No Persistency</a:t>
                       </a:r>
-                      <a:endParaRPr lang="en-US" sz="1200" b="1" u="none" strike="noStrike">
+                      <a:endParaRPr lang="en-US" sz="1200" b="0" u="none" strike="noStrike">
                         <a:solidFill>
-                          <a:srgbClr val="CBD5E1"/>
+                          <a:srgbClr val="FFFFFF"/>
                         </a:solidFill>
                         <a:effectLst/>
                         <a:uFillTx/>
-                        <a:latin typeface="Calibri"/>
+                        <a:latin typeface="Arial"/>
                       </a:endParaRPr>
                     </a:p>
                   </a:txBody>
@@ -8808,6 +8610,11 @@
                       <a:noAutofit/>
                     </a:bodyPr>
                     <a:p>
+                      <a:pPr>
+                        <a:lnSpc>
+                          <a:spcPct val="100000"/>
+                        </a:lnSpc>
+                      </a:pPr>
                       <a:r>
                         <a:rPr lang="en-US" sz="1200" b="0" u="none" strike="noStrike">
                           <a:solidFill>
@@ -8821,11 +8628,11 @@
                       </a:r>
                       <a:endParaRPr lang="en-US" sz="1200" b="0" u="none" strike="noStrike">
                         <a:solidFill>
-                          <a:srgbClr val="CBD5E1"/>
+                          <a:srgbClr val="FFFFFF"/>
                         </a:solidFill>
                         <a:effectLst/>
                         <a:uFillTx/>
-                        <a:latin typeface="Calibri"/>
+                        <a:latin typeface="Arial"/>
                       </a:endParaRPr>
                     </a:p>
                   </a:txBody>
@@ -8865,6 +8672,11 @@
                       <a:noAutofit/>
                     </a:bodyPr>
                     <a:p>
+                      <a:pPr>
+                        <a:lnSpc>
+                          <a:spcPct val="100000"/>
+                        </a:lnSpc>
+                      </a:pPr>
                       <a:r>
                         <a:rPr lang="en-US" sz="1200" b="0" u="none" strike="noStrike">
                           <a:solidFill>
@@ -8878,11 +8690,11 @@
                       </a:r>
                       <a:endParaRPr lang="en-US" sz="1200" b="0" u="none" strike="noStrike">
                         <a:solidFill>
-                          <a:srgbClr val="CBD5E1"/>
+                          <a:srgbClr val="FFFFFF"/>
                         </a:solidFill>
                         <a:effectLst/>
                         <a:uFillTx/>
-                        <a:latin typeface="Calibri"/>
+                        <a:latin typeface="Arial"/>
                       </a:endParaRPr>
                     </a:p>
                   </a:txBody>
@@ -8946,7 +8758,7 @@
                         </a:solidFill>
                         <a:effectLst/>
                         <a:uFillTx/>
-                        <a:latin typeface="Times New Roman"/>
+                        <a:latin typeface="Arial"/>
                       </a:endParaRPr>
                     </a:p>
                   </a:txBody>
@@ -9008,7 +8820,7 @@
                         </a:solidFill>
                         <a:effectLst/>
                         <a:uFillTx/>
-                        <a:latin typeface="Times New Roman"/>
+                        <a:latin typeface="Arial"/>
                       </a:endParaRPr>
                     </a:p>
                   </a:txBody>
@@ -9070,7 +8882,7 @@
                         </a:solidFill>
                         <a:effectLst/>
                         <a:uFillTx/>
-                        <a:latin typeface="Times New Roman"/>
+                        <a:latin typeface="Arial"/>
                       </a:endParaRPr>
                     </a:p>
                   </a:txBody>
@@ -9134,7 +8946,7 @@
                         </a:solidFill>
                         <a:effectLst/>
                         <a:uFillTx/>
-                        <a:latin typeface="Times New Roman"/>
+                        <a:latin typeface="Arial"/>
                       </a:endParaRPr>
                     </a:p>
                   </a:txBody>
@@ -9196,7 +9008,7 @@
                         </a:solidFill>
                         <a:effectLst/>
                         <a:uFillTx/>
-                        <a:latin typeface="Times New Roman"/>
+                        <a:latin typeface="Arial"/>
                       </a:endParaRPr>
                     </a:p>
                   </a:txBody>
@@ -9258,7 +9070,7 @@
                         </a:solidFill>
                         <a:effectLst/>
                         <a:uFillTx/>
-                        <a:latin typeface="Times New Roman"/>
+                        <a:latin typeface="Arial"/>
                       </a:endParaRPr>
                     </a:p>
                   </a:txBody>
@@ -9322,7 +9134,7 @@
                         </a:solidFill>
                         <a:effectLst/>
                         <a:uFillTx/>
-                        <a:latin typeface="Times New Roman"/>
+                        <a:latin typeface="Arial"/>
                       </a:endParaRPr>
                     </a:p>
                   </a:txBody>
@@ -9384,7 +9196,7 @@
                         </a:solidFill>
                         <a:effectLst/>
                         <a:uFillTx/>
-                        <a:latin typeface="Times New Roman"/>
+                        <a:latin typeface="Arial"/>
                       </a:endParaRPr>
                     </a:p>
                   </a:txBody>
@@ -9446,7 +9258,7 @@
                         </a:solidFill>
                         <a:effectLst/>
                         <a:uFillTx/>
-                        <a:latin typeface="Times New Roman"/>
+                        <a:latin typeface="Arial"/>
                       </a:endParaRPr>
                     </a:p>
                   </a:txBody>
@@ -9494,7 +9306,7 @@
         <p:spPr>
           <a:xfrm>
             <a:off x="457200" y="2852280"/>
-            <a:ext cx="3199320" cy="288000"/>
+            <a:ext cx="3198960" cy="288000"/>
           </a:xfrm>
           <a:prstGeom prst="rect">
             <a:avLst/>
@@ -9551,7 +9363,7 @@
         <p:spPr>
           <a:xfrm>
             <a:off x="473760" y="3140280"/>
-            <a:ext cx="11184840" cy="288720"/>
+            <a:ext cx="11184480" cy="288000"/>
           </a:xfrm>
           <a:prstGeom prst="rect">
             <a:avLst/>
@@ -9608,7 +9420,7 @@
         <p:spPr>
           <a:xfrm>
             <a:off x="473760" y="3368880"/>
-            <a:ext cx="11184840" cy="288720"/>
+            <a:ext cx="11184480" cy="288000"/>
           </a:xfrm>
           <a:prstGeom prst="rect">
             <a:avLst/>
@@ -9665,7 +9477,7 @@
         <p:spPr>
           <a:xfrm>
             <a:off x="473760" y="3597480"/>
-            <a:ext cx="11184840" cy="288720"/>
+            <a:ext cx="11184480" cy="288000"/>
           </a:xfrm>
           <a:prstGeom prst="rect">
             <a:avLst/>
@@ -9759,7 +9571,7 @@
         <p:spPr>
           <a:xfrm>
             <a:off x="502920" y="320040"/>
-            <a:ext cx="63000" cy="365760"/>
+            <a:ext cx="62640" cy="365400"/>
           </a:xfrm>
           <a:prstGeom prst="rect">
             <a:avLst/>
@@ -9791,7 +9603,7 @@
           <a:fontRef idx="minor"/>
         </p:style>
         <p:txBody>
-          <a:bodyPr lIns="31680" tIns="45000" rIns="31680" bIns="45000" anchor="ctr">
+          <a:bodyPr lIns="31320" tIns="45000" rIns="31320" bIns="45000" anchor="ctr">
             <a:noAutofit/>
           </a:bodyPr>
           <a:p>
@@ -9815,7 +9627,7 @@
         <p:spPr>
           <a:xfrm>
             <a:off x="667440" y="274320"/>
-            <a:ext cx="11184840" cy="517320"/>
+            <a:ext cx="11184480" cy="516600"/>
           </a:xfrm>
           <a:prstGeom prst="rect">
             <a:avLst/>
@@ -9872,7 +9684,7 @@
         <p:spPr>
           <a:xfrm>
             <a:off x="502920" y="6537960"/>
-            <a:ext cx="11184840" cy="243000"/>
+            <a:ext cx="11184480" cy="242280"/>
           </a:xfrm>
           <a:prstGeom prst="rect">
             <a:avLst/>
@@ -9933,7 +9745,7 @@
         <p:spPr>
           <a:xfrm>
             <a:off x="2286000" y="1371600"/>
-            <a:ext cx="7315200" cy="4800600"/>
+            <a:ext cx="7314840" cy="4800240"/>
           </a:xfrm>
           <a:prstGeom prst="rect">
             <a:avLst/>
@@ -9972,7 +9784,7 @@
           <a:fontRef idx="minor"/>
         </p:style>
         <p:txBody>
-          <a:bodyPr lIns="117360" tIns="72360" rIns="117360" bIns="72360" anchor="ctr">
+          <a:bodyPr lIns="36360" tIns="72360" rIns="36360" bIns="72360" anchor="ctr">
             <a:noAutofit/>
           </a:bodyPr>
           <a:p>
@@ -10033,7 +9845,7 @@
         <p:spPr>
           <a:xfrm>
             <a:off x="502920" y="320040"/>
-            <a:ext cx="63000" cy="365760"/>
+            <a:ext cx="62640" cy="365400"/>
           </a:xfrm>
           <a:prstGeom prst="rect">
             <a:avLst/>
@@ -10065,7 +9877,7 @@
           <a:fontRef idx="minor"/>
         </p:style>
         <p:txBody>
-          <a:bodyPr lIns="31680" tIns="45000" rIns="31680" bIns="45000" anchor="ctr">
+          <a:bodyPr lIns="31320" tIns="45000" rIns="31320" bIns="45000" anchor="ctr">
             <a:noAutofit/>
           </a:bodyPr>
           <a:p>
@@ -10089,7 +9901,7 @@
         <p:spPr>
           <a:xfrm>
             <a:off x="667440" y="274320"/>
-            <a:ext cx="11184840" cy="517320"/>
+            <a:ext cx="11184480" cy="516600"/>
           </a:xfrm>
           <a:prstGeom prst="rect">
             <a:avLst/>
@@ -10146,7 +9958,7 @@
         <p:spPr>
           <a:xfrm>
             <a:off x="4261320" y="1594080"/>
-            <a:ext cx="3636000" cy="346320"/>
+            <a:ext cx="3635640" cy="345960"/>
           </a:xfrm>
           <a:prstGeom prst="rect">
             <a:avLst/>
@@ -10202,7 +10014,7 @@
         <p:spPr>
           <a:xfrm>
             <a:off x="4328640" y="1642680"/>
-            <a:ext cx="3544560" cy="258120"/>
+            <a:ext cx="3544200" cy="257400"/>
           </a:xfrm>
           <a:prstGeom prst="rect">
             <a:avLst/>
@@ -10259,7 +10071,7 @@
         <p:spPr>
           <a:xfrm>
             <a:off x="4255560" y="1999440"/>
-            <a:ext cx="3636000" cy="432000"/>
+            <a:ext cx="3635640" cy="431640"/>
           </a:xfrm>
           <a:prstGeom prst="rect">
             <a:avLst/>
@@ -10316,7 +10128,7 @@
         <p:spPr>
           <a:xfrm>
             <a:off x="4255560" y="2215800"/>
-            <a:ext cx="3636000" cy="432000"/>
+            <a:ext cx="3635640" cy="431640"/>
           </a:xfrm>
           <a:prstGeom prst="rect">
             <a:avLst/>
@@ -10373,7 +10185,7 @@
         <p:spPr>
           <a:xfrm>
             <a:off x="4255560" y="2432520"/>
-            <a:ext cx="3636000" cy="432000"/>
+            <a:ext cx="3635640" cy="431640"/>
           </a:xfrm>
           <a:prstGeom prst="rect">
             <a:avLst/>
@@ -10430,7 +10242,7 @@
         <p:spPr>
           <a:xfrm>
             <a:off x="4255560" y="2648880"/>
-            <a:ext cx="3636000" cy="432000"/>
+            <a:ext cx="3635640" cy="431640"/>
           </a:xfrm>
           <a:prstGeom prst="rect">
             <a:avLst/>
@@ -10487,7 +10299,7 @@
         <p:spPr>
           <a:xfrm>
             <a:off x="4255560" y="2865600"/>
-            <a:ext cx="3636000" cy="432000"/>
+            <a:ext cx="3635640" cy="431640"/>
           </a:xfrm>
           <a:prstGeom prst="rect">
             <a:avLst/>
@@ -10544,7 +10356,7 @@
         <p:spPr>
           <a:xfrm>
             <a:off x="4255560" y="3081960"/>
-            <a:ext cx="3636000" cy="432000"/>
+            <a:ext cx="3635640" cy="431640"/>
           </a:xfrm>
           <a:prstGeom prst="rect">
             <a:avLst/>
@@ -10601,7 +10413,7 @@
         <p:spPr>
           <a:xfrm>
             <a:off x="457200" y="1596960"/>
-            <a:ext cx="3636000" cy="346320"/>
+            <a:ext cx="3635640" cy="345960"/>
           </a:xfrm>
           <a:prstGeom prst="rect">
             <a:avLst/>
@@ -10657,7 +10469,7 @@
         <p:spPr>
           <a:xfrm>
             <a:off x="530280" y="1651680"/>
-            <a:ext cx="3544560" cy="258120"/>
+            <a:ext cx="3544200" cy="257400"/>
           </a:xfrm>
           <a:prstGeom prst="rect">
             <a:avLst/>
@@ -10714,7 +10526,7 @@
         <p:spPr>
           <a:xfrm>
             <a:off x="457200" y="2008440"/>
-            <a:ext cx="3636000" cy="258120"/>
+            <a:ext cx="3635640" cy="257400"/>
           </a:xfrm>
           <a:prstGeom prst="rect">
             <a:avLst/>
@@ -10749,18 +10561,7 @@
                 <a:uFillTx/>
                 <a:latin typeface="Calibri"/>
               </a:rPr>
-              <a:t>• Build Wellington </a:t>
-            </a:r>
-            <a:r>
-              <a:rPr lang="en-US" sz="1100" b="0" u="none" strike="noStrike">
-                <a:solidFill>
-                  <a:srgbClr val="CBD5E1"/>
-                </a:solidFill>
-                <a:effectLst/>
-                <a:uFillTx/>
-                <a:latin typeface="Calibri"/>
-              </a:rPr>
-              <a:t>node/edge graph</a:t>
+              <a:t>• Build Wellington node/edge graph</a:t>
             </a:r>
             <a:endParaRPr lang="en-US" sz="1100" b="0" u="none" strike="noStrike">
               <a:solidFill>
@@ -10782,7 +10583,7 @@
         <p:spPr>
           <a:xfrm>
             <a:off x="457200" y="2224800"/>
-            <a:ext cx="3636000" cy="432000"/>
+            <a:ext cx="3635640" cy="431640"/>
           </a:xfrm>
           <a:prstGeom prst="rect">
             <a:avLst/>
@@ -10839,7 +10640,7 @@
         <p:spPr>
           <a:xfrm>
             <a:off x="457200" y="2441520"/>
-            <a:ext cx="3636000" cy="432000"/>
+            <a:ext cx="3635640" cy="431640"/>
           </a:xfrm>
           <a:prstGeom prst="rect">
             <a:avLst/>
@@ -10896,7 +10697,7 @@
         <p:spPr>
           <a:xfrm>
             <a:off x="457200" y="2657880"/>
-            <a:ext cx="3636000" cy="432000"/>
+            <a:ext cx="3635640" cy="431640"/>
           </a:xfrm>
           <a:prstGeom prst="rect">
             <a:avLst/>
@@ -10953,7 +10754,7 @@
         <p:spPr>
           <a:xfrm>
             <a:off x="8051760" y="1587960"/>
-            <a:ext cx="3636000" cy="346320"/>
+            <a:ext cx="3635640" cy="345960"/>
           </a:xfrm>
           <a:prstGeom prst="rect">
             <a:avLst/>
@@ -11009,7 +10810,7 @@
         <p:spPr>
           <a:xfrm>
             <a:off x="8124840" y="1642680"/>
-            <a:ext cx="3544560" cy="258120"/>
+            <a:ext cx="3544200" cy="257400"/>
           </a:xfrm>
           <a:prstGeom prst="rect">
             <a:avLst/>
@@ -11066,7 +10867,7 @@
         <p:spPr>
           <a:xfrm>
             <a:off x="8051760" y="1999440"/>
-            <a:ext cx="3636000" cy="432000"/>
+            <a:ext cx="3635640" cy="431640"/>
           </a:xfrm>
           <a:prstGeom prst="rect">
             <a:avLst/>
@@ -11123,7 +10924,7 @@
         <p:spPr>
           <a:xfrm>
             <a:off x="8051760" y="2215800"/>
-            <a:ext cx="3636000" cy="258120"/>
+            <a:ext cx="3635640" cy="257400"/>
           </a:xfrm>
           <a:prstGeom prst="rect">
             <a:avLst/>
@@ -11180,7 +10981,7 @@
         <p:spPr>
           <a:xfrm>
             <a:off x="8051760" y="2481840"/>
-            <a:ext cx="3636000" cy="432000"/>
+            <a:ext cx="3635640" cy="431640"/>
           </a:xfrm>
           <a:prstGeom prst="rect">
             <a:avLst/>
@@ -11274,7 +11075,7 @@
         <p:spPr>
           <a:xfrm>
             <a:off x="502920" y="320040"/>
-            <a:ext cx="63000" cy="821880"/>
+            <a:ext cx="62640" cy="821520"/>
           </a:xfrm>
           <a:prstGeom prst="rect">
             <a:avLst/>
@@ -11306,7 +11107,7 @@
           <a:fontRef idx="minor"/>
         </p:style>
         <p:txBody>
-          <a:bodyPr lIns="31680" tIns="45000" rIns="31680" bIns="45000" anchor="ctr">
+          <a:bodyPr lIns="31320" tIns="45000" rIns="31320" bIns="45000" anchor="ctr">
             <a:noAutofit/>
           </a:bodyPr>
           <a:p>
@@ -11330,7 +11131,7 @@
         <p:spPr>
           <a:xfrm>
             <a:off x="667440" y="274320"/>
-            <a:ext cx="11184840" cy="593280"/>
+            <a:ext cx="11184480" cy="592920"/>
           </a:xfrm>
           <a:prstGeom prst="rect">
             <a:avLst/>
@@ -11387,7 +11188,7 @@
         <p:spPr>
           <a:xfrm>
             <a:off x="667440" y="841320"/>
-            <a:ext cx="11184840" cy="364680"/>
+            <a:ext cx="11184480" cy="364320"/>
           </a:xfrm>
           <a:prstGeom prst="rect">
             <a:avLst/>
@@ -11444,7 +11245,7 @@
         <p:spPr>
           <a:xfrm>
             <a:off x="502920" y="1353240"/>
-            <a:ext cx="11184840" cy="628920"/>
+            <a:ext cx="11184480" cy="628560"/>
           </a:xfrm>
           <a:prstGeom prst="rect">
             <a:avLst/>
@@ -11501,7 +11302,7 @@
         <p:spPr>
           <a:xfrm>
             <a:off x="502920" y="1668240"/>
-            <a:ext cx="11184840" cy="628920"/>
+            <a:ext cx="11184480" cy="628560"/>
           </a:xfrm>
           <a:prstGeom prst="rect">
             <a:avLst/>
@@ -11558,7 +11359,7 @@
         <p:spPr>
           <a:xfrm>
             <a:off x="502920" y="1983240"/>
-            <a:ext cx="11184840" cy="628920"/>
+            <a:ext cx="11184480" cy="628560"/>
           </a:xfrm>
           <a:prstGeom prst="rect">
             <a:avLst/>
@@ -11615,7 +11416,7 @@
         <p:spPr>
           <a:xfrm>
             <a:off x="502920" y="2298240"/>
-            <a:ext cx="11184840" cy="628920"/>
+            <a:ext cx="11184480" cy="628560"/>
           </a:xfrm>
           <a:prstGeom prst="rect">
             <a:avLst/>
@@ -11672,7 +11473,7 @@
         <p:spPr>
           <a:xfrm>
             <a:off x="502920" y="2613240"/>
-            <a:ext cx="11184840" cy="628920"/>
+            <a:ext cx="11184480" cy="628560"/>
           </a:xfrm>
           <a:prstGeom prst="rect">
             <a:avLst/>
@@ -11729,7 +11530,7 @@
         <p:spPr>
           <a:xfrm>
             <a:off x="502920" y="2928240"/>
-            <a:ext cx="11184840" cy="628920"/>
+            <a:ext cx="11184480" cy="628560"/>
           </a:xfrm>
           <a:prstGeom prst="rect">
             <a:avLst/>
@@ -11786,7 +11587,7 @@
         <p:spPr>
           <a:xfrm>
             <a:off x="502920" y="3426120"/>
-            <a:ext cx="11184840" cy="460080"/>
+            <a:ext cx="11184480" cy="459720"/>
           </a:xfrm>
           <a:prstGeom prst="rect">
             <a:avLst/>
@@ -11842,7 +11643,7 @@
         <p:spPr>
           <a:xfrm>
             <a:off x="731520" y="3517560"/>
-            <a:ext cx="10727640" cy="273240"/>
+            <a:ext cx="10727280" cy="272880"/>
           </a:xfrm>
           <a:prstGeom prst="rect">
             <a:avLst/>
@@ -11899,7 +11700,7 @@
         <p:spPr>
           <a:xfrm>
             <a:off x="502920" y="6537960"/>
-            <a:ext cx="11184840" cy="273240"/>
+            <a:ext cx="11184480" cy="272880"/>
           </a:xfrm>
           <a:prstGeom prst="rect">
             <a:avLst/>
@@ -11993,7 +11794,7 @@
         <p:spPr>
           <a:xfrm>
             <a:off x="502920" y="320040"/>
-            <a:ext cx="63000" cy="365760"/>
+            <a:ext cx="62640" cy="365400"/>
           </a:xfrm>
           <a:prstGeom prst="rect">
             <a:avLst/>
@@ -12025,7 +11826,7 @@
           <a:fontRef idx="minor"/>
         </p:style>
         <p:txBody>
-          <a:bodyPr lIns="31680" tIns="45000" rIns="31680" bIns="45000" anchor="ctr">
+          <a:bodyPr lIns="31320" tIns="45000" rIns="31320" bIns="45000" anchor="ctr">
             <a:noAutofit/>
           </a:bodyPr>
           <a:p>
@@ -12049,7 +11850,7 @@
         <p:spPr>
           <a:xfrm>
             <a:off x="667440" y="274320"/>
-            <a:ext cx="11184840" cy="593280"/>
+            <a:ext cx="11184480" cy="592920"/>
           </a:xfrm>
           <a:prstGeom prst="rect">
             <a:avLst/>
@@ -12106,7 +11907,7 @@
         <p:spPr>
           <a:xfrm>
             <a:off x="502920" y="1353240"/>
-            <a:ext cx="11184840" cy="628920"/>
+            <a:ext cx="11184480" cy="628560"/>
           </a:xfrm>
           <a:prstGeom prst="rect">
             <a:avLst/>
@@ -12163,7 +11964,7 @@
         <p:spPr>
           <a:xfrm>
             <a:off x="502920" y="1668240"/>
-            <a:ext cx="11184840" cy="628920"/>
+            <a:ext cx="11184480" cy="628560"/>
           </a:xfrm>
           <a:prstGeom prst="rect">
             <a:avLst/>
@@ -12220,7 +12021,7 @@
         <p:spPr>
           <a:xfrm>
             <a:off x="502920" y="2057400"/>
-            <a:ext cx="11184840" cy="333360"/>
+            <a:ext cx="11184480" cy="333360"/>
           </a:xfrm>
           <a:prstGeom prst="rect">
             <a:avLst/>
@@ -12277,7 +12078,7 @@
         <p:spPr>
           <a:xfrm>
             <a:off x="502920" y="2435760"/>
-            <a:ext cx="11184840" cy="628920"/>
+            <a:ext cx="11184480" cy="628560"/>
           </a:xfrm>
           <a:prstGeom prst="rect">
             <a:avLst/>
@@ -12334,7 +12135,7 @@
         <p:spPr>
           <a:xfrm>
             <a:off x="457200" y="3914640"/>
-            <a:ext cx="11184840" cy="657360"/>
+            <a:ext cx="11184480" cy="657000"/>
           </a:xfrm>
           <a:prstGeom prst="rect">
             <a:avLst/>
@@ -12390,7 +12191,7 @@
         <p:spPr>
           <a:xfrm>
             <a:off x="640080" y="3960360"/>
-            <a:ext cx="10819080" cy="547560"/>
+            <a:ext cx="10818720" cy="546840"/>
           </a:xfrm>
           <a:prstGeom prst="rect">
             <a:avLst/>
@@ -12484,7 +12285,7 @@
         <p:spPr>
           <a:xfrm>
             <a:off x="502920" y="320040"/>
-            <a:ext cx="63000" cy="365760"/>
+            <a:ext cx="62640" cy="365400"/>
           </a:xfrm>
           <a:prstGeom prst="rect">
             <a:avLst/>
@@ -12516,7 +12317,7 @@
           <a:fontRef idx="minor"/>
         </p:style>
         <p:txBody>
-          <a:bodyPr lIns="31680" tIns="45000" rIns="31680" bIns="45000" anchor="ctr">
+          <a:bodyPr lIns="31320" tIns="45000" rIns="31320" bIns="45000" anchor="ctr">
             <a:noAutofit/>
           </a:bodyPr>
           <a:p>
@@ -12540,7 +12341,7 @@
         <p:spPr>
           <a:xfrm>
             <a:off x="667440" y="274320"/>
-            <a:ext cx="11184840" cy="593280"/>
+            <a:ext cx="11184480" cy="592920"/>
           </a:xfrm>
           <a:prstGeom prst="rect">
             <a:avLst/>
@@ -12591,13 +12392,13 @@
       <p:sp>
         <p:nvSpPr>
           <p:cNvPr id="78" name=""/>
-          <p:cNvSpPr txBox="1"/>
+          <p:cNvSpPr/>
           <p:nvPr/>
         </p:nvSpPr>
         <p:spPr>
           <a:xfrm>
             <a:off x="457200" y="914400"/>
-            <a:ext cx="11430000" cy="5486400"/>
+            <a:ext cx="11429640" cy="2527560"/>
           </a:xfrm>
           <a:prstGeom prst="rect">
             <a:avLst/>
@@ -12607,11 +12408,22 @@
             <a:noFill/>
           </a:ln>
         </p:spPr>
+        <p:style>
+          <a:lnRef idx="0"/>
+          <a:fillRef idx="0"/>
+          <a:effectRef idx="0"/>
+          <a:fontRef idx="minor"/>
+        </p:style>
         <p:txBody>
           <a:bodyPr lIns="90000" tIns="45000" rIns="90000" bIns="45000" anchor="t">
             <a:spAutoFit/>
           </a:bodyPr>
           <a:p>
+            <a:pPr>
+              <a:lnSpc>
+                <a:spcPct val="100000"/>
+              </a:lnSpc>
+            </a:pPr>
             <a:r>
               <a:rPr lang="en-US" sz="1600" b="0" u="none" strike="noStrike">
                 <a:solidFill>
@@ -12633,6 +12445,11 @@
             </a:endParaRPr>
           </a:p>
           <a:p>
+            <a:pPr>
+              <a:lnSpc>
+                <a:spcPct val="100000"/>
+              </a:lnSpc>
+            </a:pPr>
             <a:r>
               <a:rPr lang="en-US" sz="1600" b="0" u="none" strike="noStrike">
                 <a:solidFill>
@@ -12665,6 +12482,11 @@
             </a:endParaRPr>
           </a:p>
           <a:p>
+            <a:pPr>
+              <a:lnSpc>
+                <a:spcPct val="100000"/>
+              </a:lnSpc>
+            </a:pPr>
             <a:endParaRPr lang="en-US" sz="1600" b="0" u="none" strike="noStrike">
               <a:solidFill>
                 <a:srgbClr val="FFFFFF"/>
@@ -12841,7 +12663,7 @@
                 <a:uFillTx/>
                 <a:latin typeface="Calibri"/>
               </a:rPr>
-              <a:t>- mostly negative reviews</a:t>
+              <a:t>- mostly negative reviews look at them</a:t>
             </a:r>
             <a:endParaRPr lang="en-US" sz="1600" b="0" u="none" strike="noStrike">
               <a:solidFill>
@@ -12937,7 +12759,7 @@
         <p:spPr>
           <a:xfrm>
             <a:off x="502920" y="320040"/>
-            <a:ext cx="63000" cy="365400"/>
+            <a:ext cx="62640" cy="365040"/>
           </a:xfrm>
           <a:prstGeom prst="rect">
             <a:avLst/>
@@ -12969,7 +12791,7 @@
           <a:fontRef idx="minor"/>
         </p:style>
         <p:txBody>
-          <a:bodyPr lIns="31680" tIns="45000" rIns="31680" bIns="45000" anchor="ctr">
+          <a:bodyPr lIns="31320" tIns="45000" rIns="31320" bIns="45000" anchor="ctr">
             <a:noAutofit/>
           </a:bodyPr>
           <a:p>
@@ -12993,7 +12815,7 @@
         <p:spPr>
           <a:xfrm>
             <a:off x="667440" y="274320"/>
-            <a:ext cx="11184840" cy="593280"/>
+            <a:ext cx="11184480" cy="943560"/>
           </a:xfrm>
           <a:prstGeom prst="rect">
             <a:avLst/>
@@ -13028,7 +12850,7 @@
                 <a:uFillTx/>
                 <a:latin typeface="Calibri"/>
               </a:rPr>
-              <a:t>Map Library Evaluation</a:t>
+              <a:t>Tech Stack</a:t>
             </a:r>
             <a:endParaRPr lang="en-US" sz="2800" b="0" u="none" strike="noStrike">
               <a:solidFill>
@@ -13039,207 +12861,33 @@
               <a:latin typeface="Arial"/>
             </a:endParaRPr>
           </a:p>
-        </p:txBody>
-      </p:sp>
-      <p:pic>
-        <p:nvPicPr>
-          <p:cNvPr id="81" name=""/>
-          <p:cNvPicPr/>
-          <p:nvPr/>
-        </p:nvPicPr>
-        <p:blipFill>
-          <a:blip r:embed="rId1"/>
-          <a:stretch/>
-        </p:blipFill>
-        <p:spPr>
-          <a:xfrm>
-            <a:off x="2847960" y="914400"/>
-            <a:ext cx="6524280" cy="5486040"/>
-          </a:xfrm>
-          <a:prstGeom prst="rect">
-            <a:avLst/>
-          </a:prstGeom>
-          <a:noFill/>
-          <a:ln w="0">
-            <a:noFill/>
-          </a:ln>
-        </p:spPr>
-      </p:pic>
-    </p:spTree>
-  </p:cSld>
-  <mc:AlternateContent>
-    <mc:Choice Requires="p14">
-      <p:transition spd="slow" p14:dur="2000"/>
-    </mc:Choice>
-    <mc:Fallback>
-      <p:transition spd="slow"/>
-    </mc:Fallback>
-  </mc:AlternateContent>
-</p:sld>
-</file>
-
-<file path=ppt/slides/slide5.xml><?xml version="1.0" encoding="utf-8"?>
-<p:sld xmlns:a="http://schemas.openxmlformats.org/drawingml/2006/main" xmlns:p="http://schemas.openxmlformats.org/presentationml/2006/main" xmlns:r="http://schemas.openxmlformats.org/officeDocument/2006/relationships" xmlns:p14="http://schemas.microsoft.com/office/powerpoint/2010/main" xmlns:p15="http://schemas.microsoft.com/office/powerpoint/2012/main" xmlns:mc="http://schemas.openxmlformats.org/markup-compatibility/2006">
-  <p:cSld>
-    <p:bg>
-      <p:bgPr>
-        <a:solidFill>
-          <a:srgbClr val="0F172A"/>
-        </a:solidFill>
-      </p:bgPr>
-    </p:bg>
-    <p:spTree>
-      <p:nvGrpSpPr>
-        <p:cNvPr id="1" name=""/>
-        <p:cNvGrpSpPr/>
-        <p:nvPr/>
-      </p:nvGrpSpPr>
-      <p:grpSpPr>
-        <a:xfrm>
-          <a:off x="0" y="0"/>
-          <a:ext cx="0" cy="0"/>
-          <a:chOff x="0" y="0"/>
-          <a:chExt cx="0" cy="0"/>
-        </a:xfrm>
-      </p:grpSpPr>
-      <p:sp>
-        <p:nvSpPr>
-          <p:cNvPr id="82" name="Rectangle 1"/>
-          <p:cNvSpPr/>
-          <p:nvPr/>
-        </p:nvSpPr>
-        <p:spPr>
-          <a:xfrm>
-            <a:off x="502920" y="320040"/>
-            <a:ext cx="63000" cy="365400"/>
-          </a:xfrm>
-          <a:prstGeom prst="rect">
-            <a:avLst/>
-          </a:prstGeom>
-          <a:solidFill>
-            <a:srgbClr val="2563EB"/>
-          </a:solidFill>
-          <a:ln>
-            <a:noFill/>
-          </a:ln>
-          <a:effectLst>
-            <a:outerShdw blurRad="39960" dir="5400000" dist="23040" rotWithShape="0">
-              <a:srgbClr val="000000">
-                <a:alpha val="35000"/>
-              </a:srgbClr>
-            </a:outerShdw>
-          </a:effectLst>
-        </p:spPr>
-        <p:style>
-          <a:lnRef idx="1">
-            <a:schemeClr val="accent1"/>
-          </a:lnRef>
-          <a:fillRef idx="3">
-            <a:schemeClr val="accent1"/>
-          </a:fillRef>
-          <a:effectRef idx="2">
-            <a:schemeClr val="accent1"/>
-          </a:effectRef>
-          <a:fontRef idx="minor"/>
-        </p:style>
-        <p:txBody>
-          <a:bodyPr lIns="31680" tIns="45000" rIns="31680" bIns="45000" anchor="ctr">
-            <a:noAutofit/>
-          </a:bodyPr>
-          <a:p>
-            <a:endParaRPr lang="en-US" sz="1800" b="0" u="none" strike="noStrike">
-              <a:solidFill>
-                <a:schemeClr val="lt1"/>
-              </a:solidFill>
-              <a:effectLst/>
-              <a:uFillTx/>
-              <a:latin typeface="Calibri"/>
+          <a:p>
+            <a:pPr defTabSz="457200">
+              <a:lnSpc>
+                <a:spcPct val="100000"/>
+              </a:lnSpc>
+            </a:pPr>
+            <a:endParaRPr lang="en-US" sz="2800" b="0" u="none" strike="noStrike">
+              <a:solidFill>
+                <a:srgbClr val="FFFFFF"/>
+              </a:solidFill>
+              <a:effectLst/>
+              <a:uFillTx/>
+              <a:latin typeface="Arial"/>
             </a:endParaRPr>
           </a:p>
         </p:txBody>
       </p:sp>
       <p:sp>
         <p:nvSpPr>
-          <p:cNvPr id="83" name="TextBox 2"/>
-          <p:cNvSpPr/>
-          <p:nvPr/>
-        </p:nvSpPr>
-        <p:spPr>
-          <a:xfrm>
-            <a:off x="667440" y="274320"/>
-            <a:ext cx="11184840" cy="943560"/>
-          </a:xfrm>
-          <a:prstGeom prst="rect">
-            <a:avLst/>
-          </a:prstGeom>
-          <a:noFill/>
-          <a:ln w="0">
-            <a:noFill/>
-          </a:ln>
-        </p:spPr>
-        <p:style>
-          <a:lnRef idx="0"/>
-          <a:fillRef idx="0"/>
-          <a:effectRef idx="0"/>
-          <a:fontRef idx="minor"/>
-        </p:style>
-        <p:txBody>
-          <a:bodyPr lIns="90000" tIns="45000" rIns="90000" bIns="45000" anchor="t">
-            <a:spAutoFit/>
-          </a:bodyPr>
-          <a:p>
-            <a:pPr defTabSz="457200">
-              <a:lnSpc>
-                <a:spcPct val="100000"/>
-              </a:lnSpc>
-            </a:pPr>
-            <a:r>
-              <a:rPr lang="en-US" sz="2800" b="1" u="none" strike="noStrike">
-                <a:solidFill>
-                  <a:srgbClr val="FFFFFF"/>
-                </a:solidFill>
-                <a:effectLst/>
-                <a:uFillTx/>
-                <a:latin typeface="Calibri"/>
-              </a:rPr>
-              <a:t>Tech Stack</a:t>
-            </a:r>
-            <a:endParaRPr lang="en-US" sz="2800" b="0" u="none" strike="noStrike">
-              <a:solidFill>
-                <a:srgbClr val="FFFFFF"/>
-              </a:solidFill>
-              <a:effectLst/>
-              <a:uFillTx/>
-              <a:latin typeface="Arial"/>
-            </a:endParaRPr>
-          </a:p>
-          <a:p>
-            <a:pPr defTabSz="457200">
-              <a:lnSpc>
-                <a:spcPct val="100000"/>
-              </a:lnSpc>
-            </a:pPr>
-            <a:endParaRPr lang="en-US" sz="2800" b="0" u="none" strike="noStrike">
-              <a:solidFill>
-                <a:srgbClr val="FFFFFF"/>
-              </a:solidFill>
-              <a:effectLst/>
-              <a:uFillTx/>
-              <a:latin typeface="Arial"/>
-            </a:endParaRPr>
-          </a:p>
-        </p:txBody>
-      </p:sp>
-      <p:sp>
-        <p:nvSpPr>
-          <p:cNvPr id="84" name="Rectangle 4"/>
+          <p:cNvPr id="81" name="Rectangle 4"/>
           <p:cNvSpPr/>
           <p:nvPr/>
         </p:nvSpPr>
         <p:spPr>
           <a:xfrm>
             <a:off x="502920" y="914400"/>
-            <a:ext cx="11184840" cy="474480"/>
+            <a:ext cx="11184480" cy="474120"/>
           </a:xfrm>
           <a:prstGeom prst="rect">
             <a:avLst/>
@@ -13288,14 +12936,14 @@
       </p:sp>
       <p:sp>
         <p:nvSpPr>
-          <p:cNvPr id="85" name="TextBox 5"/>
+          <p:cNvPr id="82" name="TextBox 5"/>
           <p:cNvSpPr/>
           <p:nvPr/>
         </p:nvSpPr>
         <p:spPr>
           <a:xfrm>
             <a:off x="685800" y="914400"/>
-            <a:ext cx="10819080" cy="383040"/>
+            <a:ext cx="10818720" cy="486360"/>
           </a:xfrm>
           <a:prstGeom prst="rect">
             <a:avLst/>
@@ -13345,13 +12993,13 @@
       </p:sp>
       <p:graphicFrame>
         <p:nvGraphicFramePr>
-          <p:cNvPr id="86" name="Table 6"/>
+          <p:cNvPr id="83" name="Table 6"/>
           <p:cNvGraphicFramePr/>
           <p:nvPr/>
         </p:nvGraphicFramePr>
         <p:xfrm>
           <a:off x="502920" y="1518480"/>
-          <a:ext cx="10652400" cy="2046240"/>
+          <a:ext cx="10652400" cy="2045880"/>
         </p:xfrm>
         <a:graphic>
           <a:graphicData uri="http://schemas.openxmlformats.org/drawingml/2006/table">
@@ -13884,18 +13532,7 @@
                           <a:latin typeface="Calibri"/>
                           <a:ea typeface="Noto Sans CJK SC"/>
                         </a:rPr>
-                        <a:t>Reactive, typed, composable, </a:t>
-                      </a:r>
-                      <a:r>
-                        <a:rPr lang="en-US" sz="1200" b="0" u="none" strike="noStrike">
-                          <a:solidFill>
-                            <a:srgbClr val="CBD5E1"/>
-                          </a:solidFill>
-                          <a:effectLst/>
-                          <a:uFillTx/>
-                          <a:latin typeface="Calibri"/>
-                        </a:rPr>
-                        <a:t>familiarity</a:t>
+                        <a:t>Reactive, typed, composable, familiarity</a:t>
                       </a:r>
                       <a:endParaRPr lang="en-US" sz="1200" b="0" u="none" strike="noStrike">
                         <a:solidFill>
@@ -14209,7 +13846,7 @@
                           <a:uFillTx/>
                           <a:latin typeface="Calibri"/>
                         </a:rPr>
-                        <a:t>STOMP over SockJS</a:t>
+                        <a:t>Websocket STOMP over SockJS</a:t>
                       </a:r>
                       <a:endParaRPr lang="en-US" sz="1200" b="0" u="none" strike="noStrike">
                         <a:solidFill>
@@ -14694,6 +14331,180 @@
           </a:graphicData>
         </a:graphic>
       </p:graphicFrame>
+    </p:spTree>
+  </p:cSld>
+  <mc:AlternateContent>
+    <mc:Choice Requires="p14">
+      <p:transition spd="slow" p14:dur="2000"/>
+    </mc:Choice>
+    <mc:Fallback>
+      <p:transition spd="slow"/>
+    </mc:Fallback>
+  </mc:AlternateContent>
+</p:sld>
+</file>
+
+<file path=ppt/slides/slide5.xml><?xml version="1.0" encoding="utf-8"?>
+<p:sld xmlns:a="http://schemas.openxmlformats.org/drawingml/2006/main" xmlns:p="http://schemas.openxmlformats.org/presentationml/2006/main" xmlns:r="http://schemas.openxmlformats.org/officeDocument/2006/relationships" xmlns:p14="http://schemas.microsoft.com/office/powerpoint/2010/main" xmlns:p15="http://schemas.microsoft.com/office/powerpoint/2012/main" xmlns:mc="http://schemas.openxmlformats.org/markup-compatibility/2006">
+  <p:cSld>
+    <p:bg>
+      <p:bgPr>
+        <a:solidFill>
+          <a:srgbClr val="0F172A"/>
+        </a:solidFill>
+      </p:bgPr>
+    </p:bg>
+    <p:spTree>
+      <p:nvGrpSpPr>
+        <p:cNvPr id="1" name=""/>
+        <p:cNvGrpSpPr/>
+        <p:nvPr/>
+      </p:nvGrpSpPr>
+      <p:grpSpPr>
+        <a:xfrm>
+          <a:off x="0" y="0"/>
+          <a:ext cx="0" cy="0"/>
+          <a:chOff x="0" y="0"/>
+          <a:chExt cx="0" cy="0"/>
+        </a:xfrm>
+      </p:grpSpPr>
+      <p:sp>
+        <p:nvSpPr>
+          <p:cNvPr id="84" name="Rectangle 1"/>
+          <p:cNvSpPr/>
+          <p:nvPr/>
+        </p:nvSpPr>
+        <p:spPr>
+          <a:xfrm>
+            <a:off x="502920" y="320040"/>
+            <a:ext cx="62640" cy="365040"/>
+          </a:xfrm>
+          <a:prstGeom prst="rect">
+            <a:avLst/>
+          </a:prstGeom>
+          <a:solidFill>
+            <a:srgbClr val="2563EB"/>
+          </a:solidFill>
+          <a:ln>
+            <a:noFill/>
+          </a:ln>
+          <a:effectLst>
+            <a:outerShdw blurRad="39960" dir="5400000" dist="23040" rotWithShape="0">
+              <a:srgbClr val="000000">
+                <a:alpha val="35000"/>
+              </a:srgbClr>
+            </a:outerShdw>
+          </a:effectLst>
+        </p:spPr>
+        <p:style>
+          <a:lnRef idx="1">
+            <a:schemeClr val="accent1"/>
+          </a:lnRef>
+          <a:fillRef idx="3">
+            <a:schemeClr val="accent1"/>
+          </a:fillRef>
+          <a:effectRef idx="2">
+            <a:schemeClr val="accent1"/>
+          </a:effectRef>
+          <a:fontRef idx="minor"/>
+        </p:style>
+        <p:txBody>
+          <a:bodyPr lIns="31320" tIns="45000" rIns="31320" bIns="45000" anchor="ctr">
+            <a:noAutofit/>
+          </a:bodyPr>
+          <a:p>
+            <a:endParaRPr lang="en-US" sz="1800" b="0" u="none" strike="noStrike">
+              <a:solidFill>
+                <a:schemeClr val="lt1"/>
+              </a:solidFill>
+              <a:effectLst/>
+              <a:uFillTx/>
+              <a:latin typeface="Calibri"/>
+            </a:endParaRPr>
+          </a:p>
+        </p:txBody>
+      </p:sp>
+      <p:sp>
+        <p:nvSpPr>
+          <p:cNvPr id="85" name="TextBox 2"/>
+          <p:cNvSpPr/>
+          <p:nvPr/>
+        </p:nvSpPr>
+        <p:spPr>
+          <a:xfrm>
+            <a:off x="667440" y="274320"/>
+            <a:ext cx="11184480" cy="592920"/>
+          </a:xfrm>
+          <a:prstGeom prst="rect">
+            <a:avLst/>
+          </a:prstGeom>
+          <a:noFill/>
+          <a:ln w="0">
+            <a:noFill/>
+          </a:ln>
+        </p:spPr>
+        <p:style>
+          <a:lnRef idx="0"/>
+          <a:fillRef idx="0"/>
+          <a:effectRef idx="0"/>
+          <a:fontRef idx="minor"/>
+        </p:style>
+        <p:txBody>
+          <a:bodyPr lIns="90000" tIns="45000" rIns="90000" bIns="45000" anchor="t">
+            <a:spAutoFit/>
+          </a:bodyPr>
+          <a:p>
+            <a:pPr defTabSz="457200">
+              <a:lnSpc>
+                <a:spcPct val="100000"/>
+              </a:lnSpc>
+            </a:pPr>
+            <a:r>
+              <a:rPr lang="en-US" sz="2800" b="1" u="none" strike="noStrike">
+                <a:solidFill>
+                  <a:srgbClr val="FFFFFF"/>
+                </a:solidFill>
+                <a:effectLst/>
+                <a:uFillTx/>
+                <a:latin typeface="Calibri"/>
+              </a:rPr>
+              <a:t>Map Library Evaluation</a:t>
+            </a:r>
+            <a:endParaRPr lang="en-US" sz="2800" b="0" u="none" strike="noStrike">
+              <a:solidFill>
+                <a:srgbClr val="FFFFFF"/>
+              </a:solidFill>
+              <a:effectLst/>
+              <a:uFillTx/>
+              <a:latin typeface="Arial"/>
+            </a:endParaRPr>
+          </a:p>
+        </p:txBody>
+      </p:sp>
+      <p:pic>
+        <p:nvPicPr>
+          <p:cNvPr id="86" name=""/>
+          <p:cNvPicPr/>
+          <p:nvPr/>
+        </p:nvPicPr>
+        <p:blipFill>
+          <a:blip r:embed="rId1"/>
+          <a:stretch/>
+        </p:blipFill>
+        <p:spPr>
+          <a:xfrm>
+            <a:off x="2847960" y="914400"/>
+            <a:ext cx="6523920" cy="5485680"/>
+          </a:xfrm>
+          <a:prstGeom prst="rect">
+            <a:avLst/>
+          </a:prstGeom>
+          <a:noFill/>
+          <a:ln w="0">
+            <a:noFill/>
+          </a:ln>
+        </p:spPr>
+      </p:pic>
     </p:spTree>
   </p:cSld>
   <mc:AlternateContent>
@@ -14740,7 +14551,7 @@
         <p:spPr>
           <a:xfrm>
             <a:off x="502920" y="320040"/>
-            <a:ext cx="63000" cy="365760"/>
+            <a:ext cx="62640" cy="365400"/>
           </a:xfrm>
           <a:prstGeom prst="rect">
             <a:avLst/>
@@ -14772,7 +14583,7 @@
           <a:fontRef idx="minor"/>
         </p:style>
         <p:txBody>
-          <a:bodyPr lIns="31680" tIns="45000" rIns="31680" bIns="45000" anchor="ctr">
+          <a:bodyPr lIns="31320" tIns="45000" rIns="31320" bIns="45000" anchor="ctr">
             <a:noAutofit/>
           </a:bodyPr>
           <a:p>
@@ -14796,7 +14607,7 @@
         <p:spPr>
           <a:xfrm>
             <a:off x="667440" y="274320"/>
-            <a:ext cx="11184840" cy="593280"/>
+            <a:ext cx="11184480" cy="592920"/>
           </a:xfrm>
           <a:prstGeom prst="rect">
             <a:avLst/>
@@ -14857,7 +14668,7 @@
         <p:spPr>
           <a:xfrm>
             <a:off x="2505600" y="1219680"/>
-            <a:ext cx="6867000" cy="5181120"/>
+            <a:ext cx="6866640" cy="5180760"/>
           </a:xfrm>
           <a:prstGeom prst="rect">
             <a:avLst/>
@@ -14914,7 +14725,7 @@
         <p:spPr>
           <a:xfrm>
             <a:off x="502920" y="320040"/>
-            <a:ext cx="63000" cy="821880"/>
+            <a:ext cx="62640" cy="821520"/>
           </a:xfrm>
           <a:prstGeom prst="rect">
             <a:avLst/>
@@ -14946,7 +14757,7 @@
           <a:fontRef idx="minor"/>
         </p:style>
         <p:txBody>
-          <a:bodyPr lIns="31680" tIns="45000" rIns="31680" bIns="45000" anchor="ctr">
+          <a:bodyPr lIns="31320" tIns="45000" rIns="31320" bIns="45000" anchor="ctr">
             <a:noAutofit/>
           </a:bodyPr>
           <a:p>
@@ -14970,7 +14781,7 @@
         <p:spPr>
           <a:xfrm>
             <a:off x="667440" y="274320"/>
-            <a:ext cx="11184840" cy="593280"/>
+            <a:ext cx="11184480" cy="592920"/>
           </a:xfrm>
           <a:prstGeom prst="rect">
             <a:avLst/>
@@ -15027,7 +14838,7 @@
         <p:spPr>
           <a:xfrm>
             <a:off x="667440" y="841320"/>
-            <a:ext cx="11184840" cy="364680"/>
+            <a:ext cx="11184480" cy="364320"/>
           </a:xfrm>
           <a:prstGeom prst="rect">
             <a:avLst/>
@@ -16423,7 +16234,7 @@
         <p:spPr>
           <a:xfrm>
             <a:off x="502920" y="3520440"/>
-            <a:ext cx="11184840" cy="288720"/>
+            <a:ext cx="11184480" cy="288000"/>
           </a:xfrm>
           <a:prstGeom prst="rect">
             <a:avLst/>
@@ -16480,7 +16291,7 @@
         <p:spPr>
           <a:xfrm>
             <a:off x="502920" y="3776400"/>
-            <a:ext cx="11184840" cy="510840"/>
+            <a:ext cx="11184480" cy="510480"/>
           </a:xfrm>
           <a:prstGeom prst="rect">
             <a:avLst/>
@@ -16574,7 +16385,7 @@
         <p:spPr>
           <a:xfrm>
             <a:off x="502920" y="320040"/>
-            <a:ext cx="63000" cy="821880"/>
+            <a:ext cx="62640" cy="821520"/>
           </a:xfrm>
           <a:prstGeom prst="rect">
             <a:avLst/>
@@ -16606,7 +16417,7 @@
           <a:fontRef idx="minor"/>
         </p:style>
         <p:txBody>
-          <a:bodyPr lIns="31680" tIns="45000" rIns="31680" bIns="45000" anchor="ctr">
+          <a:bodyPr lIns="31320" tIns="45000" rIns="31320" bIns="45000" anchor="ctr">
             <a:noAutofit/>
           </a:bodyPr>
           <a:p>
@@ -16630,7 +16441,7 @@
         <p:spPr>
           <a:xfrm>
             <a:off x="667440" y="274320"/>
-            <a:ext cx="11184840" cy="593280"/>
+            <a:ext cx="11184480" cy="592920"/>
           </a:xfrm>
           <a:prstGeom prst="rect">
             <a:avLst/>
@@ -16665,7 +16476,18 @@
                 <a:uFillTx/>
                 <a:latin typeface="Calibri"/>
               </a:rPr>
-              <a:t>What's Been Built: Frontend + Demo</a:t>
+              <a:t>What's Been Built: </a:t>
+            </a:r>
+            <a:r>
+              <a:rPr lang="en-US" sz="2800" b="1" u="none" strike="noStrike">
+                <a:solidFill>
+                  <a:srgbClr val="FFFFFF"/>
+                </a:solidFill>
+                <a:effectLst/>
+                <a:uFillTx/>
+                <a:latin typeface="Calibri"/>
+              </a:rPr>
+              <a:t>Frontend + Demo</a:t>
             </a:r>
             <a:endParaRPr lang="en-US" sz="2800" b="0" u="none" strike="noStrike">
               <a:solidFill>
@@ -16687,7 +16509,7 @@
         <p:spPr>
           <a:xfrm>
             <a:off x="667440" y="841320"/>
-            <a:ext cx="11184840" cy="364680"/>
+            <a:ext cx="11184480" cy="364320"/>
           </a:xfrm>
           <a:prstGeom prst="rect">
             <a:avLst/>
@@ -16744,7 +16566,7 @@
         <p:spPr>
           <a:xfrm>
             <a:off x="502920" y="1353240"/>
-            <a:ext cx="364680" cy="346320"/>
+            <a:ext cx="364320" cy="345960"/>
           </a:xfrm>
           <a:prstGeom prst="rect">
             <a:avLst/>
@@ -16800,7 +16622,7 @@
         <p:spPr>
           <a:xfrm>
             <a:off x="502920" y="1353240"/>
-            <a:ext cx="364680" cy="346320"/>
+            <a:ext cx="364320" cy="345960"/>
           </a:xfrm>
           <a:prstGeom prst="rect">
             <a:avLst/>
@@ -16857,7 +16679,7 @@
         <p:spPr>
           <a:xfrm>
             <a:off x="960120" y="1389960"/>
-            <a:ext cx="10727640" cy="318960"/>
+            <a:ext cx="10727280" cy="318240"/>
           </a:xfrm>
           <a:prstGeom prst="rect">
             <a:avLst/>
@@ -16914,7 +16736,7 @@
         <p:spPr>
           <a:xfrm>
             <a:off x="502920" y="1810440"/>
-            <a:ext cx="364680" cy="346320"/>
+            <a:ext cx="364320" cy="345960"/>
           </a:xfrm>
           <a:prstGeom prst="rect">
             <a:avLst/>
@@ -16970,7 +16792,7 @@
         <p:spPr>
           <a:xfrm>
             <a:off x="502920" y="1810440"/>
-            <a:ext cx="364680" cy="346320"/>
+            <a:ext cx="364320" cy="345960"/>
           </a:xfrm>
           <a:prstGeom prst="rect">
             <a:avLst/>
@@ -17027,7 +16849,7 @@
         <p:spPr>
           <a:xfrm>
             <a:off x="960120" y="1847160"/>
-            <a:ext cx="10727640" cy="318960"/>
+            <a:ext cx="10727280" cy="318240"/>
           </a:xfrm>
           <a:prstGeom prst="rect">
             <a:avLst/>
@@ -17084,7 +16906,7 @@
         <p:spPr>
           <a:xfrm>
             <a:off x="502920" y="2267640"/>
-            <a:ext cx="364680" cy="346320"/>
+            <a:ext cx="364320" cy="345960"/>
           </a:xfrm>
           <a:prstGeom prst="rect">
             <a:avLst/>
@@ -17140,7 +16962,7 @@
         <p:spPr>
           <a:xfrm>
             <a:off x="502920" y="2267640"/>
-            <a:ext cx="364680" cy="346320"/>
+            <a:ext cx="364320" cy="345960"/>
           </a:xfrm>
           <a:prstGeom prst="rect">
             <a:avLst/>
@@ -17197,7 +17019,7 @@
         <p:spPr>
           <a:xfrm>
             <a:off x="960120" y="2304360"/>
-            <a:ext cx="10727640" cy="318960"/>
+            <a:ext cx="10727280" cy="318240"/>
           </a:xfrm>
           <a:prstGeom prst="rect">
             <a:avLst/>
@@ -17254,7 +17076,7 @@
         <p:spPr>
           <a:xfrm>
             <a:off x="502920" y="2724840"/>
-            <a:ext cx="364680" cy="346320"/>
+            <a:ext cx="364320" cy="345960"/>
           </a:xfrm>
           <a:prstGeom prst="rect">
             <a:avLst/>
@@ -17310,7 +17132,7 @@
         <p:spPr>
           <a:xfrm>
             <a:off x="502920" y="2724840"/>
-            <a:ext cx="364680" cy="346320"/>
+            <a:ext cx="364320" cy="345960"/>
           </a:xfrm>
           <a:prstGeom prst="rect">
             <a:avLst/>
@@ -17367,7 +17189,7 @@
         <p:spPr>
           <a:xfrm>
             <a:off x="960120" y="2761560"/>
-            <a:ext cx="10727640" cy="318960"/>
+            <a:ext cx="10727280" cy="318240"/>
           </a:xfrm>
           <a:prstGeom prst="rect">
             <a:avLst/>
@@ -17461,7 +17283,7 @@
         <p:spPr>
           <a:xfrm>
             <a:off x="502920" y="320040"/>
-            <a:ext cx="63000" cy="821880"/>
+            <a:ext cx="62640" cy="821520"/>
           </a:xfrm>
           <a:prstGeom prst="rect">
             <a:avLst/>
@@ -17493,7 +17315,7 @@
           <a:fontRef idx="minor"/>
         </p:style>
         <p:txBody>
-          <a:bodyPr lIns="31680" tIns="45000" rIns="31680" bIns="45000" anchor="ctr">
+          <a:bodyPr lIns="31320" tIns="45000" rIns="31320" bIns="45000" anchor="ctr">
             <a:noAutofit/>
           </a:bodyPr>
           <a:p>
@@ -17517,7 +17339,7 @@
         <p:spPr>
           <a:xfrm>
             <a:off x="667440" y="274320"/>
-            <a:ext cx="11184840" cy="593280"/>
+            <a:ext cx="11184480" cy="592920"/>
           </a:xfrm>
           <a:prstGeom prst="rect">
             <a:avLst/>
@@ -17574,7 +17396,7 @@
         <p:spPr>
           <a:xfrm>
             <a:off x="667440" y="841320"/>
-            <a:ext cx="11184840" cy="364680"/>
+            <a:ext cx="11184480" cy="364320"/>
           </a:xfrm>
           <a:prstGeom prst="rect">
             <a:avLst/>
@@ -18782,7 +18604,7 @@
         <p:spPr>
           <a:xfrm>
             <a:off x="502920" y="3246120"/>
-            <a:ext cx="11184840" cy="273240"/>
+            <a:ext cx="11184480" cy="272880"/>
           </a:xfrm>
           <a:prstGeom prst="rect">
             <a:avLst/>
@@ -18839,7 +18661,7 @@
         <p:spPr>
           <a:xfrm>
             <a:off x="502920" y="3566160"/>
-            <a:ext cx="11184840" cy="510840"/>
+            <a:ext cx="11184480" cy="510480"/>
           </a:xfrm>
           <a:prstGeom prst="rect">
             <a:avLst/>
@@ -18874,7 +18696,7 @@
                 <a:uFillTx/>
                 <a:latin typeface="Calibri"/>
               </a:rPr>
-              <a:t>eg. </a:t>
+              <a:t>eg. startGame_setsCurrentPlayerIdToMrX  — </a:t>
             </a:r>
             <a:r>
               <a:rPr lang="en-US" sz="1300" b="0" u="none" strike="noStrike">
@@ -18885,29 +18707,7 @@
                 <a:uFillTx/>
                 <a:latin typeface="Calibri"/>
               </a:rPr>
-              <a:t>startGame_setsCurrentPlayerIdToMrX  </a:t>
-            </a:r>
-            <a:r>
-              <a:rPr lang="en-US" sz="1300" b="0" u="none" strike="noStrike">
-                <a:solidFill>
-                  <a:srgbClr val="CBD5E1"/>
-                </a:solidFill>
-                <a:effectLst/>
-                <a:uFillTx/>
-                <a:latin typeface="Calibri"/>
-              </a:rPr>
-              <a:t>— fails if line 121 of GameService is </a:t>
-            </a:r>
-            <a:r>
-              <a:rPr lang="en-US" sz="1300" b="0" u="none" strike="noStrike">
-                <a:solidFill>
-                  <a:srgbClr val="CBD5E1"/>
-                </a:solidFill>
-                <a:effectLst/>
-                <a:uFillTx/>
-                <a:latin typeface="Calibri"/>
-              </a:rPr>
-              <a:t>deleted</a:t>
+              <a:t>fails if line 121 of GameService is deleted</a:t>
             </a:r>
             <a:endParaRPr lang="en-US" sz="1300" b="0" u="none" strike="noStrike">
               <a:solidFill>
@@ -18929,7 +18729,7 @@
         <p:spPr>
           <a:xfrm>
             <a:off x="502920" y="3822120"/>
-            <a:ext cx="11184840" cy="510840"/>
+            <a:ext cx="11184480" cy="510480"/>
           </a:xfrm>
           <a:prstGeom prst="rect">
             <a:avLst/>
@@ -18986,7 +18786,7 @@
         <p:spPr>
           <a:xfrm>
             <a:off x="502920" y="4078080"/>
-            <a:ext cx="11184840" cy="510840"/>
+            <a:ext cx="11184480" cy="510480"/>
           </a:xfrm>
           <a:prstGeom prst="rect">
             <a:avLst/>
@@ -19021,18 +18821,7 @@
                 <a:uFillTx/>
                 <a:latin typeface="Calibri"/>
               </a:rPr>
-              <a:t>eg. joinGame_lowercaseCodeIsNormalized  — catches </a:t>
-            </a:r>
-            <a:r>
-              <a:rPr lang="en-US" sz="1300" b="0" u="none" strike="noStrike">
-                <a:solidFill>
-                  <a:srgbClr val="CBD5E1"/>
-                </a:solidFill>
-                <a:effectLst/>
-                <a:uFillTx/>
-                <a:latin typeface="Calibri"/>
-              </a:rPr>
-              <a:t>missing toUpperCase() in joinGame()</a:t>
+              <a:t>eg. joinGame_lowercaseCodeIsNormalized  — catches missing toUpperCase() in joinGame()</a:t>
             </a:r>
             <a:endParaRPr lang="en-US" sz="1300" b="0" u="none" strike="noStrike">
               <a:solidFill>
@@ -19054,7 +18843,7 @@
         <p:spPr>
           <a:xfrm>
             <a:off x="502920" y="6537960"/>
-            <a:ext cx="11184840" cy="273240"/>
+            <a:ext cx="11184480" cy="272880"/>
           </a:xfrm>
           <a:prstGeom prst="rect">
             <a:avLst/>
